--- a/Curso Gas B/02 - ITC-ICG 02-03-04 - Almacenamiento GLP y plantas GNL/02 - ITC-ICG 02-03-04 - Almacenamiento GLP y plantas GNL - Vídeo 3.pptx
+++ b/Curso Gas B/02 - ITC-ICG 02-03-04 - Almacenamiento GLP y plantas GNL/02 - ITC-ICG 02-03-04 - Almacenamiento GLP y plantas GNL - Vídeo 3.pptx
@@ -25,7 +25,6 @@
     <p:sldId id="273" r:id="rId25"/>
     <p:sldId id="274" r:id="rId26"/>
     <p:sldId id="275" r:id="rId27"/>
-    <p:sldId id="276" r:id="rId28"/>
   </p:sldIdLst>
   <p:sldSz cx="12191695" cy="6858000" type="screen4x3"/>
   <p:notesSz cx="6858000" cy="9144000"/>
@@ -522,12 +521,12 @@
           <a:lstStyle/>
           <a:p>
             <a:r>
-              <a:t>N1: ¿Qué le da gas al chalé o a la urbanización adonde no llega el gas natural?</a:t>
-            </a:r>
-          </a:p>
-          <a:p>
-            <a:r>
-              <a:t>N2: Un depósito fijo de GLP, de superficie o enterrado, que alimenta una red o la instalación de una casa. Esa es la ITC-ICG cero tres. Aquí manda una norma técnica de referencia, la une sesenta mil doscientos cincuenta, que verás citada una y otra vez. En este vídeo cubrimos el objeto y el campo de aplicación, la documentación, con esa pregunta de proyecto o memoria, las pruebas y certificados, la puesta en servicio con su primer llenado, y todo el mantenimiento: revisiones periódicas, prueba de presión cada quince años, corrosión, depósitos con protección adicional, provisionales y retirada de servicio. Muchas cifras: apúntalas.</a:t>
+              <a:t>N1: ¿Y las casas que no tienen bombonas ni gas natural, cómo se calientan?</a:t>
+            </a:r>
+          </a:p>
+          <a:p>
+            <a:r>
+              <a:t>N2: Muchas tiran de un depósito fijo de GLP: ese tanque grande, gris, que ves enterrado o de pie en el jardín del chalé o de la urbanización a las afueras. La ITC-ICG cero tres es su manual. Aquí manda una norma técnica de referencia que vas a oír una y otra vez, la UNE sesenta mil doscientos cincuenta. En este vídeo cubrimos el objeto y el campo de aplicación, la documentación, con esa duda de proyecto o memoria, las pruebas y certificados, la puesta en servicio con su primer llenado, y todo el mantenimiento: las revisiones periódicas, las pruebas de presión, la corrosión y la retirada de servicio. Hay muchas cifras; ve apuntándolas.</a:t>
             </a:r>
           </a:p>
         </p:txBody>
@@ -597,12 +596,12 @@
           <a:lstStyle/>
           <a:p>
             <a:r>
-              <a:t>N1: ¿Cuándo hay que volver a probar un depósito antes de enchufarlo?</a:t>
-            </a:r>
-          </a:p>
-          <a:p>
-            <a:r>
-              <a:t>N2: Un depósito que ha estado mucho tiempo esperando hay que volver a probarlo con una prueba hidrostática, certificada por un organismo de control autorizado. Hay dos relojes gemelos: cuando han pasado más de doce meses desde que llegó al emplazamiento, o más de veinticuatro meses desde las pruebas de fábrica. También si lo mueves de sitio o si el instalador ve un desperfecto por las operaciones de carga y descarga. Truco: un año en la parcela, o dos desde fábrica, a probar otra vez. Superadas las pruebas, la puesta en servicio conlleva una inspección inicial del organismo de control.</a:t>
+              <a:t>N1: ¿Qué llevo a la Administración y cuándo, antes de que llegue el gas?</a:t>
+            </a:r>
+          </a:p>
+          <a:p>
+            <a:r>
+              <a:t>N2: Previo a la fecha del primer llenado, presentas por duplicado ante la Comunidad Autónoma un paquete: certificado de instalación, certificado de inspección, la memoria técnica o el proyecto si no se entregó antes, el certificado de dirección de obra cuando haya proyecto, y el contrato de mantenimiento. Fíjate en un detalle que se suele olvidar: el contrato de mantenimiento ya tiene que ir firmado en este momento; un depósito fijo nace con su mantenimiento contratado, no es algo para más adelante. Y un certificado extra que solo aparece si el depósito va en una azotea: el que acredita que la cubierta aguanta el peso. La presentación te faculta para arrancar, pero no es conformidad técnica de la Administración.</a:t>
             </a:r>
           </a:p>
         </p:txBody>
@@ -672,12 +671,12 @@
           <a:lstStyle/>
           <a:p>
             <a:r>
-              <a:t>N1: ¿Qué papeles se emiten al terminar la obra?</a:t>
-            </a:r>
-          </a:p>
-          <a:p>
-            <a:r>
-              <a:t>N2: Tres firmas distintas. La empresa instaladora cumplimenta el certificado de instalación, por triplicado, con copia para el titular y para la Comunidad Autónoma. El organismo de control emite el certificado de inspección, y con él la instalación queda en disposición de servicio. Y si hubo proyecto, el director de obra emite el certificado de dirección de obra, que como anexo incluye el estado de la protección contra la corrosión, las actas de pruebas, la documentación de los depósitos y la justificación de que se cumplen los requisitos de seguridad. Cada agente firma lo suyo: no los mezcles.</a:t>
+              <a:t>N1: ¿Por qué un depósito no se llena hasta arriba del todo?</a:t>
+            </a:r>
+          </a:p>
+          <a:p>
+            <a:r>
+              <a:t>N2: Porque el GLP líquido se dilata cuando sube la temperatura, y necesita sitio para expandirse. Nunca se llena al cien por cien: el llamado punto alto de llenado corta la entrada de gas cuando el líquido alcanza el ochenta y cinco por ciento del volumen geométrico. Ese quince por ciento de hueco que queda arriba, la fase gaseosa, es el colchón para que, en pleno verano, el líquido tenga adónde crecer sin reventar el depósito ni disparar la válvula de seguridad. Por eso, durante el primer llenado de cada depósito, el personal comprueba la estanquidad de conexiones y valvulería, y que ese corte al ochenta y cinco por ciento actúe de verdad. El resultado se anota en el Libro de Mantenimiento. Cifra de examen segura: ochenta y cinco por ciento.</a:t>
             </a:r>
           </a:p>
         </p:txBody>
@@ -747,12 +746,12 @@
           <a:lstStyle/>
           <a:p>
             <a:r>
-              <a:t>N1: ¿Por qué nunca se llena un depósito hasta arriba?</a:t>
-            </a:r>
-          </a:p>
-          <a:p>
-            <a:r>
-              <a:t>N2: Porque el GLP líquido se dilata con el calor. El punto alto de llenado corta al ochenta y cinco por ciento del volumen: ese quince por ciento de hueco es el colchón para que, en pleno verano, el líquido tenga sitio para expandirse sin reventar el depósito ni disparar la válvula de seguridad. Cifra de examen segura: ochenta y cinco por ciento. Antes del primer llenado se comunica todo a la Comunidad Autónoma, y fíjate en un detalle: el contrato de mantenimiento ya tiene que ir firmado. Un depósito fijo nace con su mantenimiento contratado. En ese primer llenado se comprueba la estanquidad y ese corte, y queda anotado en el Libro de Mantenimiento.</a:t>
+              <a:t>N1: ¿Quién cuida el depósito una vez está funcionando?</a:t>
+            </a:r>
+          </a:p>
+          <a:p>
+            <a:r>
+              <a:t>N2: El responsable es el titular o, en su defecto, los usuarios: la instalación tiene que estar permanentemente en disposición de servicio y con su nivel de seguridad. Para eso están obligados a tener un contrato de mantenimiento con una empresa instaladora que disponga de servicio de urgencias permanente, o sea, que puedas llamar a cualquier hora si hay un problema. Esa empresa conserva la instalación, hace las revisiones y se ocupa especialmente de la protección contra la corrosión. Y todo queda registrado: cada instalación tiene un Libro de Mantenimiento, o un archivo documental si la empresa tiene su sistema de calidad acreditado, donde consta cada visita, los defectos vistos, las reparaciones y las lecturas. El titular custodia ese Libro y el certificado de la última revisión.</a:t>
             </a:r>
           </a:p>
         </p:txBody>
@@ -822,12 +821,12 @@
           <a:lstStyle/>
           <a:p>
             <a:r>
-              <a:t>N1: ¿Qué obliga el mantenimiento y cada cuánto se vigila la corrosión?</a:t>
-            </a:r>
-          </a:p>
-          <a:p>
-            <a:r>
-              <a:t>N2: El titular debe tener un contrato con una empresa instaladora que disponga de servicio de urgencias permanente, encargada de las revisiones y, muy en especial, de la protección contra la corrosión. De cada visita queda constancia en el Libro de Mantenimiento. Y aquí hay dos relojes: el potencial de protección se controla cada año; pero si la protección catódica es por corriente impresa, con un equipo eléctrico alimentado, se comprueba cada tres meses. Regla: corriente impresa, más vigilancia, trimestral, porque depende de un aparato que puede fallar.</a:t>
+              <a:t>N1: ¿Por qué hay tanto miedo a la corrosión en los depósitos enterrados?</a:t>
+            </a:r>
+          </a:p>
+          <a:p>
+            <a:r>
+              <a:t>N2: Porque un depósito bajo tierra está rodeado de suelo húmedo, y la humedad se come el hierro poco a poco hasta que fuga. Para evitarlo, los depósitos enterrados llevan protección catódica, que es un truco electroquímico para que el metal no se oxide; solo se libran si un estudio de agresividad del terreno demuestra que no hace falta. Y esa protección se vigila con dos relojes: el potencial de protección se controla cada año, pero si la protección catódica es por corriente impresa, con un equipo eléctrico alimentado, se comprueba cada tres meses. La regla: corriente impresa, más vigilancia, trimestral, porque depende de un aparato que puede fallar. Idea de fondo: enterrado igual a corrosión igual a protección catódica, salvo estudio que lo exima.</a:t>
             </a:r>
           </a:p>
         </p:txBody>
@@ -897,12 +896,12 @@
           <a:lstStyle/>
           <a:p>
             <a:r>
-              <a:t>N1: ¿Cada cuánto se revisa el depósito?</a:t>
-            </a:r>
-          </a:p>
-          <a:p>
-            <a:r>
-              <a:t>N2: Dos casos. Si el depósito da gas a una red de distribución, su revisión es cada dos años. Si solo alimenta la instalación de una casa o comunidad, su revisión se engancha a la de la instalación receptora, la de la ITC-ICG cero siete, y se hacen las dos juntas en la misma visita. No te líes: red, dos años; casa, a la vez que la receptora. Si la revisión sale favorable, la instaladora emite un certificado de revisión para el titular; si sale con problemas, un informe de anomalías que el titular debe subsanar. Y sin acreditar la revisión en plazo, no hay suministro de GLP.</a:t>
+              <a:t>N1: ¿Cada cuánto se revisa el depósito, y de qué depende?</a:t>
+            </a:r>
+          </a:p>
+          <a:p>
+            <a:r>
+              <a:t>N2: Hay dos casos, no los mezcles. Si el depósito alimenta una red de distribución, su revisión es cada dos años. Si solo alimenta la instalación de una casa o una comunidad, la revisión se engancha a la de la instalación receptora, la de la ITC-ICG cero siete, y se hacen las dos juntas en la misma visita. Regla corta: red, dos años; casa, a la vez que la receptora. La revisión la hace la empresa instaladora que tiene el contrato de mantenimiento. Si sale favorable, emite un certificado de revisión para el titular; si sale con fallos, cumplimenta un informe de anomalías, y el titular es el responsable de subsanarlas. Y recuerda: sin acreditar la revisión en plazo y con resultado favorable, no hay suministro de GLP.</a:t>
             </a:r>
           </a:p>
         </p:txBody>
@@ -972,12 +971,12 @@
           <a:lstStyle/>
           <a:p>
             <a:r>
-              <a:t>N1: ¿Hay que aprenderse los trece puntos de la revisión de carrerilla?</a:t>
-            </a:r>
-          </a:p>
-          <a:p>
-            <a:r>
-              <a:t>N2: No, agrúpalos. Los puntos uno a tres son papeleo y bomberos: el último certificado de inspección, la inspección visual y el estado de los extintores. Los puntos cuatro a nueve son el hierro: el recubrimiento del depósito, las tuberías y anclajes, las llaves y manómetros, el cerramiento, los rótulos, la protección contra la corrosión y la toma de tierra. Y los puntos diez a trece son que no fugue, las pruebas de estanquidad. La cifra fina que cae: la boca de carga desplazada y las mangueras de trasvase se prueban a tres bar durante diez minutos. Y el clásico de siempre: las fugas finas se cazan con agua jabonosa, porque las burbujas te delatan el escape.</a:t>
+              <a:t>N1: Trece comprobaciones parecen muchas, ¿cómo me las aprendo?</a:t>
+            </a:r>
+          </a:p>
+          <a:p>
+            <a:r>
+              <a:t>N2: No las memorices de carrerilla; agrúpalas en tres bloques y las tienes. Los puntos uno a tres son papeleo y bomberos: el último certificado de inspección, la inspección visual y el estado del equipo contra incendios. Los puntos cuatro a nueve son el hierro: recubrimiento del depósito, tuberías y anclajes, funcionamiento de llaves, manómetros, niveles y reguladores, estado del cerramiento y los rótulos, la protección contra la corrosión y la resistencia de la toma de tierra. Y los puntos diez a trece son que no fugue: las distintas pruebas de estanquidad. La cifra fina que cae: la boca de carga desplazada y las mangueras de trasvase se prueban a tres bar durante diez minutos. Y el clásico de toda la vida: las fugas finas se cazan con agua jabonosa, porque las burbujas te delatan el escape.</a:t>
             </a:r>
           </a:p>
         </p:txBody>
@@ -1047,12 +1046,12 @@
           <a:lstStyle/>
           <a:p>
             <a:r>
-              <a:t>N1: ¿Qué prueba mayor toca cada quince años?</a:t>
-            </a:r>
-          </a:p>
-          <a:p>
-            <a:r>
-              <a:t>N2: La prueba de presión, cada quince años, según la une sesenta mil doscientos cincuenta, encargada a un organismo de control. Hay un detalle práctico para los depósitos de superficie: la primera prueba periódica no se hace a todo el lote, sino a una muestra estadística. Y de ese muestreo retén dos cosas: la muestra se redondea siempre hacia arriba y nunca baja de ocho unidades. Y si sale un depósito malo en la muestra, se revisa el doble; si sale otro, el lote completo. Es el típico control de calidad: a más fallos, más miras. Durante estas pruebas, con el depósito fuera de servicio, se puede tirar de uno provisional.</a:t>
+              <a:t>N1: Aparte de las revisiones, ¿hay una prueba más seria de vez en cuando?</a:t>
+            </a:r>
+          </a:p>
+          <a:p>
+            <a:r>
+              <a:t>N2: Sí, la prueba de presión, y su cita es cada quince años. La encarga el titular a un organismo de control, asistido por la empresa de mantenimiento, y se emite un acta de pruebas con resultado favorable. Hay un detalle de los depósitos de superficie que cae: no hace falta probar todo el lote de golpe; se prueba solo una muestra estadística. Y de esa muestra retén dos cosas. Una, el número se obtiene redondeando siempre hacia la unidad superior, y nunca puede bajar de ocho unidades. Y dos, es un control de calidad de los de a más fallos, más miras: si aparece una anomalía en un depósito de la muestra, se revisa el doble; si vuelve a salir otra, se revisa el lote completo. La cifra clave: quince años, y mínimo ocho unidades.</a:t>
             </a:r>
           </a:p>
         </p:txBody>
@@ -1122,12 +1121,12 @@
           <a:lstStyle/>
           <a:p>
             <a:r>
-              <a:t>N1: ¿Por qué tanto miedo a la corrosión en un depósito enterrado?</a:t>
-            </a:r>
-          </a:p>
-          <a:p>
-            <a:r>
-              <a:t>N2: Porque está rodeado de tierra húmeda, que se lo va comiendo poco a poco. La protección catódica es un truco electroquímico para que el hierro no se oxide, y por eso se vigila el potencial de protección cada año. Los depósitos enterrados la llevan siempre, salvo que un estudio de agresividad del terreno demuestre que no hace falta. Idea: enterrado, corrosión, protección catódica, salvo estudio que lo exima. De todos los controles queda constancia en un registro, y ante cualquier anomalía se avisa de inmediato al titular para subsanarla.</a:t>
+              <a:t>N1: ¿Qué es eso de la protección adicional, y qué hago mientras arreglo mi depósito?</a:t>
+            </a:r>
+          </a:p>
+          <a:p>
+            <a:r>
+              <a:t>N2: Dos cosas prácticas. La primera: un depósito enterrado normal, para la prueba de los quince años, habría que sacarlo del hoyo, que es carísimo. Los depósitos catalogados como con protección adicional se libran de desenterrarse si pasan las pruebas del fabricante; esa es la gran ventaja de ese sello. Si un día no las pasan, el titular puede sustituir el depósito, reparar la envolvente, o degradarlo a depósito normal poniéndole protección catódica. La segunda: mientras tu depósito está de pruebas o en reparación, no se deja a la gente sin gas; se pone uno provisional. Dos cifras que caen: máximo cinco metros cúbicos de volumen, y solo hasta sesenta días, prorrogables con permiso del órgano competente. Y el proyecto de legalización del provisional, solo la primera vez.</a:t>
             </a:r>
           </a:p>
         </p:txBody>
@@ -1197,12 +1196,12 @@
           <a:lstStyle/>
           <a:p>
             <a:r>
-              <a:t>N1: ¿Qué ventaja da que un depósito tenga protección adicional?</a:t>
-            </a:r>
-          </a:p>
-          <a:p>
-            <a:r>
-              <a:t>N2: Un depósito enterrado normal, para probarlo, habría que sacarlo del hoyo, que es carísimo. Los depósitos catalogados como de protección adicional se libran de desenterrarse si pasan las pruebas del fabricante: esa es la ventaja del sello. Para conseguirlo, antes de venderlos, el fabricante presenta a un organismo de control una documentación técnica que permite evaluar la protección contra la corrosión; esa documentación se presenta una sola vez y el fabricante la conserva quince años desde el último depósito fabricado. Si es favorable, se emite un acta de conformidad que le da la consideración de protección adicional.</a:t>
+              <a:t>N1: Cuando un depósito deja de usarse, ¿basta con cerrar la llave?</a:t>
+            </a:r>
+          </a:p>
+          <a:p>
+            <a:r>
+              <a:t>N2: No, ni mucho menos. Un depósito fuera de servicio nunca se abandona con restos de GLP dentro, porque seguiría siendo una bomba. Hay que vaciarlo de gas de verdad: se inertiza, es decir, se rellena de nitrógeno, un gas que no arde, o se desgasifica con agua. Lo hace una empresa instaladora, que lo certifica, y el titular entrega copia de ese certificado al órgano competente de la Comunidad Autónoma. Y ojo a las cifras del cese de actividad: se entiende que una instalación cesa si pasan dos años consecutivos sin consumo, si no hay contrato de mantenimiento, o si pasan cinco años sin el mantenimiento oportuno, salvo fuerza mayor. Esta misma filosofía del inertizado la volverás a ver en las plantas de GNL del vídeo cuatro.</a:t>
             </a:r>
           </a:p>
         </p:txBody>
@@ -1272,12 +1271,12 @@
           <a:lstStyle/>
           <a:p>
             <a:r>
-              <a:t>N1: ¿Qué se hace mientras arreglas o pruebas el depósito fijo?</a:t>
-            </a:r>
-          </a:p>
-          <a:p>
-            <a:r>
-              <a:t>N2: No se deja a la gente sin gas: se pone un depósito provisional que da servicio mientras tanto. Dos cifras que caen: su volumen no excede de cinco metros cúbicos y solo se puede usar hasta sesenta días, prorrogables con autorización expresa del órgano competente. Lo instala una empresa instaladora, cumple la reglamentación de equipos a presión, y cada vez que se conecta se hace una prueba de estanquidad. Y un detalle cómodo: el proyecto de legalización se hace solo la primera vez; luego ya está tramitado y se puede reutilizar.</a:t>
+              <a:t>N1: Antes de cerrar, dame los imprescindibles de este vídeo tan cargado.</a:t>
+            </a:r>
+          </a:p>
+          <a:p>
+            <a:r>
+              <a:t>N2: Seis anclas y lo tienes. Una: los topes son dos mil metros cúbicos en superficie y quinientos enterrado, y hace falta proyecto por encima de trece metros cúbicos. Dos: la memoria técnica la puede firmar el instalador; el proyecto, el técnico. Tres: el primer llenado corta al ochenta y cinco por ciento, el colchón para que el líquido se dilate. Cuatro: el depósito enterrado lleva protección catódica, con control anual o trimestral si es corriente impresa. Cinco: las revisiones, cada dos años si da a una red o junto a la receptora si es de una casa. Y seis: la prueba de presión, cada quince años, con muestreo mínimo de ocho en superficie. Con esas seis tienes el esqueleto del vídeo entero.</a:t>
             </a:r>
           </a:p>
         </p:txBody>
@@ -1347,12 +1346,12 @@
           <a:lstStyle/>
           <a:p>
             <a:r>
-              <a:t>N1: Tres cifras clave antes de entrar.</a:t>
-            </a:r>
-          </a:p>
-          <a:p>
-            <a:r>
-              <a:t>N2: La primera dispara el papeleo: por encima de trece metros cúbicos de capacidad hace falta proyecto; por debajo, y sin nada raro, basta memoria técnica. La segunda es de seguridad pura: al llenar un depósito, el corte salta al ochenta y cinco por ciento del volumen, nunca al cien. Y la tercera es de mantenimiento: cada quince años toca una prueba de presión. Estas tres cifras son las que más se preguntan de toda la instrucción.</a:t>
+              <a:t>N1: Dame las tres cifras estrella antes de empezar.</a:t>
+            </a:r>
+          </a:p>
+          <a:p>
+            <a:r>
+              <a:t>N2: Estas tres se caen del examen. La primera: por encima de trece metros cúbicos de capacidad, el depósito exige proyecto; por debajo, y sin complicaciones, basta memoria técnica. La segunda: el punto alto de llenado corta al ochenta y cinco por ciento del volumen, porque el GLP líquido se dilata con el calor y hace falta dejar un colchón. Y la tercera: la prueba de presión del depósito se hace cada quince años. Si retienes trece, ochenta y cinco y quince, ya llevas medio vídeo ganado.</a:t>
             </a:r>
           </a:p>
         </p:txBody>
@@ -1422,87 +1421,22 @@
           <a:lstStyle/>
           <a:p>
             <a:r>
-              <a:t>N1: ¿Cómo se saca de servicio un depósito para siempre?</a:t>
-            </a:r>
-          </a:p>
-          <a:p>
-            <a:r>
-              <a:t>N2: Nunca se abandona con gas dentro, porque seguiría siendo una bomba. Hay que vaciarlo de gas de verdad: se inertiza rellenándolo de nitrógeno, un gas que no arde, o se desgasifica con agua. Lo hace una empresa instaladora, que lo certifica, y se entrega copia del certificado a la Comunidad Autónoma. Ojo a las cifras del cese de actividad: se considera que un depósito cesa si pasan dos años consecutivos sin consumo, si no hay contrato de mantenimiento, o si pasan cinco años sin el mantenimiento oportuno. La misma lógica del inertizado la verás en las plantas de GNL del vídeo cuatro.</a:t>
-            </a:r>
-          </a:p>
-        </p:txBody>
-      </p:sp>
-      <p:sp>
-        <p:nvSpPr>
-          <p:cNvPr id="4" name="Slide Number Placeholder 3"/>
-          <p:cNvSpPr>
-            <a:spLocks noGrp="1"/>
-          </p:cNvSpPr>
-          <p:nvPr>
-            <p:ph type="sldNum" idx="5" sz="quarter"/>
-          </p:nvPr>
-        </p:nvSpPr>
-        <p:spPr/>
-      </p:sp>
-    </p:spTree>
-  </p:cSld>
-  <p:clrMapOvr>
-    <a:masterClrMapping/>
-  </p:clrMapOvr>
-</p:notes>
-</file>
-
-<file path=ppt/notesSlides/notesSlide21.xml><?xml version="1.0" encoding="utf-8"?>
-<p:notes xmlns:a="http://schemas.openxmlformats.org/drawingml/2006/main" xmlns:p="http://schemas.openxmlformats.org/presentationml/2006/main" xmlns:r="http://schemas.openxmlformats.org/officeDocument/2006/relationships">
-  <p:cSld>
-    <p:spTree>
-      <p:nvGrpSpPr>
-        <p:cNvPr id="1" name=""/>
-        <p:cNvGrpSpPr/>
-        <p:nvPr/>
-      </p:nvGrpSpPr>
-      <p:grpSpPr>
-        <a:xfrm>
-          <a:off x="0" y="0"/>
-          <a:ext cx="0" cy="0"/>
-          <a:chOff x="0" y="0"/>
-          <a:chExt cx="0" cy="0"/>
-        </a:xfrm>
-      </p:grpSpPr>
-      <p:sp>
-        <p:nvSpPr>
-          <p:cNvPr id="2" name="Slide Image Placeholder 1"/>
-          <p:cNvSpPr>
-            <a:spLocks noGrp="1"/>
-          </p:cNvSpPr>
-          <p:nvPr>
-            <p:ph type="sldImg" idx="2"/>
-          </p:nvPr>
-        </p:nvSpPr>
-        <p:spPr/>
-      </p:sp>
-      <p:sp>
-        <p:nvSpPr>
-          <p:cNvPr id="3" name="Notes Placeholder 2"/>
-          <p:cNvSpPr>
-            <a:spLocks noGrp="1"/>
-          </p:cNvSpPr>
-          <p:nvPr>
-            <p:ph type="body" idx="3" sz="quarter"/>
-          </p:nvPr>
-        </p:nvSpPr>
-        <p:spPr/>
-        <p:txBody>
-          <a:bodyPr/>
-          <a:lstStyle/>
-          <a:p>
-            <a:r>
-              <a:t>N1: Tres ideas para quedarte con la ITC-ICG cero tres.</a:t>
-            </a:r>
-          </a:p>
-          <a:p>
-            <a:r>
-              <a:t>N2: Primera, la que afecta a tu carné: con Gas B firmas la memoria técnica de un depósito fijo, pero no el proyecto; y el número que dispara ese proyecto es trece metros cúbicos, junto con la red, el vaporizador o el acceso público. Segunda, la seguridad del día a día: el llenado corta al ochenta y cinco por ciento para dejar sitio a la dilatación del verano, y la gran prueba de presión toca cada quince años. Y tercera: el enterrado se pelea contra la corrosión con protección catódica, y cuando un depósito sale de servicio nunca se deja con gas, se inertiza con nitrógeno o se desgasifica con agua. Esa misma filosofía la reencontrarás en el GNL.</a:t>
+              <a:t>N1: Cerramos la ITC cero tres. ¿Qué me llevo de todo este mantenimiento?</a:t>
+            </a:r>
+          </a:p>
+          <a:p>
+            <a:r>
+              <a:t>N2: Te llevas la capacidad de acompañar un depósito fijo de principio a fin, y fíjate en cómo encaja cada pieza con su porqué. Primero decides el papeleo: memoria o proyecto según los cuatro casos, con el trece como número mágico, y sabes que con tu carné firmas la memoria pero no el proyecto. Después entiendes la seguridad del llenado: el corte al ochenta y cinco por ciento existe porque el GLP líquido se dilata con el calor, y sin ese colchón el depósito reventaría en un golpe de calor. Luego dominas el mantenimiento: la corrosión del enterrado con su protección catódica, las revisiones cada dos años o junto a la receptora, y la prueba de presión de los quince años. Y por último, retiras el depósito inertizándolo con nitrógeno, nunca abandonándolo con gas.</a:t>
+            </a:r>
+          </a:p>
+          <a:p>
+            <a:r>
+              <a:t>N1: ¿Y cómo se pregunta esto en el examen?</a:t>
+            </a:r>
+          </a:p>
+          <a:p>
+            <a:r>
+              <a:t>N2: Te cruzan las cifras: te dan una capacidad y esperan que digas si toca proyecto, o te preguntan el porcentaje del llenado, o el plazo de la prueba de presión, o quién firma cada certificado. Todo lo que hoy has entendido con su lógica lo vas a reconocer al vuelo. Hoy ya eres más gasista que ayer. En el último vídeo del tema damos el salto al frío de verdad: las plantas satélite de gas natural licuado, el GNL, con su norma y su especialista criogénico. Te espero allí para cerrar el tema.</a:t>
             </a:r>
           </a:p>
         </p:txBody>
@@ -1572,12 +1506,12 @@
           <a:lstStyle/>
           <a:p>
             <a:r>
-              <a:t>N1: ¿De qué instalación habla esta instrucción?</a:t>
-            </a:r>
-          </a:p>
-          <a:p>
-            <a:r>
-              <a:t>N2: Fija los requisitos técnicos y las medidas esenciales de seguridad en el diseño, construcción, montaje y explotación del almacenamiento de GLP mediante depósitos fijos, esos tanques del jardín o enterrados, tanto de superficie como bajo tierra. Su función es alimentar una red de distribución por canalización o la instalación receptora de una vivienda o comunidad. Y desde ya interiorízalo: el detalle fino no está en la ITC, está en la norma une sesenta mil doscientos cincuenta, que es la biblia de este capítulo.</a:t>
+              <a:t>N1: ¿Qué abarca exactamente esta instrucción y dónde empieza y acaba la instalación?</a:t>
+            </a:r>
+          </a:p>
+          <a:p>
+            <a:r>
+              <a:t>N2: Regula el almacenamiento de GLP en depósitos fijos, de superficie o enterrados, que alimentan una red de distribución por canalización o una instalación receptora. La instalación va de la boca de carga, por donde el camión mete el gas, hasta las válvulas de salida, incluidas éstas. Y hay dos topes de capacidad que no se mezclan: dos mil metros cúbicos si el depósito es de superficie, y solo quinientos metros cúbicos si es enterrado. ¿Por qué el enterrado tiene un tope más bajo? Porque, si falla, es mucho más difícil de vigilar y de atacar por los bomberos, así que se le pone un límite más prudente. Depende de dónde esté el depósito: arriba dos mil, abajo quinientos.</a:t>
             </a:r>
           </a:p>
         </p:txBody>
@@ -1647,12 +1581,12 @@
           <a:lstStyle/>
           <a:p>
             <a:r>
-              <a:t>N1: ¿Hasta cuánto gas cubre esta ITC y por dónde empieza y acaba?</a:t>
-            </a:r>
-          </a:p>
-          <a:p>
-            <a:r>
-              <a:t>N2: El tope depende de dónde esté el depósito: dos mil metros cúbicos en superficie, quinientos si está enterrado. Tiene su lógica: un depósito enterrado, si falla, es más difícil de vigilar y de atacar, así que se le pone un tope más bajo. La instalación va desde la boca de carga hasta las válvulas de salida, incluidas estas. Y como en la instrucción anterior, se considera modificación la que cambia de categoría, y entonces se trata como si fuera nueva.</a:t>
+              <a:t>N1: ¿Por qué tanto insistir en esa norma UNE?</a:t>
+            </a:r>
+          </a:p>
+          <a:p>
+            <a:r>
+              <a:t>N2: Porque aquí el Reglamento no te da las categorías por kilos como hacía en la ITC cero dos, sino que delega en la norma técnica UNE sesenta mil doscientos cincuenta. Cada vez que leas según UNE sesenta mil doscientos cincuenta, tradúcelo así: el detalle fino, la clasificación, las distancias, los ensayos, no está en la ITC, está en la norma. Para el examen te basta con saber quién manda y las pocas cifras que sí aparecen en la ITC. Y una regla muy práctica: si cambias un depósito viejo por otro casi idéntico, con diferencia de volumen no superior al diez por ciento, misma categoría y mismas distancias, no rehaces el proyecto; basta una memoria justificativa de la empresa instaladora. Es el recambio equivalente, y el diez por ciento es la cifra a retener.</a:t>
             </a:r>
           </a:p>
         </p:txBody>
@@ -1722,12 +1656,12 @@
           <a:lstStyle/>
           <a:p>
             <a:r>
-              <a:t>N1: ¿Y si solo cambias un depósito viejo por otro parecido?</a:t>
-            </a:r>
-          </a:p>
-          <a:p>
-            <a:r>
-              <a:t>N2: Entonces no rehaces el proyecto. Si el nuevo es casi idéntico, con una diferencia de volumen no superior al diez por ciento arriba o abajo, sin cambiar la clasificación por capacidad y manteniendo las distancias de seguridad, basta con una memoria justificativa que emite la empresa instaladora ante la Comunidad Autónoma. Es la regla del recambio equivalente. La cifra clave a retener es ese diez por ciento. Fíjate en quién firma la memoria, la instaladora, porque en el vídeo cuatro, con el GNL, esto cambia.</a:t>
+              <a:t>N1: ¿Cuándo necesita este depósito autorización administrativa previa?</a:t>
+            </a:r>
+          </a:p>
+          <a:p>
+            <a:r>
+              <a:t>N2: Solo en un caso: cuando el depósito alimenta una red de distribución por canalización, es decir, cuando das gas a terceros a través de una red. Si el depósito es de una comunidad de vecinos para su propio consumo, sin suministrar a nadie de fuera, no hace falta autorización. Regla para no fallar: ¿doy gas a terceros por una red? Entonces autorización. ¿Solo a los míos, a mi comunidad? Entonces no. Cuando sí hace falta, se solicita presentando el proyecto y el modelo oficial, todo por duplicado, y te devuelven un ejemplar diligenciado con la fecha de entrada, que el titular conserva.</a:t>
             </a:r>
           </a:p>
         </p:txBody>
@@ -1797,12 +1731,12 @@
           <a:lstStyle/>
           <a:p>
             <a:r>
-              <a:t>N1: ¿Quién ejecuta la instalación y con qué criterio?</a:t>
-            </a:r>
-          </a:p>
-          <a:p>
-            <a:r>
-              <a:t>N2: La ejecución la hace una empresa instaladora de gas, salvo las que son propiedad de los operadores al por mayor de GLP, que también pueden. Todo el diseño, construcción y montaje sigue la une sesenta mil doscientos cincuenta. Los equipos a presión del conjunto cumplen el Real Decreto setecientos sesenta y nueve, que traspone la directiva europea de equipos a presión. Y la instalación se dimensiona con capacidad suficiente para el caudal punta y con autonomía, es decir, para el momento de más consumo y para aguantar entre llenados.</a:t>
+              <a:t>N1: ¿Cuándo hace falta proyecto y cuándo me vale una memoria?</a:t>
+            </a:r>
+          </a:p>
+          <a:p>
+            <a:r>
+              <a:t>N2: Memoriza los cuatro disparadores de proyecto como una lista corta. Uno, el más preguntado: capacidad de almacenamiento superior a trece metros cúbicos. Dos: que alimente una red de distribución por canalización. Tres: que tenga vaporizador, equipo de trasvase o boca de carga a distancia enterrada, o que la instalación no discurra por terrenos de la misma propiedad. Y cuatro: que esté en un lugar de libre acceso al público. Si se da cualquiera de esos cuatro, proyecto firmado por técnico facultativo competente. Si no se da ninguno y el depósito es pequeño, basta memoria técnica. El número mágico que tienes que clavar es el de más de trece metros cúbicos.</a:t>
             </a:r>
           </a:p>
         </p:txBody>
@@ -1872,12 +1806,12 @@
           <a:lstStyle/>
           <a:p>
             <a:r>
-              <a:t>N1: ¿Cuándo hace falta pedir autorización antes de construir?</a:t>
-            </a:r>
-          </a:p>
-          <a:p>
-            <a:r>
-              <a:t>N2: Solo cuando el depósito alimenta una red de distribución por canalización, es decir, cuando das gas a terceros. Si es el depósito de una comunidad de vecinos para su propio consumo, sin vender a nadie de fuera, no hace falta autorización. Regla sencilla: doy gas a terceros por una red, pido autorización; solo doy gas a los míos, no. Para pedirla, el titular presenta a la Comunidad Autónoma un proyecto con solicitud en modelo oficial, todo por duplicado, y le devuelven un ejemplar diligenciado con la fecha de entrada.</a:t>
+              <a:t>N1: Y esto de quién firma cada papel, ¿por qué me importa a mí, con el carné de Gas B?</a:t>
+            </a:r>
+          </a:p>
+          <a:p>
+            <a:r>
+              <a:t>N2: Porque decide qué instalaciones vas a poder legalizar tú. La lógica es la misma que en el articulado del Reglamento: instalación pequeña o normal, memoria técnica, que la puede firmar el instalador con su categoría de depósitos fijos de GLP; instalación grande o compleja, proyecto, que lo firma un técnico facultativo competente, un titulado. Traducido a tu día a día: con tu carné podrás firmar la memoria técnica de un depósito fijo, pero no el proyecto. Saber distinguir memoria de proyecto es lo que decide, en la práctica, si esa instalación la legalizas tú o tiene que ir a un ingeniero.</a:t>
             </a:r>
           </a:p>
         </p:txBody>
@@ -1947,12 +1881,12 @@
           <a:lstStyle/>
           <a:p>
             <a:r>
-              <a:t>N1: ¿Cuándo se exige proyecto de técnico competente?</a:t>
-            </a:r>
-          </a:p>
-          <a:p>
-            <a:r>
-              <a:t>N2: En cuatro casos, memorízalos como lista. Uno, capacidad de almacenamiento superior a trece metros cúbicos, que es el disparador más preguntado. Dos, cuando alimenta una red de distribución por canalización. Tres, cuando lleva vaporizador, equipo de trasvase o boca de carga a distancia enterrada, o que no discurra por terreno de la misma propiedad. Y cuatro, cuando la estación está en un lugar de libre acceso al público. Si no se da ninguno de estos, basta memoria técnica. El número mágico que retienes es trece metros cúbicos.</a:t>
+              <a:t>N1: ¿Cuándo hay que volver a probar un depósito antes de enchufarlo?</a:t>
+            </a:r>
+          </a:p>
+          <a:p>
+            <a:r>
+              <a:t>N2: Cuando ha estado esperando demasiado tiempo o ha sufrido algo. Se le hace una prueba hidrostática en el emplazamiento, certificada por un organismo de control, en varios casos: si el instalador ve algún desperfecto por las operaciones de carga y descarga, si el depósito cambia de emplazamiento, o por el paso del tiempo. Y ahí van los dos relojes gemelos: más de doce meses desde que llegó al sitio, o más de veinticuatro meses desde las pruebas de fábrica. Truco para recordarlo: un año en la parcela o dos desde fábrica, y a probar otra vez. Superadas las pruebas de la norma, la puesta en servicio conlleva una inspección inicial del organismo de control.</a:t>
             </a:r>
           </a:p>
         </p:txBody>
@@ -2022,12 +1956,12 @@
           <a:lstStyle/>
           <a:p>
             <a:r>
-              <a:t>N1: ¿Qué es la memoria técnica y quién la puede firmar?</a:t>
-            </a:r>
-          </a:p>
-          <a:p>
-            <a:r>
-              <a:t>N2: Es el documento más ligero para las instalaciones normales, las que no caen en ninguno de los cuatro casos de proyecto. Y aquí viene lo que te importa para tu carné: la memoria técnica la puede suscribir el instalador con su categoría de depósitos fijos de GLP, mientras que el proyecto lo firma un técnico facultativo competente, un titulado. Es decir: con Gas B podrás firmar memorias de depósitos fijos, pero no proyectos. La memoria recoge datos del titular y de la instaladora, emplazamiento, uso, justificación de la autonomía, diagrama de principio, plano acotado y documentación de los depósitos.</a:t>
+              <a:t>N1: ¿Qué certificados se generan y quién firma cada uno?</a:t>
+            </a:r>
+          </a:p>
+          <a:p>
+            <a:r>
+              <a:t>N2: Tres papeles, cada uno con su firmante, y esto cae cruzado en examen. Primero, la empresa instaladora cumplimenta el certificado de instalación, por triplicado, con copia para el titular y para el órgano competente de la Comunidad Autónoma. Segundo, el organismo de control emite el certificado de inspección; con él, la instalación queda en disposición de servicio. Y tercero, solo si hubo proyecto, el director de obra firma el certificado de dirección de obra, que lleva como anexo el estado de la protección contra la corrosión, las actas de pruebas, la documentación de los depósitos y la justificación de que se cumplen los requisitos de seguridad. Asocia cada papel con quien lo firma: instalación, instaladora; inspección, organismo de control; dirección de obra, director de obra.</a:t>
             </a:r>
           </a:p>
         </p:txBody>
@@ -5151,7 +5085,7 @@
                 </a:solidFill>
                 <a:latin typeface="Montserrat"/>
               </a:rPr>
-              <a:t>ITC-ICG 03 · del proyecto al mantenimiento</a:t>
+              <a:t>ITC-ICG 03: proyecto, pruebas, llenado y mantenimiento</a:t>
             </a:r>
           </a:p>
         </p:txBody>
@@ -5282,7 +5216,7 @@
                 </a:solidFill>
                 <a:latin typeface="Montserrat"/>
               </a:rPr>
-              <a:t>010 / 021</a:t>
+              <a:t>010 / 020</a:t>
             </a:r>
           </a:p>
         </p:txBody>
@@ -5350,7 +5284,7 @@
                 </a:solidFill>
                 <a:latin typeface="Montserrat"/>
               </a:rPr>
-              <a:t>APARTADO 5.4 · PRUEBAS PREVIAS</a:t>
+              <a:t>APARTADO 5.6 · COMUNICACIÓN</a:t>
             </a:r>
           </a:p>
         </p:txBody>
@@ -5384,7 +5318,7 @@
                 </a:solidFill>
                 <a:latin typeface="Montserrat"/>
               </a:rPr>
-              <a:t>12 y 24 meses</a:t>
+              <a:t>Antes del primer llenado</a:t>
             </a:r>
           </a:p>
         </p:txBody>
@@ -5432,7 +5366,7 @@
                 </a:solidFill>
                 <a:latin typeface="Montserrat"/>
               </a:rPr>
-              <a:t>Prueba hidrostática si hay golpe</a:t>
+              <a:t>Se presenta por duplicado a la Comunidad</a:t>
             </a:r>
           </a:p>
           <a:p>
@@ -5457,7 +5391,7 @@
                 </a:solidFill>
                 <a:latin typeface="Montserrat"/>
               </a:rPr>
-              <a:t>O si cambia de emplazamiento</a:t>
+              <a:t>Certificados de instalación e inspección</a:t>
             </a:r>
           </a:p>
           <a:p>
@@ -5482,7 +5416,7 @@
                 </a:solidFill>
                 <a:latin typeface="Montserrat"/>
               </a:rPr>
-              <a:t>&gt; 12 meses en el sitio</a:t>
+              <a:t>Contrato de mantenimiento ya firmado</a:t>
             </a:r>
           </a:p>
           <a:p>
@@ -5507,14 +5441,14 @@
                 </a:solidFill>
                 <a:latin typeface="Montserrat"/>
               </a:rPr>
-              <a:t>O &gt; 24 meses desde fábrica</a:t>
-            </a:r>
-          </a:p>
-        </p:txBody>
-      </p:sp>
-      <p:sp>
-        <p:nvSpPr>
-          <p:cNvPr id="8" name="imgph" descr="IMGQ:pressure gauge testing tank"/>
+              <a:t>Azotea: certificado de que aguanta el peso</a:t>
+            </a:r>
+          </a:p>
+        </p:txBody>
+      </p:sp>
+      <p:sp>
+        <p:nvSpPr>
+          <p:cNvPr id="8" name="imgph" descr="IMGQ:rooftop gas tank building"/>
           <p:cNvSpPr/>
           <p:nvPr/>
         </p:nvSpPr>
@@ -5600,7 +5534,7 @@
                 </a:solidFill>
                 <a:latin typeface="Montserrat"/>
               </a:rPr>
-              <a:t>pressure gauge testing tank</a:t>
+              <a:t>rooftop gas tank building</a:t>
             </a:r>
           </a:p>
         </p:txBody>
@@ -5697,7 +5631,7 @@
                 </a:solidFill>
                 <a:latin typeface="Montserrat"/>
               </a:rPr>
-              <a:t>011 / 021</a:t>
+              <a:t>011 / 020</a:t>
             </a:r>
           </a:p>
         </p:txBody>
@@ -5765,7 +5699,7 @@
                 </a:solidFill>
                 <a:latin typeface="Montserrat"/>
               </a:rPr>
-              <a:t>APARTADO 5.5 · CERTIFICADOS</a:t>
+              <a:t>APARTADO 5.6 · PRIMER LLENADO</a:t>
             </a:r>
           </a:p>
         </p:txBody>
@@ -5799,7 +5733,7 @@
                 </a:solidFill>
                 <a:latin typeface="Montserrat"/>
               </a:rPr>
-              <a:t>Quién firma qué</a:t>
+              <a:t>El 85 %: la burbuja de seguridad</a:t>
             </a:r>
           </a:p>
         </p:txBody>
@@ -5847,7 +5781,7 @@
                 </a:solidFill>
                 <a:latin typeface="Montserrat"/>
               </a:rPr>
-              <a:t>Instaladora: certificado de instalación</a:t>
+              <a:t>Se comprueba la estanquidad</a:t>
             </a:r>
           </a:p>
           <a:p>
@@ -5872,7 +5806,7 @@
                 </a:solidFill>
                 <a:latin typeface="Montserrat"/>
               </a:rPr>
-              <a:t>Organismo: certificado de inspección</a:t>
+              <a:t>Punto alto de llenado corta al 85 %</a:t>
             </a:r>
           </a:p>
           <a:p>
@@ -5897,7 +5831,7 @@
                 </a:solidFill>
                 <a:latin typeface="Montserrat"/>
               </a:rPr>
-              <a:t>Con proyecto: dirección de obra</a:t>
+              <a:t>El 15 % de hueco es el colchón</a:t>
             </a:r>
           </a:p>
           <a:p>
@@ -5922,14 +5856,14 @@
                 </a:solidFill>
                 <a:latin typeface="Montserrat"/>
               </a:rPr>
-              <a:t>Copias a titular y Administración</a:t>
-            </a:r>
-          </a:p>
-        </p:txBody>
-      </p:sp>
-      <p:sp>
-        <p:nvSpPr>
-          <p:cNvPr id="8" name="imgph" descr="IMGQ:signing certificate document pen"/>
+              <a:t>Queda anotado en el Libro</a:t>
+            </a:r>
+          </a:p>
+        </p:txBody>
+      </p:sp>
+      <p:sp>
+        <p:nvSpPr>
+          <p:cNvPr id="8" name="imgph" descr="IMGQ:LPG tank level gauge valve"/>
           <p:cNvSpPr/>
           <p:nvPr/>
         </p:nvSpPr>
@@ -6015,7 +5949,7 @@
                 </a:solidFill>
                 <a:latin typeface="Montserrat"/>
               </a:rPr>
-              <a:t>signing certificate document pen</a:t>
+              <a:t>LPG tank level gauge valve</a:t>
             </a:r>
           </a:p>
         </p:txBody>
@@ -6112,7 +6046,7 @@
                 </a:solidFill>
                 <a:latin typeface="Montserrat"/>
               </a:rPr>
-              <a:t>012 / 021</a:t>
+              <a:t>012 / 020</a:t>
             </a:r>
           </a:p>
         </p:txBody>
@@ -6180,7 +6114,7 @@
                 </a:solidFill>
                 <a:latin typeface="Montserrat"/>
               </a:rPr>
-              <a:t>APARTADO 5.6 · PRIMER LLENADO</a:t>
+              <a:t>APARTADO 6.1 · MANTENIMIENTO</a:t>
             </a:r>
           </a:p>
         </p:txBody>
@@ -6214,7 +6148,7 @@
                 </a:solidFill>
                 <a:latin typeface="Montserrat"/>
               </a:rPr>
-              <a:t>El 85 %, la burbuja</a:t>
+              <a:t>Contrato, urgencias y Libro</a:t>
             </a:r>
           </a:p>
         </p:txBody>
@@ -6262,7 +6196,7 @@
                 </a:solidFill>
                 <a:latin typeface="Montserrat"/>
               </a:rPr>
-              <a:t>Se comunica antes del primer llenado</a:t>
+              <a:t>Titular responsable de conservarlo</a:t>
             </a:r>
           </a:p>
           <a:p>
@@ -6287,7 +6221,7 @@
                 </a:solidFill>
                 <a:latin typeface="Montserrat"/>
               </a:rPr>
-              <a:t>Contrato de mantenimiento ya firmado</a:t>
+              <a:t>Contrato con instalador de urgencias 24 h</a:t>
             </a:r>
           </a:p>
           <a:p>
@@ -6312,7 +6246,7 @@
                 </a:solidFill>
                 <a:latin typeface="Montserrat"/>
               </a:rPr>
-              <a:t>Corte del llenado al 85 %</a:t>
+              <a:t>Libro de Mantenimiento o archivo</a:t>
             </a:r>
           </a:p>
           <a:p>
@@ -6337,14 +6271,14 @@
                 </a:solidFill>
                 <a:latin typeface="Montserrat"/>
               </a:rPr>
-              <a:t>Se comprueba la estanquidad</a:t>
-            </a:r>
-          </a:p>
-        </p:txBody>
-      </p:sp>
-      <p:sp>
-        <p:nvSpPr>
-          <p:cNvPr id="8" name="imgph" descr="IMGQ:lpg tank level gauge dial"/>
+              <a:t>Consta cada visita y sus lecturas</a:t>
+            </a:r>
+          </a:p>
+        </p:txBody>
+      </p:sp>
+      <p:sp>
+        <p:nvSpPr>
+          <p:cNvPr id="8" name="imgph" descr="IMGQ:maintenance logbook technician gas"/>
           <p:cNvSpPr/>
           <p:nvPr/>
         </p:nvSpPr>
@@ -6430,7 +6364,7 @@
                 </a:solidFill>
                 <a:latin typeface="Montserrat"/>
               </a:rPr>
-              <a:t>lpg tank level gauge dial</a:t>
+              <a:t>maintenance logbook technician gas</a:t>
             </a:r>
           </a:p>
         </p:txBody>
@@ -6527,7 +6461,7 @@
                 </a:solidFill>
                 <a:latin typeface="Montserrat"/>
               </a:rPr>
-              <a:t>013 / 021</a:t>
+              <a:t>013 / 020</a:t>
             </a:r>
           </a:p>
         </p:txBody>
@@ -6595,7 +6529,7 @@
                 </a:solidFill>
                 <a:latin typeface="Montserrat"/>
               </a:rPr>
-              <a:t>APARTADO 6.1 · MANTENIMIENTO</a:t>
+              <a:t>APARTADO 6.4 · CORROSIÓN</a:t>
             </a:r>
           </a:p>
         </p:txBody>
@@ -6629,7 +6563,7 @@
                 </a:solidFill>
                 <a:latin typeface="Montserrat"/>
               </a:rPr>
-              <a:t>Contrato y corrosión</a:t>
+              <a:t>El enemigo silencioso del enterrado</a:t>
             </a:r>
           </a:p>
         </p:txBody>
@@ -6677,7 +6611,7 @@
                 </a:solidFill>
                 <a:latin typeface="Montserrat"/>
               </a:rPr>
-              <a:t>Contrato con servicio de urgencias</a:t>
+              <a:t>Enterrado: protección catódica</a:t>
             </a:r>
           </a:p>
           <a:p>
@@ -6702,7 +6636,7 @@
                 </a:solidFill>
                 <a:latin typeface="Montserrat"/>
               </a:rPr>
-              <a:t>Libro de Mantenimiento al día</a:t>
+              <a:t>Salvo estudio de terreno que la exima</a:t>
             </a:r>
           </a:p>
           <a:p>
@@ -6727,7 +6661,7 @@
                 </a:solidFill>
                 <a:latin typeface="Montserrat"/>
               </a:rPr>
-              <a:t>Corrosión: control anual</a:t>
+              <a:t>Control del potencial: cada año</a:t>
             </a:r>
           </a:p>
           <a:p>
@@ -6759,7 +6693,7 @@
       </p:sp>
       <p:sp>
         <p:nvSpPr>
-          <p:cNvPr id="8" name="imgph" descr="IMGQ:cathodic protection anode pipe"/>
+          <p:cNvPr id="8" name="imgph" descr="IMGQ:buried metal tank corrosion protection"/>
           <p:cNvSpPr/>
           <p:nvPr/>
         </p:nvSpPr>
@@ -6845,7 +6779,7 @@
                 </a:solidFill>
                 <a:latin typeface="Montserrat"/>
               </a:rPr>
-              <a:t>cathodic protection anode pipe</a:t>
+              <a:t>buried metal tank corrosion protection</a:t>
             </a:r>
           </a:p>
         </p:txBody>
@@ -6942,7 +6876,7 @@
                 </a:solidFill>
                 <a:latin typeface="Montserrat"/>
               </a:rPr>
-              <a:t>014 / 021</a:t>
+              <a:t>014 / 020</a:t>
             </a:r>
           </a:p>
         </p:txBody>
@@ -7044,7 +6978,7 @@
                 </a:solidFill>
                 <a:latin typeface="Montserrat"/>
               </a:rPr>
-              <a:t>Cada 2 años o con la casa</a:t>
+              <a:t>Cada 2 años o con la receptora</a:t>
             </a:r>
           </a:p>
         </p:txBody>
@@ -7117,7 +7051,7 @@
                 </a:solidFill>
                 <a:latin typeface="Montserrat"/>
               </a:rPr>
-              <a:t>Alimenta una casa: con la receptora</a:t>
+              <a:t>Resto: a la vez que la receptora</a:t>
             </a:r>
           </a:p>
           <a:p>
@@ -7142,7 +7076,7 @@
                 </a:solidFill>
                 <a:latin typeface="Montserrat"/>
               </a:rPr>
-              <a:t>Ambas revisiones, en la misma visita</a:t>
+              <a:t>Favorable: certificado de revisión</a:t>
             </a:r>
           </a:p>
           <a:p>
@@ -7167,14 +7101,14 @@
                 </a:solidFill>
                 <a:latin typeface="Montserrat"/>
               </a:rPr>
-              <a:t>Favorable: certificado de revisión</a:t>
-            </a:r>
-          </a:p>
-        </p:txBody>
-      </p:sp>
-      <p:sp>
-        <p:nvSpPr>
-          <p:cNvPr id="8" name="imgph" descr="IMGQ:technician checking gas meter outdoor"/>
+              <a:t>Con fallos: informe de anomalías</a:t>
+            </a:r>
+          </a:p>
+        </p:txBody>
+      </p:sp>
+      <p:sp>
+        <p:nvSpPr>
+          <p:cNvPr id="8" name="imgph" descr="IMGQ:technician inspecting gas tank valves"/>
           <p:cNvSpPr/>
           <p:nvPr/>
         </p:nvSpPr>
@@ -7260,7 +7194,7 @@
                 </a:solidFill>
                 <a:latin typeface="Montserrat"/>
               </a:rPr>
-              <a:t>technician checking gas meter outdoor</a:t>
+              <a:t>technician inspecting gas tank valves</a:t>
             </a:r>
           </a:p>
         </p:txBody>
@@ -7357,7 +7291,7 @@
                 </a:solidFill>
                 <a:latin typeface="Montserrat"/>
               </a:rPr>
-              <a:t>015 / 021</a:t>
+              <a:t>015 / 020</a:t>
             </a:r>
           </a:p>
         </p:txBody>
@@ -7459,7 +7393,7 @@
                 </a:solidFill>
                 <a:latin typeface="Montserrat"/>
               </a:rPr>
-              <a:t>Las 13 comprobaciones</a:t>
+              <a:t>Las 13 comprobaciones, agrupadas</a:t>
             </a:r>
           </a:p>
         </p:txBody>
@@ -7507,7 +7441,7 @@
                 </a:solidFill>
                 <a:latin typeface="Montserrat"/>
               </a:rPr>
-              <a:t>1–3: papeles y bomberos</a:t>
+              <a:t>1 a 3: papeles y bomberos</a:t>
             </a:r>
           </a:p>
           <a:p>
@@ -7532,7 +7466,7 @@
                 </a:solidFill>
                 <a:latin typeface="Montserrat"/>
               </a:rPr>
-              <a:t>4–9: el hierro y la corrosión</a:t>
+              <a:t>4 a 9: el hierro (válvulas, corrosión, tierra)</a:t>
             </a:r>
           </a:p>
           <a:p>
@@ -7557,7 +7491,7 @@
                 </a:solidFill>
                 <a:latin typeface="Montserrat"/>
               </a:rPr>
-              <a:t>10–13: que no fugue</a:t>
+              <a:t>10 a 13: que no fugue</a:t>
             </a:r>
           </a:p>
           <a:p>
@@ -7582,14 +7516,14 @@
                 </a:solidFill>
                 <a:latin typeface="Montserrat"/>
               </a:rPr>
-              <a:t>Boca y mangueras: 3 bar, 10 min</a:t>
-            </a:r>
-          </a:p>
-        </p:txBody>
-      </p:sp>
-      <p:sp>
-        <p:nvSpPr>
-          <p:cNvPr id="8" name="imgph" descr="IMGQ:soapy water leak test pipe"/>
+              <a:t>Boca desplazada: 3 bar durante 10 min</a:t>
+            </a:r>
+          </a:p>
+        </p:txBody>
+      </p:sp>
+      <p:sp>
+        <p:nvSpPr>
+          <p:cNvPr id="8" name="imgph" descr="IMGQ:soapy water leak test gas fitting"/>
           <p:cNvSpPr/>
           <p:nvPr/>
         </p:nvSpPr>
@@ -7675,7 +7609,7 @@
                 </a:solidFill>
                 <a:latin typeface="Montserrat"/>
               </a:rPr>
-              <a:t>soapy water leak test pipe</a:t>
+              <a:t>soapy water leak test gas fitting</a:t>
             </a:r>
           </a:p>
         </p:txBody>
@@ -7772,7 +7706,7 @@
                 </a:solidFill>
                 <a:latin typeface="Montserrat"/>
               </a:rPr>
-              <a:t>016 / 021</a:t>
+              <a:t>016 / 020</a:t>
             </a:r>
           </a:p>
         </p:txBody>
@@ -7874,7 +7808,7 @@
                 </a:solidFill>
                 <a:latin typeface="Montserrat"/>
               </a:rPr>
-              <a:t>Cada 15 años · muestreo</a:t>
+              <a:t>Cada 15 años y el muestreo</a:t>
             </a:r>
           </a:p>
         </p:txBody>
@@ -7947,7 +7881,7 @@
                 </a:solidFill>
                 <a:latin typeface="Montserrat"/>
               </a:rPr>
-              <a:t>La hace un organismo de control</a:t>
+              <a:t>La encarga a un organismo de control</a:t>
             </a:r>
           </a:p>
           <a:p>
@@ -7972,7 +7906,7 @@
                 </a:solidFill>
                 <a:latin typeface="Montserrat"/>
               </a:rPr>
-              <a:t>Superficie: solo muestra del lote</a:t>
+              <a:t>Superficie: se prueba una muestra</a:t>
             </a:r>
           </a:p>
           <a:p>
@@ -8004,7 +7938,7 @@
       </p:sp>
       <p:sp>
         <p:nvSpPr>
-          <p:cNvPr id="8" name="imgph" descr="IMGQ:industrial storage tanks row outdoor"/>
+          <p:cNvPr id="8" name="imgph" descr="IMGQ:pressure gauge industrial tank test"/>
           <p:cNvSpPr/>
           <p:nvPr/>
         </p:nvSpPr>
@@ -8090,7 +8024,7 @@
                 </a:solidFill>
                 <a:latin typeface="Montserrat"/>
               </a:rPr>
-              <a:t>industrial storage tanks row outdoor</a:t>
+              <a:t>pressure gauge industrial tank test</a:t>
             </a:r>
           </a:p>
         </p:txBody>
@@ -8187,7 +8121,7 @@
                 </a:solidFill>
                 <a:latin typeface="Montserrat"/>
               </a:rPr>
-              <a:t>017 / 021</a:t>
+              <a:t>017 / 020</a:t>
             </a:r>
           </a:p>
         </p:txBody>
@@ -8255,7 +8189,7 @@
                 </a:solidFill>
                 <a:latin typeface="Montserrat"/>
               </a:rPr>
-              <a:t>APARTADO 6.4 · CORROSIÓN</a:t>
+              <a:t>APARTADOS 6.5 Y 6.6 · CASOS</a:t>
             </a:r>
           </a:p>
         </p:txBody>
@@ -8289,7 +8223,7 @@
                 </a:solidFill>
                 <a:latin typeface="Montserrat"/>
               </a:rPr>
-              <a:t>El enemigo del enterrado</a:t>
+              <a:t>Protección adicional y provisionales</a:t>
             </a:r>
           </a:p>
         </p:txBody>
@@ -8337,7 +8271,7 @@
                 </a:solidFill>
                 <a:latin typeface="Montserrat"/>
               </a:rPr>
-              <a:t>Enterrado: protección catódica</a:t>
+              <a:t>Protección adicional: no hay que desenterrar</a:t>
             </a:r>
           </a:p>
           <a:p>
@@ -8362,7 +8296,7 @@
                 </a:solidFill>
                 <a:latin typeface="Montserrat"/>
               </a:rPr>
-              <a:t>Salvo estudio del terreno que exima</a:t>
+              <a:t>Se libra si pasa las pruebas del fabricante</a:t>
             </a:r>
           </a:p>
           <a:p>
@@ -8387,7 +8321,7 @@
                 </a:solidFill>
                 <a:latin typeface="Montserrat"/>
               </a:rPr>
-              <a:t>Control anual del potencial</a:t>
+              <a:t>Provisional: máximo 5 m³</a:t>
             </a:r>
           </a:p>
           <a:p>
@@ -8412,14 +8346,14 @@
                 </a:solidFill>
                 <a:latin typeface="Montserrat"/>
               </a:rPr>
-              <a:t>Anomalía: aviso inmediato al titular</a:t>
-            </a:r>
-          </a:p>
-        </p:txBody>
-      </p:sp>
-      <p:sp>
-        <p:nvSpPr>
-          <p:cNvPr id="8" name="imgph" descr="IMGQ:rusty metal pipe corrosion soil"/>
+              <a:t>Provisional: hasta 60 días, prorrogable</a:t>
+            </a:r>
+          </a:p>
+        </p:txBody>
+      </p:sp>
+      <p:sp>
+        <p:nvSpPr>
+          <p:cNvPr id="8" name="imgph" descr="IMGQ:underground tank excavation site"/>
           <p:cNvSpPr/>
           <p:nvPr/>
         </p:nvSpPr>
@@ -8505,7 +8439,7 @@
                 </a:solidFill>
                 <a:latin typeface="Montserrat"/>
               </a:rPr>
-              <a:t>rusty metal pipe corrosion soil</a:t>
+              <a:t>underground tank excavation site</a:t>
             </a:r>
           </a:p>
         </p:txBody>
@@ -8602,7 +8536,7 @@
                 </a:solidFill>
                 <a:latin typeface="Montserrat"/>
               </a:rPr>
-              <a:t>018 / 021</a:t>
+              <a:t>018 / 020</a:t>
             </a:r>
           </a:p>
         </p:txBody>
@@ -8670,7 +8604,7 @@
                 </a:solidFill>
                 <a:latin typeface="Montserrat"/>
               </a:rPr>
-              <a:t>APARTADO 6.5 · PROTECCIÓN ADICIONAL</a:t>
+              <a:t>APARTADO 7 · RETIRADA</a:t>
             </a:r>
           </a:p>
         </p:txBody>
@@ -8704,7 +8638,7 @@
                 </a:solidFill>
                 <a:latin typeface="Montserrat"/>
               </a:rPr>
-              <a:t>Me ahorro desenterrar</a:t>
+              <a:t>No dejes una bomba</a:t>
             </a:r>
           </a:p>
         </p:txBody>
@@ -8752,7 +8686,7 @@
                 </a:solidFill>
                 <a:latin typeface="Montserrat"/>
               </a:rPr>
-              <a:t>Sello de fábrica autorizado</a:t>
+              <a:t>Inertizado con nitrógeno</a:t>
             </a:r>
           </a:p>
           <a:p>
@@ -8777,7 +8711,7 @@
                 </a:solidFill>
                 <a:latin typeface="Montserrat"/>
               </a:rPr>
-              <a:t>No hay que desenterrar si pasa pruebas</a:t>
+              <a:t>O desgasificado con agua</a:t>
             </a:r>
           </a:p>
           <a:p>
@@ -8802,7 +8736,7 @@
                 </a:solidFill>
                 <a:latin typeface="Montserrat"/>
               </a:rPr>
-              <a:t>Documentación técnica, una sola vez</a:t>
+              <a:t>Certificado a la Comunidad Autónoma</a:t>
             </a:r>
           </a:p>
           <a:p>
@@ -8827,14 +8761,14 @@
                 </a:solidFill>
                 <a:latin typeface="Montserrat"/>
               </a:rPr>
-              <a:t>La guarda el fabricante 15 años</a:t>
-            </a:r>
-          </a:p>
-        </p:txBody>
-      </p:sp>
-      <p:sp>
-        <p:nvSpPr>
-          <p:cNvPr id="8" name="imgph" descr="IMGQ:factory storage tank manufacturing"/>
+              <a:t>Cese: 2 años sin consumo o 5 sin mantenimiento</a:t>
+            </a:r>
+          </a:p>
+        </p:txBody>
+      </p:sp>
+      <p:sp>
+        <p:nvSpPr>
+          <p:cNvPr id="8" name="imgph" descr="IMGQ:nitrogen cylinder inert gas industrial"/>
           <p:cNvSpPr/>
           <p:nvPr/>
         </p:nvSpPr>
@@ -8920,7 +8854,7 @@
                 </a:solidFill>
                 <a:latin typeface="Montserrat"/>
               </a:rPr>
-              <a:t>factory storage tank manufacturing</a:t>
+              <a:t>nitrogen cylinder inert gas industrial</a:t>
             </a:r>
           </a:p>
         </p:txBody>
@@ -9017,7 +8951,7 @@
                 </a:solidFill>
                 <a:latin typeface="Montserrat"/>
               </a:rPr>
-              <a:t>019 / 021</a:t>
+              <a:t>019 / 020</a:t>
             </a:r>
           </a:p>
         </p:txBody>
@@ -9085,7 +9019,7 @@
                 </a:solidFill>
                 <a:latin typeface="Montserrat"/>
               </a:rPr>
-              <a:t>APARTADO 6.6 · PROVISIONALES</a:t>
+              <a:t>REPASO RELÁMPAGO</a:t>
             </a:r>
           </a:p>
         </p:txBody>
@@ -9119,7 +9053,7 @@
                 </a:solidFill>
                 <a:latin typeface="Montserrat"/>
               </a:rPr>
-              <a:t>El depósito de sustitución</a:t>
+              <a:t>Seis anclas antes del cierre</a:t>
             </a:r>
           </a:p>
         </p:txBody>
@@ -9167,7 +9101,7 @@
                 </a:solidFill>
                 <a:latin typeface="Montserrat"/>
               </a:rPr>
-              <a:t>Para no dejar sin gas en pruebas</a:t>
+              <a:t>Topes 2.000 / 500 m³ · proyecto &gt; 13 m³</a:t>
             </a:r>
           </a:p>
           <a:p>
@@ -9192,7 +9126,7 @@
                 </a:solidFill>
                 <a:latin typeface="Montserrat"/>
               </a:rPr>
-              <a:t>Volumen máximo 5 m³</a:t>
+              <a:t>Memoria la firma el instalador</a:t>
             </a:r>
           </a:p>
           <a:p>
@@ -9217,7 +9151,7 @@
                 </a:solidFill>
                 <a:latin typeface="Montserrat"/>
               </a:rPr>
-              <a:t>Máximo 60 días, prorrogables</a:t>
+              <a:t>Primer llenado corta al 85 %</a:t>
             </a:r>
           </a:p>
           <a:p>
@@ -9242,14 +9176,39 @@
                 </a:solidFill>
                 <a:latin typeface="Montserrat"/>
               </a:rPr>
-              <a:t>Proyecto solo la primera vez</a:t>
-            </a:r>
-          </a:p>
-        </p:txBody>
-      </p:sp>
-      <p:sp>
-        <p:nvSpPr>
-          <p:cNvPr id="8" name="imgph" descr="IMGQ:temporary gas tank construction site"/>
+              <a:t>Enterrado: protección catódica</a:t>
+            </a:r>
+          </a:p>
+          <a:p>
+            <a:pPr>
+              <a:spcAft>
+                <a:spcPts val="1000"/>
+              </a:spcAft>
+            </a:pPr>
+            <a:r>
+              <a:rPr sz="1600" b="1" i="0">
+                <a:solidFill>
+                  <a:srgbClr val="2E3A80"/>
+                </a:solidFill>
+                <a:latin typeface="Montserrat"/>
+              </a:rPr>
+              <a:t>•  </a:t>
+            </a:r>
+            <a:r>
+              <a:rPr sz="1600" b="0" i="0">
+                <a:solidFill>
+                  <a:srgbClr val="1B2330"/>
+                </a:solidFill>
+                <a:latin typeface="Montserrat"/>
+              </a:rPr>
+              <a:t>Prueba de presión cada 15 años</a:t>
+            </a:r>
+          </a:p>
+        </p:txBody>
+      </p:sp>
+      <p:sp>
+        <p:nvSpPr>
+          <p:cNvPr id="8" name="imgph" descr="IMGQ:LPG tank installation residential"/>
           <p:cNvSpPr/>
           <p:nvPr/>
         </p:nvSpPr>
@@ -9335,7 +9294,7 @@
                 </a:solidFill>
                 <a:latin typeface="Montserrat"/>
               </a:rPr>
-              <a:t>temporary gas tank construction site</a:t>
+              <a:t>LPG tank installation residential</a:t>
             </a:r>
           </a:p>
         </p:txBody>
@@ -9432,7 +9391,7 @@
                 </a:solidFill>
                 <a:latin typeface="Montserrat"/>
               </a:rPr>
-              <a:t>002 / 021</a:t>
+              <a:t>002 / 020</a:t>
             </a:r>
           </a:p>
         </p:txBody>
@@ -9616,7 +9575,7 @@
                 </a:solidFill>
                 <a:latin typeface="Montserrat"/>
               </a:rPr>
-              <a:t>por encima: hace falta proyecto</a:t>
+              <a:t>capacidad que exige proyecto</a:t>
             </a:r>
           </a:p>
         </p:txBody>
@@ -9732,7 +9691,7 @@
                 </a:solidFill>
                 <a:latin typeface="Montserrat"/>
               </a:rPr>
-              <a:t>corte del primer llenado</a:t>
+              <a:t>corte del punto alto de llenado</a:t>
             </a:r>
           </a:p>
         </p:txBody>
@@ -9813,7 +9772,7 @@
                 </a:solidFill>
                 <a:latin typeface="Montserrat"/>
               </a:rPr>
-              <a:t>15</a:t>
+              <a:t>15 años</a:t>
             </a:r>
           </a:p>
         </p:txBody>
@@ -9848,7 +9807,7 @@
                 </a:solidFill>
                 <a:latin typeface="Montserrat"/>
               </a:rPr>
-              <a:t>años entre pruebas de presión</a:t>
+              <a:t>prueba de presión periódica</a:t>
             </a:r>
           </a:p>
         </p:txBody>
@@ -9886,7 +9845,7 @@
             <a:avLst/>
           </a:prstGeom>
           <a:solidFill>
-            <a:srgbClr val="FFFFFF"/>
+            <a:srgbClr val="1E2761"/>
           </a:solidFill>
           <a:ln>
             <a:noFill/>
@@ -9923,8 +9882,8 @@
         </p:nvSpPr>
         <p:spPr>
           <a:xfrm>
-            <a:off x="10607040" y="320040"/>
-            <a:ext cx="1371600" cy="365760"/>
+            <a:off x="822960" y="640080"/>
+            <a:ext cx="10515600" cy="457200"/>
           </a:xfrm>
           <a:prstGeom prst="rect">
             <a:avLst/>
@@ -9937,15 +9896,14 @@
           </a:bodyPr>
           <a:lstStyle/>
           <a:p>
-            <a:pPr algn="r"/>
-            <a:r>
-              <a:rPr sz="1000" b="1" i="0">
-                <a:solidFill>
-                  <a:srgbClr val="64748B"/>
-                </a:solidFill>
-                <a:latin typeface="Montserrat"/>
-              </a:rPr>
-              <a:t>020 / 021</a:t>
+            <a:r>
+              <a:rPr sz="1400" b="1" i="0">
+                <a:solidFill>
+                  <a:srgbClr val="CADCFC"/>
+                </a:solidFill>
+                <a:latin typeface="Montserrat"/>
+              </a:rPr>
+              <a:t>LO QUE YA DOMINAS</a:t>
             </a:r>
           </a:p>
         </p:txBody>
@@ -9958,8 +9916,8 @@
         </p:nvSpPr>
         <p:spPr>
           <a:xfrm>
-            <a:off x="457200" y="6419088"/>
-            <a:ext cx="8229600" cy="365760"/>
+            <a:off x="822960" y="1143000"/>
+            <a:ext cx="10515600" cy="1097280"/>
           </a:xfrm>
           <a:prstGeom prst="rect">
             <a:avLst/>
@@ -9973,13 +9931,13 @@
           <a:lstStyle/>
           <a:p>
             <a:r>
-              <a:rPr sz="900" b="0" i="0">
-                <a:solidFill>
-                  <a:srgbClr val="64748B"/>
-                </a:solidFill>
-                <a:latin typeface="Montserrat"/>
-              </a:rPr>
-              <a:t>Curso Gas B · Tema 02 · Depósitos fijos de GLP (ITC-ICG 03)</a:t>
+              <a:rPr sz="3400" b="1" i="0">
+                <a:solidFill>
+                  <a:srgbClr val="FFFFFF"/>
+                </a:solidFill>
+                <a:latin typeface="Montserrat"/>
+              </a:rPr>
+              <a:t>Ya legalizas y mantienes un depósito fijo</a:t>
             </a:r>
           </a:p>
         </p:txBody>
@@ -9992,8 +9950,8 @@
         </p:nvSpPr>
         <p:spPr>
           <a:xfrm>
-            <a:off x="822960" y="457200"/>
-            <a:ext cx="8229600" cy="365760"/>
+            <a:off x="822960" y="2514600"/>
+            <a:ext cx="10515600" cy="2834640"/>
           </a:xfrm>
           <a:prstGeom prst="rect">
             <a:avLst/>
@@ -10006,196 +9964,126 @@
           </a:bodyPr>
           <a:lstStyle/>
           <a:p>
-            <a:r>
-              <a:rPr sz="1200" b="1" i="0">
-                <a:solidFill>
-                  <a:srgbClr val="64748B"/>
-                </a:solidFill>
-                <a:latin typeface="Montserrat"/>
-              </a:rPr>
-              <a:t>APARTADO 7 · RETIRADA</a:t>
-            </a:r>
-          </a:p>
-        </p:txBody>
-      </p:sp>
-      <p:sp>
-        <p:nvSpPr>
-          <p:cNvPr id="6" name="TextBox 5"/>
-          <p:cNvSpPr txBox="1"/>
-          <p:nvPr/>
-        </p:nvSpPr>
-        <p:spPr>
-          <a:xfrm>
-            <a:off x="822960" y="868680"/>
-            <a:ext cx="10515600" cy="914400"/>
-          </a:xfrm>
-          <a:prstGeom prst="rect">
-            <a:avLst/>
-          </a:prstGeom>
-          <a:noFill/>
-        </p:spPr>
-        <p:txBody>
-          <a:bodyPr wrap="square">
-            <a:spAutoFit/>
-          </a:bodyPr>
-          <a:lstStyle/>
-          <a:p>
-            <a:r>
-              <a:rPr sz="2700" b="1" i="0">
-                <a:solidFill>
-                  <a:srgbClr val="1E2761"/>
-                </a:solidFill>
-                <a:latin typeface="Montserrat"/>
-              </a:rPr>
-              <a:t>Sin dejar una bomba</a:t>
-            </a:r>
-          </a:p>
-        </p:txBody>
-      </p:sp>
-      <p:sp>
-        <p:nvSpPr>
-          <p:cNvPr id="7" name="TextBox 6"/>
-          <p:cNvSpPr txBox="1"/>
-          <p:nvPr/>
-        </p:nvSpPr>
-        <p:spPr>
-          <a:xfrm>
-            <a:off x="822960" y="1920240"/>
-            <a:ext cx="4983480" cy="4206240"/>
-          </a:xfrm>
-          <a:prstGeom prst="rect">
-            <a:avLst/>
-          </a:prstGeom>
-          <a:noFill/>
-        </p:spPr>
-        <p:txBody>
-          <a:bodyPr wrap="square">
-            <a:spAutoFit/>
-          </a:bodyPr>
-          <a:lstStyle/>
-          <a:p>
             <a:pPr>
               <a:spcAft>
-                <a:spcPts val="1000"/>
+                <a:spcPts val="1200"/>
               </a:spcAft>
             </a:pPr>
             <a:r>
-              <a:rPr sz="1600" b="1" i="0">
-                <a:solidFill>
-                  <a:srgbClr val="2E3A80"/>
-                </a:solidFill>
-                <a:latin typeface="Montserrat"/>
-              </a:rPr>
-              <a:t>•  </a:t>
-            </a:r>
-            <a:r>
-              <a:rPr sz="1600" b="0" i="0">
-                <a:solidFill>
-                  <a:srgbClr val="1B2330"/>
-                </a:solidFill>
-                <a:latin typeface="Montserrat"/>
-              </a:rPr>
-              <a:t>Inertizar con nitrógeno</a:t>
+              <a:rPr sz="2000" b="1" i="0">
+                <a:solidFill>
+                  <a:srgbClr val="CADCFC"/>
+                </a:solidFill>
+                <a:latin typeface="Montserrat"/>
+              </a:rPr>
+              <a:t>✓  </a:t>
+            </a:r>
+            <a:r>
+              <a:rPr sz="1900" b="0" i="0">
+                <a:solidFill>
+                  <a:srgbClr val="FFFFFF"/>
+                </a:solidFill>
+                <a:latin typeface="Montserrat"/>
+              </a:rPr>
+              <a:t>Decides memoria o proyecto y sabes qué firmas tú</a:t>
             </a:r>
           </a:p>
           <a:p>
             <a:pPr>
               <a:spcAft>
-                <a:spcPts val="1000"/>
+                <a:spcPts val="1200"/>
               </a:spcAft>
             </a:pPr>
             <a:r>
-              <a:rPr sz="1600" b="1" i="0">
-                <a:solidFill>
-                  <a:srgbClr val="2E3A80"/>
-                </a:solidFill>
-                <a:latin typeface="Montserrat"/>
-              </a:rPr>
-              <a:t>•  </a:t>
-            </a:r>
-            <a:r>
-              <a:rPr sz="1600" b="0" i="0">
-                <a:solidFill>
-                  <a:srgbClr val="1B2330"/>
-                </a:solidFill>
-                <a:latin typeface="Montserrat"/>
-              </a:rPr>
-              <a:t>O desgasificar con agua</a:t>
+              <a:rPr sz="2000" b="1" i="0">
+                <a:solidFill>
+                  <a:srgbClr val="CADCFC"/>
+                </a:solidFill>
+                <a:latin typeface="Montserrat"/>
+              </a:rPr>
+              <a:t>✓  </a:t>
+            </a:r>
+            <a:r>
+              <a:rPr sz="1900" b="0" i="0">
+                <a:solidFill>
+                  <a:srgbClr val="FFFFFF"/>
+                </a:solidFill>
+                <a:latin typeface="Montserrat"/>
+              </a:rPr>
+              <a:t>Entiendes el 85 % y por qué el líquido se dilata</a:t>
             </a:r>
           </a:p>
           <a:p>
             <a:pPr>
               <a:spcAft>
-                <a:spcPts val="1000"/>
+                <a:spcPts val="1200"/>
               </a:spcAft>
             </a:pPr>
             <a:r>
-              <a:rPr sz="1600" b="1" i="0">
-                <a:solidFill>
-                  <a:srgbClr val="2E3A80"/>
-                </a:solidFill>
-                <a:latin typeface="Montserrat"/>
-              </a:rPr>
-              <a:t>•  </a:t>
-            </a:r>
-            <a:r>
-              <a:rPr sz="1600" b="0" i="0">
-                <a:solidFill>
-                  <a:srgbClr val="1B2330"/>
-                </a:solidFill>
-                <a:latin typeface="Montserrat"/>
-              </a:rPr>
-              <a:t>Certificado a la Administración</a:t>
+              <a:rPr sz="2000" b="1" i="0">
+                <a:solidFill>
+                  <a:srgbClr val="CADCFC"/>
+                </a:solidFill>
+                <a:latin typeface="Montserrat"/>
+              </a:rPr>
+              <a:t>✓  </a:t>
+            </a:r>
+            <a:r>
+              <a:rPr sz="1900" b="0" i="0">
+                <a:solidFill>
+                  <a:srgbClr val="FFFFFF"/>
+                </a:solidFill>
+                <a:latin typeface="Montserrat"/>
+              </a:rPr>
+              <a:t>Controlas corrosión, revisiones y prueba de los 15 años</a:t>
             </a:r>
           </a:p>
           <a:p>
             <a:pPr>
               <a:spcAft>
-                <a:spcPts val="1000"/>
+                <a:spcPts val="1200"/>
               </a:spcAft>
             </a:pPr>
             <a:r>
-              <a:rPr sz="1600" b="1" i="0">
-                <a:solidFill>
-                  <a:srgbClr val="2E3A80"/>
-                </a:solidFill>
-                <a:latin typeface="Montserrat"/>
-              </a:rPr>
-              <a:t>•  </a:t>
-            </a:r>
-            <a:r>
-              <a:rPr sz="1600" b="0" i="0">
-                <a:solidFill>
-                  <a:srgbClr val="1B2330"/>
-                </a:solidFill>
-                <a:latin typeface="Montserrat"/>
-              </a:rPr>
-              <a:t>Cese: 2 años sin uso o 5 sin mantener</a:t>
-            </a:r>
-          </a:p>
-        </p:txBody>
-      </p:sp>
-      <p:sp>
-        <p:nvSpPr>
-          <p:cNvPr id="8" name="imgph" descr="IMGQ:nitrogen gas cylinder industrial"/>
+              <a:rPr sz="2000" b="1" i="0">
+                <a:solidFill>
+                  <a:srgbClr val="CADCFC"/>
+                </a:solidFill>
+                <a:latin typeface="Montserrat"/>
+              </a:rPr>
+              <a:t>✓  </a:t>
+            </a:r>
+            <a:r>
+              <a:rPr sz="1900" b="0" i="0">
+                <a:solidFill>
+                  <a:srgbClr val="FFFFFF"/>
+                </a:solidFill>
+                <a:latin typeface="Montserrat"/>
+              </a:rPr>
+              <a:t>Retiras el depósito sin dejar una bomba dentro</a:t>
+            </a:r>
+          </a:p>
+        </p:txBody>
+      </p:sp>
+      <p:sp>
+        <p:nvSpPr>
+          <p:cNvPr id="6" name="Rounded Rectangle 5"/>
           <p:cNvSpPr/>
           <p:nvPr/>
         </p:nvSpPr>
         <p:spPr>
           <a:xfrm>
-            <a:off x="5806440" y="1051560"/>
-            <a:ext cx="5298947" cy="4629150"/>
+            <a:off x="822960" y="5532120"/>
+            <a:ext cx="10515600" cy="777240"/>
           </a:xfrm>
           <a:prstGeom prst="roundRect">
             <a:avLst/>
           </a:prstGeom>
           <a:solidFill>
-            <a:srgbClr val="F3F6FB"/>
+            <a:srgbClr val="2E3A80"/>
           </a:solidFill>
-          <a:ln w="12700">
-            <a:solidFill>
-              <a:srgbClr val="C7D2E6"/>
-            </a:solidFill>
+          <a:ln>
+            <a:noFill/>
           </a:ln>
           <a:effectLst/>
         </p:spPr>
@@ -10223,14 +10111,14 @@
       </p:sp>
       <p:sp>
         <p:nvSpPr>
-          <p:cNvPr id="9" name="TextBox 8"/>
+          <p:cNvPr id="7" name="TextBox 6"/>
           <p:cNvSpPr txBox="1"/>
           <p:nvPr/>
         </p:nvSpPr>
         <p:spPr>
           <a:xfrm>
-            <a:off x="6080760" y="2726055"/>
-            <a:ext cx="4750307" cy="1280160"/>
+            <a:off x="1051560" y="5605272"/>
+            <a:ext cx="10058400" cy="640080"/>
           </a:xfrm>
           <a:prstGeom prst="rect">
             <a:avLst/>
@@ -10243,290 +10131,14 @@
           </a:bodyPr>
           <a:lstStyle/>
           <a:p>
-            <a:pPr algn="ctr"/>
-            <a:r>
-              <a:rPr sz="1400" b="1" i="0">
-                <a:solidFill>
-                  <a:srgbClr val="64748B"/>
-                </a:solidFill>
-                <a:latin typeface="Montserrat"/>
-              </a:rPr>
-              <a:t>IMAGEN REALISTA</a:t>
-            </a:r>
-          </a:p>
-          <a:p>
-            <a:pPr algn="ctr"/>
-            <a:r>
-              <a:rPr sz="1100" b="0" i="1">
-                <a:solidFill>
-                  <a:srgbClr val="64748B"/>
-                </a:solidFill>
-                <a:latin typeface="Montserrat"/>
-              </a:rPr>
-              <a:t>nitrogen gas cylinder industrial</a:t>
-            </a:r>
-          </a:p>
-        </p:txBody>
-      </p:sp>
-    </p:spTree>
-  </p:cSld>
-  <p:clrMapOvr>
-    <a:masterClrMapping/>
-  </p:clrMapOvr>
-</p:sld>
-</file>
-
-<file path=ppt/slides/slide21.xml><?xml version="1.0" encoding="utf-8"?>
-<p:sld xmlns:a="http://schemas.openxmlformats.org/drawingml/2006/main" xmlns:p="http://schemas.openxmlformats.org/presentationml/2006/main" xmlns:r="http://schemas.openxmlformats.org/officeDocument/2006/relationships">
-  <p:cSld>
-    <p:spTree>
-      <p:nvGrpSpPr>
-        <p:cNvPr id="1" name=""/>
-        <p:cNvGrpSpPr/>
-        <p:nvPr/>
-      </p:nvGrpSpPr>
-      <p:grpSpPr/>
-      <p:sp>
-        <p:nvSpPr>
-          <p:cNvPr id="2" name="Rectangle 1"/>
-          <p:cNvSpPr/>
-          <p:nvPr/>
-        </p:nvSpPr>
-        <p:spPr>
-          <a:xfrm>
-            <a:off x="0" y="0"/>
-            <a:ext cx="12191695" cy="6858000"/>
-          </a:xfrm>
-          <a:prstGeom prst="rect">
-            <a:avLst/>
-          </a:prstGeom>
-          <a:solidFill>
-            <a:srgbClr val="FFFFFF"/>
-          </a:solidFill>
-          <a:ln>
-            <a:noFill/>
-          </a:ln>
-          <a:effectLst/>
-        </p:spPr>
-        <p:style>
-          <a:lnRef idx="1">
-            <a:schemeClr val="accent1"/>
-          </a:lnRef>
-          <a:fillRef idx="3">
-            <a:schemeClr val="accent1"/>
-          </a:fillRef>
-          <a:effectRef idx="2">
-            <a:schemeClr val="accent1"/>
-          </a:effectRef>
-          <a:fontRef idx="minor">
-            <a:schemeClr val="lt1"/>
-          </a:fontRef>
-        </p:style>
-        <p:txBody>
-          <a:bodyPr rtlCol="0" anchor="ctr"/>
-          <a:lstStyle/>
-          <a:p>
-            <a:pPr algn="ctr"/>
-          </a:p>
-        </p:txBody>
-      </p:sp>
-      <p:sp>
-        <p:nvSpPr>
-          <p:cNvPr id="3" name="TextBox 2"/>
-          <p:cNvSpPr txBox="1"/>
-          <p:nvPr/>
-        </p:nvSpPr>
-        <p:spPr>
-          <a:xfrm>
-            <a:off x="10607040" y="320040"/>
-            <a:ext cx="1371600" cy="365760"/>
-          </a:xfrm>
-          <a:prstGeom prst="rect">
-            <a:avLst/>
-          </a:prstGeom>
-          <a:noFill/>
-        </p:spPr>
-        <p:txBody>
-          <a:bodyPr wrap="square">
-            <a:spAutoFit/>
-          </a:bodyPr>
-          <a:lstStyle/>
-          <a:p>
-            <a:pPr algn="r"/>
-            <a:r>
-              <a:rPr sz="1000" b="1" i="0">
-                <a:solidFill>
-                  <a:srgbClr val="64748B"/>
-                </a:solidFill>
-                <a:latin typeface="Montserrat"/>
-              </a:rPr>
-              <a:t>021 / 021</a:t>
-            </a:r>
-          </a:p>
-        </p:txBody>
-      </p:sp>
-      <p:sp>
-        <p:nvSpPr>
-          <p:cNvPr id="4" name="TextBox 3"/>
-          <p:cNvSpPr txBox="1"/>
-          <p:nvPr/>
-        </p:nvSpPr>
-        <p:spPr>
-          <a:xfrm>
-            <a:off x="457200" y="6419088"/>
-            <a:ext cx="8229600" cy="365760"/>
-          </a:xfrm>
-          <a:prstGeom prst="rect">
-            <a:avLst/>
-          </a:prstGeom>
-          <a:noFill/>
-        </p:spPr>
-        <p:txBody>
-          <a:bodyPr wrap="square">
-            <a:spAutoFit/>
-          </a:bodyPr>
-          <a:lstStyle/>
-          <a:p>
-            <a:r>
-              <a:rPr sz="900" b="0" i="0">
-                <a:solidFill>
-                  <a:srgbClr val="64748B"/>
-                </a:solidFill>
-                <a:latin typeface="Montserrat"/>
-              </a:rPr>
-              <a:t>Curso Gas B · Tema 02 · Depósitos fijos de GLP (ITC-ICG 03)</a:t>
-            </a:r>
-          </a:p>
-        </p:txBody>
-      </p:sp>
-      <p:sp>
-        <p:nvSpPr>
-          <p:cNvPr id="5" name="TextBox 4"/>
-          <p:cNvSpPr txBox="1"/>
-          <p:nvPr/>
-        </p:nvSpPr>
-        <p:spPr>
-          <a:xfrm>
-            <a:off x="822960" y="640080"/>
-            <a:ext cx="10058400" cy="914400"/>
-          </a:xfrm>
-          <a:prstGeom prst="rect">
-            <a:avLst/>
-          </a:prstGeom>
-          <a:noFill/>
-        </p:spPr>
-        <p:txBody>
-          <a:bodyPr wrap="square">
-            <a:spAutoFit/>
-          </a:bodyPr>
-          <a:lstStyle/>
-          <a:p>
-            <a:r>
-              <a:rPr sz="3000" b="1" i="0">
-                <a:solidFill>
-                  <a:srgbClr val="1E2761"/>
-                </a:solidFill>
-                <a:latin typeface="Montserrat"/>
-              </a:rPr>
-              <a:t>Qué me llevo</a:t>
-            </a:r>
-          </a:p>
-        </p:txBody>
-      </p:sp>
-      <p:sp>
-        <p:nvSpPr>
-          <p:cNvPr id="6" name="TextBox 5"/>
-          <p:cNvSpPr txBox="1"/>
-          <p:nvPr/>
-        </p:nvSpPr>
-        <p:spPr>
-          <a:xfrm>
-            <a:off x="822960" y="2011680"/>
-            <a:ext cx="10058400" cy="3657600"/>
-          </a:xfrm>
-          <a:prstGeom prst="rect">
-            <a:avLst/>
-          </a:prstGeom>
-          <a:noFill/>
-        </p:spPr>
-        <p:txBody>
-          <a:bodyPr wrap="square">
-            <a:spAutoFit/>
-          </a:bodyPr>
-          <a:lstStyle/>
-          <a:p>
-            <a:pPr>
-              <a:spcAft>
-                <a:spcPts val="1400"/>
-              </a:spcAft>
-            </a:pPr>
-            <a:r>
-              <a:rPr sz="2000" b="1" i="0">
-                <a:solidFill>
-                  <a:srgbClr val="2E3A80"/>
-                </a:solidFill>
-                <a:latin typeface="Montserrat"/>
-              </a:rPr>
-              <a:t>✓  </a:t>
-            </a:r>
-            <a:r>
-              <a:rPr sz="2000" b="0" i="0">
-                <a:solidFill>
-                  <a:srgbClr val="1B2330"/>
-                </a:solidFill>
-                <a:latin typeface="Montserrat"/>
-              </a:rPr>
-              <a:t>Firmo memoria, no proyecto · el corte es 13 m³</a:t>
-            </a:r>
-          </a:p>
-          <a:p>
-            <a:pPr>
-              <a:spcAft>
-                <a:spcPts val="1400"/>
-              </a:spcAft>
-            </a:pPr>
-            <a:r>
-              <a:rPr sz="2000" b="1" i="0">
-                <a:solidFill>
-                  <a:srgbClr val="2E3A80"/>
-                </a:solidFill>
-                <a:latin typeface="Montserrat"/>
-              </a:rPr>
-              <a:t>✓  </a:t>
-            </a:r>
-            <a:r>
-              <a:rPr sz="2000" b="0" i="0">
-                <a:solidFill>
-                  <a:srgbClr val="1B2330"/>
-                </a:solidFill>
-                <a:latin typeface="Montserrat"/>
-              </a:rPr>
-              <a:t>El llenado corta al 85 % · presión cada 15 años</a:t>
-            </a:r>
-          </a:p>
-          <a:p>
-            <a:pPr>
-              <a:spcAft>
-                <a:spcPts val="1400"/>
-              </a:spcAft>
-            </a:pPr>
-            <a:r>
-              <a:rPr sz="2000" b="1" i="0">
-                <a:solidFill>
-                  <a:srgbClr val="2E3A80"/>
-                </a:solidFill>
-                <a:latin typeface="Montserrat"/>
-              </a:rPr>
-              <a:t>✓  </a:t>
-            </a:r>
-            <a:r>
-              <a:rPr sz="2000" b="0" i="0">
-                <a:solidFill>
-                  <a:srgbClr val="1B2330"/>
-                </a:solidFill>
-                <a:latin typeface="Montserrat"/>
-              </a:rPr>
-              <a:t>Enterrado = corrosión · retirar = inertizar</a:t>
+            <a:r>
+              <a:rPr sz="1500" b="1" i="1">
+                <a:solidFill>
+                  <a:srgbClr val="CADCFC"/>
+                </a:solidFill>
+                <a:latin typeface="Montserrat"/>
+              </a:rPr>
+              <a:t>Hoy ya eres más gasista que ayer. En el último vídeo damos el salto al frío: el GNL.</a:t>
             </a:r>
           </a:p>
         </p:txBody>
@@ -10623,7 +10235,7 @@
                 </a:solidFill>
                 <a:latin typeface="Montserrat"/>
               </a:rPr>
-              <a:t>003 / 021</a:t>
+              <a:t>003 / 020</a:t>
             </a:r>
           </a:p>
         </p:txBody>
@@ -10691,7 +10303,7 @@
                 </a:solidFill>
                 <a:latin typeface="Montserrat"/>
               </a:rPr>
-              <a:t>APARTADO 1 · OBJETO</a:t>
+              <a:t>APARTADOS 1 Y 2 · OBJETO</a:t>
             </a:r>
           </a:p>
         </p:txBody>
@@ -10725,7 +10337,7 @@
                 </a:solidFill>
                 <a:latin typeface="Montserrat"/>
               </a:rPr>
-              <a:t>¿Qué regula la ITC-03?</a:t>
+              <a:t>Qué regula y hasta dónde</a:t>
             </a:r>
           </a:p>
         </p:txBody>
@@ -10773,7 +10385,7 @@
                 </a:solidFill>
                 <a:latin typeface="Montserrat"/>
               </a:rPr>
-              <a:t>Almacenar GLP en depósitos fijos</a:t>
+              <a:t>Almacenamiento de GLP en depósitos fijos</a:t>
             </a:r>
           </a:p>
           <a:p>
@@ -10798,7 +10410,7 @@
                 </a:solidFill>
                 <a:latin typeface="Montserrat"/>
               </a:rPr>
-              <a:t>De superficie o enterrados</a:t>
+              <a:t>De la boca de carga a las válvulas de salida</a:t>
             </a:r>
           </a:p>
           <a:p>
@@ -10823,7 +10435,7 @@
                 </a:solidFill>
                 <a:latin typeface="Montserrat"/>
               </a:rPr>
-              <a:t>Alimentan red o instalación receptora</a:t>
+              <a:t>Superficie: hasta 2.000 m³</a:t>
             </a:r>
           </a:p>
           <a:p>
@@ -10848,14 +10460,14 @@
                 </a:solidFill>
                 <a:latin typeface="Montserrat"/>
               </a:rPr>
-              <a:t>Referencia: UNE 60250</a:t>
-            </a:r>
-          </a:p>
-        </p:txBody>
-      </p:sp>
-      <p:sp>
-        <p:nvSpPr>
-          <p:cNvPr id="8" name="imgph" descr="IMGQ:lpg storage tank garden house"/>
+              <a:t>Enterrados: hasta 500 m³</a:t>
+            </a:r>
+          </a:p>
+        </p:txBody>
+      </p:sp>
+      <p:sp>
+        <p:nvSpPr>
+          <p:cNvPr id="8" name="imgph" descr="IMGQ:large LPG storage tank garden"/>
           <p:cNvSpPr/>
           <p:nvPr/>
         </p:nvSpPr>
@@ -10941,7 +10553,7 @@
                 </a:solidFill>
                 <a:latin typeface="Montserrat"/>
               </a:rPr>
-              <a:t>lpg storage tank garden house</a:t>
+              <a:t>large LPG storage tank garden</a:t>
             </a:r>
           </a:p>
         </p:txBody>
@@ -11038,7 +10650,7 @@
                 </a:solidFill>
                 <a:latin typeface="Montserrat"/>
               </a:rPr>
-              <a:t>004 / 021</a:t>
+              <a:t>004 / 020</a:t>
             </a:r>
           </a:p>
         </p:txBody>
@@ -11106,7 +10718,7 @@
                 </a:solidFill>
                 <a:latin typeface="Montserrat"/>
               </a:rPr>
-              <a:t>APARTADO 2 · CAMPO</a:t>
+              <a:t>APARTADOS 2 Y 3 · NORMA</a:t>
             </a:r>
           </a:p>
         </p:txBody>
@@ -11140,7 +10752,7 @@
                 </a:solidFill>
                 <a:latin typeface="Montserrat"/>
               </a:rPr>
-              <a:t>Los dos topes</a:t>
+              <a:t>Manda la UNE 60250</a:t>
             </a:r>
           </a:p>
         </p:txBody>
@@ -11188,7 +10800,7 @@
                 </a:solidFill>
                 <a:latin typeface="Montserrat"/>
               </a:rPr>
-              <a:t>Superficie: hasta 2.000 m³</a:t>
+              <a:t>Clasifica por volumen geométrico total</a:t>
             </a:r>
           </a:p>
           <a:p>
@@ -11213,7 +10825,7 @@
                 </a:solidFill>
                 <a:latin typeface="Montserrat"/>
               </a:rPr>
-              <a:t>Enterrado: hasta 500 m³</a:t>
+              <a:t>Diseño, distancias, pruebas: según UNE</a:t>
             </a:r>
           </a:p>
           <a:p>
@@ -11238,7 +10850,7 @@
                 </a:solidFill>
                 <a:latin typeface="Montserrat"/>
               </a:rPr>
-              <a:t>De la boca de carga a las válvulas</a:t>
+              <a:t>Recambio ±10 %: sin proyecto nuevo</a:t>
             </a:r>
           </a:p>
           <a:p>
@@ -11263,14 +10875,14 @@
                 </a:solidFill>
                 <a:latin typeface="Montserrat"/>
               </a:rPr>
-              <a:t>Cambio de categoría = como nueva</a:t>
-            </a:r>
-          </a:p>
-        </p:txBody>
-      </p:sp>
-      <p:sp>
-        <p:nvSpPr>
-          <p:cNvPr id="8" name="imgph" descr="IMGQ:buried lpg tank green cover"/>
+              <a:t>Basta memoria justificativa del instalador</a:t>
+            </a:r>
+          </a:p>
+        </p:txBody>
+      </p:sp>
+      <p:sp>
+        <p:nvSpPr>
+          <p:cNvPr id="8" name="imgph" descr="IMGQ:technical standard document engineering"/>
           <p:cNvSpPr/>
           <p:nvPr/>
         </p:nvSpPr>
@@ -11356,7 +10968,7 @@
                 </a:solidFill>
                 <a:latin typeface="Montserrat"/>
               </a:rPr>
-              <a:t>buried lpg tank green cover</a:t>
+              <a:t>technical standard document engineering</a:t>
             </a:r>
           </a:p>
         </p:txBody>
@@ -11453,7 +11065,7 @@
                 </a:solidFill>
                 <a:latin typeface="Montserrat"/>
               </a:rPr>
-              <a:t>005 / 021</a:t>
+              <a:t>005 / 020</a:t>
             </a:r>
           </a:p>
         </p:txBody>
@@ -11521,7 +11133,7 @@
                 </a:solidFill>
                 <a:latin typeface="Montserrat"/>
               </a:rPr>
-              <a:t>APARTADO 2 · RECAMBIO</a:t>
+              <a:t>APARTADO 5.1 · AUTORIZACIÓN</a:t>
             </a:r>
           </a:p>
         </p:txBody>
@@ -11555,7 +11167,7 @@
                 </a:solidFill>
                 <a:latin typeface="Montserrat"/>
               </a:rPr>
-              <a:t>Cambiar por otro casi igual</a:t>
+              <a:t>¿Hace falta permiso previo?</a:t>
             </a:r>
           </a:p>
         </p:txBody>
@@ -11603,7 +11215,7 @@
                 </a:solidFill>
                 <a:latin typeface="Montserrat"/>
               </a:rPr>
-              <a:t>Depósito similar: sin proyecto nuevo</a:t>
+              <a:t>Solo si alimenta una red a terceros</a:t>
             </a:r>
           </a:p>
           <a:p>
@@ -11628,7 +11240,7 @@
                 </a:solidFill>
                 <a:latin typeface="Montserrat"/>
               </a:rPr>
-              <a:t>Diferencia de volumen ≤ ±10%</a:t>
+              <a:t>Comunidad de vecinos: no hace falta</a:t>
             </a:r>
           </a:p>
           <a:p>
@@ -11653,39 +11265,14 @@
                 </a:solidFill>
                 <a:latin typeface="Montserrat"/>
               </a:rPr>
-              <a:t>Misma categoría y distancias</a:t>
-            </a:r>
-          </a:p>
-          <a:p>
-            <a:pPr>
-              <a:spcAft>
-                <a:spcPts val="1000"/>
-              </a:spcAft>
-            </a:pPr>
-            <a:r>
-              <a:rPr sz="1600" b="1" i="0">
-                <a:solidFill>
-                  <a:srgbClr val="2E3A80"/>
-                </a:solidFill>
-                <a:latin typeface="Montserrat"/>
-              </a:rPr>
-              <a:t>•  </a:t>
-            </a:r>
-            <a:r>
-              <a:rPr sz="1600" b="0" i="0">
-                <a:solidFill>
-                  <a:srgbClr val="1B2330"/>
-                </a:solidFill>
-                <a:latin typeface="Montserrat"/>
-              </a:rPr>
-              <a:t>Basta memoria justificativa</a:t>
-            </a:r>
-          </a:p>
-        </p:txBody>
-      </p:sp>
-      <p:sp>
-        <p:nvSpPr>
-          <p:cNvPr id="8" name="imgph" descr="IMGQ:technician installing storage tank"/>
+              <a:t>Se solicita con proyecto, por duplicado</a:t>
+            </a:r>
+          </a:p>
+        </p:txBody>
+      </p:sp>
+      <p:sp>
+        <p:nvSpPr>
+          <p:cNvPr id="8" name="imgph" descr="IMGQ:residential gas pipe network street"/>
           <p:cNvSpPr/>
           <p:nvPr/>
         </p:nvSpPr>
@@ -11771,7 +11358,7 @@
                 </a:solidFill>
                 <a:latin typeface="Montserrat"/>
               </a:rPr>
-              <a:t>technician installing storage tank</a:t>
+              <a:t>residential gas pipe network street</a:t>
             </a:r>
           </a:p>
         </p:txBody>
@@ -11868,7 +11455,7 @@
                 </a:solidFill>
                 <a:latin typeface="Montserrat"/>
               </a:rPr>
-              <a:t>006 / 021</a:t>
+              <a:t>006 / 020</a:t>
             </a:r>
           </a:p>
         </p:txBody>
@@ -11936,7 +11523,7 @@
                 </a:solidFill>
                 <a:latin typeface="Montserrat"/>
               </a:rPr>
-              <a:t>APARTADO 4 · DISEÑO</a:t>
+              <a:t>APARTADO 5.2 · PROYECTO</a:t>
             </a:r>
           </a:p>
         </p:txBody>
@@ -11970,7 +11557,7 @@
                 </a:solidFill>
                 <a:latin typeface="Montserrat"/>
               </a:rPr>
-              <a:t>Quién y con qué</a:t>
+              <a:t>Los cuatro casos de proyecto</a:t>
             </a:r>
           </a:p>
         </p:txBody>
@@ -12018,7 +11605,7 @@
                 </a:solidFill>
                 <a:latin typeface="Montserrat"/>
               </a:rPr>
-              <a:t>Ejecuta empresa instaladora de gas</a:t>
+              <a:t>Capacidad mayor de 13 m³</a:t>
             </a:r>
           </a:p>
           <a:p>
@@ -12043,7 +11630,7 @@
                 </a:solidFill>
                 <a:latin typeface="Montserrat"/>
               </a:rPr>
-              <a:t>Equipos a presión: RD 769/1999</a:t>
+              <a:t>Alimenta red de distribución</a:t>
             </a:r>
           </a:p>
           <a:p>
@@ -12068,7 +11655,7 @@
                 </a:solidFill>
                 <a:latin typeface="Montserrat"/>
               </a:rPr>
-              <a:t>Dimensionar para el caudal punta</a:t>
+              <a:t>Vaporizador, trasvase o boca desplazada</a:t>
             </a:r>
           </a:p>
           <a:p>
@@ -12093,14 +11680,14 @@
                 </a:solidFill>
                 <a:latin typeface="Montserrat"/>
               </a:rPr>
-              <a:t>Todo según UNE 60250</a:t>
-            </a:r>
-          </a:p>
-        </p:txBody>
-      </p:sp>
-      <p:sp>
-        <p:nvSpPr>
-          <p:cNvPr id="8" name="imgph" descr="IMGQ:gas pressure regulator valves"/>
+              <a:t>En lugar de acceso público</a:t>
+            </a:r>
+          </a:p>
+        </p:txBody>
+      </p:sp>
+      <p:sp>
+        <p:nvSpPr>
+          <p:cNvPr id="8" name="imgph" descr="IMGQ:engineer with project plans site"/>
           <p:cNvSpPr/>
           <p:nvPr/>
         </p:nvSpPr>
@@ -12186,7 +11773,7 @@
                 </a:solidFill>
                 <a:latin typeface="Montserrat"/>
               </a:rPr>
-              <a:t>gas pressure regulator valves</a:t>
+              <a:t>engineer with project plans site</a:t>
             </a:r>
           </a:p>
         </p:txBody>
@@ -12283,7 +11870,7 @@
                 </a:solidFill>
                 <a:latin typeface="Montserrat"/>
               </a:rPr>
-              <a:t>007 / 021</a:t>
+              <a:t>007 / 020</a:t>
             </a:r>
           </a:p>
         </p:txBody>
@@ -12351,7 +11938,7 @@
                 </a:solidFill>
                 <a:latin typeface="Montserrat"/>
               </a:rPr>
-              <a:t>APARTADO 5.1 · AUTORIZACIÓN</a:t>
+              <a:t>APARTADO 5.3 · MEMORIA</a:t>
             </a:r>
           </a:p>
         </p:txBody>
@@ -12385,7 +11972,7 @@
                 </a:solidFill>
                 <a:latin typeface="Montserrat"/>
               </a:rPr>
-              <a:t>¿Permiso previo?</a:t>
+              <a:t>Memoria o proyecto: quién firma</a:t>
             </a:r>
           </a:p>
         </p:txBody>
@@ -12433,7 +12020,7 @@
                 </a:solidFill>
                 <a:latin typeface="Montserrat"/>
               </a:rPr>
-              <a:t>Sí, si alimenta una red a terceros</a:t>
+              <a:t>Instalación normal: memoria técnica</a:t>
             </a:r>
           </a:p>
           <a:p>
@@ -12458,7 +12045,7 @@
                 </a:solidFill>
                 <a:latin typeface="Montserrat"/>
               </a:rPr>
-              <a:t>No, si es una comunidad para sí</a:t>
+              <a:t>La memoria la firma el instalador</a:t>
             </a:r>
           </a:p>
           <a:p>
@@ -12483,7 +12070,7 @@
                 </a:solidFill>
                 <a:latin typeface="Montserrat"/>
               </a:rPr>
-              <a:t>Solicitud oficial por duplicado</a:t>
+              <a:t>Instalación grande: proyecto</a:t>
             </a:r>
           </a:p>
           <a:p>
@@ -12508,14 +12095,14 @@
                 </a:solidFill>
                 <a:latin typeface="Montserrat"/>
               </a:rPr>
-              <a:t>Autoriza la Comunidad Autónoma</a:t>
-            </a:r>
-          </a:p>
-        </p:txBody>
-      </p:sp>
-      <p:sp>
-        <p:nvSpPr>
-          <p:cNvPr id="8" name="imgph" descr="IMGQ:residential building courtyard tank"/>
+              <a:t>El proyecto lo firma el técnico</a:t>
+            </a:r>
+          </a:p>
+        </p:txBody>
+      </p:sp>
+      <p:sp>
+        <p:nvSpPr>
+          <p:cNvPr id="8" name="imgph" descr="IMGQ:gas installer signing paperwork"/>
           <p:cNvSpPr/>
           <p:nvPr/>
         </p:nvSpPr>
@@ -12601,7 +12188,7 @@
                 </a:solidFill>
                 <a:latin typeface="Montserrat"/>
               </a:rPr>
-              <a:t>residential building courtyard tank</a:t>
+              <a:t>gas installer signing paperwork</a:t>
             </a:r>
           </a:p>
         </p:txBody>
@@ -12698,7 +12285,7 @@
                 </a:solidFill>
                 <a:latin typeface="Montserrat"/>
               </a:rPr>
-              <a:t>008 / 021</a:t>
+              <a:t>008 / 020</a:t>
             </a:r>
           </a:p>
         </p:txBody>
@@ -12766,7 +12353,7 @@
                 </a:solidFill>
                 <a:latin typeface="Montserrat"/>
               </a:rPr>
-              <a:t>APARTADO 5.2 · PROYECTO</a:t>
+              <a:t>APARTADO 5.4 · PRUEBAS PREVIAS</a:t>
             </a:r>
           </a:p>
         </p:txBody>
@@ -12800,7 +12387,7 @@
                 </a:solidFill>
                 <a:latin typeface="Montserrat"/>
               </a:rPr>
-              <a:t>Los cuatro casos de proyecto</a:t>
+              <a:t>Dos plazos gemelos</a:t>
             </a:r>
           </a:p>
         </p:txBody>
@@ -12848,7 +12435,7 @@
                 </a:solidFill>
                 <a:latin typeface="Montserrat"/>
               </a:rPr>
-              <a:t>Capacidad &gt; 13 m³</a:t>
+              <a:t>Prueba hidrostática si hay golpe o traslado</a:t>
             </a:r>
           </a:p>
           <a:p>
@@ -12873,7 +12460,7 @@
                 </a:solidFill>
                 <a:latin typeface="Montserrat"/>
               </a:rPr>
-              <a:t>Alimenta una red de distribución</a:t>
+              <a:t>Más de 12 meses en el emplazamiento</a:t>
             </a:r>
           </a:p>
           <a:p>
@@ -12898,7 +12485,7 @@
                 </a:solidFill>
                 <a:latin typeface="Montserrat"/>
               </a:rPr>
-              <a:t>Vaporizador, trasvase o boca desplazada</a:t>
+              <a:t>Más de 24 meses desde fábrica</a:t>
             </a:r>
           </a:p>
           <a:p>
@@ -12923,14 +12510,14 @@
                 </a:solidFill>
                 <a:latin typeface="Montserrat"/>
               </a:rPr>
-              <a:t>Lugar de acceso público</a:t>
-            </a:r>
-          </a:p>
-        </p:txBody>
-      </p:sp>
-      <p:sp>
-        <p:nvSpPr>
-          <p:cNvPr id="8" name="imgph" descr="IMGQ:engineer technical drawing plans"/>
+              <a:t>Certifica un organismo de control</a:t>
+            </a:r>
+          </a:p>
+        </p:txBody>
+      </p:sp>
+      <p:sp>
+        <p:nvSpPr>
+          <p:cNvPr id="8" name="imgph" descr="IMGQ:hydrostatic pressure test tank"/>
           <p:cNvSpPr/>
           <p:nvPr/>
         </p:nvSpPr>
@@ -13016,7 +12603,7 @@
                 </a:solidFill>
                 <a:latin typeface="Montserrat"/>
               </a:rPr>
-              <a:t>engineer technical drawing plans</a:t>
+              <a:t>hydrostatic pressure test tank</a:t>
             </a:r>
           </a:p>
         </p:txBody>
@@ -13113,7 +12700,7 @@
                 </a:solidFill>
                 <a:latin typeface="Montserrat"/>
               </a:rPr>
-              <a:t>009 / 021</a:t>
+              <a:t>009 / 020</a:t>
             </a:r>
           </a:p>
         </p:txBody>
@@ -13181,7 +12768,7 @@
                 </a:solidFill>
                 <a:latin typeface="Montserrat"/>
               </a:rPr>
-              <a:t>APARTADO 5.3 · MEMORIA</a:t>
+              <a:t>APARTADO 5.5 · CERTIFICADOS</a:t>
             </a:r>
           </a:p>
         </p:txBody>
@@ -13215,7 +12802,7 @@
                 </a:solidFill>
                 <a:latin typeface="Montserrat"/>
               </a:rPr>
-              <a:t>Cuando basta memoria técnica</a:t>
+              <a:t>Tres firmas, tres papeles</a:t>
             </a:r>
           </a:p>
         </p:txBody>
@@ -13263,7 +12850,7 @@
                 </a:solidFill>
                 <a:latin typeface="Montserrat"/>
               </a:rPr>
-              <a:t>Instalación normal, sin los cuatro casos</a:t>
+              <a:t>Instalación: la empresa instaladora (triplicado)</a:t>
             </a:r>
           </a:p>
           <a:p>
@@ -13288,7 +12875,7 @@
                 </a:solidFill>
                 <a:latin typeface="Montserrat"/>
               </a:rPr>
-              <a:t>La firma el instalador o el técnico</a:t>
+              <a:t>Inspección: el organismo de control</a:t>
             </a:r>
           </a:p>
           <a:p>
@@ -13313,7 +12900,7 @@
                 </a:solidFill>
                 <a:latin typeface="Montserrat"/>
               </a:rPr>
-              <a:t>Datos, emplazamiento y autonomía</a:t>
+              <a:t>Dirección de obra: si hubo proyecto</a:t>
             </a:r>
           </a:p>
           <a:p>
@@ -13338,14 +12925,14 @@
                 </a:solidFill>
                 <a:latin typeface="Montserrat"/>
               </a:rPr>
-              <a:t>Diagrama, plano y documentación</a:t>
-            </a:r>
-          </a:p>
-        </p:txBody>
-      </p:sp>
-      <p:sp>
-        <p:nvSpPr>
-          <p:cNvPr id="8" name="imgph" descr="IMGQ:gas fitter paperwork clipboard"/>
+              <a:t>Copia al titular y a la Comunidad</a:t>
+            </a:r>
+          </a:p>
+        </p:txBody>
+      </p:sp>
+      <p:sp>
+        <p:nvSpPr>
+          <p:cNvPr id="8" name="imgph" descr="IMGQ:signed certificate documents desk"/>
           <p:cNvSpPr/>
           <p:nvPr/>
         </p:nvSpPr>
@@ -13431,7 +13018,7 @@
                 </a:solidFill>
                 <a:latin typeface="Montserrat"/>
               </a:rPr>
-              <a:t>gas fitter paperwork clipboard</a:t>
+              <a:t>signed certificate documents desk</a:t>
             </a:r>
           </a:p>
         </p:txBody>

--- a/Curso Gas B/02 - ITC-ICG 02-03-04 - Almacenamiento GLP y plantas GNL/02 - ITC-ICG 02-03-04 - Almacenamiento GLP y plantas GNL - Vídeo 3.pptx
+++ b/Curso Gas B/02 - ITC-ICG 02-03-04 - Almacenamiento GLP y plantas GNL/02 - ITC-ICG 02-03-04 - Almacenamiento GLP y plantas GNL - Vídeo 3.pptx
@@ -25,6 +25,7 @@
     <p:sldId id="273" r:id="rId25"/>
     <p:sldId id="274" r:id="rId26"/>
     <p:sldId id="275" r:id="rId27"/>
+    <p:sldId id="276" r:id="rId28"/>
   </p:sldIdLst>
   <p:sldSz cx="12191695" cy="6858000" type="screen4x3"/>
   <p:notesSz cx="6858000" cy="9144000"/>
@@ -596,12 +597,12 @@
           <a:lstStyle/>
           <a:p>
             <a:r>
-              <a:t>N1: ¿Qué llevo a la Administración y cuándo, antes de que llegue el gas?</a:t>
-            </a:r>
-          </a:p>
-          <a:p>
-            <a:r>
-              <a:t>N2: Previo a la fecha del primer llenado, presentas por duplicado ante la Comunidad Autónoma un paquete: certificado de instalación, certificado de inspección, la memoria técnica o el proyecto si no se entregó antes, el certificado de dirección de obra cuando haya proyecto, y el contrato de mantenimiento. Fíjate en un detalle que se suele olvidar: el contrato de mantenimiento ya tiene que ir firmado en este momento; un depósito fijo nace con su mantenimiento contratado, no es algo para más adelante. Y un certificado extra que solo aparece si el depósito va en una azotea: el que acredita que la cubierta aguanta el peso. La presentación te faculta para arrancar, pero no es conformidad técnica de la Administración.</a:t>
+              <a:t>N1: ¿Qué certificados se generan y quién firma cada uno?</a:t>
+            </a:r>
+          </a:p>
+          <a:p>
+            <a:r>
+              <a:t>N2: Tres papeles, cada uno con su firmante, y esto cae cruzado en examen. Primero, la empresa instaladora cumplimenta el certificado de instalación, por triplicado, con copia para el titular y para el órgano competente de la Comunidad Autónoma. Segundo, el organismo de control emite el certificado de inspección; con él, la instalación queda en disposición de servicio. Y tercero, solo si hubo proyecto, el director de obra firma el certificado de dirección de obra, que lleva como anexo el estado de la protección contra la corrosión, las actas de pruebas, la documentación de los depósitos y la justificación de que se cumplen los requisitos de seguridad. Asocia cada papel con quien lo firma: instalación, instaladora; inspección, organismo de control; dirección de obra, director de obra.</a:t>
             </a:r>
           </a:p>
         </p:txBody>
@@ -671,12 +672,12 @@
           <a:lstStyle/>
           <a:p>
             <a:r>
-              <a:t>N1: ¿Por qué un depósito no se llena hasta arriba del todo?</a:t>
-            </a:r>
-          </a:p>
-          <a:p>
-            <a:r>
-              <a:t>N2: Porque el GLP líquido se dilata cuando sube la temperatura, y necesita sitio para expandirse. Nunca se llena al cien por cien: el llamado punto alto de llenado corta la entrada de gas cuando el líquido alcanza el ochenta y cinco por ciento del volumen geométrico. Ese quince por ciento de hueco que queda arriba, la fase gaseosa, es el colchón para que, en pleno verano, el líquido tenga adónde crecer sin reventar el depósito ni disparar la válvula de seguridad. Por eso, durante el primer llenado de cada depósito, el personal comprueba la estanquidad de conexiones y valvulería, y que ese corte al ochenta y cinco por ciento actúe de verdad. El resultado se anota en el Libro de Mantenimiento. Cifra de examen segura: ochenta y cinco por ciento.</a:t>
+              <a:t>N1: ¿Qué llevo a la Administración y cuándo, antes de que llegue el gas?</a:t>
+            </a:r>
+          </a:p>
+          <a:p>
+            <a:r>
+              <a:t>N2: Previo a la fecha del primer llenado, presentas por duplicado ante la Comunidad Autónoma un paquete: certificado de instalación, certificado de inspección, la memoria técnica o el proyecto si no se entregó antes, el certificado de dirección de obra cuando haya proyecto, y el contrato de mantenimiento. Fíjate en un detalle que se suele olvidar: el contrato de mantenimiento ya tiene que ir firmado en este momento; un depósito fijo nace con su mantenimiento contratado, no es algo para más adelante. Y un certificado extra que solo aparece si el depósito va en una azotea: el que acredita que la cubierta aguanta el peso. La presentación te faculta para arrancar, pero no es conformidad técnica de la Administración.</a:t>
             </a:r>
           </a:p>
         </p:txBody>
@@ -746,12 +747,12 @@
           <a:lstStyle/>
           <a:p>
             <a:r>
-              <a:t>N1: ¿Quién cuida el depósito una vez está funcionando?</a:t>
-            </a:r>
-          </a:p>
-          <a:p>
-            <a:r>
-              <a:t>N2: El responsable es el titular o, en su defecto, los usuarios: la instalación tiene que estar permanentemente en disposición de servicio y con su nivel de seguridad. Para eso están obligados a tener un contrato de mantenimiento con una empresa instaladora que disponga de servicio de urgencias permanente, o sea, que puedas llamar a cualquier hora si hay un problema. Esa empresa conserva la instalación, hace las revisiones y se ocupa especialmente de la protección contra la corrosión. Y todo queda registrado: cada instalación tiene un Libro de Mantenimiento, o un archivo documental si la empresa tiene su sistema de calidad acreditado, donde consta cada visita, los defectos vistos, las reparaciones y las lecturas. El titular custodia ese Libro y el certificado de la última revisión.</a:t>
+              <a:t>N1: ¿Por qué un depósito no se llena hasta arriba del todo?</a:t>
+            </a:r>
+          </a:p>
+          <a:p>
+            <a:r>
+              <a:t>N2: Porque el GLP líquido se dilata cuando sube la temperatura, y necesita sitio para expandirse. Nunca se llena al cien por cien: el llamado punto alto de llenado corta la entrada de gas cuando el líquido alcanza el ochenta y cinco por ciento del volumen geométrico. Ese quince por ciento de hueco que queda arriba, la fase gaseosa, es el colchón para que, en pleno verano, el líquido tenga adónde crecer sin reventar el depósito ni disparar la válvula de seguridad. Por eso, durante el primer llenado de cada depósito, el personal comprueba la estanquidad de conexiones y valvulería, y que ese corte al ochenta y cinco por ciento actúe de verdad. El resultado se anota en el Libro de Mantenimiento. Cifra de examen segura: ochenta y cinco por ciento.</a:t>
             </a:r>
           </a:p>
         </p:txBody>
@@ -821,12 +822,12 @@
           <a:lstStyle/>
           <a:p>
             <a:r>
-              <a:t>N1: ¿Por qué hay tanto miedo a la corrosión en los depósitos enterrados?</a:t>
-            </a:r>
-          </a:p>
-          <a:p>
-            <a:r>
-              <a:t>N2: Porque un depósito bajo tierra está rodeado de suelo húmedo, y la humedad se come el hierro poco a poco hasta que fuga. Para evitarlo, los depósitos enterrados llevan protección catódica, que es un truco electroquímico para que el metal no se oxide; solo se libran si un estudio de agresividad del terreno demuestra que no hace falta. Y esa protección se vigila con dos relojes: el potencial de protección se controla cada año, pero si la protección catódica es por corriente impresa, con un equipo eléctrico alimentado, se comprueba cada tres meses. La regla: corriente impresa, más vigilancia, trimestral, porque depende de un aparato que puede fallar. Idea de fondo: enterrado igual a corrosión igual a protección catódica, salvo estudio que lo exima.</a:t>
+              <a:t>N1: ¿Quién cuida el depósito una vez está funcionando?</a:t>
+            </a:r>
+          </a:p>
+          <a:p>
+            <a:r>
+              <a:t>N2: El responsable es el titular o, en su defecto, los usuarios: la instalación tiene que estar permanentemente en disposición de servicio y con su nivel de seguridad. Para eso están obligados a tener un contrato de mantenimiento con una empresa instaladora que disponga de servicio de urgencias permanente, o sea, que puedas llamar a cualquier hora si hay un problema. Esa empresa conserva la instalación, hace las revisiones y se ocupa especialmente de la protección contra la corrosión. Y todo queda registrado: cada instalación tiene un Libro de Mantenimiento, o un archivo documental si la empresa tiene su sistema de calidad acreditado, donde consta cada visita, los defectos vistos, las reparaciones y las lecturas. El titular custodia ese Libro y el certificado de la última revisión.</a:t>
             </a:r>
           </a:p>
         </p:txBody>
@@ -896,12 +897,12 @@
           <a:lstStyle/>
           <a:p>
             <a:r>
-              <a:t>N1: ¿Cada cuánto se revisa el depósito, y de qué depende?</a:t>
-            </a:r>
-          </a:p>
-          <a:p>
-            <a:r>
-              <a:t>N2: Hay dos casos, no los mezcles. Si el depósito alimenta una red de distribución, su revisión es cada dos años. Si solo alimenta la instalación de una casa o una comunidad, la revisión se engancha a la de la instalación receptora, la de la ITC-ICG cero siete, y se hacen las dos juntas en la misma visita. Regla corta: red, dos años; casa, a la vez que la receptora. La revisión la hace la empresa instaladora que tiene el contrato de mantenimiento. Si sale favorable, emite un certificado de revisión para el titular; si sale con fallos, cumplimenta un informe de anomalías, y el titular es el responsable de subsanarlas. Y recuerda: sin acreditar la revisión en plazo y con resultado favorable, no hay suministro de GLP.</a:t>
+              <a:t>N1: ¿Por qué hay tanto miedo a la corrosión en los depósitos enterrados?</a:t>
+            </a:r>
+          </a:p>
+          <a:p>
+            <a:r>
+              <a:t>N2: Porque un depósito bajo tierra está rodeado de suelo húmedo, y la humedad se come el hierro poco a poco hasta que fuga. Para evitarlo, los depósitos enterrados llevan protección catódica, que es un truco electroquímico para que el metal no se oxide; solo se libran si un estudio de agresividad del terreno demuestra que no hace falta. Y esa protección se vigila con dos relojes: el potencial de protección se controla cada año, pero si la protección catódica es por corriente impresa, con un equipo eléctrico alimentado, se comprueba cada tres meses. La regla: corriente impresa, más vigilancia, trimestral, porque depende de un aparato que puede fallar. Idea de fondo: enterrado igual a corrosión igual a protección catódica, salvo estudio que lo exima.</a:t>
             </a:r>
           </a:p>
         </p:txBody>
@@ -971,12 +972,12 @@
           <a:lstStyle/>
           <a:p>
             <a:r>
-              <a:t>N1: Trece comprobaciones parecen muchas, ¿cómo me las aprendo?</a:t>
-            </a:r>
-          </a:p>
-          <a:p>
-            <a:r>
-              <a:t>N2: No las memorices de carrerilla; agrúpalas en tres bloques y las tienes. Los puntos uno a tres son papeleo y bomberos: el último certificado de inspección, la inspección visual y el estado del equipo contra incendios. Los puntos cuatro a nueve son el hierro: recubrimiento del depósito, tuberías y anclajes, funcionamiento de llaves, manómetros, niveles y reguladores, estado del cerramiento y los rótulos, la protección contra la corrosión y la resistencia de la toma de tierra. Y los puntos diez a trece son que no fugue: las distintas pruebas de estanquidad. La cifra fina que cae: la boca de carga desplazada y las mangueras de trasvase se prueban a tres bar durante diez minutos. Y el clásico de toda la vida: las fugas finas se cazan con agua jabonosa, porque las burbujas te delatan el escape.</a:t>
+              <a:t>N1: ¿Cada cuánto se revisa el depósito, y de qué depende?</a:t>
+            </a:r>
+          </a:p>
+          <a:p>
+            <a:r>
+              <a:t>N2: Hay dos casos, no los mezcles. Si el depósito alimenta una red de distribución, su revisión es cada dos años. Si solo alimenta la instalación de una casa o una comunidad, la revisión se engancha a la de la instalación receptora, la de la ITC-ICG cero siete, y se hacen las dos juntas en la misma visita. Regla corta: red, dos años; casa, a la vez que la receptora. La revisión la hace la empresa instaladora que tiene el contrato de mantenimiento. Si sale favorable, emite un certificado de revisión para el titular; si sale con fallos, cumplimenta un informe de anomalías, y el titular es el responsable de subsanarlas. Y recuerda: sin acreditar la revisión en plazo y con resultado favorable, no hay suministro de GLP.</a:t>
             </a:r>
           </a:p>
         </p:txBody>
@@ -1046,12 +1047,12 @@
           <a:lstStyle/>
           <a:p>
             <a:r>
-              <a:t>N1: Aparte de las revisiones, ¿hay una prueba más seria de vez en cuando?</a:t>
-            </a:r>
-          </a:p>
-          <a:p>
-            <a:r>
-              <a:t>N2: Sí, la prueba de presión, y su cita es cada quince años. La encarga el titular a un organismo de control, asistido por la empresa de mantenimiento, y se emite un acta de pruebas con resultado favorable. Hay un detalle de los depósitos de superficie que cae: no hace falta probar todo el lote de golpe; se prueba solo una muestra estadística. Y de esa muestra retén dos cosas. Una, el número se obtiene redondeando siempre hacia la unidad superior, y nunca puede bajar de ocho unidades. Y dos, es un control de calidad de los de a más fallos, más miras: si aparece una anomalía en un depósito de la muestra, se revisa el doble; si vuelve a salir otra, se revisa el lote completo. La cifra clave: quince años, y mínimo ocho unidades.</a:t>
+              <a:t>N1: Trece comprobaciones parecen muchas, ¿cómo me las aprendo?</a:t>
+            </a:r>
+          </a:p>
+          <a:p>
+            <a:r>
+              <a:t>N2: No las memorices de carrerilla; agrúpalas en tres bloques y las tienes. Los puntos uno a tres son papeleo y bomberos: el último certificado de inspección, la inspección visual y el estado del equipo contra incendios. Los puntos cuatro a nueve son el hierro: recubrimiento del depósito, tuberías y anclajes, funcionamiento de llaves, manómetros, niveles y reguladores, estado del cerramiento y los rótulos, la protección contra la corrosión y la resistencia de la toma de tierra. Y los puntos diez a trece son que no fugue: las distintas pruebas de estanquidad. La cifra fina que cae: la boca de carga desplazada y las mangueras de trasvase se prueban a tres bar durante diez minutos. Y el clásico de toda la vida: las fugas finas se cazan con agua jabonosa, porque las burbujas te delatan el escape.</a:t>
             </a:r>
           </a:p>
         </p:txBody>
@@ -1121,12 +1122,12 @@
           <a:lstStyle/>
           <a:p>
             <a:r>
-              <a:t>N1: ¿Qué es eso de la protección adicional, y qué hago mientras arreglo mi depósito?</a:t>
-            </a:r>
-          </a:p>
-          <a:p>
-            <a:r>
-              <a:t>N2: Dos cosas prácticas. La primera: un depósito enterrado normal, para la prueba de los quince años, habría que sacarlo del hoyo, que es carísimo. Los depósitos catalogados como con protección adicional se libran de desenterrarse si pasan las pruebas del fabricante; esa es la gran ventaja de ese sello. Si un día no las pasan, el titular puede sustituir el depósito, reparar la envolvente, o degradarlo a depósito normal poniéndole protección catódica. La segunda: mientras tu depósito está de pruebas o en reparación, no se deja a la gente sin gas; se pone uno provisional. Dos cifras que caen: máximo cinco metros cúbicos de volumen, y solo hasta sesenta días, prorrogables con permiso del órgano competente. Y el proyecto de legalización del provisional, solo la primera vez.</a:t>
+              <a:t>N1: Aparte de las revisiones, ¿hay una prueba más seria de vez en cuando?</a:t>
+            </a:r>
+          </a:p>
+          <a:p>
+            <a:r>
+              <a:t>N2: Sí, la prueba de presión, y su cita es cada quince años. La encarga el titular a un organismo de control, asistido por la empresa de mantenimiento, y se emite un acta de pruebas con resultado favorable. Hay un detalle de los depósitos de superficie que cae: no hace falta probar todo el lote de golpe; se prueba solo una muestra estadística. Y de esa muestra retén dos cosas. Una, el número se obtiene redondeando siempre hacia la unidad superior, y nunca puede bajar de ocho unidades. Y dos, es un control de calidad de los de a más fallos, más miras: si aparece una anomalía en un depósito de la muestra, se revisa el doble; si vuelve a salir otra, se revisa el lote completo. La cifra clave: quince años, y mínimo ocho unidades.</a:t>
             </a:r>
           </a:p>
         </p:txBody>
@@ -1196,12 +1197,12 @@
           <a:lstStyle/>
           <a:p>
             <a:r>
-              <a:t>N1: Cuando un depósito deja de usarse, ¿basta con cerrar la llave?</a:t>
-            </a:r>
-          </a:p>
-          <a:p>
-            <a:r>
-              <a:t>N2: No, ni mucho menos. Un depósito fuera de servicio nunca se abandona con restos de GLP dentro, porque seguiría siendo una bomba. Hay que vaciarlo de gas de verdad: se inertiza, es decir, se rellena de nitrógeno, un gas que no arde, o se desgasifica con agua. Lo hace una empresa instaladora, que lo certifica, y el titular entrega copia de ese certificado al órgano competente de la Comunidad Autónoma. Y ojo a las cifras del cese de actividad: se entiende que una instalación cesa si pasan dos años consecutivos sin consumo, si no hay contrato de mantenimiento, o si pasan cinco años sin el mantenimiento oportuno, salvo fuerza mayor. Esta misma filosofía del inertizado la volverás a ver en las plantas de GNL del vídeo cuatro.</a:t>
+              <a:t>N1: ¿Qué es eso de la protección adicional, y qué hago mientras arreglo mi depósito?</a:t>
+            </a:r>
+          </a:p>
+          <a:p>
+            <a:r>
+              <a:t>N2: Dos cosas prácticas. La primera: un depósito enterrado normal, para la prueba de los quince años, habría que sacarlo del hoyo, que es carísimo. Los depósitos catalogados como con protección adicional se libran de desenterrarse si pasan las pruebas del fabricante; esa es la gran ventaja de ese sello. Si un día no las pasan, el titular puede sustituir el depósito, reparar la envolvente, o degradarlo a depósito normal poniéndole protección catódica. La segunda: mientras tu depósito está de pruebas o en reparación, no se deja a la gente sin gas; se pone uno provisional. Dos cifras que caen: máximo cinco metros cúbicos de volumen, y solo hasta sesenta días, prorrogables con permiso del órgano competente. Y el proyecto de legalización del provisional, solo la primera vez.</a:t>
             </a:r>
           </a:p>
         </p:txBody>
@@ -1271,12 +1272,12 @@
           <a:lstStyle/>
           <a:p>
             <a:r>
-              <a:t>N1: Antes de cerrar, dame los imprescindibles de este vídeo tan cargado.</a:t>
-            </a:r>
-          </a:p>
-          <a:p>
-            <a:r>
-              <a:t>N2: Seis anclas y lo tienes. Una: los topes son dos mil metros cúbicos en superficie y quinientos enterrado, y hace falta proyecto por encima de trece metros cúbicos. Dos: la memoria técnica la puede firmar el instalador; el proyecto, el técnico. Tres: el primer llenado corta al ochenta y cinco por ciento, el colchón para que el líquido se dilate. Cuatro: el depósito enterrado lleva protección catódica, con control anual o trimestral si es corriente impresa. Cinco: las revisiones, cada dos años si da a una red o junto a la receptora si es de una casa. Y seis: la prueba de presión, cada quince años, con muestreo mínimo de ocho en superficie. Con esas seis tienes el esqueleto del vídeo entero.</a:t>
+              <a:t>N1: Cuando un depósito deja de usarse, ¿basta con cerrar la llave?</a:t>
+            </a:r>
+          </a:p>
+          <a:p>
+            <a:r>
+              <a:t>N2: No, ni mucho menos. Un depósito fuera de servicio nunca se abandona con restos de GLP dentro, porque seguiría siendo una bomba. Hay que vaciarlo de gas de verdad: se inertiza, es decir, se rellena de nitrógeno, un gas que no arde, o se desgasifica con agua. Lo hace una empresa instaladora, que lo certifica, y el titular entrega copia de ese certificado al órgano competente de la Comunidad Autónoma. Y ojo a las cifras del cese de actividad: se entiende que una instalación cesa si pasan dos años consecutivos sin consumo, si no hay contrato de mantenimiento, o si pasan cinco años sin el mantenimiento oportuno, salvo fuerza mayor. Esta misma filosofía del inertizado la volverás a ver en las plantas de GNL del vídeo cuatro.</a:t>
             </a:r>
           </a:p>
         </p:txBody>
@@ -1421,6 +1422,81 @@
           <a:lstStyle/>
           <a:p>
             <a:r>
+              <a:t>N1: Antes de cerrar, dame los imprescindibles de este vídeo tan cargado.</a:t>
+            </a:r>
+          </a:p>
+          <a:p>
+            <a:r>
+              <a:t>N2: Seis anclas y lo tienes. Una: los topes son dos mil metros cúbicos en superficie y quinientos enterrado, y hace falta proyecto por encima de trece metros cúbicos. Dos: la memoria técnica la puede firmar el instalador; el proyecto, el técnico. Tres: el primer llenado corta al ochenta y cinco por ciento, el colchón para que el líquido se dilate. Cuatro: el depósito enterrado lleva protección catódica, con control anual o trimestral si es corriente impresa. Cinco: las revisiones, cada dos años si da a una red o junto a la receptora si es de una casa. Y seis: la prueba de presión, cada quince años, con muestreo mínimo de ocho en superficie. Con esas seis tienes el esqueleto del vídeo entero.</a:t>
+            </a:r>
+          </a:p>
+        </p:txBody>
+      </p:sp>
+      <p:sp>
+        <p:nvSpPr>
+          <p:cNvPr id="4" name="Slide Number Placeholder 3"/>
+          <p:cNvSpPr>
+            <a:spLocks noGrp="1"/>
+          </p:cNvSpPr>
+          <p:nvPr>
+            <p:ph type="sldNum" idx="5" sz="quarter"/>
+          </p:nvPr>
+        </p:nvSpPr>
+        <p:spPr/>
+      </p:sp>
+    </p:spTree>
+  </p:cSld>
+  <p:clrMapOvr>
+    <a:masterClrMapping/>
+  </p:clrMapOvr>
+</p:notes>
+</file>
+
+<file path=ppt/notesSlides/notesSlide21.xml><?xml version="1.0" encoding="utf-8"?>
+<p:notes xmlns:a="http://schemas.openxmlformats.org/drawingml/2006/main" xmlns:p="http://schemas.openxmlformats.org/presentationml/2006/main" xmlns:r="http://schemas.openxmlformats.org/officeDocument/2006/relationships">
+  <p:cSld>
+    <p:spTree>
+      <p:nvGrpSpPr>
+        <p:cNvPr id="1" name=""/>
+        <p:cNvGrpSpPr/>
+        <p:nvPr/>
+      </p:nvGrpSpPr>
+      <p:grpSpPr>
+        <a:xfrm>
+          <a:off x="0" y="0"/>
+          <a:ext cx="0" cy="0"/>
+          <a:chOff x="0" y="0"/>
+          <a:chExt cx="0" cy="0"/>
+        </a:xfrm>
+      </p:grpSpPr>
+      <p:sp>
+        <p:nvSpPr>
+          <p:cNvPr id="2" name="Slide Image Placeholder 1"/>
+          <p:cNvSpPr>
+            <a:spLocks noGrp="1"/>
+          </p:cNvSpPr>
+          <p:nvPr>
+            <p:ph type="sldImg" idx="2"/>
+          </p:nvPr>
+        </p:nvSpPr>
+        <p:spPr/>
+      </p:sp>
+      <p:sp>
+        <p:nvSpPr>
+          <p:cNvPr id="3" name="Notes Placeholder 2"/>
+          <p:cNvSpPr>
+            <a:spLocks noGrp="1"/>
+          </p:cNvSpPr>
+          <p:nvPr>
+            <p:ph type="body" idx="3" sz="quarter"/>
+          </p:nvPr>
+        </p:nvSpPr>
+        <p:spPr/>
+        <p:txBody>
+          <a:bodyPr/>
+          <a:lstStyle/>
+          <a:p>
+            <a:r>
               <a:t>N1: Cerramos la ITC cero tres. ¿Qué me llevo de todo este mantenimiento?</a:t>
             </a:r>
           </a:p>
@@ -1504,16 +1580,7 @@
         <p:txBody>
           <a:bodyPr/>
           <a:lstStyle/>
-          <a:p>
-            <a:r>
-              <a:t>N1: ¿Qué abarca exactamente esta instrucción y dónde empieza y acaba la instalación?</a:t>
-            </a:r>
-          </a:p>
-          <a:p>
-            <a:r>
-              <a:t>N2: Regula el almacenamiento de GLP en depósitos fijos, de superficie o enterrados, que alimentan una red de distribución por canalización o una instalación receptora. La instalación va de la boca de carga, por donde el camión mete el gas, hasta las válvulas de salida, incluidas éstas. Y hay dos topes de capacidad que no se mezclan: dos mil metros cúbicos si el depósito es de superficie, y solo quinientos metros cúbicos si es enterrado. ¿Por qué el enterrado tiene un tope más bajo? Porque, si falla, es mucho más difícil de vigilar y de atacar por los bomberos, así que se le pone un límite más prudente. Depende de dónde esté el depósito: arriba dos mil, abajo quinientos.</a:t>
-            </a:r>
-          </a:p>
+          <a:p/>
         </p:txBody>
       </p:sp>
       <p:sp>
@@ -1581,12 +1648,12 @@
           <a:lstStyle/>
           <a:p>
             <a:r>
-              <a:t>N1: ¿Por qué tanto insistir en esa norma UNE?</a:t>
-            </a:r>
-          </a:p>
-          <a:p>
-            <a:r>
-              <a:t>N2: Porque aquí el Reglamento no te da las categorías por kilos como hacía en la ITC cero dos, sino que delega en la norma técnica UNE sesenta mil doscientos cincuenta. Cada vez que leas según UNE sesenta mil doscientos cincuenta, tradúcelo así: el detalle fino, la clasificación, las distancias, los ensayos, no está en la ITC, está en la norma. Para el examen te basta con saber quién manda y las pocas cifras que sí aparecen en la ITC. Y una regla muy práctica: si cambias un depósito viejo por otro casi idéntico, con diferencia de volumen no superior al diez por ciento, misma categoría y mismas distancias, no rehaces el proyecto; basta una memoria justificativa de la empresa instaladora. Es el recambio equivalente, y el diez por ciento es la cifra a retener.</a:t>
+              <a:t>N1: ¿Qué abarca exactamente esta instrucción y dónde empieza y acaba la instalación?</a:t>
+            </a:r>
+          </a:p>
+          <a:p>
+            <a:r>
+              <a:t>N2: Regula el almacenamiento de GLP en depósitos fijos, de superficie o enterrados, que alimentan una red de distribución por canalización o una instalación receptora. La instalación va de la boca de carga, por donde el camión mete el gas, hasta las válvulas de salida, incluidas éstas. Y hay dos topes de capacidad que no se mezclan: dos mil metros cúbicos si el depósito es de superficie, y solo quinientos metros cúbicos si es enterrado. ¿Por qué el enterrado tiene un tope más bajo? Porque, si falla, es mucho más difícil de vigilar y de atacar por los bomberos, así que se le pone un límite más prudente. Depende de dónde esté el depósito: arriba dos mil, abajo quinientos.</a:t>
             </a:r>
           </a:p>
         </p:txBody>
@@ -1656,12 +1723,12 @@
           <a:lstStyle/>
           <a:p>
             <a:r>
-              <a:t>N1: ¿Cuándo necesita este depósito autorización administrativa previa?</a:t>
-            </a:r>
-          </a:p>
-          <a:p>
-            <a:r>
-              <a:t>N2: Solo en un caso: cuando el depósito alimenta una red de distribución por canalización, es decir, cuando das gas a terceros a través de una red. Si el depósito es de una comunidad de vecinos para su propio consumo, sin suministrar a nadie de fuera, no hace falta autorización. Regla para no fallar: ¿doy gas a terceros por una red? Entonces autorización. ¿Solo a los míos, a mi comunidad? Entonces no. Cuando sí hace falta, se solicita presentando el proyecto y el modelo oficial, todo por duplicado, y te devuelven un ejemplar diligenciado con la fecha de entrada, que el titular conserva.</a:t>
+              <a:t>N1: ¿Por qué tanto insistir en esa norma UNE?</a:t>
+            </a:r>
+          </a:p>
+          <a:p>
+            <a:r>
+              <a:t>N2: Porque aquí el Reglamento no te da las categorías por kilos como hacía en la ITC cero dos, sino que delega en la norma técnica UNE sesenta mil doscientos cincuenta. Cada vez que leas según UNE sesenta mil doscientos cincuenta, tradúcelo así: el detalle fino, la clasificación, las distancias, los ensayos, no está en la ITC, está en la norma. Para el examen te basta con saber quién manda y las pocas cifras que sí aparecen en la ITC. Y una regla muy práctica: si cambias un depósito viejo por otro casi idéntico, con diferencia de volumen no superior al diez por ciento, misma categoría y mismas distancias, no rehaces el proyecto; basta una memoria justificativa de la empresa instaladora. Es el recambio equivalente, y el diez por ciento es la cifra a retener.</a:t>
             </a:r>
           </a:p>
         </p:txBody>
@@ -1731,12 +1798,12 @@
           <a:lstStyle/>
           <a:p>
             <a:r>
-              <a:t>N1: ¿Cuándo hace falta proyecto y cuándo me vale una memoria?</a:t>
-            </a:r>
-          </a:p>
-          <a:p>
-            <a:r>
-              <a:t>N2: Memoriza los cuatro disparadores de proyecto como una lista corta. Uno, el más preguntado: capacidad de almacenamiento superior a trece metros cúbicos. Dos: que alimente una red de distribución por canalización. Tres: que tenga vaporizador, equipo de trasvase o boca de carga a distancia enterrada, o que la instalación no discurra por terrenos de la misma propiedad. Y cuatro: que esté en un lugar de libre acceso al público. Si se da cualquiera de esos cuatro, proyecto firmado por técnico facultativo competente. Si no se da ninguno y el depósito es pequeño, basta memoria técnica. El número mágico que tienes que clavar es el de más de trece metros cúbicos.</a:t>
+              <a:t>N1: ¿Cuándo necesita este depósito autorización administrativa previa?</a:t>
+            </a:r>
+          </a:p>
+          <a:p>
+            <a:r>
+              <a:t>N2: Solo en un caso: cuando el depósito alimenta una red de distribución por canalización, es decir, cuando das gas a terceros a través de una red. Si el depósito es de una comunidad de vecinos para su propio consumo, sin suministrar a nadie de fuera, no hace falta autorización. Regla para no fallar: ¿doy gas a terceros por una red? Entonces autorización. ¿Solo a los míos, a mi comunidad? Entonces no. Cuando sí hace falta, se solicita presentando el proyecto y el modelo oficial, todo por duplicado, y te devuelven un ejemplar diligenciado con la fecha de entrada, que el titular conserva.</a:t>
             </a:r>
           </a:p>
         </p:txBody>
@@ -1806,12 +1873,12 @@
           <a:lstStyle/>
           <a:p>
             <a:r>
-              <a:t>N1: Y esto de quién firma cada papel, ¿por qué me importa a mí, con el carné de Gas B?</a:t>
-            </a:r>
-          </a:p>
-          <a:p>
-            <a:r>
-              <a:t>N2: Porque decide qué instalaciones vas a poder legalizar tú. La lógica es la misma que en el articulado del Reglamento: instalación pequeña o normal, memoria técnica, que la puede firmar el instalador con su categoría de depósitos fijos de GLP; instalación grande o compleja, proyecto, que lo firma un técnico facultativo competente, un titulado. Traducido a tu día a día: con tu carné podrás firmar la memoria técnica de un depósito fijo, pero no el proyecto. Saber distinguir memoria de proyecto es lo que decide, en la práctica, si esa instalación la legalizas tú o tiene que ir a un ingeniero.</a:t>
+              <a:t>N1: ¿Cuándo hace falta proyecto y cuándo me vale una memoria?</a:t>
+            </a:r>
+          </a:p>
+          <a:p>
+            <a:r>
+              <a:t>N2: Memoriza los cuatro disparadores de proyecto como una lista corta. Uno, el más preguntado: capacidad de almacenamiento superior a trece metros cúbicos. Dos: que alimente una red de distribución por canalización. Tres: que tenga vaporizador, equipo de trasvase o boca de carga a distancia enterrada, o que la instalación no discurra por terrenos de la misma propiedad. Y cuatro: que esté en un lugar de libre acceso al público. Si se da cualquiera de esos cuatro, proyecto firmado por técnico facultativo competente. Si no se da ninguno y el depósito es pequeño, basta memoria técnica. El número mágico que tienes que clavar es el de más de trece metros cúbicos.</a:t>
             </a:r>
           </a:p>
         </p:txBody>
@@ -1881,12 +1948,12 @@
           <a:lstStyle/>
           <a:p>
             <a:r>
-              <a:t>N1: ¿Cuándo hay que volver a probar un depósito antes de enchufarlo?</a:t>
-            </a:r>
-          </a:p>
-          <a:p>
-            <a:r>
-              <a:t>N2: Cuando ha estado esperando demasiado tiempo o ha sufrido algo. Se le hace una prueba hidrostática en el emplazamiento, certificada por un organismo de control, en varios casos: si el instalador ve algún desperfecto por las operaciones de carga y descarga, si el depósito cambia de emplazamiento, o por el paso del tiempo. Y ahí van los dos relojes gemelos: más de doce meses desde que llegó al sitio, o más de veinticuatro meses desde las pruebas de fábrica. Truco para recordarlo: un año en la parcela o dos desde fábrica, y a probar otra vez. Superadas las pruebas de la norma, la puesta en servicio conlleva una inspección inicial del organismo de control.</a:t>
+              <a:t>N1: Y esto de quién firma cada papel, ¿por qué me importa a mí, con el carné de Gas B?</a:t>
+            </a:r>
+          </a:p>
+          <a:p>
+            <a:r>
+              <a:t>N2: Porque decide qué instalaciones vas a poder legalizar tú. La lógica es la misma que en el articulado del Reglamento: instalación pequeña o normal, memoria técnica, que la puede firmar el instalador con su categoría de depósitos fijos de GLP; instalación grande o compleja, proyecto, que lo firma un técnico facultativo competente, un titulado. Traducido a tu día a día: con tu carné podrás firmar la memoria técnica de un depósito fijo, pero no el proyecto. Saber distinguir memoria de proyecto es lo que decide, en la práctica, si esa instalación la legalizas tú o tiene que ir a un ingeniero.</a:t>
             </a:r>
           </a:p>
         </p:txBody>
@@ -1956,12 +2023,12 @@
           <a:lstStyle/>
           <a:p>
             <a:r>
-              <a:t>N1: ¿Qué certificados se generan y quién firma cada uno?</a:t>
-            </a:r>
-          </a:p>
-          <a:p>
-            <a:r>
-              <a:t>N2: Tres papeles, cada uno con su firmante, y esto cae cruzado en examen. Primero, la empresa instaladora cumplimenta el certificado de instalación, por triplicado, con copia para el titular y para el órgano competente de la Comunidad Autónoma. Segundo, el organismo de control emite el certificado de inspección; con él, la instalación queda en disposición de servicio. Y tercero, solo si hubo proyecto, el director de obra firma el certificado de dirección de obra, que lleva como anexo el estado de la protección contra la corrosión, las actas de pruebas, la documentación de los depósitos y la justificación de que se cumplen los requisitos de seguridad. Asocia cada papel con quien lo firma: instalación, instaladora; inspección, organismo de control; dirección de obra, director de obra.</a:t>
+              <a:t>N1: ¿Cuándo hay que volver a probar un depósito antes de enchufarlo?</a:t>
+            </a:r>
+          </a:p>
+          <a:p>
+            <a:r>
+              <a:t>N2: Cuando ha estado esperando demasiado tiempo o ha sufrido algo. Se le hace una prueba hidrostática en el emplazamiento, certificada por un organismo de control, en varios casos: si el instalador ve algún desperfecto por las operaciones de carga y descarga, si el depósito cambia de emplazamiento, o por el paso del tiempo. Y ahí van los dos relojes gemelos: más de doce meses desde que llegó al sitio, o más de veinticuatro meses desde las pruebas de fábrica. Truco para recordarlo: un año en la parcela o dos desde fábrica, y a probar otra vez. Superadas las pruebas de la norma, la puesta en servicio conlleva una inspección inicial del organismo de control.</a:t>
             </a:r>
           </a:p>
         </p:txBody>
@@ -5036,7 +5103,7 @@
             <a:r>
               <a:rPr sz="1400" b="1" i="0">
                 <a:solidFill>
-                  <a:srgbClr val="CADCFC"/>
+                  <a:srgbClr val="F4A24C"/>
                 </a:solidFill>
                 <a:latin typeface="Montserrat"/>
               </a:rPr>
@@ -5047,13 +5114,57 @@
       </p:sp>
       <p:sp>
         <p:nvSpPr>
-          <p:cNvPr id="4" name="TextBox 3"/>
+          <p:cNvPr id="4" name="Rounded Rectangle 3"/>
+          <p:cNvSpPr/>
+          <p:nvPr/>
+        </p:nvSpPr>
+        <p:spPr>
+          <a:xfrm>
+            <a:off x="868680" y="2057400"/>
+            <a:ext cx="1463040" cy="82296"/>
+          </a:xfrm>
+          <a:prstGeom prst="roundRect">
+            <a:avLst/>
+          </a:prstGeom>
+          <a:solidFill>
+            <a:srgbClr val="E8801A"/>
+          </a:solidFill>
+          <a:ln>
+            <a:noFill/>
+          </a:ln>
+          <a:effectLst/>
+        </p:spPr>
+        <p:style>
+          <a:lnRef idx="1">
+            <a:schemeClr val="accent1"/>
+          </a:lnRef>
+          <a:fillRef idx="3">
+            <a:schemeClr val="accent1"/>
+          </a:fillRef>
+          <a:effectRef idx="2">
+            <a:schemeClr val="accent1"/>
+          </a:effectRef>
+          <a:fontRef idx="minor">
+            <a:schemeClr val="lt1"/>
+          </a:fontRef>
+        </p:style>
+        <p:txBody>
+          <a:bodyPr rtlCol="0" anchor="ctr"/>
+          <a:lstStyle/>
+          <a:p>
+            <a:pPr algn="ctr"/>
+          </a:p>
+        </p:txBody>
+      </p:sp>
+      <p:sp>
+        <p:nvSpPr>
+          <p:cNvPr id="5" name="TextBox 4"/>
           <p:cNvSpPr txBox="1"/>
           <p:nvPr/>
         </p:nvSpPr>
         <p:spPr>
           <a:xfrm>
-            <a:off x="822960" y="2194560"/>
+            <a:off x="822960" y="2286000"/>
             <a:ext cx="10515600" cy="2011680"/>
           </a:xfrm>
           <a:prstGeom prst="rect">
@@ -5092,7 +5203,7 @@
       </p:sp>
       <p:sp>
         <p:nvSpPr>
-          <p:cNvPr id="5" name="TextBox 4"/>
+          <p:cNvPr id="6" name="TextBox 5"/>
           <p:cNvSpPr txBox="1"/>
           <p:nvPr/>
         </p:nvSpPr>
@@ -5216,7 +5327,7 @@
                 </a:solidFill>
                 <a:latin typeface="Montserrat"/>
               </a:rPr>
-              <a:t>010 / 020</a:t>
+              <a:t>010 / 021</a:t>
             </a:r>
           </a:p>
         </p:txBody>
@@ -5264,7 +5375,7 @@
         <p:spPr>
           <a:xfrm>
             <a:off x="822960" y="457200"/>
-            <a:ext cx="8229600" cy="365760"/>
+            <a:ext cx="10058400" cy="365760"/>
           </a:xfrm>
           <a:prstGeom prst="rect">
             <a:avLst/>
@@ -5278,13 +5389,13 @@
           <a:lstStyle/>
           <a:p>
             <a:r>
-              <a:rPr sz="1200" b="1" i="0">
-                <a:solidFill>
-                  <a:srgbClr val="64748B"/>
-                </a:solidFill>
-                <a:latin typeface="Montserrat"/>
-              </a:rPr>
-              <a:t>APARTADO 5.6 · COMUNICACIÓN</a:t>
+              <a:rPr sz="1300" b="1" i="0">
+                <a:solidFill>
+                  <a:srgbClr val="E8801A"/>
+                </a:solidFill>
+                <a:latin typeface="Montserrat"/>
+              </a:rPr>
+              <a:t>APARTADO 5.5 · CERTIFICADOS</a:t>
             </a:r>
           </a:p>
         </p:txBody>
@@ -5312,26 +5423,70 @@
           <a:lstStyle/>
           <a:p>
             <a:r>
-              <a:rPr sz="2700" b="1" i="0">
+              <a:rPr sz="2800" b="1" i="0">
                 <a:solidFill>
                   <a:srgbClr val="1E2761"/>
                 </a:solidFill>
                 <a:latin typeface="Montserrat"/>
               </a:rPr>
-              <a:t>Antes del primer llenado</a:t>
-            </a:r>
-          </a:p>
-        </p:txBody>
-      </p:sp>
-      <p:sp>
-        <p:nvSpPr>
-          <p:cNvPr id="7" name="TextBox 6"/>
+              <a:t>Tres firmas, tres papeles</a:t>
+            </a:r>
+          </a:p>
+        </p:txBody>
+      </p:sp>
+      <p:sp>
+        <p:nvSpPr>
+          <p:cNvPr id="7" name="Rounded Rectangle 6"/>
+          <p:cNvSpPr/>
+          <p:nvPr/>
+        </p:nvSpPr>
+        <p:spPr>
+          <a:xfrm>
+            <a:off x="868680" y="1627632"/>
+            <a:ext cx="2011680" cy="73152"/>
+          </a:xfrm>
+          <a:prstGeom prst="roundRect">
+            <a:avLst/>
+          </a:prstGeom>
+          <a:solidFill>
+            <a:srgbClr val="E8801A"/>
+          </a:solidFill>
+          <a:ln>
+            <a:noFill/>
+          </a:ln>
+          <a:effectLst/>
+        </p:spPr>
+        <p:style>
+          <a:lnRef idx="1">
+            <a:schemeClr val="accent1"/>
+          </a:lnRef>
+          <a:fillRef idx="3">
+            <a:schemeClr val="accent1"/>
+          </a:fillRef>
+          <a:effectRef idx="2">
+            <a:schemeClr val="accent1"/>
+          </a:effectRef>
+          <a:fontRef idx="minor">
+            <a:schemeClr val="lt1"/>
+          </a:fontRef>
+        </p:style>
+        <p:txBody>
+          <a:bodyPr rtlCol="0" anchor="ctr"/>
+          <a:lstStyle/>
+          <a:p>
+            <a:pPr algn="ctr"/>
+          </a:p>
+        </p:txBody>
+      </p:sp>
+      <p:sp>
+        <p:nvSpPr>
+          <p:cNvPr id="8" name="TextBox 7"/>
           <p:cNvSpPr txBox="1"/>
           <p:nvPr/>
         </p:nvSpPr>
         <p:spPr>
           <a:xfrm>
-            <a:off x="822960" y="1920240"/>
+            <a:off x="822960" y="1965960"/>
             <a:ext cx="4983480" cy="4206240"/>
           </a:xfrm>
           <a:prstGeom prst="rect">
@@ -5347,17 +5502,17 @@
           <a:p>
             <a:pPr>
               <a:spcAft>
-                <a:spcPts val="1000"/>
+                <a:spcPts val="1100"/>
               </a:spcAft>
             </a:pPr>
             <a:r>
               <a:rPr sz="1600" b="1" i="0">
                 <a:solidFill>
-                  <a:srgbClr val="2E3A80"/>
-                </a:solidFill>
-                <a:latin typeface="Montserrat"/>
-              </a:rPr>
-              <a:t>•  </a:t>
+                  <a:srgbClr val="E8801A"/>
+                </a:solidFill>
+                <a:latin typeface="Montserrat"/>
+              </a:rPr>
+              <a:t>▸  </a:t>
             </a:r>
             <a:r>
               <a:rPr sz="1600" b="0" i="0">
@@ -5366,23 +5521,23 @@
                 </a:solidFill>
                 <a:latin typeface="Montserrat"/>
               </a:rPr>
-              <a:t>Se presenta por duplicado a la Comunidad</a:t>
+              <a:t>Instalación: la empresa instaladora (triplicado)</a:t>
             </a:r>
           </a:p>
           <a:p>
             <a:pPr>
               <a:spcAft>
-                <a:spcPts val="1000"/>
+                <a:spcPts val="1100"/>
               </a:spcAft>
             </a:pPr>
             <a:r>
               <a:rPr sz="1600" b="1" i="0">
                 <a:solidFill>
-                  <a:srgbClr val="2E3A80"/>
-                </a:solidFill>
-                <a:latin typeface="Montserrat"/>
-              </a:rPr>
-              <a:t>•  </a:t>
+                  <a:srgbClr val="E8801A"/>
+                </a:solidFill>
+                <a:latin typeface="Montserrat"/>
+              </a:rPr>
+              <a:t>▸  </a:t>
             </a:r>
             <a:r>
               <a:rPr sz="1600" b="0" i="0">
@@ -5391,23 +5546,23 @@
                 </a:solidFill>
                 <a:latin typeface="Montserrat"/>
               </a:rPr>
-              <a:t>Certificados de instalación e inspección</a:t>
+              <a:t>Inspección: el organismo de control</a:t>
             </a:r>
           </a:p>
           <a:p>
             <a:pPr>
               <a:spcAft>
-                <a:spcPts val="1000"/>
+                <a:spcPts val="1100"/>
               </a:spcAft>
             </a:pPr>
             <a:r>
               <a:rPr sz="1600" b="1" i="0">
                 <a:solidFill>
-                  <a:srgbClr val="2E3A80"/>
-                </a:solidFill>
-                <a:latin typeface="Montserrat"/>
-              </a:rPr>
-              <a:t>•  </a:t>
+                  <a:srgbClr val="E8801A"/>
+                </a:solidFill>
+                <a:latin typeface="Montserrat"/>
+              </a:rPr>
+              <a:t>▸  </a:t>
             </a:r>
             <a:r>
               <a:rPr sz="1600" b="0" i="0">
@@ -5416,23 +5571,23 @@
                 </a:solidFill>
                 <a:latin typeface="Montserrat"/>
               </a:rPr>
-              <a:t>Contrato de mantenimiento ya firmado</a:t>
+              <a:t>Dirección de obra: si hubo proyecto</a:t>
             </a:r>
           </a:p>
           <a:p>
             <a:pPr>
               <a:spcAft>
-                <a:spcPts val="1000"/>
+                <a:spcPts val="1100"/>
               </a:spcAft>
             </a:pPr>
             <a:r>
               <a:rPr sz="1600" b="1" i="0">
                 <a:solidFill>
-                  <a:srgbClr val="2E3A80"/>
-                </a:solidFill>
-                <a:latin typeface="Montserrat"/>
-              </a:rPr>
-              <a:t>•  </a:t>
+                  <a:srgbClr val="E8801A"/>
+                </a:solidFill>
+                <a:latin typeface="Montserrat"/>
+              </a:rPr>
+              <a:t>▸  </a:t>
             </a:r>
             <a:r>
               <a:rPr sz="1600" b="0" i="0">
@@ -5441,14 +5596,14 @@
                 </a:solidFill>
                 <a:latin typeface="Montserrat"/>
               </a:rPr>
-              <a:t>Azotea: certificado de que aguanta el peso</a:t>
-            </a:r>
-          </a:p>
-        </p:txBody>
-      </p:sp>
-      <p:sp>
-        <p:nvSpPr>
-          <p:cNvPr id="8" name="imgph" descr="IMGQ:rooftop gas tank building"/>
+              <a:t>Copia al titular y a la Comunidad</a:t>
+            </a:r>
+          </a:p>
+        </p:txBody>
+      </p:sp>
+      <p:sp>
+        <p:nvSpPr>
+          <p:cNvPr id="9" name="imgph" descr="IMGQ:signed certificate documents desk"/>
           <p:cNvSpPr/>
           <p:nvPr/>
         </p:nvSpPr>
@@ -5494,7 +5649,7 @@
       </p:sp>
       <p:sp>
         <p:nvSpPr>
-          <p:cNvPr id="9" name="TextBox 8"/>
+          <p:cNvPr id="10" name="TextBox 9"/>
           <p:cNvSpPr txBox="1"/>
           <p:nvPr/>
         </p:nvSpPr>
@@ -5534,7 +5689,7 @@
                 </a:solidFill>
                 <a:latin typeface="Montserrat"/>
               </a:rPr>
-              <a:t>rooftop gas tank building</a:t>
+              <a:t>signed certificate documents desk</a:t>
             </a:r>
           </a:p>
         </p:txBody>
@@ -5631,7 +5786,7 @@
                 </a:solidFill>
                 <a:latin typeface="Montserrat"/>
               </a:rPr>
-              <a:t>011 / 020</a:t>
+              <a:t>011 / 021</a:t>
             </a:r>
           </a:p>
         </p:txBody>
@@ -5679,7 +5834,7 @@
         <p:spPr>
           <a:xfrm>
             <a:off x="822960" y="457200"/>
-            <a:ext cx="8229600" cy="365760"/>
+            <a:ext cx="10058400" cy="365760"/>
           </a:xfrm>
           <a:prstGeom prst="rect">
             <a:avLst/>
@@ -5693,13 +5848,13 @@
           <a:lstStyle/>
           <a:p>
             <a:r>
-              <a:rPr sz="1200" b="1" i="0">
-                <a:solidFill>
-                  <a:srgbClr val="64748B"/>
-                </a:solidFill>
-                <a:latin typeface="Montserrat"/>
-              </a:rPr>
-              <a:t>APARTADO 5.6 · PRIMER LLENADO</a:t>
+              <a:rPr sz="1300" b="1" i="0">
+                <a:solidFill>
+                  <a:srgbClr val="E8801A"/>
+                </a:solidFill>
+                <a:latin typeface="Montserrat"/>
+              </a:rPr>
+              <a:t>APARTADO 5.6 · COMUNICACIÓN</a:t>
             </a:r>
           </a:p>
         </p:txBody>
@@ -5727,26 +5882,70 @@
           <a:lstStyle/>
           <a:p>
             <a:r>
-              <a:rPr sz="2700" b="1" i="0">
+              <a:rPr sz="2800" b="1" i="0">
                 <a:solidFill>
                   <a:srgbClr val="1E2761"/>
                 </a:solidFill>
                 <a:latin typeface="Montserrat"/>
               </a:rPr>
-              <a:t>El 85 %: la burbuja de seguridad</a:t>
-            </a:r>
-          </a:p>
-        </p:txBody>
-      </p:sp>
-      <p:sp>
-        <p:nvSpPr>
-          <p:cNvPr id="7" name="TextBox 6"/>
+              <a:t>Antes del primer llenado</a:t>
+            </a:r>
+          </a:p>
+        </p:txBody>
+      </p:sp>
+      <p:sp>
+        <p:nvSpPr>
+          <p:cNvPr id="7" name="Rounded Rectangle 6"/>
+          <p:cNvSpPr/>
+          <p:nvPr/>
+        </p:nvSpPr>
+        <p:spPr>
+          <a:xfrm>
+            <a:off x="868680" y="1627632"/>
+            <a:ext cx="2011680" cy="73152"/>
+          </a:xfrm>
+          <a:prstGeom prst="roundRect">
+            <a:avLst/>
+          </a:prstGeom>
+          <a:solidFill>
+            <a:srgbClr val="E8801A"/>
+          </a:solidFill>
+          <a:ln>
+            <a:noFill/>
+          </a:ln>
+          <a:effectLst/>
+        </p:spPr>
+        <p:style>
+          <a:lnRef idx="1">
+            <a:schemeClr val="accent1"/>
+          </a:lnRef>
+          <a:fillRef idx="3">
+            <a:schemeClr val="accent1"/>
+          </a:fillRef>
+          <a:effectRef idx="2">
+            <a:schemeClr val="accent1"/>
+          </a:effectRef>
+          <a:fontRef idx="minor">
+            <a:schemeClr val="lt1"/>
+          </a:fontRef>
+        </p:style>
+        <p:txBody>
+          <a:bodyPr rtlCol="0" anchor="ctr"/>
+          <a:lstStyle/>
+          <a:p>
+            <a:pPr algn="ctr"/>
+          </a:p>
+        </p:txBody>
+      </p:sp>
+      <p:sp>
+        <p:nvSpPr>
+          <p:cNvPr id="8" name="TextBox 7"/>
           <p:cNvSpPr txBox="1"/>
           <p:nvPr/>
         </p:nvSpPr>
         <p:spPr>
           <a:xfrm>
-            <a:off x="822960" y="1920240"/>
+            <a:off x="822960" y="1965960"/>
             <a:ext cx="4983480" cy="4206240"/>
           </a:xfrm>
           <a:prstGeom prst="rect">
@@ -5762,17 +5961,17 @@
           <a:p>
             <a:pPr>
               <a:spcAft>
-                <a:spcPts val="1000"/>
+                <a:spcPts val="1100"/>
               </a:spcAft>
             </a:pPr>
             <a:r>
               <a:rPr sz="1600" b="1" i="0">
                 <a:solidFill>
-                  <a:srgbClr val="2E3A80"/>
-                </a:solidFill>
-                <a:latin typeface="Montserrat"/>
-              </a:rPr>
-              <a:t>•  </a:t>
+                  <a:srgbClr val="E8801A"/>
+                </a:solidFill>
+                <a:latin typeface="Montserrat"/>
+              </a:rPr>
+              <a:t>▸  </a:t>
             </a:r>
             <a:r>
               <a:rPr sz="1600" b="0" i="0">
@@ -5781,23 +5980,23 @@
                 </a:solidFill>
                 <a:latin typeface="Montserrat"/>
               </a:rPr>
-              <a:t>Se comprueba la estanquidad</a:t>
+              <a:t>Se presenta por duplicado a la Comunidad</a:t>
             </a:r>
           </a:p>
           <a:p>
             <a:pPr>
               <a:spcAft>
-                <a:spcPts val="1000"/>
+                <a:spcPts val="1100"/>
               </a:spcAft>
             </a:pPr>
             <a:r>
               <a:rPr sz="1600" b="1" i="0">
                 <a:solidFill>
-                  <a:srgbClr val="2E3A80"/>
-                </a:solidFill>
-                <a:latin typeface="Montserrat"/>
-              </a:rPr>
-              <a:t>•  </a:t>
+                  <a:srgbClr val="E8801A"/>
+                </a:solidFill>
+                <a:latin typeface="Montserrat"/>
+              </a:rPr>
+              <a:t>▸  </a:t>
             </a:r>
             <a:r>
               <a:rPr sz="1600" b="0" i="0">
@@ -5806,23 +6005,23 @@
                 </a:solidFill>
                 <a:latin typeface="Montserrat"/>
               </a:rPr>
-              <a:t>Punto alto de llenado corta al 85 %</a:t>
+              <a:t>Certificados de instalación e inspección</a:t>
             </a:r>
           </a:p>
           <a:p>
             <a:pPr>
               <a:spcAft>
-                <a:spcPts val="1000"/>
+                <a:spcPts val="1100"/>
               </a:spcAft>
             </a:pPr>
             <a:r>
               <a:rPr sz="1600" b="1" i="0">
                 <a:solidFill>
-                  <a:srgbClr val="2E3A80"/>
-                </a:solidFill>
-                <a:latin typeface="Montserrat"/>
-              </a:rPr>
-              <a:t>•  </a:t>
+                  <a:srgbClr val="E8801A"/>
+                </a:solidFill>
+                <a:latin typeface="Montserrat"/>
+              </a:rPr>
+              <a:t>▸  </a:t>
             </a:r>
             <a:r>
               <a:rPr sz="1600" b="0" i="0">
@@ -5831,23 +6030,23 @@
                 </a:solidFill>
                 <a:latin typeface="Montserrat"/>
               </a:rPr>
-              <a:t>El 15 % de hueco es el colchón</a:t>
+              <a:t>Contrato de mantenimiento ya firmado</a:t>
             </a:r>
           </a:p>
           <a:p>
             <a:pPr>
               <a:spcAft>
-                <a:spcPts val="1000"/>
+                <a:spcPts val="1100"/>
               </a:spcAft>
             </a:pPr>
             <a:r>
               <a:rPr sz="1600" b="1" i="0">
                 <a:solidFill>
-                  <a:srgbClr val="2E3A80"/>
-                </a:solidFill>
-                <a:latin typeface="Montserrat"/>
-              </a:rPr>
-              <a:t>•  </a:t>
+                  <a:srgbClr val="E8801A"/>
+                </a:solidFill>
+                <a:latin typeface="Montserrat"/>
+              </a:rPr>
+              <a:t>▸  </a:t>
             </a:r>
             <a:r>
               <a:rPr sz="1600" b="0" i="0">
@@ -5856,14 +6055,14 @@
                 </a:solidFill>
                 <a:latin typeface="Montserrat"/>
               </a:rPr>
-              <a:t>Queda anotado en el Libro</a:t>
-            </a:r>
-          </a:p>
-        </p:txBody>
-      </p:sp>
-      <p:sp>
-        <p:nvSpPr>
-          <p:cNvPr id="8" name="imgph" descr="IMGQ:LPG tank level gauge valve"/>
+              <a:t>Azotea: certificado de que aguanta el peso</a:t>
+            </a:r>
+          </a:p>
+        </p:txBody>
+      </p:sp>
+      <p:sp>
+        <p:nvSpPr>
+          <p:cNvPr id="9" name="imgph" descr="IMGQ:rooftop gas tank building"/>
           <p:cNvSpPr/>
           <p:nvPr/>
         </p:nvSpPr>
@@ -5909,7 +6108,7 @@
       </p:sp>
       <p:sp>
         <p:nvSpPr>
-          <p:cNvPr id="9" name="TextBox 8"/>
+          <p:cNvPr id="10" name="TextBox 9"/>
           <p:cNvSpPr txBox="1"/>
           <p:nvPr/>
         </p:nvSpPr>
@@ -5949,7 +6148,7 @@
                 </a:solidFill>
                 <a:latin typeface="Montserrat"/>
               </a:rPr>
-              <a:t>LPG tank level gauge valve</a:t>
+              <a:t>rooftop gas tank building</a:t>
             </a:r>
           </a:p>
         </p:txBody>
@@ -6046,7 +6245,7 @@
                 </a:solidFill>
                 <a:latin typeface="Montserrat"/>
               </a:rPr>
-              <a:t>012 / 020</a:t>
+              <a:t>012 / 021</a:t>
             </a:r>
           </a:p>
         </p:txBody>
@@ -6094,7 +6293,7 @@
         <p:spPr>
           <a:xfrm>
             <a:off x="822960" y="457200"/>
-            <a:ext cx="8229600" cy="365760"/>
+            <a:ext cx="10058400" cy="365760"/>
           </a:xfrm>
           <a:prstGeom prst="rect">
             <a:avLst/>
@@ -6108,13 +6307,13 @@
           <a:lstStyle/>
           <a:p>
             <a:r>
-              <a:rPr sz="1200" b="1" i="0">
-                <a:solidFill>
-                  <a:srgbClr val="64748B"/>
-                </a:solidFill>
-                <a:latin typeface="Montserrat"/>
-              </a:rPr>
-              <a:t>APARTADO 6.1 · MANTENIMIENTO</a:t>
+              <a:rPr sz="1300" b="1" i="0">
+                <a:solidFill>
+                  <a:srgbClr val="E8801A"/>
+                </a:solidFill>
+                <a:latin typeface="Montserrat"/>
+              </a:rPr>
+              <a:t>APARTADO 5.6 · PRIMER LLENADO</a:t>
             </a:r>
           </a:p>
         </p:txBody>
@@ -6142,26 +6341,70 @@
           <a:lstStyle/>
           <a:p>
             <a:r>
-              <a:rPr sz="2700" b="1" i="0">
+              <a:rPr sz="2800" b="1" i="0">
                 <a:solidFill>
                   <a:srgbClr val="1E2761"/>
                 </a:solidFill>
                 <a:latin typeface="Montserrat"/>
               </a:rPr>
-              <a:t>Contrato, urgencias y Libro</a:t>
-            </a:r>
-          </a:p>
-        </p:txBody>
-      </p:sp>
-      <p:sp>
-        <p:nvSpPr>
-          <p:cNvPr id="7" name="TextBox 6"/>
+              <a:t>El 85 %: la burbuja de seguridad</a:t>
+            </a:r>
+          </a:p>
+        </p:txBody>
+      </p:sp>
+      <p:sp>
+        <p:nvSpPr>
+          <p:cNvPr id="7" name="Rounded Rectangle 6"/>
+          <p:cNvSpPr/>
+          <p:nvPr/>
+        </p:nvSpPr>
+        <p:spPr>
+          <a:xfrm>
+            <a:off x="868680" y="1627632"/>
+            <a:ext cx="2011680" cy="73152"/>
+          </a:xfrm>
+          <a:prstGeom prst="roundRect">
+            <a:avLst/>
+          </a:prstGeom>
+          <a:solidFill>
+            <a:srgbClr val="E8801A"/>
+          </a:solidFill>
+          <a:ln>
+            <a:noFill/>
+          </a:ln>
+          <a:effectLst/>
+        </p:spPr>
+        <p:style>
+          <a:lnRef idx="1">
+            <a:schemeClr val="accent1"/>
+          </a:lnRef>
+          <a:fillRef idx="3">
+            <a:schemeClr val="accent1"/>
+          </a:fillRef>
+          <a:effectRef idx="2">
+            <a:schemeClr val="accent1"/>
+          </a:effectRef>
+          <a:fontRef idx="minor">
+            <a:schemeClr val="lt1"/>
+          </a:fontRef>
+        </p:style>
+        <p:txBody>
+          <a:bodyPr rtlCol="0" anchor="ctr"/>
+          <a:lstStyle/>
+          <a:p>
+            <a:pPr algn="ctr"/>
+          </a:p>
+        </p:txBody>
+      </p:sp>
+      <p:sp>
+        <p:nvSpPr>
+          <p:cNvPr id="8" name="TextBox 7"/>
           <p:cNvSpPr txBox="1"/>
           <p:nvPr/>
         </p:nvSpPr>
         <p:spPr>
           <a:xfrm>
-            <a:off x="822960" y="1920240"/>
+            <a:off x="822960" y="1965960"/>
             <a:ext cx="4983480" cy="4206240"/>
           </a:xfrm>
           <a:prstGeom prst="rect">
@@ -6177,17 +6420,17 @@
           <a:p>
             <a:pPr>
               <a:spcAft>
-                <a:spcPts val="1000"/>
+                <a:spcPts val="1100"/>
               </a:spcAft>
             </a:pPr>
             <a:r>
               <a:rPr sz="1600" b="1" i="0">
                 <a:solidFill>
-                  <a:srgbClr val="2E3A80"/>
-                </a:solidFill>
-                <a:latin typeface="Montserrat"/>
-              </a:rPr>
-              <a:t>•  </a:t>
+                  <a:srgbClr val="E8801A"/>
+                </a:solidFill>
+                <a:latin typeface="Montserrat"/>
+              </a:rPr>
+              <a:t>▸  </a:t>
             </a:r>
             <a:r>
               <a:rPr sz="1600" b="0" i="0">
@@ -6196,23 +6439,23 @@
                 </a:solidFill>
                 <a:latin typeface="Montserrat"/>
               </a:rPr>
-              <a:t>Titular responsable de conservarlo</a:t>
+              <a:t>Se comprueba la estanquidad</a:t>
             </a:r>
           </a:p>
           <a:p>
             <a:pPr>
               <a:spcAft>
-                <a:spcPts val="1000"/>
+                <a:spcPts val="1100"/>
               </a:spcAft>
             </a:pPr>
             <a:r>
               <a:rPr sz="1600" b="1" i="0">
                 <a:solidFill>
-                  <a:srgbClr val="2E3A80"/>
-                </a:solidFill>
-                <a:latin typeface="Montserrat"/>
-              </a:rPr>
-              <a:t>•  </a:t>
+                  <a:srgbClr val="E8801A"/>
+                </a:solidFill>
+                <a:latin typeface="Montserrat"/>
+              </a:rPr>
+              <a:t>▸  </a:t>
             </a:r>
             <a:r>
               <a:rPr sz="1600" b="0" i="0">
@@ -6221,23 +6464,23 @@
                 </a:solidFill>
                 <a:latin typeface="Montserrat"/>
               </a:rPr>
-              <a:t>Contrato con instalador de urgencias 24 h</a:t>
+              <a:t>Punto alto de llenado corta al 85 %</a:t>
             </a:r>
           </a:p>
           <a:p>
             <a:pPr>
               <a:spcAft>
-                <a:spcPts val="1000"/>
+                <a:spcPts val="1100"/>
               </a:spcAft>
             </a:pPr>
             <a:r>
               <a:rPr sz="1600" b="1" i="0">
                 <a:solidFill>
-                  <a:srgbClr val="2E3A80"/>
-                </a:solidFill>
-                <a:latin typeface="Montserrat"/>
-              </a:rPr>
-              <a:t>•  </a:t>
+                  <a:srgbClr val="E8801A"/>
+                </a:solidFill>
+                <a:latin typeface="Montserrat"/>
+              </a:rPr>
+              <a:t>▸  </a:t>
             </a:r>
             <a:r>
               <a:rPr sz="1600" b="0" i="0">
@@ -6246,23 +6489,23 @@
                 </a:solidFill>
                 <a:latin typeface="Montserrat"/>
               </a:rPr>
-              <a:t>Libro de Mantenimiento o archivo</a:t>
+              <a:t>El 15 % de hueco es el colchón</a:t>
             </a:r>
           </a:p>
           <a:p>
             <a:pPr>
               <a:spcAft>
-                <a:spcPts val="1000"/>
+                <a:spcPts val="1100"/>
               </a:spcAft>
             </a:pPr>
             <a:r>
               <a:rPr sz="1600" b="1" i="0">
                 <a:solidFill>
-                  <a:srgbClr val="2E3A80"/>
-                </a:solidFill>
-                <a:latin typeface="Montserrat"/>
-              </a:rPr>
-              <a:t>•  </a:t>
+                  <a:srgbClr val="E8801A"/>
+                </a:solidFill>
+                <a:latin typeface="Montserrat"/>
+              </a:rPr>
+              <a:t>▸  </a:t>
             </a:r>
             <a:r>
               <a:rPr sz="1600" b="0" i="0">
@@ -6271,14 +6514,14 @@
                 </a:solidFill>
                 <a:latin typeface="Montserrat"/>
               </a:rPr>
-              <a:t>Consta cada visita y sus lecturas</a:t>
-            </a:r>
-          </a:p>
-        </p:txBody>
-      </p:sp>
-      <p:sp>
-        <p:nvSpPr>
-          <p:cNvPr id="8" name="imgph" descr="IMGQ:maintenance logbook technician gas"/>
+              <a:t>Queda anotado en el Libro</a:t>
+            </a:r>
+          </a:p>
+        </p:txBody>
+      </p:sp>
+      <p:sp>
+        <p:nvSpPr>
+          <p:cNvPr id="9" name="imgph" descr="IMGQ:LPG tank level gauge valve"/>
           <p:cNvSpPr/>
           <p:nvPr/>
         </p:nvSpPr>
@@ -6324,7 +6567,7 @@
       </p:sp>
       <p:sp>
         <p:nvSpPr>
-          <p:cNvPr id="9" name="TextBox 8"/>
+          <p:cNvPr id="10" name="TextBox 9"/>
           <p:cNvSpPr txBox="1"/>
           <p:nvPr/>
         </p:nvSpPr>
@@ -6364,7 +6607,7 @@
                 </a:solidFill>
                 <a:latin typeface="Montserrat"/>
               </a:rPr>
-              <a:t>maintenance logbook technician gas</a:t>
+              <a:t>LPG tank level gauge valve</a:t>
             </a:r>
           </a:p>
         </p:txBody>
@@ -6461,7 +6704,7 @@
                 </a:solidFill>
                 <a:latin typeface="Montserrat"/>
               </a:rPr>
-              <a:t>013 / 020</a:t>
+              <a:t>013 / 021</a:t>
             </a:r>
           </a:p>
         </p:txBody>
@@ -6509,7 +6752,7 @@
         <p:spPr>
           <a:xfrm>
             <a:off x="822960" y="457200"/>
-            <a:ext cx="8229600" cy="365760"/>
+            <a:ext cx="10058400" cy="365760"/>
           </a:xfrm>
           <a:prstGeom prst="rect">
             <a:avLst/>
@@ -6523,13 +6766,13 @@
           <a:lstStyle/>
           <a:p>
             <a:r>
-              <a:rPr sz="1200" b="1" i="0">
-                <a:solidFill>
-                  <a:srgbClr val="64748B"/>
-                </a:solidFill>
-                <a:latin typeface="Montserrat"/>
-              </a:rPr>
-              <a:t>APARTADO 6.4 · CORROSIÓN</a:t>
+              <a:rPr sz="1300" b="1" i="0">
+                <a:solidFill>
+                  <a:srgbClr val="E8801A"/>
+                </a:solidFill>
+                <a:latin typeface="Montserrat"/>
+              </a:rPr>
+              <a:t>APARTADO 6.1 · MANTENIMIENTO</a:t>
             </a:r>
           </a:p>
         </p:txBody>
@@ -6557,26 +6800,70 @@
           <a:lstStyle/>
           <a:p>
             <a:r>
-              <a:rPr sz="2700" b="1" i="0">
+              <a:rPr sz="2800" b="1" i="0">
                 <a:solidFill>
                   <a:srgbClr val="1E2761"/>
                 </a:solidFill>
                 <a:latin typeface="Montserrat"/>
               </a:rPr>
-              <a:t>El enemigo silencioso del enterrado</a:t>
-            </a:r>
-          </a:p>
-        </p:txBody>
-      </p:sp>
-      <p:sp>
-        <p:nvSpPr>
-          <p:cNvPr id="7" name="TextBox 6"/>
+              <a:t>Contrato, urgencias y Libro</a:t>
+            </a:r>
+          </a:p>
+        </p:txBody>
+      </p:sp>
+      <p:sp>
+        <p:nvSpPr>
+          <p:cNvPr id="7" name="Rounded Rectangle 6"/>
+          <p:cNvSpPr/>
+          <p:nvPr/>
+        </p:nvSpPr>
+        <p:spPr>
+          <a:xfrm>
+            <a:off x="868680" y="1627632"/>
+            <a:ext cx="2011680" cy="73152"/>
+          </a:xfrm>
+          <a:prstGeom prst="roundRect">
+            <a:avLst/>
+          </a:prstGeom>
+          <a:solidFill>
+            <a:srgbClr val="E8801A"/>
+          </a:solidFill>
+          <a:ln>
+            <a:noFill/>
+          </a:ln>
+          <a:effectLst/>
+        </p:spPr>
+        <p:style>
+          <a:lnRef idx="1">
+            <a:schemeClr val="accent1"/>
+          </a:lnRef>
+          <a:fillRef idx="3">
+            <a:schemeClr val="accent1"/>
+          </a:fillRef>
+          <a:effectRef idx="2">
+            <a:schemeClr val="accent1"/>
+          </a:effectRef>
+          <a:fontRef idx="minor">
+            <a:schemeClr val="lt1"/>
+          </a:fontRef>
+        </p:style>
+        <p:txBody>
+          <a:bodyPr rtlCol="0" anchor="ctr"/>
+          <a:lstStyle/>
+          <a:p>
+            <a:pPr algn="ctr"/>
+          </a:p>
+        </p:txBody>
+      </p:sp>
+      <p:sp>
+        <p:nvSpPr>
+          <p:cNvPr id="8" name="TextBox 7"/>
           <p:cNvSpPr txBox="1"/>
           <p:nvPr/>
         </p:nvSpPr>
         <p:spPr>
           <a:xfrm>
-            <a:off x="822960" y="1920240"/>
+            <a:off x="822960" y="1965960"/>
             <a:ext cx="4983480" cy="4206240"/>
           </a:xfrm>
           <a:prstGeom prst="rect">
@@ -6592,17 +6879,17 @@
           <a:p>
             <a:pPr>
               <a:spcAft>
-                <a:spcPts val="1000"/>
+                <a:spcPts val="1100"/>
               </a:spcAft>
             </a:pPr>
             <a:r>
               <a:rPr sz="1600" b="1" i="0">
                 <a:solidFill>
-                  <a:srgbClr val="2E3A80"/>
-                </a:solidFill>
-                <a:latin typeface="Montserrat"/>
-              </a:rPr>
-              <a:t>•  </a:t>
+                  <a:srgbClr val="E8801A"/>
+                </a:solidFill>
+                <a:latin typeface="Montserrat"/>
+              </a:rPr>
+              <a:t>▸  </a:t>
             </a:r>
             <a:r>
               <a:rPr sz="1600" b="0" i="0">
@@ -6611,23 +6898,23 @@
                 </a:solidFill>
                 <a:latin typeface="Montserrat"/>
               </a:rPr>
-              <a:t>Enterrado: protección catódica</a:t>
+              <a:t>Titular responsable de conservarlo</a:t>
             </a:r>
           </a:p>
           <a:p>
             <a:pPr>
               <a:spcAft>
-                <a:spcPts val="1000"/>
+                <a:spcPts val="1100"/>
               </a:spcAft>
             </a:pPr>
             <a:r>
               <a:rPr sz="1600" b="1" i="0">
                 <a:solidFill>
-                  <a:srgbClr val="2E3A80"/>
-                </a:solidFill>
-                <a:latin typeface="Montserrat"/>
-              </a:rPr>
-              <a:t>•  </a:t>
+                  <a:srgbClr val="E8801A"/>
+                </a:solidFill>
+                <a:latin typeface="Montserrat"/>
+              </a:rPr>
+              <a:t>▸  </a:t>
             </a:r>
             <a:r>
               <a:rPr sz="1600" b="0" i="0">
@@ -6636,23 +6923,23 @@
                 </a:solidFill>
                 <a:latin typeface="Montserrat"/>
               </a:rPr>
-              <a:t>Salvo estudio de terreno que la exima</a:t>
+              <a:t>Contrato con instalador de urgencias 24 h</a:t>
             </a:r>
           </a:p>
           <a:p>
             <a:pPr>
               <a:spcAft>
-                <a:spcPts val="1000"/>
+                <a:spcPts val="1100"/>
               </a:spcAft>
             </a:pPr>
             <a:r>
               <a:rPr sz="1600" b="1" i="0">
                 <a:solidFill>
-                  <a:srgbClr val="2E3A80"/>
-                </a:solidFill>
-                <a:latin typeface="Montserrat"/>
-              </a:rPr>
-              <a:t>•  </a:t>
+                  <a:srgbClr val="E8801A"/>
+                </a:solidFill>
+                <a:latin typeface="Montserrat"/>
+              </a:rPr>
+              <a:t>▸  </a:t>
             </a:r>
             <a:r>
               <a:rPr sz="1600" b="0" i="0">
@@ -6661,23 +6948,23 @@
                 </a:solidFill>
                 <a:latin typeface="Montserrat"/>
               </a:rPr>
-              <a:t>Control del potencial: cada año</a:t>
+              <a:t>Libro de Mantenimiento o archivo</a:t>
             </a:r>
           </a:p>
           <a:p>
             <a:pPr>
               <a:spcAft>
-                <a:spcPts val="1000"/>
+                <a:spcPts val="1100"/>
               </a:spcAft>
             </a:pPr>
             <a:r>
               <a:rPr sz="1600" b="1" i="0">
                 <a:solidFill>
-                  <a:srgbClr val="2E3A80"/>
-                </a:solidFill>
-                <a:latin typeface="Montserrat"/>
-              </a:rPr>
-              <a:t>•  </a:t>
+                  <a:srgbClr val="E8801A"/>
+                </a:solidFill>
+                <a:latin typeface="Montserrat"/>
+              </a:rPr>
+              <a:t>▸  </a:t>
             </a:r>
             <a:r>
               <a:rPr sz="1600" b="0" i="0">
@@ -6686,14 +6973,14 @@
                 </a:solidFill>
                 <a:latin typeface="Montserrat"/>
               </a:rPr>
-              <a:t>Corriente impresa: cada 3 meses</a:t>
-            </a:r>
-          </a:p>
-        </p:txBody>
-      </p:sp>
-      <p:sp>
-        <p:nvSpPr>
-          <p:cNvPr id="8" name="imgph" descr="IMGQ:buried metal tank corrosion protection"/>
+              <a:t>Consta cada visita y sus lecturas</a:t>
+            </a:r>
+          </a:p>
+        </p:txBody>
+      </p:sp>
+      <p:sp>
+        <p:nvSpPr>
+          <p:cNvPr id="9" name="imgph" descr="IMGQ:maintenance logbook technician gas"/>
           <p:cNvSpPr/>
           <p:nvPr/>
         </p:nvSpPr>
@@ -6739,7 +7026,7 @@
       </p:sp>
       <p:sp>
         <p:nvSpPr>
-          <p:cNvPr id="9" name="TextBox 8"/>
+          <p:cNvPr id="10" name="TextBox 9"/>
           <p:cNvSpPr txBox="1"/>
           <p:nvPr/>
         </p:nvSpPr>
@@ -6779,7 +7066,7 @@
                 </a:solidFill>
                 <a:latin typeface="Montserrat"/>
               </a:rPr>
-              <a:t>buried metal tank corrosion protection</a:t>
+              <a:t>maintenance logbook technician gas</a:t>
             </a:r>
           </a:p>
         </p:txBody>
@@ -6876,7 +7163,7 @@
                 </a:solidFill>
                 <a:latin typeface="Montserrat"/>
               </a:rPr>
-              <a:t>014 / 020</a:t>
+              <a:t>014 / 021</a:t>
             </a:r>
           </a:p>
         </p:txBody>
@@ -6924,7 +7211,7 @@
         <p:spPr>
           <a:xfrm>
             <a:off x="822960" y="457200"/>
-            <a:ext cx="8229600" cy="365760"/>
+            <a:ext cx="10058400" cy="365760"/>
           </a:xfrm>
           <a:prstGeom prst="rect">
             <a:avLst/>
@@ -6938,13 +7225,13 @@
           <a:lstStyle/>
           <a:p>
             <a:r>
-              <a:rPr sz="1200" b="1" i="0">
-                <a:solidFill>
-                  <a:srgbClr val="64748B"/>
-                </a:solidFill>
-                <a:latin typeface="Montserrat"/>
-              </a:rPr>
-              <a:t>APARTADO 6.2 · REVISIONES</a:t>
+              <a:rPr sz="1300" b="1" i="0">
+                <a:solidFill>
+                  <a:srgbClr val="E8801A"/>
+                </a:solidFill>
+                <a:latin typeface="Montserrat"/>
+              </a:rPr>
+              <a:t>APARTADO 6.4 · CORROSIÓN</a:t>
             </a:r>
           </a:p>
         </p:txBody>
@@ -6972,26 +7259,70 @@
           <a:lstStyle/>
           <a:p>
             <a:r>
-              <a:rPr sz="2700" b="1" i="0">
+              <a:rPr sz="2800" b="1" i="0">
                 <a:solidFill>
                   <a:srgbClr val="1E2761"/>
                 </a:solidFill>
                 <a:latin typeface="Montserrat"/>
               </a:rPr>
-              <a:t>Cada 2 años o con la receptora</a:t>
-            </a:r>
-          </a:p>
-        </p:txBody>
-      </p:sp>
-      <p:sp>
-        <p:nvSpPr>
-          <p:cNvPr id="7" name="TextBox 6"/>
+              <a:t>El enemigo silencioso del enterrado</a:t>
+            </a:r>
+          </a:p>
+        </p:txBody>
+      </p:sp>
+      <p:sp>
+        <p:nvSpPr>
+          <p:cNvPr id="7" name="Rounded Rectangle 6"/>
+          <p:cNvSpPr/>
+          <p:nvPr/>
+        </p:nvSpPr>
+        <p:spPr>
+          <a:xfrm>
+            <a:off x="868680" y="1627632"/>
+            <a:ext cx="2011680" cy="73152"/>
+          </a:xfrm>
+          <a:prstGeom prst="roundRect">
+            <a:avLst/>
+          </a:prstGeom>
+          <a:solidFill>
+            <a:srgbClr val="E8801A"/>
+          </a:solidFill>
+          <a:ln>
+            <a:noFill/>
+          </a:ln>
+          <a:effectLst/>
+        </p:spPr>
+        <p:style>
+          <a:lnRef idx="1">
+            <a:schemeClr val="accent1"/>
+          </a:lnRef>
+          <a:fillRef idx="3">
+            <a:schemeClr val="accent1"/>
+          </a:fillRef>
+          <a:effectRef idx="2">
+            <a:schemeClr val="accent1"/>
+          </a:effectRef>
+          <a:fontRef idx="minor">
+            <a:schemeClr val="lt1"/>
+          </a:fontRef>
+        </p:style>
+        <p:txBody>
+          <a:bodyPr rtlCol="0" anchor="ctr"/>
+          <a:lstStyle/>
+          <a:p>
+            <a:pPr algn="ctr"/>
+          </a:p>
+        </p:txBody>
+      </p:sp>
+      <p:sp>
+        <p:nvSpPr>
+          <p:cNvPr id="8" name="TextBox 7"/>
           <p:cNvSpPr txBox="1"/>
           <p:nvPr/>
         </p:nvSpPr>
         <p:spPr>
           <a:xfrm>
-            <a:off x="822960" y="1920240"/>
+            <a:off x="822960" y="1965960"/>
             <a:ext cx="4983480" cy="4206240"/>
           </a:xfrm>
           <a:prstGeom prst="rect">
@@ -7007,17 +7338,17 @@
           <a:p>
             <a:pPr>
               <a:spcAft>
-                <a:spcPts val="1000"/>
+                <a:spcPts val="1100"/>
               </a:spcAft>
             </a:pPr>
             <a:r>
               <a:rPr sz="1600" b="1" i="0">
                 <a:solidFill>
-                  <a:srgbClr val="2E3A80"/>
-                </a:solidFill>
-                <a:latin typeface="Montserrat"/>
-              </a:rPr>
-              <a:t>•  </a:t>
+                  <a:srgbClr val="E8801A"/>
+                </a:solidFill>
+                <a:latin typeface="Montserrat"/>
+              </a:rPr>
+              <a:t>▸  </a:t>
             </a:r>
             <a:r>
               <a:rPr sz="1600" b="0" i="0">
@@ -7026,23 +7357,23 @@
                 </a:solidFill>
                 <a:latin typeface="Montserrat"/>
               </a:rPr>
-              <a:t>Alimenta una red: cada 2 años</a:t>
+              <a:t>Enterrado: protección catódica</a:t>
             </a:r>
           </a:p>
           <a:p>
             <a:pPr>
               <a:spcAft>
-                <a:spcPts val="1000"/>
+                <a:spcPts val="1100"/>
               </a:spcAft>
             </a:pPr>
             <a:r>
               <a:rPr sz="1600" b="1" i="0">
                 <a:solidFill>
-                  <a:srgbClr val="2E3A80"/>
-                </a:solidFill>
-                <a:latin typeface="Montserrat"/>
-              </a:rPr>
-              <a:t>•  </a:t>
+                  <a:srgbClr val="E8801A"/>
+                </a:solidFill>
+                <a:latin typeface="Montserrat"/>
+              </a:rPr>
+              <a:t>▸  </a:t>
             </a:r>
             <a:r>
               <a:rPr sz="1600" b="0" i="0">
@@ -7051,23 +7382,23 @@
                 </a:solidFill>
                 <a:latin typeface="Montserrat"/>
               </a:rPr>
-              <a:t>Resto: a la vez que la receptora</a:t>
+              <a:t>Salvo estudio de terreno que la exima</a:t>
             </a:r>
           </a:p>
           <a:p>
             <a:pPr>
               <a:spcAft>
-                <a:spcPts val="1000"/>
+                <a:spcPts val="1100"/>
               </a:spcAft>
             </a:pPr>
             <a:r>
               <a:rPr sz="1600" b="1" i="0">
                 <a:solidFill>
-                  <a:srgbClr val="2E3A80"/>
-                </a:solidFill>
-                <a:latin typeface="Montserrat"/>
-              </a:rPr>
-              <a:t>•  </a:t>
+                  <a:srgbClr val="E8801A"/>
+                </a:solidFill>
+                <a:latin typeface="Montserrat"/>
+              </a:rPr>
+              <a:t>▸  </a:t>
             </a:r>
             <a:r>
               <a:rPr sz="1600" b="0" i="0">
@@ -7076,23 +7407,23 @@
                 </a:solidFill>
                 <a:latin typeface="Montserrat"/>
               </a:rPr>
-              <a:t>Favorable: certificado de revisión</a:t>
+              <a:t>Control del potencial: cada año</a:t>
             </a:r>
           </a:p>
           <a:p>
             <a:pPr>
               <a:spcAft>
-                <a:spcPts val="1000"/>
+                <a:spcPts val="1100"/>
               </a:spcAft>
             </a:pPr>
             <a:r>
               <a:rPr sz="1600" b="1" i="0">
                 <a:solidFill>
-                  <a:srgbClr val="2E3A80"/>
-                </a:solidFill>
-                <a:latin typeface="Montserrat"/>
-              </a:rPr>
-              <a:t>•  </a:t>
+                  <a:srgbClr val="E8801A"/>
+                </a:solidFill>
+                <a:latin typeface="Montserrat"/>
+              </a:rPr>
+              <a:t>▸  </a:t>
             </a:r>
             <a:r>
               <a:rPr sz="1600" b="0" i="0">
@@ -7101,14 +7432,14 @@
                 </a:solidFill>
                 <a:latin typeface="Montserrat"/>
               </a:rPr>
-              <a:t>Con fallos: informe de anomalías</a:t>
-            </a:r>
-          </a:p>
-        </p:txBody>
-      </p:sp>
-      <p:sp>
-        <p:nvSpPr>
-          <p:cNvPr id="8" name="imgph" descr="IMGQ:technician inspecting gas tank valves"/>
+              <a:t>Corriente impresa: cada 3 meses</a:t>
+            </a:r>
+          </a:p>
+        </p:txBody>
+      </p:sp>
+      <p:sp>
+        <p:nvSpPr>
+          <p:cNvPr id="9" name="imgph" descr="IMGQ:buried metal tank corrosion protection"/>
           <p:cNvSpPr/>
           <p:nvPr/>
         </p:nvSpPr>
@@ -7154,7 +7485,7 @@
       </p:sp>
       <p:sp>
         <p:nvSpPr>
-          <p:cNvPr id="9" name="TextBox 8"/>
+          <p:cNvPr id="10" name="TextBox 9"/>
           <p:cNvSpPr txBox="1"/>
           <p:nvPr/>
         </p:nvSpPr>
@@ -7194,7 +7525,7 @@
                 </a:solidFill>
                 <a:latin typeface="Montserrat"/>
               </a:rPr>
-              <a:t>technician inspecting gas tank valves</a:t>
+              <a:t>buried metal tank corrosion protection</a:t>
             </a:r>
           </a:p>
         </p:txBody>
@@ -7291,7 +7622,7 @@
                 </a:solidFill>
                 <a:latin typeface="Montserrat"/>
               </a:rPr>
-              <a:t>015 / 020</a:t>
+              <a:t>015 / 021</a:t>
             </a:r>
           </a:p>
         </p:txBody>
@@ -7339,7 +7670,7 @@
         <p:spPr>
           <a:xfrm>
             <a:off x="822960" y="457200"/>
-            <a:ext cx="8229600" cy="365760"/>
+            <a:ext cx="10058400" cy="365760"/>
           </a:xfrm>
           <a:prstGeom prst="rect">
             <a:avLst/>
@@ -7353,13 +7684,13 @@
           <a:lstStyle/>
           <a:p>
             <a:r>
-              <a:rPr sz="1200" b="1" i="0">
-                <a:solidFill>
-                  <a:srgbClr val="64748B"/>
-                </a:solidFill>
-                <a:latin typeface="Montserrat"/>
-              </a:rPr>
-              <a:t>APARTADO 6.2.1 · COMPROBACIONES</a:t>
+              <a:rPr sz="1300" b="1" i="0">
+                <a:solidFill>
+                  <a:srgbClr val="E8801A"/>
+                </a:solidFill>
+                <a:latin typeface="Montserrat"/>
+              </a:rPr>
+              <a:t>APARTADO 6.2 · REVISIONES</a:t>
             </a:r>
           </a:p>
         </p:txBody>
@@ -7387,26 +7718,70 @@
           <a:lstStyle/>
           <a:p>
             <a:r>
-              <a:rPr sz="2700" b="1" i="0">
+              <a:rPr sz="2800" b="1" i="0">
                 <a:solidFill>
                   <a:srgbClr val="1E2761"/>
                 </a:solidFill>
                 <a:latin typeface="Montserrat"/>
               </a:rPr>
-              <a:t>Las 13 comprobaciones, agrupadas</a:t>
-            </a:r>
-          </a:p>
-        </p:txBody>
-      </p:sp>
-      <p:sp>
-        <p:nvSpPr>
-          <p:cNvPr id="7" name="TextBox 6"/>
+              <a:t>Cada 2 años o con la receptora</a:t>
+            </a:r>
+          </a:p>
+        </p:txBody>
+      </p:sp>
+      <p:sp>
+        <p:nvSpPr>
+          <p:cNvPr id="7" name="Rounded Rectangle 6"/>
+          <p:cNvSpPr/>
+          <p:nvPr/>
+        </p:nvSpPr>
+        <p:spPr>
+          <a:xfrm>
+            <a:off x="868680" y="1627632"/>
+            <a:ext cx="2011680" cy="73152"/>
+          </a:xfrm>
+          <a:prstGeom prst="roundRect">
+            <a:avLst/>
+          </a:prstGeom>
+          <a:solidFill>
+            <a:srgbClr val="E8801A"/>
+          </a:solidFill>
+          <a:ln>
+            <a:noFill/>
+          </a:ln>
+          <a:effectLst/>
+        </p:spPr>
+        <p:style>
+          <a:lnRef idx="1">
+            <a:schemeClr val="accent1"/>
+          </a:lnRef>
+          <a:fillRef idx="3">
+            <a:schemeClr val="accent1"/>
+          </a:fillRef>
+          <a:effectRef idx="2">
+            <a:schemeClr val="accent1"/>
+          </a:effectRef>
+          <a:fontRef idx="minor">
+            <a:schemeClr val="lt1"/>
+          </a:fontRef>
+        </p:style>
+        <p:txBody>
+          <a:bodyPr rtlCol="0" anchor="ctr"/>
+          <a:lstStyle/>
+          <a:p>
+            <a:pPr algn="ctr"/>
+          </a:p>
+        </p:txBody>
+      </p:sp>
+      <p:sp>
+        <p:nvSpPr>
+          <p:cNvPr id="8" name="TextBox 7"/>
           <p:cNvSpPr txBox="1"/>
           <p:nvPr/>
         </p:nvSpPr>
         <p:spPr>
           <a:xfrm>
-            <a:off x="822960" y="1920240"/>
+            <a:off x="822960" y="1965960"/>
             <a:ext cx="4983480" cy="4206240"/>
           </a:xfrm>
           <a:prstGeom prst="rect">
@@ -7422,17 +7797,17 @@
           <a:p>
             <a:pPr>
               <a:spcAft>
-                <a:spcPts val="1000"/>
+                <a:spcPts val="1100"/>
               </a:spcAft>
             </a:pPr>
             <a:r>
               <a:rPr sz="1600" b="1" i="0">
                 <a:solidFill>
-                  <a:srgbClr val="2E3A80"/>
-                </a:solidFill>
-                <a:latin typeface="Montserrat"/>
-              </a:rPr>
-              <a:t>•  </a:t>
+                  <a:srgbClr val="E8801A"/>
+                </a:solidFill>
+                <a:latin typeface="Montserrat"/>
+              </a:rPr>
+              <a:t>▸  </a:t>
             </a:r>
             <a:r>
               <a:rPr sz="1600" b="0" i="0">
@@ -7441,23 +7816,23 @@
                 </a:solidFill>
                 <a:latin typeface="Montserrat"/>
               </a:rPr>
-              <a:t>1 a 3: papeles y bomberos</a:t>
+              <a:t>Alimenta una red: cada 2 años</a:t>
             </a:r>
           </a:p>
           <a:p>
             <a:pPr>
               <a:spcAft>
-                <a:spcPts val="1000"/>
+                <a:spcPts val="1100"/>
               </a:spcAft>
             </a:pPr>
             <a:r>
               <a:rPr sz="1600" b="1" i="0">
                 <a:solidFill>
-                  <a:srgbClr val="2E3A80"/>
-                </a:solidFill>
-                <a:latin typeface="Montserrat"/>
-              </a:rPr>
-              <a:t>•  </a:t>
+                  <a:srgbClr val="E8801A"/>
+                </a:solidFill>
+                <a:latin typeface="Montserrat"/>
+              </a:rPr>
+              <a:t>▸  </a:t>
             </a:r>
             <a:r>
               <a:rPr sz="1600" b="0" i="0">
@@ -7466,23 +7841,23 @@
                 </a:solidFill>
                 <a:latin typeface="Montserrat"/>
               </a:rPr>
-              <a:t>4 a 9: el hierro (válvulas, corrosión, tierra)</a:t>
+              <a:t>Resto: a la vez que la receptora</a:t>
             </a:r>
           </a:p>
           <a:p>
             <a:pPr>
               <a:spcAft>
-                <a:spcPts val="1000"/>
+                <a:spcPts val="1100"/>
               </a:spcAft>
             </a:pPr>
             <a:r>
               <a:rPr sz="1600" b="1" i="0">
                 <a:solidFill>
-                  <a:srgbClr val="2E3A80"/>
-                </a:solidFill>
-                <a:latin typeface="Montserrat"/>
-              </a:rPr>
-              <a:t>•  </a:t>
+                  <a:srgbClr val="E8801A"/>
+                </a:solidFill>
+                <a:latin typeface="Montserrat"/>
+              </a:rPr>
+              <a:t>▸  </a:t>
             </a:r>
             <a:r>
               <a:rPr sz="1600" b="0" i="0">
@@ -7491,23 +7866,23 @@
                 </a:solidFill>
                 <a:latin typeface="Montserrat"/>
               </a:rPr>
-              <a:t>10 a 13: que no fugue</a:t>
+              <a:t>Favorable: certificado de revisión</a:t>
             </a:r>
           </a:p>
           <a:p>
             <a:pPr>
               <a:spcAft>
-                <a:spcPts val="1000"/>
+                <a:spcPts val="1100"/>
               </a:spcAft>
             </a:pPr>
             <a:r>
               <a:rPr sz="1600" b="1" i="0">
                 <a:solidFill>
-                  <a:srgbClr val="2E3A80"/>
-                </a:solidFill>
-                <a:latin typeface="Montserrat"/>
-              </a:rPr>
-              <a:t>•  </a:t>
+                  <a:srgbClr val="E8801A"/>
+                </a:solidFill>
+                <a:latin typeface="Montserrat"/>
+              </a:rPr>
+              <a:t>▸  </a:t>
             </a:r>
             <a:r>
               <a:rPr sz="1600" b="0" i="0">
@@ -7516,14 +7891,14 @@
                 </a:solidFill>
                 <a:latin typeface="Montserrat"/>
               </a:rPr>
-              <a:t>Boca desplazada: 3 bar durante 10 min</a:t>
-            </a:r>
-          </a:p>
-        </p:txBody>
-      </p:sp>
-      <p:sp>
-        <p:nvSpPr>
-          <p:cNvPr id="8" name="imgph" descr="IMGQ:soapy water leak test gas fitting"/>
+              <a:t>Con fallos: informe de anomalías</a:t>
+            </a:r>
+          </a:p>
+        </p:txBody>
+      </p:sp>
+      <p:sp>
+        <p:nvSpPr>
+          <p:cNvPr id="9" name="imgph" descr="IMGQ:technician inspecting gas tank valves"/>
           <p:cNvSpPr/>
           <p:nvPr/>
         </p:nvSpPr>
@@ -7569,7 +7944,7 @@
       </p:sp>
       <p:sp>
         <p:nvSpPr>
-          <p:cNvPr id="9" name="TextBox 8"/>
+          <p:cNvPr id="10" name="TextBox 9"/>
           <p:cNvSpPr txBox="1"/>
           <p:nvPr/>
         </p:nvSpPr>
@@ -7609,7 +7984,7 @@
                 </a:solidFill>
                 <a:latin typeface="Montserrat"/>
               </a:rPr>
-              <a:t>soapy water leak test gas fitting</a:t>
+              <a:t>technician inspecting gas tank valves</a:t>
             </a:r>
           </a:p>
         </p:txBody>
@@ -7706,7 +8081,7 @@
                 </a:solidFill>
                 <a:latin typeface="Montserrat"/>
               </a:rPr>
-              <a:t>016 / 020</a:t>
+              <a:t>016 / 021</a:t>
             </a:r>
           </a:p>
         </p:txBody>
@@ -7754,7 +8129,7 @@
         <p:spPr>
           <a:xfrm>
             <a:off x="822960" y="457200"/>
-            <a:ext cx="8229600" cy="365760"/>
+            <a:ext cx="10058400" cy="365760"/>
           </a:xfrm>
           <a:prstGeom prst="rect">
             <a:avLst/>
@@ -7768,13 +8143,13 @@
           <a:lstStyle/>
           <a:p>
             <a:r>
-              <a:rPr sz="1200" b="1" i="0">
-                <a:solidFill>
-                  <a:srgbClr val="64748B"/>
-                </a:solidFill>
-                <a:latin typeface="Montserrat"/>
-              </a:rPr>
-              <a:t>APARTADO 6.3 · PRUEBA DE PRESIÓN</a:t>
+              <a:rPr sz="1300" b="1" i="0">
+                <a:solidFill>
+                  <a:srgbClr val="E8801A"/>
+                </a:solidFill>
+                <a:latin typeface="Montserrat"/>
+              </a:rPr>
+              <a:t>APARTADO 6.2.1 · COMPROBACIONES</a:t>
             </a:r>
           </a:p>
         </p:txBody>
@@ -7802,26 +8177,70 @@
           <a:lstStyle/>
           <a:p>
             <a:r>
-              <a:rPr sz="2700" b="1" i="0">
+              <a:rPr sz="2800" b="1" i="0">
                 <a:solidFill>
                   <a:srgbClr val="1E2761"/>
                 </a:solidFill>
                 <a:latin typeface="Montserrat"/>
               </a:rPr>
-              <a:t>Cada 15 años y el muestreo</a:t>
-            </a:r>
-          </a:p>
-        </p:txBody>
-      </p:sp>
-      <p:sp>
-        <p:nvSpPr>
-          <p:cNvPr id="7" name="TextBox 6"/>
+              <a:t>Las 13 comprobaciones, agrupadas</a:t>
+            </a:r>
+          </a:p>
+        </p:txBody>
+      </p:sp>
+      <p:sp>
+        <p:nvSpPr>
+          <p:cNvPr id="7" name="Rounded Rectangle 6"/>
+          <p:cNvSpPr/>
+          <p:nvPr/>
+        </p:nvSpPr>
+        <p:spPr>
+          <a:xfrm>
+            <a:off x="868680" y="1627632"/>
+            <a:ext cx="2011680" cy="73152"/>
+          </a:xfrm>
+          <a:prstGeom prst="roundRect">
+            <a:avLst/>
+          </a:prstGeom>
+          <a:solidFill>
+            <a:srgbClr val="E8801A"/>
+          </a:solidFill>
+          <a:ln>
+            <a:noFill/>
+          </a:ln>
+          <a:effectLst/>
+        </p:spPr>
+        <p:style>
+          <a:lnRef idx="1">
+            <a:schemeClr val="accent1"/>
+          </a:lnRef>
+          <a:fillRef idx="3">
+            <a:schemeClr val="accent1"/>
+          </a:fillRef>
+          <a:effectRef idx="2">
+            <a:schemeClr val="accent1"/>
+          </a:effectRef>
+          <a:fontRef idx="minor">
+            <a:schemeClr val="lt1"/>
+          </a:fontRef>
+        </p:style>
+        <p:txBody>
+          <a:bodyPr rtlCol="0" anchor="ctr"/>
+          <a:lstStyle/>
+          <a:p>
+            <a:pPr algn="ctr"/>
+          </a:p>
+        </p:txBody>
+      </p:sp>
+      <p:sp>
+        <p:nvSpPr>
+          <p:cNvPr id="8" name="TextBox 7"/>
           <p:cNvSpPr txBox="1"/>
           <p:nvPr/>
         </p:nvSpPr>
         <p:spPr>
           <a:xfrm>
-            <a:off x="822960" y="1920240"/>
+            <a:off x="822960" y="1965960"/>
             <a:ext cx="4983480" cy="4206240"/>
           </a:xfrm>
           <a:prstGeom prst="rect">
@@ -7837,17 +8256,17 @@
           <a:p>
             <a:pPr>
               <a:spcAft>
-                <a:spcPts val="1000"/>
+                <a:spcPts val="1100"/>
               </a:spcAft>
             </a:pPr>
             <a:r>
               <a:rPr sz="1600" b="1" i="0">
                 <a:solidFill>
-                  <a:srgbClr val="2E3A80"/>
-                </a:solidFill>
-                <a:latin typeface="Montserrat"/>
-              </a:rPr>
-              <a:t>•  </a:t>
+                  <a:srgbClr val="E8801A"/>
+                </a:solidFill>
+                <a:latin typeface="Montserrat"/>
+              </a:rPr>
+              <a:t>▸  </a:t>
             </a:r>
             <a:r>
               <a:rPr sz="1600" b="0" i="0">
@@ -7856,23 +8275,23 @@
                 </a:solidFill>
                 <a:latin typeface="Montserrat"/>
               </a:rPr>
-              <a:t>Prueba de presión cada 15 años</a:t>
+              <a:t>1 a 3: papeles y bomberos</a:t>
             </a:r>
           </a:p>
           <a:p>
             <a:pPr>
               <a:spcAft>
-                <a:spcPts val="1000"/>
+                <a:spcPts val="1100"/>
               </a:spcAft>
             </a:pPr>
             <a:r>
               <a:rPr sz="1600" b="1" i="0">
                 <a:solidFill>
-                  <a:srgbClr val="2E3A80"/>
-                </a:solidFill>
-                <a:latin typeface="Montserrat"/>
-              </a:rPr>
-              <a:t>•  </a:t>
+                  <a:srgbClr val="E8801A"/>
+                </a:solidFill>
+                <a:latin typeface="Montserrat"/>
+              </a:rPr>
+              <a:t>▸  </a:t>
             </a:r>
             <a:r>
               <a:rPr sz="1600" b="0" i="0">
@@ -7881,23 +8300,23 @@
                 </a:solidFill>
                 <a:latin typeface="Montserrat"/>
               </a:rPr>
-              <a:t>La encarga a un organismo de control</a:t>
+              <a:t>4 a 9: el hierro (válvulas, corrosión, tierra)</a:t>
             </a:r>
           </a:p>
           <a:p>
             <a:pPr>
               <a:spcAft>
-                <a:spcPts val="1000"/>
+                <a:spcPts val="1100"/>
               </a:spcAft>
             </a:pPr>
             <a:r>
               <a:rPr sz="1600" b="1" i="0">
                 <a:solidFill>
-                  <a:srgbClr val="2E3A80"/>
-                </a:solidFill>
-                <a:latin typeface="Montserrat"/>
-              </a:rPr>
-              <a:t>•  </a:t>
+                  <a:srgbClr val="E8801A"/>
+                </a:solidFill>
+                <a:latin typeface="Montserrat"/>
+              </a:rPr>
+              <a:t>▸  </a:t>
             </a:r>
             <a:r>
               <a:rPr sz="1600" b="0" i="0">
@@ -7906,23 +8325,23 @@
                 </a:solidFill>
                 <a:latin typeface="Montserrat"/>
               </a:rPr>
-              <a:t>Superficie: se prueba una muestra</a:t>
+              <a:t>10 a 13: que no fugue</a:t>
             </a:r>
           </a:p>
           <a:p>
             <a:pPr>
               <a:spcAft>
-                <a:spcPts val="1000"/>
+                <a:spcPts val="1100"/>
               </a:spcAft>
             </a:pPr>
             <a:r>
               <a:rPr sz="1600" b="1" i="0">
                 <a:solidFill>
-                  <a:srgbClr val="2E3A80"/>
-                </a:solidFill>
-                <a:latin typeface="Montserrat"/>
-              </a:rPr>
-              <a:t>•  </a:t>
+                  <a:srgbClr val="E8801A"/>
+                </a:solidFill>
+                <a:latin typeface="Montserrat"/>
+              </a:rPr>
+              <a:t>▸  </a:t>
             </a:r>
             <a:r>
               <a:rPr sz="1600" b="0" i="0">
@@ -7931,14 +8350,14 @@
                 </a:solidFill>
                 <a:latin typeface="Montserrat"/>
               </a:rPr>
-              <a:t>Muestra redondea arriba, mínimo 8</a:t>
-            </a:r>
-          </a:p>
-        </p:txBody>
-      </p:sp>
-      <p:sp>
-        <p:nvSpPr>
-          <p:cNvPr id="8" name="imgph" descr="IMGQ:pressure gauge industrial tank test"/>
+              <a:t>Boca desplazada: 3 bar durante 10 min</a:t>
+            </a:r>
+          </a:p>
+        </p:txBody>
+      </p:sp>
+      <p:sp>
+        <p:nvSpPr>
+          <p:cNvPr id="9" name="imgph" descr="IMGQ:soapy water leak test gas fitting"/>
           <p:cNvSpPr/>
           <p:nvPr/>
         </p:nvSpPr>
@@ -7984,7 +8403,7 @@
       </p:sp>
       <p:sp>
         <p:nvSpPr>
-          <p:cNvPr id="9" name="TextBox 8"/>
+          <p:cNvPr id="10" name="TextBox 9"/>
           <p:cNvSpPr txBox="1"/>
           <p:nvPr/>
         </p:nvSpPr>
@@ -8024,7 +8443,7 @@
                 </a:solidFill>
                 <a:latin typeface="Montserrat"/>
               </a:rPr>
-              <a:t>pressure gauge industrial tank test</a:t>
+              <a:t>soapy water leak test gas fitting</a:t>
             </a:r>
           </a:p>
         </p:txBody>
@@ -8121,7 +8540,7 @@
                 </a:solidFill>
                 <a:latin typeface="Montserrat"/>
               </a:rPr>
-              <a:t>017 / 020</a:t>
+              <a:t>017 / 021</a:t>
             </a:r>
           </a:p>
         </p:txBody>
@@ -8169,7 +8588,7 @@
         <p:spPr>
           <a:xfrm>
             <a:off x="822960" y="457200"/>
-            <a:ext cx="8229600" cy="365760"/>
+            <a:ext cx="10058400" cy="365760"/>
           </a:xfrm>
           <a:prstGeom prst="rect">
             <a:avLst/>
@@ -8183,13 +8602,13 @@
           <a:lstStyle/>
           <a:p>
             <a:r>
-              <a:rPr sz="1200" b="1" i="0">
-                <a:solidFill>
-                  <a:srgbClr val="64748B"/>
-                </a:solidFill>
-                <a:latin typeface="Montserrat"/>
-              </a:rPr>
-              <a:t>APARTADOS 6.5 Y 6.6 · CASOS</a:t>
+              <a:rPr sz="1300" b="1" i="0">
+                <a:solidFill>
+                  <a:srgbClr val="E8801A"/>
+                </a:solidFill>
+                <a:latin typeface="Montserrat"/>
+              </a:rPr>
+              <a:t>APARTADO 6.3 · PRUEBA DE PRESIÓN</a:t>
             </a:r>
           </a:p>
         </p:txBody>
@@ -8217,26 +8636,70 @@
           <a:lstStyle/>
           <a:p>
             <a:r>
-              <a:rPr sz="2700" b="1" i="0">
+              <a:rPr sz="2800" b="1" i="0">
                 <a:solidFill>
                   <a:srgbClr val="1E2761"/>
                 </a:solidFill>
                 <a:latin typeface="Montserrat"/>
               </a:rPr>
-              <a:t>Protección adicional y provisionales</a:t>
-            </a:r>
-          </a:p>
-        </p:txBody>
-      </p:sp>
-      <p:sp>
-        <p:nvSpPr>
-          <p:cNvPr id="7" name="TextBox 6"/>
+              <a:t>Cada 15 años y el muestreo</a:t>
+            </a:r>
+          </a:p>
+        </p:txBody>
+      </p:sp>
+      <p:sp>
+        <p:nvSpPr>
+          <p:cNvPr id="7" name="Rounded Rectangle 6"/>
+          <p:cNvSpPr/>
+          <p:nvPr/>
+        </p:nvSpPr>
+        <p:spPr>
+          <a:xfrm>
+            <a:off x="868680" y="1627632"/>
+            <a:ext cx="2011680" cy="73152"/>
+          </a:xfrm>
+          <a:prstGeom prst="roundRect">
+            <a:avLst/>
+          </a:prstGeom>
+          <a:solidFill>
+            <a:srgbClr val="E8801A"/>
+          </a:solidFill>
+          <a:ln>
+            <a:noFill/>
+          </a:ln>
+          <a:effectLst/>
+        </p:spPr>
+        <p:style>
+          <a:lnRef idx="1">
+            <a:schemeClr val="accent1"/>
+          </a:lnRef>
+          <a:fillRef idx="3">
+            <a:schemeClr val="accent1"/>
+          </a:fillRef>
+          <a:effectRef idx="2">
+            <a:schemeClr val="accent1"/>
+          </a:effectRef>
+          <a:fontRef idx="minor">
+            <a:schemeClr val="lt1"/>
+          </a:fontRef>
+        </p:style>
+        <p:txBody>
+          <a:bodyPr rtlCol="0" anchor="ctr"/>
+          <a:lstStyle/>
+          <a:p>
+            <a:pPr algn="ctr"/>
+          </a:p>
+        </p:txBody>
+      </p:sp>
+      <p:sp>
+        <p:nvSpPr>
+          <p:cNvPr id="8" name="TextBox 7"/>
           <p:cNvSpPr txBox="1"/>
           <p:nvPr/>
         </p:nvSpPr>
         <p:spPr>
           <a:xfrm>
-            <a:off x="822960" y="1920240"/>
+            <a:off x="822960" y="1965960"/>
             <a:ext cx="4983480" cy="4206240"/>
           </a:xfrm>
           <a:prstGeom prst="rect">
@@ -8252,17 +8715,17 @@
           <a:p>
             <a:pPr>
               <a:spcAft>
-                <a:spcPts val="1000"/>
+                <a:spcPts val="1100"/>
               </a:spcAft>
             </a:pPr>
             <a:r>
               <a:rPr sz="1600" b="1" i="0">
                 <a:solidFill>
-                  <a:srgbClr val="2E3A80"/>
-                </a:solidFill>
-                <a:latin typeface="Montserrat"/>
-              </a:rPr>
-              <a:t>•  </a:t>
+                  <a:srgbClr val="E8801A"/>
+                </a:solidFill>
+                <a:latin typeface="Montserrat"/>
+              </a:rPr>
+              <a:t>▸  </a:t>
             </a:r>
             <a:r>
               <a:rPr sz="1600" b="0" i="0">
@@ -8271,23 +8734,23 @@
                 </a:solidFill>
                 <a:latin typeface="Montserrat"/>
               </a:rPr>
-              <a:t>Protección adicional: no hay que desenterrar</a:t>
+              <a:t>Prueba de presión cada 15 años</a:t>
             </a:r>
           </a:p>
           <a:p>
             <a:pPr>
               <a:spcAft>
-                <a:spcPts val="1000"/>
+                <a:spcPts val="1100"/>
               </a:spcAft>
             </a:pPr>
             <a:r>
               <a:rPr sz="1600" b="1" i="0">
                 <a:solidFill>
-                  <a:srgbClr val="2E3A80"/>
-                </a:solidFill>
-                <a:latin typeface="Montserrat"/>
-              </a:rPr>
-              <a:t>•  </a:t>
+                  <a:srgbClr val="E8801A"/>
+                </a:solidFill>
+                <a:latin typeface="Montserrat"/>
+              </a:rPr>
+              <a:t>▸  </a:t>
             </a:r>
             <a:r>
               <a:rPr sz="1600" b="0" i="0">
@@ -8296,23 +8759,23 @@
                 </a:solidFill>
                 <a:latin typeface="Montserrat"/>
               </a:rPr>
-              <a:t>Se libra si pasa las pruebas del fabricante</a:t>
+              <a:t>La encarga a un organismo de control</a:t>
             </a:r>
           </a:p>
           <a:p>
             <a:pPr>
               <a:spcAft>
-                <a:spcPts val="1000"/>
+                <a:spcPts val="1100"/>
               </a:spcAft>
             </a:pPr>
             <a:r>
               <a:rPr sz="1600" b="1" i="0">
                 <a:solidFill>
-                  <a:srgbClr val="2E3A80"/>
-                </a:solidFill>
-                <a:latin typeface="Montserrat"/>
-              </a:rPr>
-              <a:t>•  </a:t>
+                  <a:srgbClr val="E8801A"/>
+                </a:solidFill>
+                <a:latin typeface="Montserrat"/>
+              </a:rPr>
+              <a:t>▸  </a:t>
             </a:r>
             <a:r>
               <a:rPr sz="1600" b="0" i="0">
@@ -8321,23 +8784,23 @@
                 </a:solidFill>
                 <a:latin typeface="Montserrat"/>
               </a:rPr>
-              <a:t>Provisional: máximo 5 m³</a:t>
+              <a:t>Superficie: se prueba una muestra</a:t>
             </a:r>
           </a:p>
           <a:p>
             <a:pPr>
               <a:spcAft>
-                <a:spcPts val="1000"/>
+                <a:spcPts val="1100"/>
               </a:spcAft>
             </a:pPr>
             <a:r>
               <a:rPr sz="1600" b="1" i="0">
                 <a:solidFill>
-                  <a:srgbClr val="2E3A80"/>
-                </a:solidFill>
-                <a:latin typeface="Montserrat"/>
-              </a:rPr>
-              <a:t>•  </a:t>
+                  <a:srgbClr val="E8801A"/>
+                </a:solidFill>
+                <a:latin typeface="Montserrat"/>
+              </a:rPr>
+              <a:t>▸  </a:t>
             </a:r>
             <a:r>
               <a:rPr sz="1600" b="0" i="0">
@@ -8346,14 +8809,14 @@
                 </a:solidFill>
                 <a:latin typeface="Montserrat"/>
               </a:rPr>
-              <a:t>Provisional: hasta 60 días, prorrogable</a:t>
-            </a:r>
-          </a:p>
-        </p:txBody>
-      </p:sp>
-      <p:sp>
-        <p:nvSpPr>
-          <p:cNvPr id="8" name="imgph" descr="IMGQ:underground tank excavation site"/>
+              <a:t>Muestra redondea arriba, mínimo 8</a:t>
+            </a:r>
+          </a:p>
+        </p:txBody>
+      </p:sp>
+      <p:sp>
+        <p:nvSpPr>
+          <p:cNvPr id="9" name="imgph" descr="IMGQ:pressure gauge industrial tank test"/>
           <p:cNvSpPr/>
           <p:nvPr/>
         </p:nvSpPr>
@@ -8399,7 +8862,7 @@
       </p:sp>
       <p:sp>
         <p:nvSpPr>
-          <p:cNvPr id="9" name="TextBox 8"/>
+          <p:cNvPr id="10" name="TextBox 9"/>
           <p:cNvSpPr txBox="1"/>
           <p:nvPr/>
         </p:nvSpPr>
@@ -8439,7 +8902,7 @@
                 </a:solidFill>
                 <a:latin typeface="Montserrat"/>
               </a:rPr>
-              <a:t>underground tank excavation site</a:t>
+              <a:t>pressure gauge industrial tank test</a:t>
             </a:r>
           </a:p>
         </p:txBody>
@@ -8536,7 +8999,7 @@
                 </a:solidFill>
                 <a:latin typeface="Montserrat"/>
               </a:rPr>
-              <a:t>018 / 020</a:t>
+              <a:t>018 / 021</a:t>
             </a:r>
           </a:p>
         </p:txBody>
@@ -8584,7 +9047,7 @@
         <p:spPr>
           <a:xfrm>
             <a:off x="822960" y="457200"/>
-            <a:ext cx="8229600" cy="365760"/>
+            <a:ext cx="10058400" cy="365760"/>
           </a:xfrm>
           <a:prstGeom prst="rect">
             <a:avLst/>
@@ -8598,13 +9061,13 @@
           <a:lstStyle/>
           <a:p>
             <a:r>
-              <a:rPr sz="1200" b="1" i="0">
-                <a:solidFill>
-                  <a:srgbClr val="64748B"/>
-                </a:solidFill>
-                <a:latin typeface="Montserrat"/>
-              </a:rPr>
-              <a:t>APARTADO 7 · RETIRADA</a:t>
+              <a:rPr sz="1300" b="1" i="0">
+                <a:solidFill>
+                  <a:srgbClr val="E8801A"/>
+                </a:solidFill>
+                <a:latin typeface="Montserrat"/>
+              </a:rPr>
+              <a:t>APARTADOS 6.5 Y 6.6 · CASOS</a:t>
             </a:r>
           </a:p>
         </p:txBody>
@@ -8632,26 +9095,70 @@
           <a:lstStyle/>
           <a:p>
             <a:r>
-              <a:rPr sz="2700" b="1" i="0">
+              <a:rPr sz="2800" b="1" i="0">
                 <a:solidFill>
                   <a:srgbClr val="1E2761"/>
                 </a:solidFill>
                 <a:latin typeface="Montserrat"/>
               </a:rPr>
-              <a:t>No dejes una bomba</a:t>
-            </a:r>
-          </a:p>
-        </p:txBody>
-      </p:sp>
-      <p:sp>
-        <p:nvSpPr>
-          <p:cNvPr id="7" name="TextBox 6"/>
+              <a:t>Protección adicional y provisionales</a:t>
+            </a:r>
+          </a:p>
+        </p:txBody>
+      </p:sp>
+      <p:sp>
+        <p:nvSpPr>
+          <p:cNvPr id="7" name="Rounded Rectangle 6"/>
+          <p:cNvSpPr/>
+          <p:nvPr/>
+        </p:nvSpPr>
+        <p:spPr>
+          <a:xfrm>
+            <a:off x="868680" y="1627632"/>
+            <a:ext cx="2011680" cy="73152"/>
+          </a:xfrm>
+          <a:prstGeom prst="roundRect">
+            <a:avLst/>
+          </a:prstGeom>
+          <a:solidFill>
+            <a:srgbClr val="E8801A"/>
+          </a:solidFill>
+          <a:ln>
+            <a:noFill/>
+          </a:ln>
+          <a:effectLst/>
+        </p:spPr>
+        <p:style>
+          <a:lnRef idx="1">
+            <a:schemeClr val="accent1"/>
+          </a:lnRef>
+          <a:fillRef idx="3">
+            <a:schemeClr val="accent1"/>
+          </a:fillRef>
+          <a:effectRef idx="2">
+            <a:schemeClr val="accent1"/>
+          </a:effectRef>
+          <a:fontRef idx="minor">
+            <a:schemeClr val="lt1"/>
+          </a:fontRef>
+        </p:style>
+        <p:txBody>
+          <a:bodyPr rtlCol="0" anchor="ctr"/>
+          <a:lstStyle/>
+          <a:p>
+            <a:pPr algn="ctr"/>
+          </a:p>
+        </p:txBody>
+      </p:sp>
+      <p:sp>
+        <p:nvSpPr>
+          <p:cNvPr id="8" name="TextBox 7"/>
           <p:cNvSpPr txBox="1"/>
           <p:nvPr/>
         </p:nvSpPr>
         <p:spPr>
           <a:xfrm>
-            <a:off x="822960" y="1920240"/>
+            <a:off x="822960" y="1965960"/>
             <a:ext cx="4983480" cy="4206240"/>
           </a:xfrm>
           <a:prstGeom prst="rect">
@@ -8667,17 +9174,17 @@
           <a:p>
             <a:pPr>
               <a:spcAft>
-                <a:spcPts val="1000"/>
+                <a:spcPts val="1100"/>
               </a:spcAft>
             </a:pPr>
             <a:r>
               <a:rPr sz="1600" b="1" i="0">
                 <a:solidFill>
-                  <a:srgbClr val="2E3A80"/>
-                </a:solidFill>
-                <a:latin typeface="Montserrat"/>
-              </a:rPr>
-              <a:t>•  </a:t>
+                  <a:srgbClr val="E8801A"/>
+                </a:solidFill>
+                <a:latin typeface="Montserrat"/>
+              </a:rPr>
+              <a:t>▸  </a:t>
             </a:r>
             <a:r>
               <a:rPr sz="1600" b="0" i="0">
@@ -8686,23 +9193,23 @@
                 </a:solidFill>
                 <a:latin typeface="Montserrat"/>
               </a:rPr>
-              <a:t>Inertizado con nitrógeno</a:t>
+              <a:t>Protección adicional: no hay que desenterrar</a:t>
             </a:r>
           </a:p>
           <a:p>
             <a:pPr>
               <a:spcAft>
-                <a:spcPts val="1000"/>
+                <a:spcPts val="1100"/>
               </a:spcAft>
             </a:pPr>
             <a:r>
               <a:rPr sz="1600" b="1" i="0">
                 <a:solidFill>
-                  <a:srgbClr val="2E3A80"/>
-                </a:solidFill>
-                <a:latin typeface="Montserrat"/>
-              </a:rPr>
-              <a:t>•  </a:t>
+                  <a:srgbClr val="E8801A"/>
+                </a:solidFill>
+                <a:latin typeface="Montserrat"/>
+              </a:rPr>
+              <a:t>▸  </a:t>
             </a:r>
             <a:r>
               <a:rPr sz="1600" b="0" i="0">
@@ -8711,23 +9218,23 @@
                 </a:solidFill>
                 <a:latin typeface="Montserrat"/>
               </a:rPr>
-              <a:t>O desgasificado con agua</a:t>
+              <a:t>Se libra si pasa las pruebas del fabricante</a:t>
             </a:r>
           </a:p>
           <a:p>
             <a:pPr>
               <a:spcAft>
-                <a:spcPts val="1000"/>
+                <a:spcPts val="1100"/>
               </a:spcAft>
             </a:pPr>
             <a:r>
               <a:rPr sz="1600" b="1" i="0">
                 <a:solidFill>
-                  <a:srgbClr val="2E3A80"/>
-                </a:solidFill>
-                <a:latin typeface="Montserrat"/>
-              </a:rPr>
-              <a:t>•  </a:t>
+                  <a:srgbClr val="E8801A"/>
+                </a:solidFill>
+                <a:latin typeface="Montserrat"/>
+              </a:rPr>
+              <a:t>▸  </a:t>
             </a:r>
             <a:r>
               <a:rPr sz="1600" b="0" i="0">
@@ -8736,23 +9243,23 @@
                 </a:solidFill>
                 <a:latin typeface="Montserrat"/>
               </a:rPr>
-              <a:t>Certificado a la Comunidad Autónoma</a:t>
+              <a:t>Provisional: máximo 5 m³</a:t>
             </a:r>
           </a:p>
           <a:p>
             <a:pPr>
               <a:spcAft>
-                <a:spcPts val="1000"/>
+                <a:spcPts val="1100"/>
               </a:spcAft>
             </a:pPr>
             <a:r>
               <a:rPr sz="1600" b="1" i="0">
                 <a:solidFill>
-                  <a:srgbClr val="2E3A80"/>
-                </a:solidFill>
-                <a:latin typeface="Montserrat"/>
-              </a:rPr>
-              <a:t>•  </a:t>
+                  <a:srgbClr val="E8801A"/>
+                </a:solidFill>
+                <a:latin typeface="Montserrat"/>
+              </a:rPr>
+              <a:t>▸  </a:t>
             </a:r>
             <a:r>
               <a:rPr sz="1600" b="0" i="0">
@@ -8761,14 +9268,14 @@
                 </a:solidFill>
                 <a:latin typeface="Montserrat"/>
               </a:rPr>
-              <a:t>Cese: 2 años sin consumo o 5 sin mantenimiento</a:t>
-            </a:r>
-          </a:p>
-        </p:txBody>
-      </p:sp>
-      <p:sp>
-        <p:nvSpPr>
-          <p:cNvPr id="8" name="imgph" descr="IMGQ:nitrogen cylinder inert gas industrial"/>
+              <a:t>Provisional: hasta 60 días, prorrogable</a:t>
+            </a:r>
+          </a:p>
+        </p:txBody>
+      </p:sp>
+      <p:sp>
+        <p:nvSpPr>
+          <p:cNvPr id="9" name="imgph" descr="IMGQ:underground tank excavation site"/>
           <p:cNvSpPr/>
           <p:nvPr/>
         </p:nvSpPr>
@@ -8814,7 +9321,7 @@
       </p:sp>
       <p:sp>
         <p:nvSpPr>
-          <p:cNvPr id="9" name="TextBox 8"/>
+          <p:cNvPr id="10" name="TextBox 9"/>
           <p:cNvSpPr txBox="1"/>
           <p:nvPr/>
         </p:nvSpPr>
@@ -8854,7 +9361,7 @@
                 </a:solidFill>
                 <a:latin typeface="Montserrat"/>
               </a:rPr>
-              <a:t>nitrogen cylinder inert gas industrial</a:t>
+              <a:t>underground tank excavation site</a:t>
             </a:r>
           </a:p>
         </p:txBody>
@@ -8951,7 +9458,7 @@
                 </a:solidFill>
                 <a:latin typeface="Montserrat"/>
               </a:rPr>
-              <a:t>019 / 020</a:t>
+              <a:t>019 / 021</a:t>
             </a:r>
           </a:p>
         </p:txBody>
@@ -8999,7 +9506,7 @@
         <p:spPr>
           <a:xfrm>
             <a:off x="822960" y="457200"/>
-            <a:ext cx="8229600" cy="365760"/>
+            <a:ext cx="10058400" cy="365760"/>
           </a:xfrm>
           <a:prstGeom prst="rect">
             <a:avLst/>
@@ -9013,13 +9520,13 @@
           <a:lstStyle/>
           <a:p>
             <a:r>
-              <a:rPr sz="1200" b="1" i="0">
-                <a:solidFill>
-                  <a:srgbClr val="64748B"/>
-                </a:solidFill>
-                <a:latin typeface="Montserrat"/>
-              </a:rPr>
-              <a:t>REPASO RELÁMPAGO</a:t>
+              <a:rPr sz="1300" b="1" i="0">
+                <a:solidFill>
+                  <a:srgbClr val="E8801A"/>
+                </a:solidFill>
+                <a:latin typeface="Montserrat"/>
+              </a:rPr>
+              <a:t>APARTADO 7 · RETIRADA</a:t>
             </a:r>
           </a:p>
         </p:txBody>
@@ -9047,26 +9554,70 @@
           <a:lstStyle/>
           <a:p>
             <a:r>
-              <a:rPr sz="2700" b="1" i="0">
+              <a:rPr sz="2800" b="1" i="0">
                 <a:solidFill>
                   <a:srgbClr val="1E2761"/>
                 </a:solidFill>
                 <a:latin typeface="Montserrat"/>
               </a:rPr>
-              <a:t>Seis anclas antes del cierre</a:t>
-            </a:r>
-          </a:p>
-        </p:txBody>
-      </p:sp>
-      <p:sp>
-        <p:nvSpPr>
-          <p:cNvPr id="7" name="TextBox 6"/>
+              <a:t>No dejes una bomba</a:t>
+            </a:r>
+          </a:p>
+        </p:txBody>
+      </p:sp>
+      <p:sp>
+        <p:nvSpPr>
+          <p:cNvPr id="7" name="Rounded Rectangle 6"/>
+          <p:cNvSpPr/>
+          <p:nvPr/>
+        </p:nvSpPr>
+        <p:spPr>
+          <a:xfrm>
+            <a:off x="868680" y="1627632"/>
+            <a:ext cx="2011680" cy="73152"/>
+          </a:xfrm>
+          <a:prstGeom prst="roundRect">
+            <a:avLst/>
+          </a:prstGeom>
+          <a:solidFill>
+            <a:srgbClr val="E8801A"/>
+          </a:solidFill>
+          <a:ln>
+            <a:noFill/>
+          </a:ln>
+          <a:effectLst/>
+        </p:spPr>
+        <p:style>
+          <a:lnRef idx="1">
+            <a:schemeClr val="accent1"/>
+          </a:lnRef>
+          <a:fillRef idx="3">
+            <a:schemeClr val="accent1"/>
+          </a:fillRef>
+          <a:effectRef idx="2">
+            <a:schemeClr val="accent1"/>
+          </a:effectRef>
+          <a:fontRef idx="minor">
+            <a:schemeClr val="lt1"/>
+          </a:fontRef>
+        </p:style>
+        <p:txBody>
+          <a:bodyPr rtlCol="0" anchor="ctr"/>
+          <a:lstStyle/>
+          <a:p>
+            <a:pPr algn="ctr"/>
+          </a:p>
+        </p:txBody>
+      </p:sp>
+      <p:sp>
+        <p:nvSpPr>
+          <p:cNvPr id="8" name="TextBox 7"/>
           <p:cNvSpPr txBox="1"/>
           <p:nvPr/>
         </p:nvSpPr>
         <p:spPr>
           <a:xfrm>
-            <a:off x="822960" y="1920240"/>
+            <a:off x="822960" y="1965960"/>
             <a:ext cx="4983480" cy="4206240"/>
           </a:xfrm>
           <a:prstGeom prst="rect">
@@ -9082,17 +9633,17 @@
           <a:p>
             <a:pPr>
               <a:spcAft>
-                <a:spcPts val="1000"/>
+                <a:spcPts val="1100"/>
               </a:spcAft>
             </a:pPr>
             <a:r>
               <a:rPr sz="1600" b="1" i="0">
                 <a:solidFill>
-                  <a:srgbClr val="2E3A80"/>
-                </a:solidFill>
-                <a:latin typeface="Montserrat"/>
-              </a:rPr>
-              <a:t>•  </a:t>
+                  <a:srgbClr val="E8801A"/>
+                </a:solidFill>
+                <a:latin typeface="Montserrat"/>
+              </a:rPr>
+              <a:t>▸  </a:t>
             </a:r>
             <a:r>
               <a:rPr sz="1600" b="0" i="0">
@@ -9101,23 +9652,23 @@
                 </a:solidFill>
                 <a:latin typeface="Montserrat"/>
               </a:rPr>
-              <a:t>Topes 2.000 / 500 m³ · proyecto &gt; 13 m³</a:t>
+              <a:t>Inertizado con nitrógeno</a:t>
             </a:r>
           </a:p>
           <a:p>
             <a:pPr>
               <a:spcAft>
-                <a:spcPts val="1000"/>
+                <a:spcPts val="1100"/>
               </a:spcAft>
             </a:pPr>
             <a:r>
               <a:rPr sz="1600" b="1" i="0">
                 <a:solidFill>
-                  <a:srgbClr val="2E3A80"/>
-                </a:solidFill>
-                <a:latin typeface="Montserrat"/>
-              </a:rPr>
-              <a:t>•  </a:t>
+                  <a:srgbClr val="E8801A"/>
+                </a:solidFill>
+                <a:latin typeface="Montserrat"/>
+              </a:rPr>
+              <a:t>▸  </a:t>
             </a:r>
             <a:r>
               <a:rPr sz="1600" b="0" i="0">
@@ -9126,23 +9677,23 @@
                 </a:solidFill>
                 <a:latin typeface="Montserrat"/>
               </a:rPr>
-              <a:t>Memoria la firma el instalador</a:t>
+              <a:t>O desgasificado con agua</a:t>
             </a:r>
           </a:p>
           <a:p>
             <a:pPr>
               <a:spcAft>
-                <a:spcPts val="1000"/>
+                <a:spcPts val="1100"/>
               </a:spcAft>
             </a:pPr>
             <a:r>
               <a:rPr sz="1600" b="1" i="0">
                 <a:solidFill>
-                  <a:srgbClr val="2E3A80"/>
-                </a:solidFill>
-                <a:latin typeface="Montserrat"/>
-              </a:rPr>
-              <a:t>•  </a:t>
+                  <a:srgbClr val="E8801A"/>
+                </a:solidFill>
+                <a:latin typeface="Montserrat"/>
+              </a:rPr>
+              <a:t>▸  </a:t>
             </a:r>
             <a:r>
               <a:rPr sz="1600" b="0" i="0">
@@ -9151,23 +9702,23 @@
                 </a:solidFill>
                 <a:latin typeface="Montserrat"/>
               </a:rPr>
-              <a:t>Primer llenado corta al 85 %</a:t>
+              <a:t>Certificado a la Comunidad Autónoma</a:t>
             </a:r>
           </a:p>
           <a:p>
             <a:pPr>
               <a:spcAft>
-                <a:spcPts val="1000"/>
+                <a:spcPts val="1100"/>
               </a:spcAft>
             </a:pPr>
             <a:r>
               <a:rPr sz="1600" b="1" i="0">
                 <a:solidFill>
-                  <a:srgbClr val="2E3A80"/>
-                </a:solidFill>
-                <a:latin typeface="Montserrat"/>
-              </a:rPr>
-              <a:t>•  </a:t>
+                  <a:srgbClr val="E8801A"/>
+                </a:solidFill>
+                <a:latin typeface="Montserrat"/>
+              </a:rPr>
+              <a:t>▸  </a:t>
             </a:r>
             <a:r>
               <a:rPr sz="1600" b="0" i="0">
@@ -9176,39 +9727,14 @@
                 </a:solidFill>
                 <a:latin typeface="Montserrat"/>
               </a:rPr>
-              <a:t>Enterrado: protección catódica</a:t>
-            </a:r>
-          </a:p>
-          <a:p>
-            <a:pPr>
-              <a:spcAft>
-                <a:spcPts val="1000"/>
-              </a:spcAft>
-            </a:pPr>
-            <a:r>
-              <a:rPr sz="1600" b="1" i="0">
-                <a:solidFill>
-                  <a:srgbClr val="2E3A80"/>
-                </a:solidFill>
-                <a:latin typeface="Montserrat"/>
-              </a:rPr>
-              <a:t>•  </a:t>
-            </a:r>
-            <a:r>
-              <a:rPr sz="1600" b="0" i="0">
-                <a:solidFill>
-                  <a:srgbClr val="1B2330"/>
-                </a:solidFill>
-                <a:latin typeface="Montserrat"/>
-              </a:rPr>
-              <a:t>Prueba de presión cada 15 años</a:t>
-            </a:r>
-          </a:p>
-        </p:txBody>
-      </p:sp>
-      <p:sp>
-        <p:nvSpPr>
-          <p:cNvPr id="8" name="imgph" descr="IMGQ:LPG tank installation residential"/>
+              <a:t>Cese: 2 años sin consumo o 5 sin mantenimiento</a:t>
+            </a:r>
+          </a:p>
+        </p:txBody>
+      </p:sp>
+      <p:sp>
+        <p:nvSpPr>
+          <p:cNvPr id="9" name="imgph" descr="IMGQ:nitrogen cylinder inert gas industrial"/>
           <p:cNvSpPr/>
           <p:nvPr/>
         </p:nvSpPr>
@@ -9254,7 +9780,7 @@
       </p:sp>
       <p:sp>
         <p:nvSpPr>
-          <p:cNvPr id="9" name="TextBox 8"/>
+          <p:cNvPr id="10" name="TextBox 9"/>
           <p:cNvSpPr txBox="1"/>
           <p:nvPr/>
         </p:nvSpPr>
@@ -9294,7 +9820,7 @@
                 </a:solidFill>
                 <a:latin typeface="Montserrat"/>
               </a:rPr>
-              <a:t>LPG tank installation residential</a:t>
+              <a:t>nitrogen cylinder inert gas industrial</a:t>
             </a:r>
           </a:p>
         </p:txBody>
@@ -9391,7 +9917,7 @@
                 </a:solidFill>
                 <a:latin typeface="Montserrat"/>
               </a:rPr>
-              <a:t>002 / 020</a:t>
+              <a:t>002 / 021</a:t>
             </a:r>
           </a:p>
         </p:txBody>
@@ -9455,7 +9981,7 @@
             <a:r>
               <a:rPr sz="2700" b="1" i="0">
                 <a:solidFill>
-                  <a:srgbClr val="1E2761"/>
+                  <a:srgbClr val="E8801A"/>
                 </a:solidFill>
                 <a:latin typeface="Montserrat"/>
               </a:rPr>
@@ -9467,6 +9993,50 @@
       <p:sp>
         <p:nvSpPr>
           <p:cNvPr id="6" name="Rounded Rectangle 5"/>
+          <p:cNvSpPr/>
+          <p:nvPr/>
+        </p:nvSpPr>
+        <p:spPr>
+          <a:xfrm>
+            <a:off x="868680" y="1234440"/>
+            <a:ext cx="1463040" cy="73152"/>
+          </a:xfrm>
+          <a:prstGeom prst="roundRect">
+            <a:avLst/>
+          </a:prstGeom>
+          <a:solidFill>
+            <a:srgbClr val="1E2761"/>
+          </a:solidFill>
+          <a:ln>
+            <a:noFill/>
+          </a:ln>
+          <a:effectLst/>
+        </p:spPr>
+        <p:style>
+          <a:lnRef idx="1">
+            <a:schemeClr val="accent1"/>
+          </a:lnRef>
+          <a:fillRef idx="3">
+            <a:schemeClr val="accent1"/>
+          </a:fillRef>
+          <a:effectRef idx="2">
+            <a:schemeClr val="accent1"/>
+          </a:effectRef>
+          <a:fontRef idx="minor">
+            <a:schemeClr val="lt1"/>
+          </a:fontRef>
+        </p:style>
+        <p:txBody>
+          <a:bodyPr rtlCol="0" anchor="ctr"/>
+          <a:lstStyle/>
+          <a:p>
+            <a:pPr algn="ctr"/>
+          </a:p>
+        </p:txBody>
+      </p:sp>
+      <p:sp>
+        <p:nvSpPr>
+          <p:cNvPr id="7" name="Rounded Rectangle 6"/>
           <p:cNvSpPr/>
           <p:nvPr/>
         </p:nvSpPr>
@@ -9512,7 +10082,7 @@
       </p:sp>
       <p:sp>
         <p:nvSpPr>
-          <p:cNvPr id="7" name="TextBox 6"/>
+          <p:cNvPr id="8" name="TextBox 7"/>
           <p:cNvSpPr txBox="1"/>
           <p:nvPr/>
         </p:nvSpPr>
@@ -9547,7 +10117,7 @@
       </p:sp>
       <p:sp>
         <p:nvSpPr>
-          <p:cNvPr id="8" name="TextBox 7"/>
+          <p:cNvPr id="9" name="TextBox 8"/>
           <p:cNvSpPr txBox="1"/>
           <p:nvPr/>
         </p:nvSpPr>
@@ -9582,7 +10152,7 @@
       </p:sp>
       <p:sp>
         <p:nvSpPr>
-          <p:cNvPr id="9" name="Rounded Rectangle 8"/>
+          <p:cNvPr id="10" name="Rounded Rectangle 9"/>
           <p:cNvSpPr/>
           <p:nvPr/>
         </p:nvSpPr>
@@ -9628,7 +10198,7 @@
       </p:sp>
       <p:sp>
         <p:nvSpPr>
-          <p:cNvPr id="10" name="TextBox 9"/>
+          <p:cNvPr id="11" name="TextBox 10"/>
           <p:cNvSpPr txBox="1"/>
           <p:nvPr/>
         </p:nvSpPr>
@@ -9663,7 +10233,7 @@
       </p:sp>
       <p:sp>
         <p:nvSpPr>
-          <p:cNvPr id="11" name="TextBox 10"/>
+          <p:cNvPr id="12" name="TextBox 11"/>
           <p:cNvSpPr txBox="1"/>
           <p:nvPr/>
         </p:nvSpPr>
@@ -9698,7 +10268,7 @@
       </p:sp>
       <p:sp>
         <p:nvSpPr>
-          <p:cNvPr id="12" name="Rounded Rectangle 11"/>
+          <p:cNvPr id="13" name="Rounded Rectangle 12"/>
           <p:cNvSpPr/>
           <p:nvPr/>
         </p:nvSpPr>
@@ -9744,7 +10314,7 @@
       </p:sp>
       <p:sp>
         <p:nvSpPr>
-          <p:cNvPr id="13" name="TextBox 12"/>
+          <p:cNvPr id="14" name="TextBox 13"/>
           <p:cNvSpPr txBox="1"/>
           <p:nvPr/>
         </p:nvSpPr>
@@ -9779,7 +10349,7 @@
       </p:sp>
       <p:sp>
         <p:nvSpPr>
-          <p:cNvPr id="14" name="TextBox 13"/>
+          <p:cNvPr id="15" name="TextBox 14"/>
           <p:cNvSpPr txBox="1"/>
           <p:nvPr/>
         </p:nvSpPr>
@@ -9845,6 +10415,490 @@
             <a:avLst/>
           </a:prstGeom>
           <a:solidFill>
+            <a:srgbClr val="FFFFFF"/>
+          </a:solidFill>
+          <a:ln>
+            <a:noFill/>
+          </a:ln>
+          <a:effectLst/>
+        </p:spPr>
+        <p:style>
+          <a:lnRef idx="1">
+            <a:schemeClr val="accent1"/>
+          </a:lnRef>
+          <a:fillRef idx="3">
+            <a:schemeClr val="accent1"/>
+          </a:fillRef>
+          <a:effectRef idx="2">
+            <a:schemeClr val="accent1"/>
+          </a:effectRef>
+          <a:fontRef idx="minor">
+            <a:schemeClr val="lt1"/>
+          </a:fontRef>
+        </p:style>
+        <p:txBody>
+          <a:bodyPr rtlCol="0" anchor="ctr"/>
+          <a:lstStyle/>
+          <a:p>
+            <a:pPr algn="ctr"/>
+          </a:p>
+        </p:txBody>
+      </p:sp>
+      <p:sp>
+        <p:nvSpPr>
+          <p:cNvPr id="3" name="TextBox 2"/>
+          <p:cNvSpPr txBox="1"/>
+          <p:nvPr/>
+        </p:nvSpPr>
+        <p:spPr>
+          <a:xfrm>
+            <a:off x="10607040" y="320040"/>
+            <a:ext cx="1371600" cy="365760"/>
+          </a:xfrm>
+          <a:prstGeom prst="rect">
+            <a:avLst/>
+          </a:prstGeom>
+          <a:noFill/>
+        </p:spPr>
+        <p:txBody>
+          <a:bodyPr wrap="square">
+            <a:spAutoFit/>
+          </a:bodyPr>
+          <a:lstStyle/>
+          <a:p>
+            <a:pPr algn="r"/>
+            <a:r>
+              <a:rPr sz="1000" b="1" i="0">
+                <a:solidFill>
+                  <a:srgbClr val="64748B"/>
+                </a:solidFill>
+                <a:latin typeface="Montserrat"/>
+              </a:rPr>
+              <a:t>020 / 021</a:t>
+            </a:r>
+          </a:p>
+        </p:txBody>
+      </p:sp>
+      <p:sp>
+        <p:nvSpPr>
+          <p:cNvPr id="4" name="TextBox 3"/>
+          <p:cNvSpPr txBox="1"/>
+          <p:nvPr/>
+        </p:nvSpPr>
+        <p:spPr>
+          <a:xfrm>
+            <a:off x="457200" y="6419088"/>
+            <a:ext cx="8229600" cy="365760"/>
+          </a:xfrm>
+          <a:prstGeom prst="rect">
+            <a:avLst/>
+          </a:prstGeom>
+          <a:noFill/>
+        </p:spPr>
+        <p:txBody>
+          <a:bodyPr wrap="square">
+            <a:spAutoFit/>
+          </a:bodyPr>
+          <a:lstStyle/>
+          <a:p>
+            <a:r>
+              <a:rPr sz="900" b="0" i="0">
+                <a:solidFill>
+                  <a:srgbClr val="64748B"/>
+                </a:solidFill>
+                <a:latin typeface="Montserrat"/>
+              </a:rPr>
+              <a:t>Curso Gas B · Tema 02 · Depósitos fijos de GLP (ITC-ICG 03)</a:t>
+            </a:r>
+          </a:p>
+        </p:txBody>
+      </p:sp>
+      <p:sp>
+        <p:nvSpPr>
+          <p:cNvPr id="5" name="TextBox 4"/>
+          <p:cNvSpPr txBox="1"/>
+          <p:nvPr/>
+        </p:nvSpPr>
+        <p:spPr>
+          <a:xfrm>
+            <a:off x="822960" y="457200"/>
+            <a:ext cx="10058400" cy="365760"/>
+          </a:xfrm>
+          <a:prstGeom prst="rect">
+            <a:avLst/>
+          </a:prstGeom>
+          <a:noFill/>
+        </p:spPr>
+        <p:txBody>
+          <a:bodyPr wrap="square">
+            <a:spAutoFit/>
+          </a:bodyPr>
+          <a:lstStyle/>
+          <a:p>
+            <a:r>
+              <a:rPr sz="1300" b="1" i="0">
+                <a:solidFill>
+                  <a:srgbClr val="E8801A"/>
+                </a:solidFill>
+                <a:latin typeface="Montserrat"/>
+              </a:rPr>
+              <a:t>REPASO RELÁMPAGO</a:t>
+            </a:r>
+          </a:p>
+        </p:txBody>
+      </p:sp>
+      <p:sp>
+        <p:nvSpPr>
+          <p:cNvPr id="6" name="TextBox 5"/>
+          <p:cNvSpPr txBox="1"/>
+          <p:nvPr/>
+        </p:nvSpPr>
+        <p:spPr>
+          <a:xfrm>
+            <a:off x="822960" y="868680"/>
+            <a:ext cx="10515600" cy="914400"/>
+          </a:xfrm>
+          <a:prstGeom prst="rect">
+            <a:avLst/>
+          </a:prstGeom>
+          <a:noFill/>
+        </p:spPr>
+        <p:txBody>
+          <a:bodyPr wrap="square">
+            <a:spAutoFit/>
+          </a:bodyPr>
+          <a:lstStyle/>
+          <a:p>
+            <a:r>
+              <a:rPr sz="2800" b="1" i="0">
+                <a:solidFill>
+                  <a:srgbClr val="1E2761"/>
+                </a:solidFill>
+                <a:latin typeface="Montserrat"/>
+              </a:rPr>
+              <a:t>Seis anclas antes del cierre</a:t>
+            </a:r>
+          </a:p>
+        </p:txBody>
+      </p:sp>
+      <p:sp>
+        <p:nvSpPr>
+          <p:cNvPr id="7" name="Rounded Rectangle 6"/>
+          <p:cNvSpPr/>
+          <p:nvPr/>
+        </p:nvSpPr>
+        <p:spPr>
+          <a:xfrm>
+            <a:off x="868680" y="1627632"/>
+            <a:ext cx="2011680" cy="73152"/>
+          </a:xfrm>
+          <a:prstGeom prst="roundRect">
+            <a:avLst/>
+          </a:prstGeom>
+          <a:solidFill>
+            <a:srgbClr val="E8801A"/>
+          </a:solidFill>
+          <a:ln>
+            <a:noFill/>
+          </a:ln>
+          <a:effectLst/>
+        </p:spPr>
+        <p:style>
+          <a:lnRef idx="1">
+            <a:schemeClr val="accent1"/>
+          </a:lnRef>
+          <a:fillRef idx="3">
+            <a:schemeClr val="accent1"/>
+          </a:fillRef>
+          <a:effectRef idx="2">
+            <a:schemeClr val="accent1"/>
+          </a:effectRef>
+          <a:fontRef idx="minor">
+            <a:schemeClr val="lt1"/>
+          </a:fontRef>
+        </p:style>
+        <p:txBody>
+          <a:bodyPr rtlCol="0" anchor="ctr"/>
+          <a:lstStyle/>
+          <a:p>
+            <a:pPr algn="ctr"/>
+          </a:p>
+        </p:txBody>
+      </p:sp>
+      <p:sp>
+        <p:nvSpPr>
+          <p:cNvPr id="8" name="TextBox 7"/>
+          <p:cNvSpPr txBox="1"/>
+          <p:nvPr/>
+        </p:nvSpPr>
+        <p:spPr>
+          <a:xfrm>
+            <a:off x="822960" y="1965960"/>
+            <a:ext cx="4983480" cy="4206240"/>
+          </a:xfrm>
+          <a:prstGeom prst="rect">
+            <a:avLst/>
+          </a:prstGeom>
+          <a:noFill/>
+        </p:spPr>
+        <p:txBody>
+          <a:bodyPr wrap="square">
+            <a:spAutoFit/>
+          </a:bodyPr>
+          <a:lstStyle/>
+          <a:p>
+            <a:pPr>
+              <a:spcAft>
+                <a:spcPts val="1100"/>
+              </a:spcAft>
+            </a:pPr>
+            <a:r>
+              <a:rPr sz="1600" b="1" i="0">
+                <a:solidFill>
+                  <a:srgbClr val="E8801A"/>
+                </a:solidFill>
+                <a:latin typeface="Montserrat"/>
+              </a:rPr>
+              <a:t>▸  </a:t>
+            </a:r>
+            <a:r>
+              <a:rPr sz="1600" b="0" i="0">
+                <a:solidFill>
+                  <a:srgbClr val="1B2330"/>
+                </a:solidFill>
+                <a:latin typeface="Montserrat"/>
+              </a:rPr>
+              <a:t>Topes 2.000 / 500 m³ · proyecto &gt; 13 m³</a:t>
+            </a:r>
+          </a:p>
+          <a:p>
+            <a:pPr>
+              <a:spcAft>
+                <a:spcPts val="1100"/>
+              </a:spcAft>
+            </a:pPr>
+            <a:r>
+              <a:rPr sz="1600" b="1" i="0">
+                <a:solidFill>
+                  <a:srgbClr val="E8801A"/>
+                </a:solidFill>
+                <a:latin typeface="Montserrat"/>
+              </a:rPr>
+              <a:t>▸  </a:t>
+            </a:r>
+            <a:r>
+              <a:rPr sz="1600" b="0" i="0">
+                <a:solidFill>
+                  <a:srgbClr val="1B2330"/>
+                </a:solidFill>
+                <a:latin typeface="Montserrat"/>
+              </a:rPr>
+              <a:t>Memoria la firma el instalador</a:t>
+            </a:r>
+          </a:p>
+          <a:p>
+            <a:pPr>
+              <a:spcAft>
+                <a:spcPts val="1100"/>
+              </a:spcAft>
+            </a:pPr>
+            <a:r>
+              <a:rPr sz="1600" b="1" i="0">
+                <a:solidFill>
+                  <a:srgbClr val="E8801A"/>
+                </a:solidFill>
+                <a:latin typeface="Montserrat"/>
+              </a:rPr>
+              <a:t>▸  </a:t>
+            </a:r>
+            <a:r>
+              <a:rPr sz="1600" b="0" i="0">
+                <a:solidFill>
+                  <a:srgbClr val="1B2330"/>
+                </a:solidFill>
+                <a:latin typeface="Montserrat"/>
+              </a:rPr>
+              <a:t>Primer llenado corta al 85 %</a:t>
+            </a:r>
+          </a:p>
+          <a:p>
+            <a:pPr>
+              <a:spcAft>
+                <a:spcPts val="1100"/>
+              </a:spcAft>
+            </a:pPr>
+            <a:r>
+              <a:rPr sz="1600" b="1" i="0">
+                <a:solidFill>
+                  <a:srgbClr val="E8801A"/>
+                </a:solidFill>
+                <a:latin typeface="Montserrat"/>
+              </a:rPr>
+              <a:t>▸  </a:t>
+            </a:r>
+            <a:r>
+              <a:rPr sz="1600" b="0" i="0">
+                <a:solidFill>
+                  <a:srgbClr val="1B2330"/>
+                </a:solidFill>
+                <a:latin typeface="Montserrat"/>
+              </a:rPr>
+              <a:t>Enterrado: protección catódica</a:t>
+            </a:r>
+          </a:p>
+          <a:p>
+            <a:pPr>
+              <a:spcAft>
+                <a:spcPts val="1100"/>
+              </a:spcAft>
+            </a:pPr>
+            <a:r>
+              <a:rPr sz="1600" b="1" i="0">
+                <a:solidFill>
+                  <a:srgbClr val="E8801A"/>
+                </a:solidFill>
+                <a:latin typeface="Montserrat"/>
+              </a:rPr>
+              <a:t>▸  </a:t>
+            </a:r>
+            <a:r>
+              <a:rPr sz="1600" b="0" i="0">
+                <a:solidFill>
+                  <a:srgbClr val="1B2330"/>
+                </a:solidFill>
+                <a:latin typeface="Montserrat"/>
+              </a:rPr>
+              <a:t>Prueba de presión cada 15 años</a:t>
+            </a:r>
+          </a:p>
+        </p:txBody>
+      </p:sp>
+      <p:sp>
+        <p:nvSpPr>
+          <p:cNvPr id="9" name="imgph" descr="IMGQ:LPG tank installation residential"/>
+          <p:cNvSpPr/>
+          <p:nvPr/>
+        </p:nvSpPr>
+        <p:spPr>
+          <a:xfrm>
+            <a:off x="5806440" y="1051560"/>
+            <a:ext cx="5298947" cy="4629150"/>
+          </a:xfrm>
+          <a:prstGeom prst="roundRect">
+            <a:avLst/>
+          </a:prstGeom>
+          <a:solidFill>
+            <a:srgbClr val="F3F6FB"/>
+          </a:solidFill>
+          <a:ln w="12700">
+            <a:solidFill>
+              <a:srgbClr val="C7D2E6"/>
+            </a:solidFill>
+          </a:ln>
+          <a:effectLst/>
+        </p:spPr>
+        <p:style>
+          <a:lnRef idx="1">
+            <a:schemeClr val="accent1"/>
+          </a:lnRef>
+          <a:fillRef idx="3">
+            <a:schemeClr val="accent1"/>
+          </a:fillRef>
+          <a:effectRef idx="2">
+            <a:schemeClr val="accent1"/>
+          </a:effectRef>
+          <a:fontRef idx="minor">
+            <a:schemeClr val="lt1"/>
+          </a:fontRef>
+        </p:style>
+        <p:txBody>
+          <a:bodyPr rtlCol="0" anchor="ctr"/>
+          <a:lstStyle/>
+          <a:p>
+            <a:pPr algn="ctr"/>
+          </a:p>
+        </p:txBody>
+      </p:sp>
+      <p:sp>
+        <p:nvSpPr>
+          <p:cNvPr id="10" name="TextBox 9"/>
+          <p:cNvSpPr txBox="1"/>
+          <p:nvPr/>
+        </p:nvSpPr>
+        <p:spPr>
+          <a:xfrm>
+            <a:off x="6080760" y="2726055"/>
+            <a:ext cx="4750307" cy="1280160"/>
+          </a:xfrm>
+          <a:prstGeom prst="rect">
+            <a:avLst/>
+          </a:prstGeom>
+          <a:noFill/>
+        </p:spPr>
+        <p:txBody>
+          <a:bodyPr wrap="square">
+            <a:spAutoFit/>
+          </a:bodyPr>
+          <a:lstStyle/>
+          <a:p>
+            <a:pPr algn="ctr"/>
+            <a:r>
+              <a:rPr sz="1400" b="1" i="0">
+                <a:solidFill>
+                  <a:srgbClr val="64748B"/>
+                </a:solidFill>
+                <a:latin typeface="Montserrat"/>
+              </a:rPr>
+              <a:t>IMAGEN REALISTA</a:t>
+            </a:r>
+          </a:p>
+          <a:p>
+            <a:pPr algn="ctr"/>
+            <a:r>
+              <a:rPr sz="1100" b="0" i="1">
+                <a:solidFill>
+                  <a:srgbClr val="64748B"/>
+                </a:solidFill>
+                <a:latin typeface="Montserrat"/>
+              </a:rPr>
+              <a:t>LPG tank installation residential</a:t>
+            </a:r>
+          </a:p>
+        </p:txBody>
+      </p:sp>
+    </p:spTree>
+  </p:cSld>
+  <p:clrMapOvr>
+    <a:masterClrMapping/>
+  </p:clrMapOvr>
+</p:sld>
+</file>
+
+<file path=ppt/slides/slide21.xml><?xml version="1.0" encoding="utf-8"?>
+<p:sld xmlns:a="http://schemas.openxmlformats.org/drawingml/2006/main" xmlns:p="http://schemas.openxmlformats.org/presentationml/2006/main" xmlns:r="http://schemas.openxmlformats.org/officeDocument/2006/relationships">
+  <p:cSld>
+    <p:spTree>
+      <p:nvGrpSpPr>
+        <p:cNvPr id="1" name=""/>
+        <p:cNvGrpSpPr/>
+        <p:nvPr/>
+      </p:nvGrpSpPr>
+      <p:grpSpPr/>
+      <p:sp>
+        <p:nvSpPr>
+          <p:cNvPr id="2" name="Rectangle 1"/>
+          <p:cNvSpPr/>
+          <p:nvPr/>
+        </p:nvSpPr>
+        <p:spPr>
+          <a:xfrm>
+            <a:off x="0" y="0"/>
+            <a:ext cx="12191695" cy="6858000"/>
+          </a:xfrm>
+          <a:prstGeom prst="rect">
+            <a:avLst/>
+          </a:prstGeom>
+          <a:solidFill>
             <a:srgbClr val="1E2761"/>
           </a:solidFill>
           <a:ln>
@@ -9899,7 +10953,7 @@
             <a:r>
               <a:rPr sz="1400" b="1" i="0">
                 <a:solidFill>
-                  <a:srgbClr val="CADCFC"/>
+                  <a:srgbClr val="F4A24C"/>
                 </a:solidFill>
                 <a:latin typeface="Montserrat"/>
               </a:rPr>
@@ -9910,13 +10964,57 @@
       </p:sp>
       <p:sp>
         <p:nvSpPr>
-          <p:cNvPr id="4" name="TextBox 3"/>
+          <p:cNvPr id="4" name="Rounded Rectangle 3"/>
+          <p:cNvSpPr/>
+          <p:nvPr/>
+        </p:nvSpPr>
+        <p:spPr>
+          <a:xfrm>
+            <a:off x="868680" y="1051560"/>
+            <a:ext cx="1463040" cy="82296"/>
+          </a:xfrm>
+          <a:prstGeom prst="roundRect">
+            <a:avLst/>
+          </a:prstGeom>
+          <a:solidFill>
+            <a:srgbClr val="E8801A"/>
+          </a:solidFill>
+          <a:ln>
+            <a:noFill/>
+          </a:ln>
+          <a:effectLst/>
+        </p:spPr>
+        <p:style>
+          <a:lnRef idx="1">
+            <a:schemeClr val="accent1"/>
+          </a:lnRef>
+          <a:fillRef idx="3">
+            <a:schemeClr val="accent1"/>
+          </a:fillRef>
+          <a:effectRef idx="2">
+            <a:schemeClr val="accent1"/>
+          </a:effectRef>
+          <a:fontRef idx="minor">
+            <a:schemeClr val="lt1"/>
+          </a:fontRef>
+        </p:style>
+        <p:txBody>
+          <a:bodyPr rtlCol="0" anchor="ctr"/>
+          <a:lstStyle/>
+          <a:p>
+            <a:pPr algn="ctr"/>
+          </a:p>
+        </p:txBody>
+      </p:sp>
+      <p:sp>
+        <p:nvSpPr>
+          <p:cNvPr id="5" name="TextBox 4"/>
           <p:cNvSpPr txBox="1"/>
           <p:nvPr/>
         </p:nvSpPr>
         <p:spPr>
           <a:xfrm>
-            <a:off x="822960" y="1143000"/>
+            <a:off x="822960" y="1234440"/>
             <a:ext cx="10515600" cy="1097280"/>
           </a:xfrm>
           <a:prstGeom prst="rect">
@@ -9944,14 +11042,14 @@
       </p:sp>
       <p:sp>
         <p:nvSpPr>
-          <p:cNvPr id="5" name="TextBox 4"/>
+          <p:cNvPr id="6" name="TextBox 5"/>
           <p:cNvSpPr txBox="1"/>
           <p:nvPr/>
         </p:nvSpPr>
         <p:spPr>
           <a:xfrm>
-            <a:off x="822960" y="2514600"/>
-            <a:ext cx="10515600" cy="2834640"/>
+            <a:off x="822960" y="2606040"/>
+            <a:ext cx="10515600" cy="2743200"/>
           </a:xfrm>
           <a:prstGeom prst="rect">
             <a:avLst/>
@@ -9972,7 +11070,7 @@
             <a:r>
               <a:rPr sz="2000" b="1" i="0">
                 <a:solidFill>
-                  <a:srgbClr val="CADCFC"/>
+                  <a:srgbClr val="F4A24C"/>
                 </a:solidFill>
                 <a:latin typeface="Montserrat"/>
               </a:rPr>
@@ -9997,7 +11095,7 @@
             <a:r>
               <a:rPr sz="2000" b="1" i="0">
                 <a:solidFill>
-                  <a:srgbClr val="CADCFC"/>
+                  <a:srgbClr val="F4A24C"/>
                 </a:solidFill>
                 <a:latin typeface="Montserrat"/>
               </a:rPr>
@@ -10022,7 +11120,7 @@
             <a:r>
               <a:rPr sz="2000" b="1" i="0">
                 <a:solidFill>
-                  <a:srgbClr val="CADCFC"/>
+                  <a:srgbClr val="F4A24C"/>
                 </a:solidFill>
                 <a:latin typeface="Montserrat"/>
               </a:rPr>
@@ -10047,7 +11145,7 @@
             <a:r>
               <a:rPr sz="2000" b="1" i="0">
                 <a:solidFill>
-                  <a:srgbClr val="CADCFC"/>
+                  <a:srgbClr val="F4A24C"/>
                 </a:solidFill>
                 <a:latin typeface="Montserrat"/>
               </a:rPr>
@@ -10067,20 +11165,20 @@
       </p:sp>
       <p:sp>
         <p:nvSpPr>
-          <p:cNvPr id="6" name="Rounded Rectangle 5"/>
+          <p:cNvPr id="7" name="Rounded Rectangle 6"/>
           <p:cNvSpPr/>
           <p:nvPr/>
         </p:nvSpPr>
         <p:spPr>
           <a:xfrm>
             <a:off x="822960" y="5532120"/>
-            <a:ext cx="10515600" cy="777240"/>
+            <a:ext cx="10515600" cy="822960"/>
           </a:xfrm>
           <a:prstGeom prst="roundRect">
             <a:avLst/>
           </a:prstGeom>
           <a:solidFill>
-            <a:srgbClr val="2E3A80"/>
+            <a:srgbClr val="E8801A"/>
           </a:solidFill>
           <a:ln>
             <a:noFill/>
@@ -10111,13 +11209,13 @@
       </p:sp>
       <p:sp>
         <p:nvSpPr>
-          <p:cNvPr id="7" name="TextBox 6"/>
+          <p:cNvPr id="8" name="TextBox 7"/>
           <p:cNvSpPr txBox="1"/>
           <p:nvPr/>
         </p:nvSpPr>
         <p:spPr>
           <a:xfrm>
-            <a:off x="1051560" y="5605272"/>
+            <a:off x="1051560" y="5623560"/>
             <a:ext cx="10058400" cy="640080"/>
           </a:xfrm>
           <a:prstGeom prst="rect">
@@ -10134,7 +11232,7 @@
             <a:r>
               <a:rPr sz="1500" b="1" i="1">
                 <a:solidFill>
-                  <a:srgbClr val="CADCFC"/>
+                  <a:srgbClr val="1E2761"/>
                 </a:solidFill>
                 <a:latin typeface="Montserrat"/>
               </a:rPr>
@@ -10235,7 +11333,7 @@
                 </a:solidFill>
                 <a:latin typeface="Montserrat"/>
               </a:rPr>
-              <a:t>003 / 020</a:t>
+              <a:t>003 / 021</a:t>
             </a:r>
           </a:p>
         </p:txBody>
@@ -10282,7 +11380,7 @@
         </p:nvSpPr>
         <p:spPr>
           <a:xfrm>
-            <a:off x="822960" y="457200"/>
+            <a:off x="822960" y="502920"/>
             <a:ext cx="8229600" cy="365760"/>
           </a:xfrm>
           <a:prstGeom prst="rect">
@@ -10297,13 +11395,13 @@
           <a:lstStyle/>
           <a:p>
             <a:r>
-              <a:rPr sz="1200" b="1" i="0">
-                <a:solidFill>
-                  <a:srgbClr val="64748B"/>
-                </a:solidFill>
-                <a:latin typeface="Montserrat"/>
-              </a:rPr>
-              <a:t>APARTADOS 1 Y 2 · OBJETO</a:t>
+              <a:rPr sz="1300" b="1" i="0">
+                <a:solidFill>
+                  <a:srgbClr val="E8801A"/>
+                </a:solidFill>
+                <a:latin typeface="Montserrat"/>
+              </a:rPr>
+              <a:t>PARTES DE ESTE VÍDEO</a:t>
             </a:r>
           </a:p>
         </p:txBody>
@@ -10316,7 +11414,7 @@
         </p:nvSpPr>
         <p:spPr>
           <a:xfrm>
-            <a:off x="822960" y="868680"/>
+            <a:off x="822960" y="914400"/>
             <a:ext cx="10515600" cy="914400"/>
           </a:xfrm>
           <a:prstGeom prst="rect">
@@ -10337,155 +11435,30 @@
                 </a:solidFill>
                 <a:latin typeface="Montserrat"/>
               </a:rPr>
-              <a:t>Qué regula y hasta dónde</a:t>
-            </a:r>
-          </a:p>
-        </p:txBody>
-      </p:sp>
-      <p:sp>
-        <p:nvSpPr>
-          <p:cNvPr id="7" name="TextBox 6"/>
-          <p:cNvSpPr txBox="1"/>
-          <p:nvPr/>
-        </p:nvSpPr>
-        <p:spPr>
-          <a:xfrm>
-            <a:off x="822960" y="1920240"/>
-            <a:ext cx="4983480" cy="4206240"/>
-          </a:xfrm>
-          <a:prstGeom prst="rect">
-            <a:avLst/>
-          </a:prstGeom>
-          <a:noFill/>
-        </p:spPr>
-        <p:txBody>
-          <a:bodyPr wrap="square">
-            <a:spAutoFit/>
-          </a:bodyPr>
-          <a:lstStyle/>
-          <a:p>
-            <a:pPr>
-              <a:spcAft>
-                <a:spcPts val="1000"/>
-              </a:spcAft>
-            </a:pPr>
-            <a:r>
-              <a:rPr sz="1600" b="1" i="0">
-                <a:solidFill>
-                  <a:srgbClr val="2E3A80"/>
-                </a:solidFill>
-                <a:latin typeface="Montserrat"/>
-              </a:rPr>
-              <a:t>•  </a:t>
-            </a:r>
-            <a:r>
-              <a:rPr sz="1600" b="0" i="0">
-                <a:solidFill>
-                  <a:srgbClr val="1B2330"/>
-                </a:solidFill>
-                <a:latin typeface="Montserrat"/>
-              </a:rPr>
-              <a:t>Almacenamiento de GLP en depósitos fijos</a:t>
-            </a:r>
-          </a:p>
-          <a:p>
-            <a:pPr>
-              <a:spcAft>
-                <a:spcPts val="1000"/>
-              </a:spcAft>
-            </a:pPr>
-            <a:r>
-              <a:rPr sz="1600" b="1" i="0">
-                <a:solidFill>
-                  <a:srgbClr val="2E3A80"/>
-                </a:solidFill>
-                <a:latin typeface="Montserrat"/>
-              </a:rPr>
-              <a:t>•  </a:t>
-            </a:r>
-            <a:r>
-              <a:rPr sz="1600" b="0" i="0">
-                <a:solidFill>
-                  <a:srgbClr val="1B2330"/>
-                </a:solidFill>
-                <a:latin typeface="Montserrat"/>
-              </a:rPr>
-              <a:t>De la boca de carga a las válvulas de salida</a:t>
-            </a:r>
-          </a:p>
-          <a:p>
-            <a:pPr>
-              <a:spcAft>
-                <a:spcPts val="1000"/>
-              </a:spcAft>
-            </a:pPr>
-            <a:r>
-              <a:rPr sz="1600" b="1" i="0">
-                <a:solidFill>
-                  <a:srgbClr val="2E3A80"/>
-                </a:solidFill>
-                <a:latin typeface="Montserrat"/>
-              </a:rPr>
-              <a:t>•  </a:t>
-            </a:r>
-            <a:r>
-              <a:rPr sz="1600" b="0" i="0">
-                <a:solidFill>
-                  <a:srgbClr val="1B2330"/>
-                </a:solidFill>
-                <a:latin typeface="Montserrat"/>
-              </a:rPr>
-              <a:t>Superficie: hasta 2.000 m³</a:t>
-            </a:r>
-          </a:p>
-          <a:p>
-            <a:pPr>
-              <a:spcAft>
-                <a:spcPts val="1000"/>
-              </a:spcAft>
-            </a:pPr>
-            <a:r>
-              <a:rPr sz="1600" b="1" i="0">
-                <a:solidFill>
-                  <a:srgbClr val="2E3A80"/>
-                </a:solidFill>
-                <a:latin typeface="Montserrat"/>
-              </a:rPr>
-              <a:t>•  </a:t>
-            </a:r>
-            <a:r>
-              <a:rPr sz="1600" b="0" i="0">
-                <a:solidFill>
-                  <a:srgbClr val="1B2330"/>
-                </a:solidFill>
-                <a:latin typeface="Montserrat"/>
-              </a:rPr>
-              <a:t>Enterrados: hasta 500 m³</a:t>
-            </a:r>
-          </a:p>
-        </p:txBody>
-      </p:sp>
-      <p:sp>
-        <p:nvSpPr>
-          <p:cNvPr id="8" name="imgph" descr="IMGQ:large LPG storage tank garden"/>
+              <a:t>En este vídeo</a:t>
+            </a:r>
+          </a:p>
+        </p:txBody>
+      </p:sp>
+      <p:sp>
+        <p:nvSpPr>
+          <p:cNvPr id="7" name="Rounded Rectangle 6"/>
           <p:cNvSpPr/>
           <p:nvPr/>
         </p:nvSpPr>
         <p:spPr>
           <a:xfrm>
-            <a:off x="5806440" y="1051560"/>
-            <a:ext cx="5298947" cy="4629150"/>
+            <a:off x="868680" y="1673352"/>
+            <a:ext cx="2011680" cy="73152"/>
           </a:xfrm>
           <a:prstGeom prst="roundRect">
             <a:avLst/>
           </a:prstGeom>
           <a:solidFill>
-            <a:srgbClr val="F3F6FB"/>
+            <a:srgbClr val="E8801A"/>
           </a:solidFill>
-          <a:ln w="12700">
-            <a:solidFill>
-              <a:srgbClr val="C7D2E6"/>
-            </a:solidFill>
+          <a:ln>
+            <a:noFill/>
           </a:ln>
           <a:effectLst/>
         </p:spPr>
@@ -10513,14 +11486,14 @@
       </p:sp>
       <p:sp>
         <p:nvSpPr>
-          <p:cNvPr id="9" name="TextBox 8"/>
+          <p:cNvPr id="8" name="TextBox 7"/>
           <p:cNvSpPr txBox="1"/>
           <p:nvPr/>
         </p:nvSpPr>
         <p:spPr>
           <a:xfrm>
-            <a:off x="6080760" y="2726055"/>
-            <a:ext cx="4750307" cy="1280160"/>
+            <a:off x="822960" y="2103120"/>
+            <a:ext cx="10515600" cy="4023360"/>
           </a:xfrm>
           <a:prstGeom prst="rect">
             <a:avLst/>
@@ -10533,27 +11506,228 @@
           </a:bodyPr>
           <a:lstStyle/>
           <a:p>
-            <a:pPr algn="ctr"/>
-            <a:r>
-              <a:rPr sz="1400" b="1" i="0">
-                <a:solidFill>
-                  <a:srgbClr val="64748B"/>
-                </a:solidFill>
-                <a:latin typeface="Montserrat"/>
-              </a:rPr>
-              <a:t>IMAGEN REALISTA</a:t>
-            </a:r>
-          </a:p>
-          <a:p>
-            <a:pPr algn="ctr"/>
-            <a:r>
-              <a:rPr sz="1100" b="0" i="1">
-                <a:solidFill>
-                  <a:srgbClr val="64748B"/>
-                </a:solidFill>
-                <a:latin typeface="Montserrat"/>
-              </a:rPr>
-              <a:t>large LPG storage tank garden</a:t>
+            <a:pPr>
+              <a:spcAft>
+                <a:spcPts val="900"/>
+              </a:spcAft>
+            </a:pPr>
+            <a:r>
+              <a:rPr sz="1800" b="1" i="0">
+                <a:solidFill>
+                  <a:srgbClr val="E8801A"/>
+                </a:solidFill>
+                <a:latin typeface="Montserrat"/>
+              </a:rPr>
+              <a:t>01   </a:t>
+            </a:r>
+            <a:r>
+              <a:rPr sz="1700" b="0" i="0">
+                <a:solidFill>
+                  <a:srgbClr val="1B2330"/>
+                </a:solidFill>
+                <a:latin typeface="Montserrat"/>
+              </a:rPr>
+              <a:t>Apartados 1 y 2</a:t>
+            </a:r>
+          </a:p>
+          <a:p>
+            <a:pPr>
+              <a:spcAft>
+                <a:spcPts val="900"/>
+              </a:spcAft>
+            </a:pPr>
+            <a:r>
+              <a:rPr sz="1800" b="1" i="0">
+                <a:solidFill>
+                  <a:srgbClr val="E8801A"/>
+                </a:solidFill>
+                <a:latin typeface="Montserrat"/>
+              </a:rPr>
+              <a:t>02   </a:t>
+            </a:r>
+            <a:r>
+              <a:rPr sz="1700" b="0" i="0">
+                <a:solidFill>
+                  <a:srgbClr val="1B2330"/>
+                </a:solidFill>
+                <a:latin typeface="Montserrat"/>
+              </a:rPr>
+              <a:t>Apartados 2 y 3</a:t>
+            </a:r>
+          </a:p>
+          <a:p>
+            <a:pPr>
+              <a:spcAft>
+                <a:spcPts val="900"/>
+              </a:spcAft>
+            </a:pPr>
+            <a:r>
+              <a:rPr sz="1800" b="1" i="0">
+                <a:solidFill>
+                  <a:srgbClr val="E8801A"/>
+                </a:solidFill>
+                <a:latin typeface="Montserrat"/>
+              </a:rPr>
+              <a:t>03   </a:t>
+            </a:r>
+            <a:r>
+              <a:rPr sz="1700" b="0" i="0">
+                <a:solidFill>
+                  <a:srgbClr val="1B2330"/>
+                </a:solidFill>
+                <a:latin typeface="Montserrat"/>
+              </a:rPr>
+              <a:t>Apartado 5.1</a:t>
+            </a:r>
+          </a:p>
+          <a:p>
+            <a:pPr>
+              <a:spcAft>
+                <a:spcPts val="900"/>
+              </a:spcAft>
+            </a:pPr>
+            <a:r>
+              <a:rPr sz="1800" b="1" i="0">
+                <a:solidFill>
+                  <a:srgbClr val="E8801A"/>
+                </a:solidFill>
+                <a:latin typeface="Montserrat"/>
+              </a:rPr>
+              <a:t>04   </a:t>
+            </a:r>
+            <a:r>
+              <a:rPr sz="1700" b="0" i="0">
+                <a:solidFill>
+                  <a:srgbClr val="1B2330"/>
+                </a:solidFill>
+                <a:latin typeface="Montserrat"/>
+              </a:rPr>
+              <a:t>Apartado 5.2</a:t>
+            </a:r>
+          </a:p>
+          <a:p>
+            <a:pPr>
+              <a:spcAft>
+                <a:spcPts val="900"/>
+              </a:spcAft>
+            </a:pPr>
+            <a:r>
+              <a:rPr sz="1800" b="1" i="0">
+                <a:solidFill>
+                  <a:srgbClr val="E8801A"/>
+                </a:solidFill>
+                <a:latin typeface="Montserrat"/>
+              </a:rPr>
+              <a:t>05   </a:t>
+            </a:r>
+            <a:r>
+              <a:rPr sz="1700" b="0" i="0">
+                <a:solidFill>
+                  <a:srgbClr val="1B2330"/>
+                </a:solidFill>
+                <a:latin typeface="Montserrat"/>
+              </a:rPr>
+              <a:t>Apartado 5.3</a:t>
+            </a:r>
+          </a:p>
+          <a:p>
+            <a:pPr>
+              <a:spcAft>
+                <a:spcPts val="900"/>
+              </a:spcAft>
+            </a:pPr>
+            <a:r>
+              <a:rPr sz="1800" b="1" i="0">
+                <a:solidFill>
+                  <a:srgbClr val="E8801A"/>
+                </a:solidFill>
+                <a:latin typeface="Montserrat"/>
+              </a:rPr>
+              <a:t>06   </a:t>
+            </a:r>
+            <a:r>
+              <a:rPr sz="1700" b="0" i="0">
+                <a:solidFill>
+                  <a:srgbClr val="1B2330"/>
+                </a:solidFill>
+                <a:latin typeface="Montserrat"/>
+              </a:rPr>
+              <a:t>Apartado 5.4</a:t>
+            </a:r>
+          </a:p>
+          <a:p>
+            <a:pPr>
+              <a:spcAft>
+                <a:spcPts val="900"/>
+              </a:spcAft>
+            </a:pPr>
+            <a:r>
+              <a:rPr sz="1800" b="1" i="0">
+                <a:solidFill>
+                  <a:srgbClr val="E8801A"/>
+                </a:solidFill>
+                <a:latin typeface="Montserrat"/>
+              </a:rPr>
+              <a:t>07   </a:t>
+            </a:r>
+            <a:r>
+              <a:rPr sz="1700" b="0" i="0">
+                <a:solidFill>
+                  <a:srgbClr val="1B2330"/>
+                </a:solidFill>
+                <a:latin typeface="Montserrat"/>
+              </a:rPr>
+              <a:t>Apartado 5.5</a:t>
+            </a:r>
+          </a:p>
+          <a:p>
+            <a:pPr>
+              <a:spcAft>
+                <a:spcPts val="900"/>
+              </a:spcAft>
+            </a:pPr>
+            <a:r>
+              <a:rPr sz="1800" b="1" i="0">
+                <a:solidFill>
+                  <a:srgbClr val="E8801A"/>
+                </a:solidFill>
+                <a:latin typeface="Montserrat"/>
+              </a:rPr>
+              <a:t>08   </a:t>
+            </a:r>
+            <a:r>
+              <a:rPr sz="1700" b="0" i="0">
+                <a:solidFill>
+                  <a:srgbClr val="1B2330"/>
+                </a:solidFill>
+                <a:latin typeface="Montserrat"/>
+              </a:rPr>
+              <a:t>Apartado 5.6</a:t>
+            </a:r>
+          </a:p>
+          <a:p>
+            <a:pPr>
+              <a:spcAft>
+                <a:spcPts val="900"/>
+              </a:spcAft>
+            </a:pPr>
+            <a:r>
+              <a:rPr sz="1800" b="1" i="0">
+                <a:solidFill>
+                  <a:srgbClr val="E8801A"/>
+                </a:solidFill>
+                <a:latin typeface="Montserrat"/>
+              </a:rPr>
+              <a:t>09   </a:t>
+            </a:r>
+            <a:r>
+              <a:rPr sz="1700" b="0" i="0">
+                <a:solidFill>
+                  <a:srgbClr val="1B2330"/>
+                </a:solidFill>
+                <a:latin typeface="Montserrat"/>
+              </a:rPr>
+              <a:t>Apartado 6.1</a:t>
             </a:r>
           </a:p>
         </p:txBody>
@@ -10650,7 +11824,7 @@
                 </a:solidFill>
                 <a:latin typeface="Montserrat"/>
               </a:rPr>
-              <a:t>004 / 020</a:t>
+              <a:t>004 / 021</a:t>
             </a:r>
           </a:p>
         </p:txBody>
@@ -10698,7 +11872,7 @@
         <p:spPr>
           <a:xfrm>
             <a:off x="822960" y="457200"/>
-            <a:ext cx="8229600" cy="365760"/>
+            <a:ext cx="10058400" cy="365760"/>
           </a:xfrm>
           <a:prstGeom prst="rect">
             <a:avLst/>
@@ -10712,13 +11886,13 @@
           <a:lstStyle/>
           <a:p>
             <a:r>
-              <a:rPr sz="1200" b="1" i="0">
-                <a:solidFill>
-                  <a:srgbClr val="64748B"/>
-                </a:solidFill>
-                <a:latin typeface="Montserrat"/>
-              </a:rPr>
-              <a:t>APARTADOS 2 Y 3 · NORMA</a:t>
+              <a:rPr sz="1300" b="1" i="0">
+                <a:solidFill>
+                  <a:srgbClr val="E8801A"/>
+                </a:solidFill>
+                <a:latin typeface="Montserrat"/>
+              </a:rPr>
+              <a:t>APARTADOS 1 Y 2 · OBJETO</a:t>
             </a:r>
           </a:p>
         </p:txBody>
@@ -10746,26 +11920,70 @@
           <a:lstStyle/>
           <a:p>
             <a:r>
-              <a:rPr sz="2700" b="1" i="0">
+              <a:rPr sz="2800" b="1" i="0">
                 <a:solidFill>
                   <a:srgbClr val="1E2761"/>
                 </a:solidFill>
                 <a:latin typeface="Montserrat"/>
               </a:rPr>
-              <a:t>Manda la UNE 60250</a:t>
-            </a:r>
-          </a:p>
-        </p:txBody>
-      </p:sp>
-      <p:sp>
-        <p:nvSpPr>
-          <p:cNvPr id="7" name="TextBox 6"/>
+              <a:t>Qué regula y hasta dónde</a:t>
+            </a:r>
+          </a:p>
+        </p:txBody>
+      </p:sp>
+      <p:sp>
+        <p:nvSpPr>
+          <p:cNvPr id="7" name="Rounded Rectangle 6"/>
+          <p:cNvSpPr/>
+          <p:nvPr/>
+        </p:nvSpPr>
+        <p:spPr>
+          <a:xfrm>
+            <a:off x="868680" y="1627632"/>
+            <a:ext cx="2011680" cy="73152"/>
+          </a:xfrm>
+          <a:prstGeom prst="roundRect">
+            <a:avLst/>
+          </a:prstGeom>
+          <a:solidFill>
+            <a:srgbClr val="E8801A"/>
+          </a:solidFill>
+          <a:ln>
+            <a:noFill/>
+          </a:ln>
+          <a:effectLst/>
+        </p:spPr>
+        <p:style>
+          <a:lnRef idx="1">
+            <a:schemeClr val="accent1"/>
+          </a:lnRef>
+          <a:fillRef idx="3">
+            <a:schemeClr val="accent1"/>
+          </a:fillRef>
+          <a:effectRef idx="2">
+            <a:schemeClr val="accent1"/>
+          </a:effectRef>
+          <a:fontRef idx="minor">
+            <a:schemeClr val="lt1"/>
+          </a:fontRef>
+        </p:style>
+        <p:txBody>
+          <a:bodyPr rtlCol="0" anchor="ctr"/>
+          <a:lstStyle/>
+          <a:p>
+            <a:pPr algn="ctr"/>
+          </a:p>
+        </p:txBody>
+      </p:sp>
+      <p:sp>
+        <p:nvSpPr>
+          <p:cNvPr id="8" name="TextBox 7"/>
           <p:cNvSpPr txBox="1"/>
           <p:nvPr/>
         </p:nvSpPr>
         <p:spPr>
           <a:xfrm>
-            <a:off x="822960" y="1920240"/>
+            <a:off x="822960" y="1965960"/>
             <a:ext cx="4983480" cy="4206240"/>
           </a:xfrm>
           <a:prstGeom prst="rect">
@@ -10781,17 +11999,17 @@
           <a:p>
             <a:pPr>
               <a:spcAft>
-                <a:spcPts val="1000"/>
+                <a:spcPts val="1100"/>
               </a:spcAft>
             </a:pPr>
             <a:r>
               <a:rPr sz="1600" b="1" i="0">
                 <a:solidFill>
-                  <a:srgbClr val="2E3A80"/>
-                </a:solidFill>
-                <a:latin typeface="Montserrat"/>
-              </a:rPr>
-              <a:t>•  </a:t>
+                  <a:srgbClr val="E8801A"/>
+                </a:solidFill>
+                <a:latin typeface="Montserrat"/>
+              </a:rPr>
+              <a:t>▸  </a:t>
             </a:r>
             <a:r>
               <a:rPr sz="1600" b="0" i="0">
@@ -10800,23 +12018,23 @@
                 </a:solidFill>
                 <a:latin typeface="Montserrat"/>
               </a:rPr>
-              <a:t>Clasifica por volumen geométrico total</a:t>
+              <a:t>Almacenamiento de GLP en depósitos fijos</a:t>
             </a:r>
           </a:p>
           <a:p>
             <a:pPr>
               <a:spcAft>
-                <a:spcPts val="1000"/>
+                <a:spcPts val="1100"/>
               </a:spcAft>
             </a:pPr>
             <a:r>
               <a:rPr sz="1600" b="1" i="0">
                 <a:solidFill>
-                  <a:srgbClr val="2E3A80"/>
-                </a:solidFill>
-                <a:latin typeface="Montserrat"/>
-              </a:rPr>
-              <a:t>•  </a:t>
+                  <a:srgbClr val="E8801A"/>
+                </a:solidFill>
+                <a:latin typeface="Montserrat"/>
+              </a:rPr>
+              <a:t>▸  </a:t>
             </a:r>
             <a:r>
               <a:rPr sz="1600" b="0" i="0">
@@ -10825,23 +12043,23 @@
                 </a:solidFill>
                 <a:latin typeface="Montserrat"/>
               </a:rPr>
-              <a:t>Diseño, distancias, pruebas: según UNE</a:t>
+              <a:t>De la boca de carga a las válvulas de salida</a:t>
             </a:r>
           </a:p>
           <a:p>
             <a:pPr>
               <a:spcAft>
-                <a:spcPts val="1000"/>
+                <a:spcPts val="1100"/>
               </a:spcAft>
             </a:pPr>
             <a:r>
               <a:rPr sz="1600" b="1" i="0">
                 <a:solidFill>
-                  <a:srgbClr val="2E3A80"/>
-                </a:solidFill>
-                <a:latin typeface="Montserrat"/>
-              </a:rPr>
-              <a:t>•  </a:t>
+                  <a:srgbClr val="E8801A"/>
+                </a:solidFill>
+                <a:latin typeface="Montserrat"/>
+              </a:rPr>
+              <a:t>▸  </a:t>
             </a:r>
             <a:r>
               <a:rPr sz="1600" b="0" i="0">
@@ -10850,23 +12068,23 @@
                 </a:solidFill>
                 <a:latin typeface="Montserrat"/>
               </a:rPr>
-              <a:t>Recambio ±10 %: sin proyecto nuevo</a:t>
+              <a:t>Superficie: hasta 2.000 m³</a:t>
             </a:r>
           </a:p>
           <a:p>
             <a:pPr>
               <a:spcAft>
-                <a:spcPts val="1000"/>
+                <a:spcPts val="1100"/>
               </a:spcAft>
             </a:pPr>
             <a:r>
               <a:rPr sz="1600" b="1" i="0">
                 <a:solidFill>
-                  <a:srgbClr val="2E3A80"/>
-                </a:solidFill>
-                <a:latin typeface="Montserrat"/>
-              </a:rPr>
-              <a:t>•  </a:t>
+                  <a:srgbClr val="E8801A"/>
+                </a:solidFill>
+                <a:latin typeface="Montserrat"/>
+              </a:rPr>
+              <a:t>▸  </a:t>
             </a:r>
             <a:r>
               <a:rPr sz="1600" b="0" i="0">
@@ -10875,14 +12093,14 @@
                 </a:solidFill>
                 <a:latin typeface="Montserrat"/>
               </a:rPr>
-              <a:t>Basta memoria justificativa del instalador</a:t>
-            </a:r>
-          </a:p>
-        </p:txBody>
-      </p:sp>
-      <p:sp>
-        <p:nvSpPr>
-          <p:cNvPr id="8" name="imgph" descr="IMGQ:technical standard document engineering"/>
+              <a:t>Enterrados: hasta 500 m³</a:t>
+            </a:r>
+          </a:p>
+        </p:txBody>
+      </p:sp>
+      <p:sp>
+        <p:nvSpPr>
+          <p:cNvPr id="9" name="imgph" descr="IMGQ:large LPG storage tank garden"/>
           <p:cNvSpPr/>
           <p:nvPr/>
         </p:nvSpPr>
@@ -10928,7 +12146,7 @@
       </p:sp>
       <p:sp>
         <p:nvSpPr>
-          <p:cNvPr id="9" name="TextBox 8"/>
+          <p:cNvPr id="10" name="TextBox 9"/>
           <p:cNvSpPr txBox="1"/>
           <p:nvPr/>
         </p:nvSpPr>
@@ -10968,7 +12186,7 @@
                 </a:solidFill>
                 <a:latin typeface="Montserrat"/>
               </a:rPr>
-              <a:t>technical standard document engineering</a:t>
+              <a:t>large LPG storage tank garden</a:t>
             </a:r>
           </a:p>
         </p:txBody>
@@ -11065,7 +12283,7 @@
                 </a:solidFill>
                 <a:latin typeface="Montserrat"/>
               </a:rPr>
-              <a:t>005 / 020</a:t>
+              <a:t>005 / 021</a:t>
             </a:r>
           </a:p>
         </p:txBody>
@@ -11113,7 +12331,7 @@
         <p:spPr>
           <a:xfrm>
             <a:off x="822960" y="457200"/>
-            <a:ext cx="8229600" cy="365760"/>
+            <a:ext cx="10058400" cy="365760"/>
           </a:xfrm>
           <a:prstGeom prst="rect">
             <a:avLst/>
@@ -11127,13 +12345,13 @@
           <a:lstStyle/>
           <a:p>
             <a:r>
-              <a:rPr sz="1200" b="1" i="0">
-                <a:solidFill>
-                  <a:srgbClr val="64748B"/>
-                </a:solidFill>
-                <a:latin typeface="Montserrat"/>
-              </a:rPr>
-              <a:t>APARTADO 5.1 · AUTORIZACIÓN</a:t>
+              <a:rPr sz="1300" b="1" i="0">
+                <a:solidFill>
+                  <a:srgbClr val="E8801A"/>
+                </a:solidFill>
+                <a:latin typeface="Montserrat"/>
+              </a:rPr>
+              <a:t>APARTADOS 2 Y 3 · NORMA</a:t>
             </a:r>
           </a:p>
         </p:txBody>
@@ -11161,26 +12379,70 @@
           <a:lstStyle/>
           <a:p>
             <a:r>
-              <a:rPr sz="2700" b="1" i="0">
+              <a:rPr sz="2800" b="1" i="0">
                 <a:solidFill>
                   <a:srgbClr val="1E2761"/>
                 </a:solidFill>
                 <a:latin typeface="Montserrat"/>
               </a:rPr>
-              <a:t>¿Hace falta permiso previo?</a:t>
-            </a:r>
-          </a:p>
-        </p:txBody>
-      </p:sp>
-      <p:sp>
-        <p:nvSpPr>
-          <p:cNvPr id="7" name="TextBox 6"/>
+              <a:t>Manda la UNE 60250</a:t>
+            </a:r>
+          </a:p>
+        </p:txBody>
+      </p:sp>
+      <p:sp>
+        <p:nvSpPr>
+          <p:cNvPr id="7" name="Rounded Rectangle 6"/>
+          <p:cNvSpPr/>
+          <p:nvPr/>
+        </p:nvSpPr>
+        <p:spPr>
+          <a:xfrm>
+            <a:off x="868680" y="1627632"/>
+            <a:ext cx="2011680" cy="73152"/>
+          </a:xfrm>
+          <a:prstGeom prst="roundRect">
+            <a:avLst/>
+          </a:prstGeom>
+          <a:solidFill>
+            <a:srgbClr val="E8801A"/>
+          </a:solidFill>
+          <a:ln>
+            <a:noFill/>
+          </a:ln>
+          <a:effectLst/>
+        </p:spPr>
+        <p:style>
+          <a:lnRef idx="1">
+            <a:schemeClr val="accent1"/>
+          </a:lnRef>
+          <a:fillRef idx="3">
+            <a:schemeClr val="accent1"/>
+          </a:fillRef>
+          <a:effectRef idx="2">
+            <a:schemeClr val="accent1"/>
+          </a:effectRef>
+          <a:fontRef idx="minor">
+            <a:schemeClr val="lt1"/>
+          </a:fontRef>
+        </p:style>
+        <p:txBody>
+          <a:bodyPr rtlCol="0" anchor="ctr"/>
+          <a:lstStyle/>
+          <a:p>
+            <a:pPr algn="ctr"/>
+          </a:p>
+        </p:txBody>
+      </p:sp>
+      <p:sp>
+        <p:nvSpPr>
+          <p:cNvPr id="8" name="TextBox 7"/>
           <p:cNvSpPr txBox="1"/>
           <p:nvPr/>
         </p:nvSpPr>
         <p:spPr>
           <a:xfrm>
-            <a:off x="822960" y="1920240"/>
+            <a:off x="822960" y="1965960"/>
             <a:ext cx="4983480" cy="4206240"/>
           </a:xfrm>
           <a:prstGeom prst="rect">
@@ -11196,17 +12458,17 @@
           <a:p>
             <a:pPr>
               <a:spcAft>
-                <a:spcPts val="1000"/>
+                <a:spcPts val="1100"/>
               </a:spcAft>
             </a:pPr>
             <a:r>
               <a:rPr sz="1600" b="1" i="0">
                 <a:solidFill>
-                  <a:srgbClr val="2E3A80"/>
-                </a:solidFill>
-                <a:latin typeface="Montserrat"/>
-              </a:rPr>
-              <a:t>•  </a:t>
+                  <a:srgbClr val="E8801A"/>
+                </a:solidFill>
+                <a:latin typeface="Montserrat"/>
+              </a:rPr>
+              <a:t>▸  </a:t>
             </a:r>
             <a:r>
               <a:rPr sz="1600" b="0" i="0">
@@ -11215,23 +12477,23 @@
                 </a:solidFill>
                 <a:latin typeface="Montserrat"/>
               </a:rPr>
-              <a:t>Solo si alimenta una red a terceros</a:t>
+              <a:t>Clasifica por volumen geométrico total</a:t>
             </a:r>
           </a:p>
           <a:p>
             <a:pPr>
               <a:spcAft>
-                <a:spcPts val="1000"/>
+                <a:spcPts val="1100"/>
               </a:spcAft>
             </a:pPr>
             <a:r>
               <a:rPr sz="1600" b="1" i="0">
                 <a:solidFill>
-                  <a:srgbClr val="2E3A80"/>
-                </a:solidFill>
-                <a:latin typeface="Montserrat"/>
-              </a:rPr>
-              <a:t>•  </a:t>
+                  <a:srgbClr val="E8801A"/>
+                </a:solidFill>
+                <a:latin typeface="Montserrat"/>
+              </a:rPr>
+              <a:t>▸  </a:t>
             </a:r>
             <a:r>
               <a:rPr sz="1600" b="0" i="0">
@@ -11240,23 +12502,23 @@
                 </a:solidFill>
                 <a:latin typeface="Montserrat"/>
               </a:rPr>
-              <a:t>Comunidad de vecinos: no hace falta</a:t>
+              <a:t>Diseño, distancias, pruebas: según UNE</a:t>
             </a:r>
           </a:p>
           <a:p>
             <a:pPr>
               <a:spcAft>
-                <a:spcPts val="1000"/>
+                <a:spcPts val="1100"/>
               </a:spcAft>
             </a:pPr>
             <a:r>
               <a:rPr sz="1600" b="1" i="0">
                 <a:solidFill>
-                  <a:srgbClr val="2E3A80"/>
-                </a:solidFill>
-                <a:latin typeface="Montserrat"/>
-              </a:rPr>
-              <a:t>•  </a:t>
+                  <a:srgbClr val="E8801A"/>
+                </a:solidFill>
+                <a:latin typeface="Montserrat"/>
+              </a:rPr>
+              <a:t>▸  </a:t>
             </a:r>
             <a:r>
               <a:rPr sz="1600" b="0" i="0">
@@ -11265,14 +12527,39 @@
                 </a:solidFill>
                 <a:latin typeface="Montserrat"/>
               </a:rPr>
-              <a:t>Se solicita con proyecto, por duplicado</a:t>
-            </a:r>
-          </a:p>
-        </p:txBody>
-      </p:sp>
-      <p:sp>
-        <p:nvSpPr>
-          <p:cNvPr id="8" name="imgph" descr="IMGQ:residential gas pipe network street"/>
+              <a:t>Recambio ±10 %: sin proyecto nuevo</a:t>
+            </a:r>
+          </a:p>
+          <a:p>
+            <a:pPr>
+              <a:spcAft>
+                <a:spcPts val="1100"/>
+              </a:spcAft>
+            </a:pPr>
+            <a:r>
+              <a:rPr sz="1600" b="1" i="0">
+                <a:solidFill>
+                  <a:srgbClr val="E8801A"/>
+                </a:solidFill>
+                <a:latin typeface="Montserrat"/>
+              </a:rPr>
+              <a:t>▸  </a:t>
+            </a:r>
+            <a:r>
+              <a:rPr sz="1600" b="0" i="0">
+                <a:solidFill>
+                  <a:srgbClr val="1B2330"/>
+                </a:solidFill>
+                <a:latin typeface="Montserrat"/>
+              </a:rPr>
+              <a:t>Basta memoria justificativa del instalador</a:t>
+            </a:r>
+          </a:p>
+        </p:txBody>
+      </p:sp>
+      <p:sp>
+        <p:nvSpPr>
+          <p:cNvPr id="9" name="imgph" descr="IMGQ:technical standard document engineering"/>
           <p:cNvSpPr/>
           <p:nvPr/>
         </p:nvSpPr>
@@ -11318,7 +12605,7 @@
       </p:sp>
       <p:sp>
         <p:nvSpPr>
-          <p:cNvPr id="9" name="TextBox 8"/>
+          <p:cNvPr id="10" name="TextBox 9"/>
           <p:cNvSpPr txBox="1"/>
           <p:nvPr/>
         </p:nvSpPr>
@@ -11358,7 +12645,7 @@
                 </a:solidFill>
                 <a:latin typeface="Montserrat"/>
               </a:rPr>
-              <a:t>residential gas pipe network street</a:t>
+              <a:t>technical standard document engineering</a:t>
             </a:r>
           </a:p>
         </p:txBody>
@@ -11455,7 +12742,7 @@
                 </a:solidFill>
                 <a:latin typeface="Montserrat"/>
               </a:rPr>
-              <a:t>006 / 020</a:t>
+              <a:t>006 / 021</a:t>
             </a:r>
           </a:p>
         </p:txBody>
@@ -11503,7 +12790,7 @@
         <p:spPr>
           <a:xfrm>
             <a:off x="822960" y="457200"/>
-            <a:ext cx="8229600" cy="365760"/>
+            <a:ext cx="10058400" cy="365760"/>
           </a:xfrm>
           <a:prstGeom prst="rect">
             <a:avLst/>
@@ -11517,13 +12804,13 @@
           <a:lstStyle/>
           <a:p>
             <a:r>
-              <a:rPr sz="1200" b="1" i="0">
-                <a:solidFill>
-                  <a:srgbClr val="64748B"/>
-                </a:solidFill>
-                <a:latin typeface="Montserrat"/>
-              </a:rPr>
-              <a:t>APARTADO 5.2 · PROYECTO</a:t>
+              <a:rPr sz="1300" b="1" i="0">
+                <a:solidFill>
+                  <a:srgbClr val="E8801A"/>
+                </a:solidFill>
+                <a:latin typeface="Montserrat"/>
+              </a:rPr>
+              <a:t>APARTADO 5.1 · AUTORIZACIÓN</a:t>
             </a:r>
           </a:p>
         </p:txBody>
@@ -11551,26 +12838,70 @@
           <a:lstStyle/>
           <a:p>
             <a:r>
-              <a:rPr sz="2700" b="1" i="0">
+              <a:rPr sz="2800" b="1" i="0">
                 <a:solidFill>
                   <a:srgbClr val="1E2761"/>
                 </a:solidFill>
                 <a:latin typeface="Montserrat"/>
               </a:rPr>
-              <a:t>Los cuatro casos de proyecto</a:t>
-            </a:r>
-          </a:p>
-        </p:txBody>
-      </p:sp>
-      <p:sp>
-        <p:nvSpPr>
-          <p:cNvPr id="7" name="TextBox 6"/>
+              <a:t>¿Hace falta permiso previo?</a:t>
+            </a:r>
+          </a:p>
+        </p:txBody>
+      </p:sp>
+      <p:sp>
+        <p:nvSpPr>
+          <p:cNvPr id="7" name="Rounded Rectangle 6"/>
+          <p:cNvSpPr/>
+          <p:nvPr/>
+        </p:nvSpPr>
+        <p:spPr>
+          <a:xfrm>
+            <a:off x="868680" y="1627632"/>
+            <a:ext cx="2011680" cy="73152"/>
+          </a:xfrm>
+          <a:prstGeom prst="roundRect">
+            <a:avLst/>
+          </a:prstGeom>
+          <a:solidFill>
+            <a:srgbClr val="E8801A"/>
+          </a:solidFill>
+          <a:ln>
+            <a:noFill/>
+          </a:ln>
+          <a:effectLst/>
+        </p:spPr>
+        <p:style>
+          <a:lnRef idx="1">
+            <a:schemeClr val="accent1"/>
+          </a:lnRef>
+          <a:fillRef idx="3">
+            <a:schemeClr val="accent1"/>
+          </a:fillRef>
+          <a:effectRef idx="2">
+            <a:schemeClr val="accent1"/>
+          </a:effectRef>
+          <a:fontRef idx="minor">
+            <a:schemeClr val="lt1"/>
+          </a:fontRef>
+        </p:style>
+        <p:txBody>
+          <a:bodyPr rtlCol="0" anchor="ctr"/>
+          <a:lstStyle/>
+          <a:p>
+            <a:pPr algn="ctr"/>
+          </a:p>
+        </p:txBody>
+      </p:sp>
+      <p:sp>
+        <p:nvSpPr>
+          <p:cNvPr id="8" name="TextBox 7"/>
           <p:cNvSpPr txBox="1"/>
           <p:nvPr/>
         </p:nvSpPr>
         <p:spPr>
           <a:xfrm>
-            <a:off x="822960" y="1920240"/>
+            <a:off x="822960" y="1965960"/>
             <a:ext cx="4983480" cy="4206240"/>
           </a:xfrm>
           <a:prstGeom prst="rect">
@@ -11586,17 +12917,17 @@
           <a:p>
             <a:pPr>
               <a:spcAft>
-                <a:spcPts val="1000"/>
+                <a:spcPts val="1100"/>
               </a:spcAft>
             </a:pPr>
             <a:r>
               <a:rPr sz="1600" b="1" i="0">
                 <a:solidFill>
-                  <a:srgbClr val="2E3A80"/>
-                </a:solidFill>
-                <a:latin typeface="Montserrat"/>
-              </a:rPr>
-              <a:t>•  </a:t>
+                  <a:srgbClr val="E8801A"/>
+                </a:solidFill>
+                <a:latin typeface="Montserrat"/>
+              </a:rPr>
+              <a:t>▸  </a:t>
             </a:r>
             <a:r>
               <a:rPr sz="1600" b="0" i="0">
@@ -11605,23 +12936,23 @@
                 </a:solidFill>
                 <a:latin typeface="Montserrat"/>
               </a:rPr>
-              <a:t>Capacidad mayor de 13 m³</a:t>
+              <a:t>Solo si alimenta una red a terceros</a:t>
             </a:r>
           </a:p>
           <a:p>
             <a:pPr>
               <a:spcAft>
-                <a:spcPts val="1000"/>
+                <a:spcPts val="1100"/>
               </a:spcAft>
             </a:pPr>
             <a:r>
               <a:rPr sz="1600" b="1" i="0">
                 <a:solidFill>
-                  <a:srgbClr val="2E3A80"/>
-                </a:solidFill>
-                <a:latin typeface="Montserrat"/>
-              </a:rPr>
-              <a:t>•  </a:t>
+                  <a:srgbClr val="E8801A"/>
+                </a:solidFill>
+                <a:latin typeface="Montserrat"/>
+              </a:rPr>
+              <a:t>▸  </a:t>
             </a:r>
             <a:r>
               <a:rPr sz="1600" b="0" i="0">
@@ -11630,23 +12961,23 @@
                 </a:solidFill>
                 <a:latin typeface="Montserrat"/>
               </a:rPr>
-              <a:t>Alimenta red de distribución</a:t>
+              <a:t>Comunidad de vecinos: no hace falta</a:t>
             </a:r>
           </a:p>
           <a:p>
             <a:pPr>
               <a:spcAft>
-                <a:spcPts val="1000"/>
+                <a:spcPts val="1100"/>
               </a:spcAft>
             </a:pPr>
             <a:r>
               <a:rPr sz="1600" b="1" i="0">
                 <a:solidFill>
-                  <a:srgbClr val="2E3A80"/>
-                </a:solidFill>
-                <a:latin typeface="Montserrat"/>
-              </a:rPr>
-              <a:t>•  </a:t>
+                  <a:srgbClr val="E8801A"/>
+                </a:solidFill>
+                <a:latin typeface="Montserrat"/>
+              </a:rPr>
+              <a:t>▸  </a:t>
             </a:r>
             <a:r>
               <a:rPr sz="1600" b="0" i="0">
@@ -11655,39 +12986,14 @@
                 </a:solidFill>
                 <a:latin typeface="Montserrat"/>
               </a:rPr>
-              <a:t>Vaporizador, trasvase o boca desplazada</a:t>
-            </a:r>
-          </a:p>
-          <a:p>
-            <a:pPr>
-              <a:spcAft>
-                <a:spcPts val="1000"/>
-              </a:spcAft>
-            </a:pPr>
-            <a:r>
-              <a:rPr sz="1600" b="1" i="0">
-                <a:solidFill>
-                  <a:srgbClr val="2E3A80"/>
-                </a:solidFill>
-                <a:latin typeface="Montserrat"/>
-              </a:rPr>
-              <a:t>•  </a:t>
-            </a:r>
-            <a:r>
-              <a:rPr sz="1600" b="0" i="0">
-                <a:solidFill>
-                  <a:srgbClr val="1B2330"/>
-                </a:solidFill>
-                <a:latin typeface="Montserrat"/>
-              </a:rPr>
-              <a:t>En lugar de acceso público</a:t>
-            </a:r>
-          </a:p>
-        </p:txBody>
-      </p:sp>
-      <p:sp>
-        <p:nvSpPr>
-          <p:cNvPr id="8" name="imgph" descr="IMGQ:engineer with project plans site"/>
+              <a:t>Se solicita con proyecto, por duplicado</a:t>
+            </a:r>
+          </a:p>
+        </p:txBody>
+      </p:sp>
+      <p:sp>
+        <p:nvSpPr>
+          <p:cNvPr id="9" name="imgph" descr="IMGQ:residential gas pipe network street"/>
           <p:cNvSpPr/>
           <p:nvPr/>
         </p:nvSpPr>
@@ -11733,7 +13039,7 @@
       </p:sp>
       <p:sp>
         <p:nvSpPr>
-          <p:cNvPr id="9" name="TextBox 8"/>
+          <p:cNvPr id="10" name="TextBox 9"/>
           <p:cNvSpPr txBox="1"/>
           <p:nvPr/>
         </p:nvSpPr>
@@ -11773,7 +13079,7 @@
                 </a:solidFill>
                 <a:latin typeface="Montserrat"/>
               </a:rPr>
-              <a:t>engineer with project plans site</a:t>
+              <a:t>residential gas pipe network street</a:t>
             </a:r>
           </a:p>
         </p:txBody>
@@ -11870,7 +13176,7 @@
                 </a:solidFill>
                 <a:latin typeface="Montserrat"/>
               </a:rPr>
-              <a:t>007 / 020</a:t>
+              <a:t>007 / 021</a:t>
             </a:r>
           </a:p>
         </p:txBody>
@@ -11918,7 +13224,7 @@
         <p:spPr>
           <a:xfrm>
             <a:off x="822960" y="457200"/>
-            <a:ext cx="8229600" cy="365760"/>
+            <a:ext cx="10058400" cy="365760"/>
           </a:xfrm>
           <a:prstGeom prst="rect">
             <a:avLst/>
@@ -11932,13 +13238,13 @@
           <a:lstStyle/>
           <a:p>
             <a:r>
-              <a:rPr sz="1200" b="1" i="0">
-                <a:solidFill>
-                  <a:srgbClr val="64748B"/>
-                </a:solidFill>
-                <a:latin typeface="Montserrat"/>
-              </a:rPr>
-              <a:t>APARTADO 5.3 · MEMORIA</a:t>
+              <a:rPr sz="1300" b="1" i="0">
+                <a:solidFill>
+                  <a:srgbClr val="E8801A"/>
+                </a:solidFill>
+                <a:latin typeface="Montserrat"/>
+              </a:rPr>
+              <a:t>APARTADO 5.2 · PROYECTO</a:t>
             </a:r>
           </a:p>
         </p:txBody>
@@ -11966,26 +13272,70 @@
           <a:lstStyle/>
           <a:p>
             <a:r>
-              <a:rPr sz="2700" b="1" i="0">
+              <a:rPr sz="2800" b="1" i="0">
                 <a:solidFill>
                   <a:srgbClr val="1E2761"/>
                 </a:solidFill>
                 <a:latin typeface="Montserrat"/>
               </a:rPr>
-              <a:t>Memoria o proyecto: quién firma</a:t>
-            </a:r>
-          </a:p>
-        </p:txBody>
-      </p:sp>
-      <p:sp>
-        <p:nvSpPr>
-          <p:cNvPr id="7" name="TextBox 6"/>
+              <a:t>Los cuatro casos de proyecto</a:t>
+            </a:r>
+          </a:p>
+        </p:txBody>
+      </p:sp>
+      <p:sp>
+        <p:nvSpPr>
+          <p:cNvPr id="7" name="Rounded Rectangle 6"/>
+          <p:cNvSpPr/>
+          <p:nvPr/>
+        </p:nvSpPr>
+        <p:spPr>
+          <a:xfrm>
+            <a:off x="868680" y="1627632"/>
+            <a:ext cx="2011680" cy="73152"/>
+          </a:xfrm>
+          <a:prstGeom prst="roundRect">
+            <a:avLst/>
+          </a:prstGeom>
+          <a:solidFill>
+            <a:srgbClr val="E8801A"/>
+          </a:solidFill>
+          <a:ln>
+            <a:noFill/>
+          </a:ln>
+          <a:effectLst/>
+        </p:spPr>
+        <p:style>
+          <a:lnRef idx="1">
+            <a:schemeClr val="accent1"/>
+          </a:lnRef>
+          <a:fillRef idx="3">
+            <a:schemeClr val="accent1"/>
+          </a:fillRef>
+          <a:effectRef idx="2">
+            <a:schemeClr val="accent1"/>
+          </a:effectRef>
+          <a:fontRef idx="minor">
+            <a:schemeClr val="lt1"/>
+          </a:fontRef>
+        </p:style>
+        <p:txBody>
+          <a:bodyPr rtlCol="0" anchor="ctr"/>
+          <a:lstStyle/>
+          <a:p>
+            <a:pPr algn="ctr"/>
+          </a:p>
+        </p:txBody>
+      </p:sp>
+      <p:sp>
+        <p:nvSpPr>
+          <p:cNvPr id="8" name="TextBox 7"/>
           <p:cNvSpPr txBox="1"/>
           <p:nvPr/>
         </p:nvSpPr>
         <p:spPr>
           <a:xfrm>
-            <a:off x="822960" y="1920240"/>
+            <a:off x="822960" y="1965960"/>
             <a:ext cx="4983480" cy="4206240"/>
           </a:xfrm>
           <a:prstGeom prst="rect">
@@ -12001,17 +13351,17 @@
           <a:p>
             <a:pPr>
               <a:spcAft>
-                <a:spcPts val="1000"/>
+                <a:spcPts val="1100"/>
               </a:spcAft>
             </a:pPr>
             <a:r>
               <a:rPr sz="1600" b="1" i="0">
                 <a:solidFill>
-                  <a:srgbClr val="2E3A80"/>
-                </a:solidFill>
-                <a:latin typeface="Montserrat"/>
-              </a:rPr>
-              <a:t>•  </a:t>
+                  <a:srgbClr val="E8801A"/>
+                </a:solidFill>
+                <a:latin typeface="Montserrat"/>
+              </a:rPr>
+              <a:t>▸  </a:t>
             </a:r>
             <a:r>
               <a:rPr sz="1600" b="0" i="0">
@@ -12020,23 +13370,23 @@
                 </a:solidFill>
                 <a:latin typeface="Montserrat"/>
               </a:rPr>
-              <a:t>Instalación normal: memoria técnica</a:t>
+              <a:t>Capacidad mayor de 13 m³</a:t>
             </a:r>
           </a:p>
           <a:p>
             <a:pPr>
               <a:spcAft>
-                <a:spcPts val="1000"/>
+                <a:spcPts val="1100"/>
               </a:spcAft>
             </a:pPr>
             <a:r>
               <a:rPr sz="1600" b="1" i="0">
                 <a:solidFill>
-                  <a:srgbClr val="2E3A80"/>
-                </a:solidFill>
-                <a:latin typeface="Montserrat"/>
-              </a:rPr>
-              <a:t>•  </a:t>
+                  <a:srgbClr val="E8801A"/>
+                </a:solidFill>
+                <a:latin typeface="Montserrat"/>
+              </a:rPr>
+              <a:t>▸  </a:t>
             </a:r>
             <a:r>
               <a:rPr sz="1600" b="0" i="0">
@@ -12045,23 +13395,23 @@
                 </a:solidFill>
                 <a:latin typeface="Montserrat"/>
               </a:rPr>
-              <a:t>La memoria la firma el instalador</a:t>
+              <a:t>Alimenta red de distribución</a:t>
             </a:r>
           </a:p>
           <a:p>
             <a:pPr>
               <a:spcAft>
-                <a:spcPts val="1000"/>
+                <a:spcPts val="1100"/>
               </a:spcAft>
             </a:pPr>
             <a:r>
               <a:rPr sz="1600" b="1" i="0">
                 <a:solidFill>
-                  <a:srgbClr val="2E3A80"/>
-                </a:solidFill>
-                <a:latin typeface="Montserrat"/>
-              </a:rPr>
-              <a:t>•  </a:t>
+                  <a:srgbClr val="E8801A"/>
+                </a:solidFill>
+                <a:latin typeface="Montserrat"/>
+              </a:rPr>
+              <a:t>▸  </a:t>
             </a:r>
             <a:r>
               <a:rPr sz="1600" b="0" i="0">
@@ -12070,23 +13420,23 @@
                 </a:solidFill>
                 <a:latin typeface="Montserrat"/>
               </a:rPr>
-              <a:t>Instalación grande: proyecto</a:t>
+              <a:t>Vaporizador, trasvase o boca desplazada</a:t>
             </a:r>
           </a:p>
           <a:p>
             <a:pPr>
               <a:spcAft>
-                <a:spcPts val="1000"/>
+                <a:spcPts val="1100"/>
               </a:spcAft>
             </a:pPr>
             <a:r>
               <a:rPr sz="1600" b="1" i="0">
                 <a:solidFill>
-                  <a:srgbClr val="2E3A80"/>
-                </a:solidFill>
-                <a:latin typeface="Montserrat"/>
-              </a:rPr>
-              <a:t>•  </a:t>
+                  <a:srgbClr val="E8801A"/>
+                </a:solidFill>
+                <a:latin typeface="Montserrat"/>
+              </a:rPr>
+              <a:t>▸  </a:t>
             </a:r>
             <a:r>
               <a:rPr sz="1600" b="0" i="0">
@@ -12095,14 +13445,14 @@
                 </a:solidFill>
                 <a:latin typeface="Montserrat"/>
               </a:rPr>
-              <a:t>El proyecto lo firma el técnico</a:t>
-            </a:r>
-          </a:p>
-        </p:txBody>
-      </p:sp>
-      <p:sp>
-        <p:nvSpPr>
-          <p:cNvPr id="8" name="imgph" descr="IMGQ:gas installer signing paperwork"/>
+              <a:t>En lugar de acceso público</a:t>
+            </a:r>
+          </a:p>
+        </p:txBody>
+      </p:sp>
+      <p:sp>
+        <p:nvSpPr>
+          <p:cNvPr id="9" name="imgph" descr="IMGQ:engineer with project plans site"/>
           <p:cNvSpPr/>
           <p:nvPr/>
         </p:nvSpPr>
@@ -12148,7 +13498,7 @@
       </p:sp>
       <p:sp>
         <p:nvSpPr>
-          <p:cNvPr id="9" name="TextBox 8"/>
+          <p:cNvPr id="10" name="TextBox 9"/>
           <p:cNvSpPr txBox="1"/>
           <p:nvPr/>
         </p:nvSpPr>
@@ -12188,7 +13538,7 @@
                 </a:solidFill>
                 <a:latin typeface="Montserrat"/>
               </a:rPr>
-              <a:t>gas installer signing paperwork</a:t>
+              <a:t>engineer with project plans site</a:t>
             </a:r>
           </a:p>
         </p:txBody>
@@ -12285,7 +13635,7 @@
                 </a:solidFill>
                 <a:latin typeface="Montserrat"/>
               </a:rPr>
-              <a:t>008 / 020</a:t>
+              <a:t>008 / 021</a:t>
             </a:r>
           </a:p>
         </p:txBody>
@@ -12333,7 +13683,7 @@
         <p:spPr>
           <a:xfrm>
             <a:off x="822960" y="457200"/>
-            <a:ext cx="8229600" cy="365760"/>
+            <a:ext cx="10058400" cy="365760"/>
           </a:xfrm>
           <a:prstGeom prst="rect">
             <a:avLst/>
@@ -12347,13 +13697,13 @@
           <a:lstStyle/>
           <a:p>
             <a:r>
-              <a:rPr sz="1200" b="1" i="0">
-                <a:solidFill>
-                  <a:srgbClr val="64748B"/>
-                </a:solidFill>
-                <a:latin typeface="Montserrat"/>
-              </a:rPr>
-              <a:t>APARTADO 5.4 · PRUEBAS PREVIAS</a:t>
+              <a:rPr sz="1300" b="1" i="0">
+                <a:solidFill>
+                  <a:srgbClr val="E8801A"/>
+                </a:solidFill>
+                <a:latin typeface="Montserrat"/>
+              </a:rPr>
+              <a:t>APARTADO 5.3 · MEMORIA</a:t>
             </a:r>
           </a:p>
         </p:txBody>
@@ -12381,26 +13731,70 @@
           <a:lstStyle/>
           <a:p>
             <a:r>
-              <a:rPr sz="2700" b="1" i="0">
+              <a:rPr sz="2800" b="1" i="0">
                 <a:solidFill>
                   <a:srgbClr val="1E2761"/>
                 </a:solidFill>
                 <a:latin typeface="Montserrat"/>
               </a:rPr>
-              <a:t>Dos plazos gemelos</a:t>
-            </a:r>
-          </a:p>
-        </p:txBody>
-      </p:sp>
-      <p:sp>
-        <p:nvSpPr>
-          <p:cNvPr id="7" name="TextBox 6"/>
+              <a:t>Memoria o proyecto: quién firma</a:t>
+            </a:r>
+          </a:p>
+        </p:txBody>
+      </p:sp>
+      <p:sp>
+        <p:nvSpPr>
+          <p:cNvPr id="7" name="Rounded Rectangle 6"/>
+          <p:cNvSpPr/>
+          <p:nvPr/>
+        </p:nvSpPr>
+        <p:spPr>
+          <a:xfrm>
+            <a:off x="868680" y="1627632"/>
+            <a:ext cx="2011680" cy="73152"/>
+          </a:xfrm>
+          <a:prstGeom prst="roundRect">
+            <a:avLst/>
+          </a:prstGeom>
+          <a:solidFill>
+            <a:srgbClr val="E8801A"/>
+          </a:solidFill>
+          <a:ln>
+            <a:noFill/>
+          </a:ln>
+          <a:effectLst/>
+        </p:spPr>
+        <p:style>
+          <a:lnRef idx="1">
+            <a:schemeClr val="accent1"/>
+          </a:lnRef>
+          <a:fillRef idx="3">
+            <a:schemeClr val="accent1"/>
+          </a:fillRef>
+          <a:effectRef idx="2">
+            <a:schemeClr val="accent1"/>
+          </a:effectRef>
+          <a:fontRef idx="minor">
+            <a:schemeClr val="lt1"/>
+          </a:fontRef>
+        </p:style>
+        <p:txBody>
+          <a:bodyPr rtlCol="0" anchor="ctr"/>
+          <a:lstStyle/>
+          <a:p>
+            <a:pPr algn="ctr"/>
+          </a:p>
+        </p:txBody>
+      </p:sp>
+      <p:sp>
+        <p:nvSpPr>
+          <p:cNvPr id="8" name="TextBox 7"/>
           <p:cNvSpPr txBox="1"/>
           <p:nvPr/>
         </p:nvSpPr>
         <p:spPr>
           <a:xfrm>
-            <a:off x="822960" y="1920240"/>
+            <a:off x="822960" y="1965960"/>
             <a:ext cx="4983480" cy="4206240"/>
           </a:xfrm>
           <a:prstGeom prst="rect">
@@ -12416,17 +13810,17 @@
           <a:p>
             <a:pPr>
               <a:spcAft>
-                <a:spcPts val="1000"/>
+                <a:spcPts val="1100"/>
               </a:spcAft>
             </a:pPr>
             <a:r>
               <a:rPr sz="1600" b="1" i="0">
                 <a:solidFill>
-                  <a:srgbClr val="2E3A80"/>
-                </a:solidFill>
-                <a:latin typeface="Montserrat"/>
-              </a:rPr>
-              <a:t>•  </a:t>
+                  <a:srgbClr val="E8801A"/>
+                </a:solidFill>
+                <a:latin typeface="Montserrat"/>
+              </a:rPr>
+              <a:t>▸  </a:t>
             </a:r>
             <a:r>
               <a:rPr sz="1600" b="0" i="0">
@@ -12435,23 +13829,23 @@
                 </a:solidFill>
                 <a:latin typeface="Montserrat"/>
               </a:rPr>
-              <a:t>Prueba hidrostática si hay golpe o traslado</a:t>
+              <a:t>Instalación normal: memoria técnica</a:t>
             </a:r>
           </a:p>
           <a:p>
             <a:pPr>
               <a:spcAft>
-                <a:spcPts val="1000"/>
+                <a:spcPts val="1100"/>
               </a:spcAft>
             </a:pPr>
             <a:r>
               <a:rPr sz="1600" b="1" i="0">
                 <a:solidFill>
-                  <a:srgbClr val="2E3A80"/>
-                </a:solidFill>
-                <a:latin typeface="Montserrat"/>
-              </a:rPr>
-              <a:t>•  </a:t>
+                  <a:srgbClr val="E8801A"/>
+                </a:solidFill>
+                <a:latin typeface="Montserrat"/>
+              </a:rPr>
+              <a:t>▸  </a:t>
             </a:r>
             <a:r>
               <a:rPr sz="1600" b="0" i="0">
@@ -12460,23 +13854,23 @@
                 </a:solidFill>
                 <a:latin typeface="Montserrat"/>
               </a:rPr>
-              <a:t>Más de 12 meses en el emplazamiento</a:t>
+              <a:t>La memoria la firma el instalador</a:t>
             </a:r>
           </a:p>
           <a:p>
             <a:pPr>
               <a:spcAft>
-                <a:spcPts val="1000"/>
+                <a:spcPts val="1100"/>
               </a:spcAft>
             </a:pPr>
             <a:r>
               <a:rPr sz="1600" b="1" i="0">
                 <a:solidFill>
-                  <a:srgbClr val="2E3A80"/>
-                </a:solidFill>
-                <a:latin typeface="Montserrat"/>
-              </a:rPr>
-              <a:t>•  </a:t>
+                  <a:srgbClr val="E8801A"/>
+                </a:solidFill>
+                <a:latin typeface="Montserrat"/>
+              </a:rPr>
+              <a:t>▸  </a:t>
             </a:r>
             <a:r>
               <a:rPr sz="1600" b="0" i="0">
@@ -12485,23 +13879,23 @@
                 </a:solidFill>
                 <a:latin typeface="Montserrat"/>
               </a:rPr>
-              <a:t>Más de 24 meses desde fábrica</a:t>
+              <a:t>Instalación grande: proyecto</a:t>
             </a:r>
           </a:p>
           <a:p>
             <a:pPr>
               <a:spcAft>
-                <a:spcPts val="1000"/>
+                <a:spcPts val="1100"/>
               </a:spcAft>
             </a:pPr>
             <a:r>
               <a:rPr sz="1600" b="1" i="0">
                 <a:solidFill>
-                  <a:srgbClr val="2E3A80"/>
-                </a:solidFill>
-                <a:latin typeface="Montserrat"/>
-              </a:rPr>
-              <a:t>•  </a:t>
+                  <a:srgbClr val="E8801A"/>
+                </a:solidFill>
+                <a:latin typeface="Montserrat"/>
+              </a:rPr>
+              <a:t>▸  </a:t>
             </a:r>
             <a:r>
               <a:rPr sz="1600" b="0" i="0">
@@ -12510,14 +13904,14 @@
                 </a:solidFill>
                 <a:latin typeface="Montserrat"/>
               </a:rPr>
-              <a:t>Certifica un organismo de control</a:t>
-            </a:r>
-          </a:p>
-        </p:txBody>
-      </p:sp>
-      <p:sp>
-        <p:nvSpPr>
-          <p:cNvPr id="8" name="imgph" descr="IMGQ:hydrostatic pressure test tank"/>
+              <a:t>El proyecto lo firma el técnico</a:t>
+            </a:r>
+          </a:p>
+        </p:txBody>
+      </p:sp>
+      <p:sp>
+        <p:nvSpPr>
+          <p:cNvPr id="9" name="imgph" descr="IMGQ:gas installer signing paperwork"/>
           <p:cNvSpPr/>
           <p:nvPr/>
         </p:nvSpPr>
@@ -12563,7 +13957,7 @@
       </p:sp>
       <p:sp>
         <p:nvSpPr>
-          <p:cNvPr id="9" name="TextBox 8"/>
+          <p:cNvPr id="10" name="TextBox 9"/>
           <p:cNvSpPr txBox="1"/>
           <p:nvPr/>
         </p:nvSpPr>
@@ -12603,7 +13997,7 @@
                 </a:solidFill>
                 <a:latin typeface="Montserrat"/>
               </a:rPr>
-              <a:t>hydrostatic pressure test tank</a:t>
+              <a:t>gas installer signing paperwork</a:t>
             </a:r>
           </a:p>
         </p:txBody>
@@ -12700,7 +14094,7 @@
                 </a:solidFill>
                 <a:latin typeface="Montserrat"/>
               </a:rPr>
-              <a:t>009 / 020</a:t>
+              <a:t>009 / 021</a:t>
             </a:r>
           </a:p>
         </p:txBody>
@@ -12748,7 +14142,7 @@
         <p:spPr>
           <a:xfrm>
             <a:off x="822960" y="457200"/>
-            <a:ext cx="8229600" cy="365760"/>
+            <a:ext cx="10058400" cy="365760"/>
           </a:xfrm>
           <a:prstGeom prst="rect">
             <a:avLst/>
@@ -12762,13 +14156,13 @@
           <a:lstStyle/>
           <a:p>
             <a:r>
-              <a:rPr sz="1200" b="1" i="0">
-                <a:solidFill>
-                  <a:srgbClr val="64748B"/>
-                </a:solidFill>
-                <a:latin typeface="Montserrat"/>
-              </a:rPr>
-              <a:t>APARTADO 5.5 · CERTIFICADOS</a:t>
+              <a:rPr sz="1300" b="1" i="0">
+                <a:solidFill>
+                  <a:srgbClr val="E8801A"/>
+                </a:solidFill>
+                <a:latin typeface="Montserrat"/>
+              </a:rPr>
+              <a:t>APARTADO 5.4 · PRUEBAS PREVIAS</a:t>
             </a:r>
           </a:p>
         </p:txBody>
@@ -12796,26 +14190,70 @@
           <a:lstStyle/>
           <a:p>
             <a:r>
-              <a:rPr sz="2700" b="1" i="0">
+              <a:rPr sz="2800" b="1" i="0">
                 <a:solidFill>
                   <a:srgbClr val="1E2761"/>
                 </a:solidFill>
                 <a:latin typeface="Montserrat"/>
               </a:rPr>
-              <a:t>Tres firmas, tres papeles</a:t>
-            </a:r>
-          </a:p>
-        </p:txBody>
-      </p:sp>
-      <p:sp>
-        <p:nvSpPr>
-          <p:cNvPr id="7" name="TextBox 6"/>
+              <a:t>Dos plazos gemelos</a:t>
+            </a:r>
+          </a:p>
+        </p:txBody>
+      </p:sp>
+      <p:sp>
+        <p:nvSpPr>
+          <p:cNvPr id="7" name="Rounded Rectangle 6"/>
+          <p:cNvSpPr/>
+          <p:nvPr/>
+        </p:nvSpPr>
+        <p:spPr>
+          <a:xfrm>
+            <a:off x="868680" y="1627632"/>
+            <a:ext cx="2011680" cy="73152"/>
+          </a:xfrm>
+          <a:prstGeom prst="roundRect">
+            <a:avLst/>
+          </a:prstGeom>
+          <a:solidFill>
+            <a:srgbClr val="E8801A"/>
+          </a:solidFill>
+          <a:ln>
+            <a:noFill/>
+          </a:ln>
+          <a:effectLst/>
+        </p:spPr>
+        <p:style>
+          <a:lnRef idx="1">
+            <a:schemeClr val="accent1"/>
+          </a:lnRef>
+          <a:fillRef idx="3">
+            <a:schemeClr val="accent1"/>
+          </a:fillRef>
+          <a:effectRef idx="2">
+            <a:schemeClr val="accent1"/>
+          </a:effectRef>
+          <a:fontRef idx="minor">
+            <a:schemeClr val="lt1"/>
+          </a:fontRef>
+        </p:style>
+        <p:txBody>
+          <a:bodyPr rtlCol="0" anchor="ctr"/>
+          <a:lstStyle/>
+          <a:p>
+            <a:pPr algn="ctr"/>
+          </a:p>
+        </p:txBody>
+      </p:sp>
+      <p:sp>
+        <p:nvSpPr>
+          <p:cNvPr id="8" name="TextBox 7"/>
           <p:cNvSpPr txBox="1"/>
           <p:nvPr/>
         </p:nvSpPr>
         <p:spPr>
           <a:xfrm>
-            <a:off x="822960" y="1920240"/>
+            <a:off x="822960" y="1965960"/>
             <a:ext cx="4983480" cy="4206240"/>
           </a:xfrm>
           <a:prstGeom prst="rect">
@@ -12831,17 +14269,17 @@
           <a:p>
             <a:pPr>
               <a:spcAft>
-                <a:spcPts val="1000"/>
+                <a:spcPts val="1100"/>
               </a:spcAft>
             </a:pPr>
             <a:r>
               <a:rPr sz="1600" b="1" i="0">
                 <a:solidFill>
-                  <a:srgbClr val="2E3A80"/>
-                </a:solidFill>
-                <a:latin typeface="Montserrat"/>
-              </a:rPr>
-              <a:t>•  </a:t>
+                  <a:srgbClr val="E8801A"/>
+                </a:solidFill>
+                <a:latin typeface="Montserrat"/>
+              </a:rPr>
+              <a:t>▸  </a:t>
             </a:r>
             <a:r>
               <a:rPr sz="1600" b="0" i="0">
@@ -12850,23 +14288,23 @@
                 </a:solidFill>
                 <a:latin typeface="Montserrat"/>
               </a:rPr>
-              <a:t>Instalación: la empresa instaladora (triplicado)</a:t>
+              <a:t>Prueba hidrostática si hay golpe o traslado</a:t>
             </a:r>
           </a:p>
           <a:p>
             <a:pPr>
               <a:spcAft>
-                <a:spcPts val="1000"/>
+                <a:spcPts val="1100"/>
               </a:spcAft>
             </a:pPr>
             <a:r>
               <a:rPr sz="1600" b="1" i="0">
                 <a:solidFill>
-                  <a:srgbClr val="2E3A80"/>
-                </a:solidFill>
-                <a:latin typeface="Montserrat"/>
-              </a:rPr>
-              <a:t>•  </a:t>
+                  <a:srgbClr val="E8801A"/>
+                </a:solidFill>
+                <a:latin typeface="Montserrat"/>
+              </a:rPr>
+              <a:t>▸  </a:t>
             </a:r>
             <a:r>
               <a:rPr sz="1600" b="0" i="0">
@@ -12875,23 +14313,23 @@
                 </a:solidFill>
                 <a:latin typeface="Montserrat"/>
               </a:rPr>
-              <a:t>Inspección: el organismo de control</a:t>
+              <a:t>Más de 12 meses en el emplazamiento</a:t>
             </a:r>
           </a:p>
           <a:p>
             <a:pPr>
               <a:spcAft>
-                <a:spcPts val="1000"/>
+                <a:spcPts val="1100"/>
               </a:spcAft>
             </a:pPr>
             <a:r>
               <a:rPr sz="1600" b="1" i="0">
                 <a:solidFill>
-                  <a:srgbClr val="2E3A80"/>
-                </a:solidFill>
-                <a:latin typeface="Montserrat"/>
-              </a:rPr>
-              <a:t>•  </a:t>
+                  <a:srgbClr val="E8801A"/>
+                </a:solidFill>
+                <a:latin typeface="Montserrat"/>
+              </a:rPr>
+              <a:t>▸  </a:t>
             </a:r>
             <a:r>
               <a:rPr sz="1600" b="0" i="0">
@@ -12900,23 +14338,23 @@
                 </a:solidFill>
                 <a:latin typeface="Montserrat"/>
               </a:rPr>
-              <a:t>Dirección de obra: si hubo proyecto</a:t>
+              <a:t>Más de 24 meses desde fábrica</a:t>
             </a:r>
           </a:p>
           <a:p>
             <a:pPr>
               <a:spcAft>
-                <a:spcPts val="1000"/>
+                <a:spcPts val="1100"/>
               </a:spcAft>
             </a:pPr>
             <a:r>
               <a:rPr sz="1600" b="1" i="0">
                 <a:solidFill>
-                  <a:srgbClr val="2E3A80"/>
-                </a:solidFill>
-                <a:latin typeface="Montserrat"/>
-              </a:rPr>
-              <a:t>•  </a:t>
+                  <a:srgbClr val="E8801A"/>
+                </a:solidFill>
+                <a:latin typeface="Montserrat"/>
+              </a:rPr>
+              <a:t>▸  </a:t>
             </a:r>
             <a:r>
               <a:rPr sz="1600" b="0" i="0">
@@ -12925,14 +14363,14 @@
                 </a:solidFill>
                 <a:latin typeface="Montserrat"/>
               </a:rPr>
-              <a:t>Copia al titular y a la Comunidad</a:t>
-            </a:r>
-          </a:p>
-        </p:txBody>
-      </p:sp>
-      <p:sp>
-        <p:nvSpPr>
-          <p:cNvPr id="8" name="imgph" descr="IMGQ:signed certificate documents desk"/>
+              <a:t>Certifica un organismo de control</a:t>
+            </a:r>
+          </a:p>
+        </p:txBody>
+      </p:sp>
+      <p:sp>
+        <p:nvSpPr>
+          <p:cNvPr id="9" name="imgph" descr="IMGQ:hydrostatic pressure test tank"/>
           <p:cNvSpPr/>
           <p:nvPr/>
         </p:nvSpPr>
@@ -12978,7 +14416,7 @@
       </p:sp>
       <p:sp>
         <p:nvSpPr>
-          <p:cNvPr id="9" name="TextBox 8"/>
+          <p:cNvPr id="10" name="TextBox 9"/>
           <p:cNvSpPr txBox="1"/>
           <p:nvPr/>
         </p:nvSpPr>
@@ -13018,7 +14456,7 @@
                 </a:solidFill>
                 <a:latin typeface="Montserrat"/>
               </a:rPr>
-              <a:t>signed certificate documents desk</a:t>
+              <a:t>hydrostatic pressure test tank</a:t>
             </a:r>
           </a:p>
         </p:txBody>

--- a/Curso Gas B/02 - ITC-ICG 02-03-04 - Almacenamiento GLP y plantas GNL/02 - ITC-ICG 02-03-04 - Almacenamiento GLP y plantas GNL - Vídeo 3.pptx
+++ b/Curso Gas B/02 - ITC-ICG 02-03-04 - Almacenamiento GLP y plantas GNL/02 - ITC-ICG 02-03-04 - Almacenamiento GLP y plantas GNL - Vídeo 3.pptx
@@ -26,6 +26,11 @@
     <p:sldId id="274" r:id="rId26"/>
     <p:sldId id="275" r:id="rId27"/>
     <p:sldId id="276" r:id="rId28"/>
+    <p:sldId id="277" r:id="rId29"/>
+    <p:sldId id="278" r:id="rId30"/>
+    <p:sldId id="279" r:id="rId31"/>
+    <p:sldId id="280" r:id="rId32"/>
+    <p:sldId id="281" r:id="rId33"/>
   </p:sldIdLst>
   <p:sldSz cx="12191695" cy="6858000" type="screen4x3"/>
   <p:notesSz cx="6858000" cy="9144000"/>
@@ -597,12 +602,12 @@
           <a:lstStyle/>
           <a:p>
             <a:r>
-              <a:t>N1: ¿Qué certificados se generan y quién firma cada uno?</a:t>
-            </a:r>
-          </a:p>
-          <a:p>
-            <a:r>
-              <a:t>N2: Tres papeles, cada uno con su firmante, y esto cae cruzado en examen. Primero, la empresa instaladora cumplimenta el certificado de instalación, por triplicado, con copia para el titular y para el órgano competente de la Comunidad Autónoma. Segundo, el organismo de control emite el certificado de inspección; con él, la instalación queda en disposición de servicio. Y tercero, solo si hubo proyecto, el director de obra firma el certificado de dirección de obra, que lleva como anexo el estado de la protección contra la corrosión, las actas de pruebas, la documentación de los depósitos y la justificación de que se cumplen los requisitos de seguridad. Asocia cada papel con quien lo firma: instalación, instaladora; inspección, organismo de control; dirección de obra, director de obra.</a:t>
+              <a:t>N1: Y esto de quién firma cada papel, ¿por qué me importa a mí, con el carné de Gas B?</a:t>
+            </a:r>
+          </a:p>
+          <a:p>
+            <a:r>
+              <a:t>N2: Porque decide qué instalaciones vas a poder legalizar tú. La lógica es la misma que en el articulado del Reglamento: instalación pequeña o normal, memoria técnica, que la puede firmar el instalador con su categoría de depósitos fijos de GLP; instalación grande o compleja, proyecto, que lo firma un técnico facultativo competente, un titulado. Traducido a tu día a día: con tu carné podrás firmar la memoria técnica de un depósito fijo, pero no el proyecto. Saber distinguir memoria de proyecto es lo que decide, en la práctica, si esa instalación la legalizas tú o tiene que ir a un ingeniero.</a:t>
             </a:r>
           </a:p>
         </p:txBody>
@@ -672,12 +677,12 @@
           <a:lstStyle/>
           <a:p>
             <a:r>
-              <a:t>N1: ¿Qué llevo a la Administración y cuándo, antes de que llegue el gas?</a:t>
-            </a:r>
-          </a:p>
-          <a:p>
-            <a:r>
-              <a:t>N2: Previo a la fecha del primer llenado, presentas por duplicado ante la Comunidad Autónoma un paquete: certificado de instalación, certificado de inspección, la memoria técnica o el proyecto si no se entregó antes, el certificado de dirección de obra cuando haya proyecto, y el contrato de mantenimiento. Fíjate en un detalle que se suele olvidar: el contrato de mantenimiento ya tiene que ir firmado en este momento; un depósito fijo nace con su mantenimiento contratado, no es algo para más adelante. Y un certificado extra que solo aparece si el depósito va en una azotea: el que acredita que la cubierta aguanta el peso. La presentación te faculta para arrancar, pero no es conformidad técnica de la Administración.</a:t>
+              <a:t>N1: ¿Cuándo hay que volver a probar un depósito antes de enchufarlo?</a:t>
+            </a:r>
+          </a:p>
+          <a:p>
+            <a:r>
+              <a:t>N2: Cuando ha estado esperando demasiado tiempo o ha sufrido algo. Se le hace una prueba hidrostática en el emplazamiento, certificada por un organismo de control, en varios casos: si el instalador ve algún desperfecto por las operaciones de carga y descarga, si el depósito cambia de emplazamiento, o por el paso del tiempo. Y ahí van los dos relojes gemelos: más de doce meses desde que llegó al sitio, o más de veinticuatro meses desde las pruebas de fábrica. Truco para recordarlo: un año en la parcela o dos desde fábrica, y a probar otra vez. Superadas las pruebas de la norma, la puesta en servicio conlleva una inspección inicial del organismo de control.</a:t>
             </a:r>
           </a:p>
         </p:txBody>
@@ -747,12 +752,12 @@
           <a:lstStyle/>
           <a:p>
             <a:r>
-              <a:t>N1: ¿Por qué un depósito no se llena hasta arriba del todo?</a:t>
-            </a:r>
-          </a:p>
-          <a:p>
-            <a:r>
-              <a:t>N2: Porque el GLP líquido se dilata cuando sube la temperatura, y necesita sitio para expandirse. Nunca se llena al cien por cien: el llamado punto alto de llenado corta la entrada de gas cuando el líquido alcanza el ochenta y cinco por ciento del volumen geométrico. Ese quince por ciento de hueco que queda arriba, la fase gaseosa, es el colchón para que, en pleno verano, el líquido tenga adónde crecer sin reventar el depósito ni disparar la válvula de seguridad. Por eso, durante el primer llenado de cada depósito, el personal comprueba la estanquidad de conexiones y valvulería, y que ese corte al ochenta y cinco por ciento actúe de verdad. El resultado se anota en el Libro de Mantenimiento. Cifra de examen segura: ochenta y cinco por ciento.</a:t>
+              <a:t>N1: ¿Qué certificados se generan y quién firma cada uno?</a:t>
+            </a:r>
+          </a:p>
+          <a:p>
+            <a:r>
+              <a:t>N2: Tres papeles, cada uno con su firmante, y esto cae cruzado en examen. Primero, la empresa instaladora cumplimenta el certificado de instalación, por triplicado, con copia para el titular y para el órgano competente de la Comunidad Autónoma. Segundo, el organismo de control emite el certificado de inspección; con él, la instalación queda en disposición de servicio. Y tercero, solo si hubo proyecto, el director de obra firma el certificado de dirección de obra, que lleva como anexo el estado de la protección contra la corrosión, las actas de pruebas, la documentación de los depósitos y la justificación de que se cumplen los requisitos de seguridad. Asocia cada papel con quien lo firma: instalación, instaladora; inspección, organismo de control; dirección de obra, director de obra.</a:t>
             </a:r>
           </a:p>
         </p:txBody>
@@ -822,12 +827,12 @@
           <a:lstStyle/>
           <a:p>
             <a:r>
-              <a:t>N1: ¿Quién cuida el depósito una vez está funcionando?</a:t>
-            </a:r>
-          </a:p>
-          <a:p>
-            <a:r>
-              <a:t>N2: El responsable es el titular o, en su defecto, los usuarios: la instalación tiene que estar permanentemente en disposición de servicio y con su nivel de seguridad. Para eso están obligados a tener un contrato de mantenimiento con una empresa instaladora que disponga de servicio de urgencias permanente, o sea, que puedas llamar a cualquier hora si hay un problema. Esa empresa conserva la instalación, hace las revisiones y se ocupa especialmente de la protección contra la corrosión. Y todo queda registrado: cada instalación tiene un Libro de Mantenimiento, o un archivo documental si la empresa tiene su sistema de calidad acreditado, donde consta cada visita, los defectos vistos, las reparaciones y las lecturas. El titular custodia ese Libro y el certificado de la última revisión.</a:t>
+              <a:t>N1: ¿Qué llevo a la Administración y cuándo, antes de que llegue el gas?</a:t>
+            </a:r>
+          </a:p>
+          <a:p>
+            <a:r>
+              <a:t>N2: Previo a la fecha del primer llenado, presentas por duplicado ante la Comunidad Autónoma un paquete: certificado de instalación, certificado de inspección, la memoria técnica o el proyecto si no se entregó antes, el certificado de dirección de obra cuando haya proyecto, y el contrato de mantenimiento. Fíjate en un detalle que se suele olvidar: el contrato de mantenimiento ya tiene que ir firmado en este momento; un depósito fijo nace con su mantenimiento contratado, no es algo para más adelante. Y un certificado extra que solo aparece si el depósito va en una azotea: el que acredita que la cubierta aguanta el peso. La presentación te faculta para arrancar, pero no es conformidad técnica de la Administración.</a:t>
             </a:r>
           </a:p>
         </p:txBody>
@@ -897,12 +902,12 @@
           <a:lstStyle/>
           <a:p>
             <a:r>
-              <a:t>N1: ¿Por qué hay tanto miedo a la corrosión en los depósitos enterrados?</a:t>
-            </a:r>
-          </a:p>
-          <a:p>
-            <a:r>
-              <a:t>N2: Porque un depósito bajo tierra está rodeado de suelo húmedo, y la humedad se come el hierro poco a poco hasta que fuga. Para evitarlo, los depósitos enterrados llevan protección catódica, que es un truco electroquímico para que el metal no se oxide; solo se libran si un estudio de agresividad del terreno demuestra que no hace falta. Y esa protección se vigila con dos relojes: el potencial de protección se controla cada año, pero si la protección catódica es por corriente impresa, con un equipo eléctrico alimentado, se comprueba cada tres meses. La regla: corriente impresa, más vigilancia, trimestral, porque depende de un aparato que puede fallar. Idea de fondo: enterrado igual a corrosión igual a protección catódica, salvo estudio que lo exima.</a:t>
+              <a:t>N1: ¿Por qué un depósito no se llena hasta arriba del todo?</a:t>
+            </a:r>
+          </a:p>
+          <a:p>
+            <a:r>
+              <a:t>N2: Porque el GLP líquido se dilata cuando sube la temperatura, y necesita sitio para expandirse. Nunca se llena al cien por cien: el llamado punto alto de llenado corta la entrada de gas cuando el líquido alcanza el ochenta y cinco por ciento del volumen geométrico. Ese quince por ciento de hueco que queda arriba, la fase gaseosa, es el colchón para que, en pleno verano, el líquido tenga adónde crecer sin reventar el depósito ni disparar la válvula de seguridad. Por eso, durante el primer llenado de cada depósito, el personal comprueba la estanquidad de conexiones y valvulería, y que ese corte al ochenta y cinco por ciento actúe de verdad. El resultado se anota en el Libro de Mantenimiento. Cifra de examen segura: ochenta y cinco por ciento.</a:t>
             </a:r>
           </a:p>
         </p:txBody>
@@ -972,12 +977,12 @@
           <a:lstStyle/>
           <a:p>
             <a:r>
-              <a:t>N1: ¿Cada cuánto se revisa el depósito, y de qué depende?</a:t>
-            </a:r>
-          </a:p>
-          <a:p>
-            <a:r>
-              <a:t>N2: Hay dos casos, no los mezcles. Si el depósito alimenta una red de distribución, su revisión es cada dos años. Si solo alimenta la instalación de una casa o una comunidad, la revisión se engancha a la de la instalación receptora, la de la ITC-ICG cero siete, y se hacen las dos juntas en la misma visita. Regla corta: red, dos años; casa, a la vez que la receptora. La revisión la hace la empresa instaladora que tiene el contrato de mantenimiento. Si sale favorable, emite un certificado de revisión para el titular; si sale con fallos, cumplimenta un informe de anomalías, y el titular es el responsable de subsanarlas. Y recuerda: sin acreditar la revisión en plazo y con resultado favorable, no hay suministro de GLP.</a:t>
+              <a:t>N1: Nunca se llena hasta arriba. ¿En qué porcentaje corta el llenado?</a:t>
+            </a:r>
+          </a:p>
+          <a:p>
+            <a:r>
+              <a:t>N2: Recuerda que el GLP líquido se dilata con el calor y necesita sitio.</a:t>
             </a:r>
           </a:p>
         </p:txBody>
@@ -1047,12 +1052,12 @@
           <a:lstStyle/>
           <a:p>
             <a:r>
-              <a:t>N1: Trece comprobaciones parecen muchas, ¿cómo me las aprendo?</a:t>
-            </a:r>
-          </a:p>
-          <a:p>
-            <a:r>
-              <a:t>N2: No las memorices de carrerilla; agrúpalas en tres bloques y las tienes. Los puntos uno a tres son papeleo y bomberos: el último certificado de inspección, la inspección visual y el estado del equipo contra incendios. Los puntos cuatro a nueve son el hierro: recubrimiento del depósito, tuberías y anclajes, funcionamiento de llaves, manómetros, niveles y reguladores, estado del cerramiento y los rótulos, la protección contra la corrosión y la resistencia de la toma de tierra. Y los puntos diez a trece son que no fugue: las distintas pruebas de estanquidad. La cifra fina que cae: la boca de carga desplazada y las mangueras de trasvase se prueban a tres bar durante diez minutos. Y el clásico de toda la vida: las fugas finas se cazan con agua jabonosa, porque las burbujas te delatan el escape.</a:t>
+              <a:t>N1: ¿Por qué el ochenta y cinco y no el cien?</a:t>
+            </a:r>
+          </a:p>
+          <a:p>
+            <a:r>
+              <a:t>N2: Porque el GLP líquido se dilata cuando sube la temperatura, así que el punto alto de llenado corta al ochenta y cinco por ciento y deja un quince por ciento de hueco como colchón. Sin ese margen, en pleno verano el depósito reventaría o dispararía la válvula. Cuidado con el sesenta y cinco, que es el coeficiente de otra fórmula distinta, la de los envases.</a:t>
             </a:r>
           </a:p>
         </p:txBody>
@@ -1122,12 +1127,12 @@
           <a:lstStyle/>
           <a:p>
             <a:r>
-              <a:t>N1: Aparte de las revisiones, ¿hay una prueba más seria de vez en cuando?</a:t>
-            </a:r>
-          </a:p>
-          <a:p>
-            <a:r>
-              <a:t>N2: Sí, la prueba de presión, y su cita es cada quince años. La encarga el titular a un organismo de control, asistido por la empresa de mantenimiento, y se emite un acta de pruebas con resultado favorable. Hay un detalle de los depósitos de superficie que cae: no hace falta probar todo el lote de golpe; se prueba solo una muestra estadística. Y de esa muestra retén dos cosas. Una, el número se obtiene redondeando siempre hacia la unidad superior, y nunca puede bajar de ocho unidades. Y dos, es un control de calidad de los de a más fallos, más miras: si aparece una anomalía en un depósito de la muestra, se revisa el doble; si vuelve a salir otra, se revisa el lote completo. La cifra clave: quince años, y mínimo ocho unidades.</a:t>
+              <a:t>N1: ¿Quién cuida el depósito una vez está funcionando?</a:t>
+            </a:r>
+          </a:p>
+          <a:p>
+            <a:r>
+              <a:t>N2: El responsable es el titular o, en su defecto, los usuarios: la instalación tiene que estar permanentemente en disposición de servicio y con su nivel de seguridad. Para eso están obligados a tener un contrato de mantenimiento con una empresa instaladora que disponga de servicio de urgencias permanente, o sea, que puedas llamar a cualquier hora si hay un problema. Esa empresa conserva la instalación, hace las revisiones y se ocupa especialmente de la protección contra la corrosión. Y todo queda registrado: cada instalación tiene un Libro de Mantenimiento, o un archivo documental si la empresa tiene su sistema de calidad acreditado, donde consta cada visita, los defectos vistos, las reparaciones y las lecturas. El titular custodia ese Libro y el certificado de la última revisión.</a:t>
             </a:r>
           </a:p>
         </p:txBody>
@@ -1197,12 +1202,12 @@
           <a:lstStyle/>
           <a:p>
             <a:r>
-              <a:t>N1: ¿Qué es eso de la protección adicional, y qué hago mientras arreglo mi depósito?</a:t>
-            </a:r>
-          </a:p>
-          <a:p>
-            <a:r>
-              <a:t>N2: Dos cosas prácticas. La primera: un depósito enterrado normal, para la prueba de los quince años, habría que sacarlo del hoyo, que es carísimo. Los depósitos catalogados como con protección adicional se libran de desenterrarse si pasan las pruebas del fabricante; esa es la gran ventaja de ese sello. Si un día no las pasan, el titular puede sustituir el depósito, reparar la envolvente, o degradarlo a depósito normal poniéndole protección catódica. La segunda: mientras tu depósito está de pruebas o en reparación, no se deja a la gente sin gas; se pone uno provisional. Dos cifras que caen: máximo cinco metros cúbicos de volumen, y solo hasta sesenta días, prorrogables con permiso del órgano competente. Y el proyecto de legalización del provisional, solo la primera vez.</a:t>
+              <a:t>N1: ¿Por qué hay tanto miedo a la corrosión en los depósitos enterrados?</a:t>
+            </a:r>
+          </a:p>
+          <a:p>
+            <a:r>
+              <a:t>N2: Porque un depósito bajo tierra está rodeado de suelo húmedo, y la humedad se come el hierro poco a poco hasta que fuga. Para evitarlo, los depósitos enterrados llevan protección catódica, que es un truco electroquímico para que el metal no se oxide; solo se libran si un estudio de agresividad del terreno demuestra que no hace falta. Y esa protección se vigila con dos relojes: el potencial de protección se controla cada año, pero si la protección catódica es por corriente impresa, con un equipo eléctrico alimentado, se comprueba cada tres meses. La regla: corriente impresa, más vigilancia, trimestral, porque depende de un aparato que puede fallar. Idea de fondo: enterrado igual a corrosión igual a protección catódica, salvo estudio que lo exima.</a:t>
             </a:r>
           </a:p>
         </p:txBody>
@@ -1272,12 +1277,12 @@
           <a:lstStyle/>
           <a:p>
             <a:r>
-              <a:t>N1: Cuando un depósito deja de usarse, ¿basta con cerrar la llave?</a:t>
-            </a:r>
-          </a:p>
-          <a:p>
-            <a:r>
-              <a:t>N2: No, ni mucho menos. Un depósito fuera de servicio nunca se abandona con restos de GLP dentro, porque seguiría siendo una bomba. Hay que vaciarlo de gas de verdad: se inertiza, es decir, se rellena de nitrógeno, un gas que no arde, o se desgasifica con agua. Lo hace una empresa instaladora, que lo certifica, y el titular entrega copia de ese certificado al órgano competente de la Comunidad Autónoma. Y ojo a las cifras del cese de actividad: se entiende que una instalación cesa si pasan dos años consecutivos sin consumo, si no hay contrato de mantenimiento, o si pasan cinco años sin el mantenimiento oportuno, salvo fuerza mayor. Esta misma filosofía del inertizado la volverás a ver en las plantas de GNL del vídeo cuatro.</a:t>
+              <a:t>N1: ¿Cada cuánto se revisa el depósito, y de qué depende?</a:t>
+            </a:r>
+          </a:p>
+          <a:p>
+            <a:r>
+              <a:t>N2: Hay dos casos, no los mezcles. Si el depósito alimenta una red de distribución, su revisión es cada dos años. Si solo alimenta la instalación de una casa o una comunidad, la revisión se engancha a la de la instalación receptora, la de la ITC-ICG cero siete, y se hacen las dos juntas en la misma visita. Regla corta: red, dos años; casa, a la vez que la receptora. La revisión la hace la empresa instaladora que tiene el contrato de mantenimiento. Si sale favorable, emite un certificado de revisión para el titular; si sale con fallos, cumplimenta un informe de anomalías, y el titular es el responsable de subsanarlas. Y recuerda: sin acreditar la revisión en plazo y con resultado favorable, no hay suministro de GLP.</a:t>
             </a:r>
           </a:p>
         </p:txBody>
@@ -1422,12 +1427,12 @@
           <a:lstStyle/>
           <a:p>
             <a:r>
-              <a:t>N1: Antes de cerrar, dame los imprescindibles de este vídeo tan cargado.</a:t>
-            </a:r>
-          </a:p>
-          <a:p>
-            <a:r>
-              <a:t>N2: Seis anclas y lo tienes. Una: los topes son dos mil metros cúbicos en superficie y quinientos enterrado, y hace falta proyecto por encima de trece metros cúbicos. Dos: la memoria técnica la puede firmar el instalador; el proyecto, el técnico. Tres: el primer llenado corta al ochenta y cinco por ciento, el colchón para que el líquido se dilate. Cuatro: el depósito enterrado lleva protección catódica, con control anual o trimestral si es corriente impresa. Cinco: las revisiones, cada dos años si da a una red o junto a la receptora si es de una casa. Y seis: la prueba de presión, cada quince años, con muestreo mínimo de ocho en superficie. Con esas seis tienes el esqueleto del vídeo entero.</a:t>
+              <a:t>N1: Trece comprobaciones parecen muchas, ¿cómo me las aprendo?</a:t>
+            </a:r>
+          </a:p>
+          <a:p>
+            <a:r>
+              <a:t>N2: No las memorices de carrerilla; agrúpalas en tres bloques y las tienes. Los puntos uno a tres son papeleo y bomberos: el último certificado de inspección, la inspección visual y el estado del equipo contra incendios. Los puntos cuatro a nueve son el hierro: recubrimiento del depósito, tuberías y anclajes, funcionamiento de llaves, manómetros, niveles y reguladores, estado del cerramiento y los rótulos, la protección contra la corrosión y la resistencia de la toma de tierra. Y los puntos diez a trece son que no fugue: las distintas pruebas de estanquidad. La cifra fina que cae: la boca de carga desplazada y las mangueras de trasvase se prueban a tres bar durante diez minutos. Y el clásico de toda la vida: las fugas finas se cazan con agua jabonosa, porque las burbujas te delatan el escape.</a:t>
             </a:r>
           </a:p>
         </p:txBody>
@@ -1497,6 +1502,381 @@
           <a:lstStyle/>
           <a:p>
             <a:r>
+              <a:t>N1: Aparte de las revisiones, ¿hay una prueba más seria de vez en cuando?</a:t>
+            </a:r>
+          </a:p>
+          <a:p>
+            <a:r>
+              <a:t>N2: Sí, la prueba de presión, y su cita es cada quince años. La encarga el titular a un organismo de control, asistido por la empresa de mantenimiento, y se emite un acta de pruebas con resultado favorable. Hay un detalle de los depósitos de superficie que cae: no hace falta probar todo el lote de golpe; se prueba solo una muestra estadística. Y de esa muestra retén dos cosas. Una, el número se obtiene redondeando siempre hacia la unidad superior, y nunca puede bajar de ocho unidades. Y dos, es un control de calidad de los de a más fallos, más miras: si aparece una anomalía en un depósito de la muestra, se revisa el doble; si vuelve a salir otra, se revisa el lote completo. La cifra clave: quince años, y mínimo ocho unidades.</a:t>
+            </a:r>
+          </a:p>
+        </p:txBody>
+      </p:sp>
+      <p:sp>
+        <p:nvSpPr>
+          <p:cNvPr id="4" name="Slide Number Placeholder 3"/>
+          <p:cNvSpPr>
+            <a:spLocks noGrp="1"/>
+          </p:cNvSpPr>
+          <p:nvPr>
+            <p:ph type="sldNum" idx="5" sz="quarter"/>
+          </p:nvPr>
+        </p:nvSpPr>
+        <p:spPr/>
+      </p:sp>
+    </p:spTree>
+  </p:cSld>
+  <p:clrMapOvr>
+    <a:masterClrMapping/>
+  </p:clrMapOvr>
+</p:notes>
+</file>
+
+<file path=ppt/notesSlides/notesSlide22.xml><?xml version="1.0" encoding="utf-8"?>
+<p:notes xmlns:a="http://schemas.openxmlformats.org/drawingml/2006/main" xmlns:p="http://schemas.openxmlformats.org/presentationml/2006/main" xmlns:r="http://schemas.openxmlformats.org/officeDocument/2006/relationships">
+  <p:cSld>
+    <p:spTree>
+      <p:nvGrpSpPr>
+        <p:cNvPr id="1" name=""/>
+        <p:cNvGrpSpPr/>
+        <p:nvPr/>
+      </p:nvGrpSpPr>
+      <p:grpSpPr>
+        <a:xfrm>
+          <a:off x="0" y="0"/>
+          <a:ext cx="0" cy="0"/>
+          <a:chOff x="0" y="0"/>
+          <a:chExt cx="0" cy="0"/>
+        </a:xfrm>
+      </p:grpSpPr>
+      <p:sp>
+        <p:nvSpPr>
+          <p:cNvPr id="2" name="Slide Image Placeholder 1"/>
+          <p:cNvSpPr>
+            <a:spLocks noGrp="1"/>
+          </p:cNvSpPr>
+          <p:nvPr>
+            <p:ph type="sldImg" idx="2"/>
+          </p:nvPr>
+        </p:nvSpPr>
+        <p:spPr/>
+      </p:sp>
+      <p:sp>
+        <p:nvSpPr>
+          <p:cNvPr id="3" name="Notes Placeholder 2"/>
+          <p:cNvSpPr>
+            <a:spLocks noGrp="1"/>
+          </p:cNvSpPr>
+          <p:nvPr>
+            <p:ph type="body" idx="3" sz="quarter"/>
+          </p:nvPr>
+        </p:nvSpPr>
+        <p:spPr/>
+        <p:txBody>
+          <a:bodyPr/>
+          <a:lstStyle/>
+          <a:p>
+            <a:r>
+              <a:t>N1: De un lote grande de depósitos de superficie, ¿cuántos hay que probar como mínimo?</a:t>
+            </a:r>
+          </a:p>
+          <a:p>
+            <a:r>
+              <a:t>N2: Este es el Cuadro uno del muestreo: los depósitos de superficie no prueban todo el lote, solo una muestra estadística, y su tamaño baja en porcentaje según crece el lote. Se lee así: buscas el tramo por número de depósitos y aplicas el porcentaje de la columna que toque, normal o reducida. La reducida solo vale si son del mismo tipo, mismo fabricante y sin ninguna anomalía el año anterior. Cuanto mayor el lote, menor el porcentaje, porque hay más confianza estadística. Dos reglas de oro que van fuera de la tabla: el resultado se redondea siempre hacia arriba, y nunca puede ser inferior a ocho depósitos. Ejemplo: en un lote de cincuenta depósitos, el veinticuatro por ciento son doce; pero si saliera menos de ocho, probarías ocho igualmente.</a:t>
+            </a:r>
+          </a:p>
+        </p:txBody>
+      </p:sp>
+      <p:sp>
+        <p:nvSpPr>
+          <p:cNvPr id="4" name="Slide Number Placeholder 3"/>
+          <p:cNvSpPr>
+            <a:spLocks noGrp="1"/>
+          </p:cNvSpPr>
+          <p:nvPr>
+            <p:ph type="sldNum" idx="5" sz="quarter"/>
+          </p:nvPr>
+        </p:nvSpPr>
+        <p:spPr/>
+      </p:sp>
+    </p:spTree>
+  </p:cSld>
+  <p:clrMapOvr>
+    <a:masterClrMapping/>
+  </p:clrMapOvr>
+</p:notes>
+</file>
+
+<file path=ppt/notesSlides/notesSlide23.xml><?xml version="1.0" encoding="utf-8"?>
+<p:notes xmlns:a="http://schemas.openxmlformats.org/drawingml/2006/main" xmlns:p="http://schemas.openxmlformats.org/presentationml/2006/main" xmlns:r="http://schemas.openxmlformats.org/officeDocument/2006/relationships">
+  <p:cSld>
+    <p:spTree>
+      <p:nvGrpSpPr>
+        <p:cNvPr id="1" name=""/>
+        <p:cNvGrpSpPr/>
+        <p:nvPr/>
+      </p:nvGrpSpPr>
+      <p:grpSpPr>
+        <a:xfrm>
+          <a:off x="0" y="0"/>
+          <a:ext cx="0" cy="0"/>
+          <a:chOff x="0" y="0"/>
+          <a:chExt cx="0" cy="0"/>
+        </a:xfrm>
+      </p:grpSpPr>
+      <p:sp>
+        <p:nvSpPr>
+          <p:cNvPr id="2" name="Slide Image Placeholder 1"/>
+          <p:cNvSpPr>
+            <a:spLocks noGrp="1"/>
+          </p:cNvSpPr>
+          <p:nvPr>
+            <p:ph type="sldImg" idx="2"/>
+          </p:nvPr>
+        </p:nvSpPr>
+        <p:spPr/>
+      </p:sp>
+      <p:sp>
+        <p:nvSpPr>
+          <p:cNvPr id="3" name="Notes Placeholder 2"/>
+          <p:cNvSpPr>
+            <a:spLocks noGrp="1"/>
+          </p:cNvSpPr>
+          <p:nvPr>
+            <p:ph type="body" idx="3" sz="quarter"/>
+          </p:nvPr>
+        </p:nvSpPr>
+        <p:spPr/>
+        <p:txBody>
+          <a:bodyPr/>
+          <a:lstStyle/>
+          <a:p>
+            <a:r>
+              <a:t>N1: ¿Qué es eso de la protección adicional, y qué hago mientras arreglo mi depósito?</a:t>
+            </a:r>
+          </a:p>
+          <a:p>
+            <a:r>
+              <a:t>N2: Dos cosas prácticas. La primera: un depósito enterrado normal, para la prueba de los quince años, habría que sacarlo del hoyo, que es carísimo. Los depósitos catalogados como con protección adicional se libran de desenterrarse si pasan las pruebas del fabricante; esa es la gran ventaja de ese sello. Si un día no las pasan, el titular puede sustituir el depósito, reparar la envolvente, o degradarlo a depósito normal poniéndole protección catódica. La segunda: mientras tu depósito está de pruebas o en reparación, no se deja a la gente sin gas; se pone uno provisional. Dos cifras que caen: máximo cinco metros cúbicos de volumen, y solo hasta sesenta días, prorrogables con permiso del órgano competente. Y el proyecto de legalización del provisional, solo la primera vez.</a:t>
+            </a:r>
+          </a:p>
+        </p:txBody>
+      </p:sp>
+      <p:sp>
+        <p:nvSpPr>
+          <p:cNvPr id="4" name="Slide Number Placeholder 3"/>
+          <p:cNvSpPr>
+            <a:spLocks noGrp="1"/>
+          </p:cNvSpPr>
+          <p:nvPr>
+            <p:ph type="sldNum" idx="5" sz="quarter"/>
+          </p:nvPr>
+        </p:nvSpPr>
+        <p:spPr/>
+      </p:sp>
+    </p:spTree>
+  </p:cSld>
+  <p:clrMapOvr>
+    <a:masterClrMapping/>
+  </p:clrMapOvr>
+</p:notes>
+</file>
+
+<file path=ppt/notesSlides/notesSlide24.xml><?xml version="1.0" encoding="utf-8"?>
+<p:notes xmlns:a="http://schemas.openxmlformats.org/drawingml/2006/main" xmlns:p="http://schemas.openxmlformats.org/presentationml/2006/main" xmlns:r="http://schemas.openxmlformats.org/officeDocument/2006/relationships">
+  <p:cSld>
+    <p:spTree>
+      <p:nvGrpSpPr>
+        <p:cNvPr id="1" name=""/>
+        <p:cNvGrpSpPr/>
+        <p:nvPr/>
+      </p:nvGrpSpPr>
+      <p:grpSpPr>
+        <a:xfrm>
+          <a:off x="0" y="0"/>
+          <a:ext cx="0" cy="0"/>
+          <a:chOff x="0" y="0"/>
+          <a:chExt cx="0" cy="0"/>
+        </a:xfrm>
+      </p:grpSpPr>
+      <p:sp>
+        <p:nvSpPr>
+          <p:cNvPr id="2" name="Slide Image Placeholder 1"/>
+          <p:cNvSpPr>
+            <a:spLocks noGrp="1"/>
+          </p:cNvSpPr>
+          <p:nvPr>
+            <p:ph type="sldImg" idx="2"/>
+          </p:nvPr>
+        </p:nvSpPr>
+        <p:spPr/>
+      </p:sp>
+      <p:sp>
+        <p:nvSpPr>
+          <p:cNvPr id="3" name="Notes Placeholder 2"/>
+          <p:cNvSpPr>
+            <a:spLocks noGrp="1"/>
+          </p:cNvSpPr>
+          <p:nvPr>
+            <p:ph type="body" idx="3" sz="quarter"/>
+          </p:nvPr>
+        </p:nvSpPr>
+        <p:spPr/>
+        <p:txBody>
+          <a:bodyPr/>
+          <a:lstStyle/>
+          <a:p>
+            <a:r>
+              <a:t>N1: Cuando un depósito deja de usarse, ¿basta con cerrar la llave?</a:t>
+            </a:r>
+          </a:p>
+          <a:p>
+            <a:r>
+              <a:t>N2: No, ni mucho menos. Un depósito fuera de servicio nunca se abandona con restos de GLP dentro, porque seguiría siendo una bomba. Hay que vaciarlo de gas de verdad: se inertiza, es decir, se rellena de nitrógeno, un gas que no arde, o se desgasifica con agua. Lo hace una empresa instaladora, que lo certifica, y el titular entrega copia de ese certificado al órgano competente de la Comunidad Autónoma. Y ojo a las cifras del cese de actividad: se entiende que una instalación cesa si pasan dos años consecutivos sin consumo, si no hay contrato de mantenimiento, o si pasan cinco años sin el mantenimiento oportuno, salvo fuerza mayor. Esta misma filosofía del inertizado la volverás a ver en las plantas de GNL del vídeo cuatro.</a:t>
+            </a:r>
+          </a:p>
+        </p:txBody>
+      </p:sp>
+      <p:sp>
+        <p:nvSpPr>
+          <p:cNvPr id="4" name="Slide Number Placeholder 3"/>
+          <p:cNvSpPr>
+            <a:spLocks noGrp="1"/>
+          </p:cNvSpPr>
+          <p:nvPr>
+            <p:ph type="sldNum" idx="5" sz="quarter"/>
+          </p:nvPr>
+        </p:nvSpPr>
+        <p:spPr/>
+      </p:sp>
+    </p:spTree>
+  </p:cSld>
+  <p:clrMapOvr>
+    <a:masterClrMapping/>
+  </p:clrMapOvr>
+</p:notes>
+</file>
+
+<file path=ppt/notesSlides/notesSlide25.xml><?xml version="1.0" encoding="utf-8"?>
+<p:notes xmlns:a="http://schemas.openxmlformats.org/drawingml/2006/main" xmlns:p="http://schemas.openxmlformats.org/presentationml/2006/main" xmlns:r="http://schemas.openxmlformats.org/officeDocument/2006/relationships">
+  <p:cSld>
+    <p:spTree>
+      <p:nvGrpSpPr>
+        <p:cNvPr id="1" name=""/>
+        <p:cNvGrpSpPr/>
+        <p:nvPr/>
+      </p:nvGrpSpPr>
+      <p:grpSpPr>
+        <a:xfrm>
+          <a:off x="0" y="0"/>
+          <a:ext cx="0" cy="0"/>
+          <a:chOff x="0" y="0"/>
+          <a:chExt cx="0" cy="0"/>
+        </a:xfrm>
+      </p:grpSpPr>
+      <p:sp>
+        <p:nvSpPr>
+          <p:cNvPr id="2" name="Slide Image Placeholder 1"/>
+          <p:cNvSpPr>
+            <a:spLocks noGrp="1"/>
+          </p:cNvSpPr>
+          <p:nvPr>
+            <p:ph type="sldImg" idx="2"/>
+          </p:nvPr>
+        </p:nvSpPr>
+        <p:spPr/>
+      </p:sp>
+      <p:sp>
+        <p:nvSpPr>
+          <p:cNvPr id="3" name="Notes Placeholder 2"/>
+          <p:cNvSpPr>
+            <a:spLocks noGrp="1"/>
+          </p:cNvSpPr>
+          <p:nvPr>
+            <p:ph type="body" idx="3" sz="quarter"/>
+          </p:nvPr>
+        </p:nvSpPr>
+        <p:spPr/>
+        <p:txBody>
+          <a:bodyPr/>
+          <a:lstStyle/>
+          <a:p>
+            <a:r>
+              <a:t>N1: Antes de cerrar, dame los imprescindibles de este vídeo tan cargado.</a:t>
+            </a:r>
+          </a:p>
+          <a:p>
+            <a:r>
+              <a:t>N2: Seis anclas y lo tienes. Una: los topes son dos mil metros cúbicos en superficie y quinientos enterrado, y hace falta proyecto por encima de trece metros cúbicos. Dos: la memoria técnica la puede firmar el instalador; el proyecto, el técnico. Tres: el primer llenado corta al ochenta y cinco por ciento, el colchón para que el líquido se dilate. Cuatro: el depósito enterrado lleva protección catódica, con control anual o trimestral si es corriente impresa. Cinco: las revisiones, cada dos años si da a una red o junto a la receptora si es de una casa. Y seis: la prueba de presión, cada quince años, con muestreo mínimo de ocho en superficie. Con esas seis tienes el esqueleto del vídeo entero.</a:t>
+            </a:r>
+          </a:p>
+        </p:txBody>
+      </p:sp>
+      <p:sp>
+        <p:nvSpPr>
+          <p:cNvPr id="4" name="Slide Number Placeholder 3"/>
+          <p:cNvSpPr>
+            <a:spLocks noGrp="1"/>
+          </p:cNvSpPr>
+          <p:nvPr>
+            <p:ph type="sldNum" idx="5" sz="quarter"/>
+          </p:nvPr>
+        </p:nvSpPr>
+        <p:spPr/>
+      </p:sp>
+    </p:spTree>
+  </p:cSld>
+  <p:clrMapOvr>
+    <a:masterClrMapping/>
+  </p:clrMapOvr>
+</p:notes>
+</file>
+
+<file path=ppt/notesSlides/notesSlide26.xml><?xml version="1.0" encoding="utf-8"?>
+<p:notes xmlns:a="http://schemas.openxmlformats.org/drawingml/2006/main" xmlns:p="http://schemas.openxmlformats.org/presentationml/2006/main" xmlns:r="http://schemas.openxmlformats.org/officeDocument/2006/relationships">
+  <p:cSld>
+    <p:spTree>
+      <p:nvGrpSpPr>
+        <p:cNvPr id="1" name=""/>
+        <p:cNvGrpSpPr/>
+        <p:nvPr/>
+      </p:nvGrpSpPr>
+      <p:grpSpPr>
+        <a:xfrm>
+          <a:off x="0" y="0"/>
+          <a:ext cx="0" cy="0"/>
+          <a:chOff x="0" y="0"/>
+          <a:chExt cx="0" cy="0"/>
+        </a:xfrm>
+      </p:grpSpPr>
+      <p:sp>
+        <p:nvSpPr>
+          <p:cNvPr id="2" name="Slide Image Placeholder 1"/>
+          <p:cNvSpPr>
+            <a:spLocks noGrp="1"/>
+          </p:cNvSpPr>
+          <p:nvPr>
+            <p:ph type="sldImg" idx="2"/>
+          </p:nvPr>
+        </p:nvSpPr>
+        <p:spPr/>
+      </p:sp>
+      <p:sp>
+        <p:nvSpPr>
+          <p:cNvPr id="3" name="Notes Placeholder 2"/>
+          <p:cNvSpPr>
+            <a:spLocks noGrp="1"/>
+          </p:cNvSpPr>
+          <p:nvPr>
+            <p:ph type="body" idx="3" sz="quarter"/>
+          </p:nvPr>
+        </p:nvSpPr>
+        <p:spPr/>
+        <p:txBody>
+          <a:bodyPr/>
+          <a:lstStyle/>
+          <a:p>
+            <a:r>
               <a:t>N1: Cerramos la ITC cero tres. ¿Qué me llevo de todo este mantenimiento?</a:t>
             </a:r>
           </a:p>
@@ -1948,12 +2328,12 @@
           <a:lstStyle/>
           <a:p>
             <a:r>
-              <a:t>N1: Y esto de quién firma cada papel, ¿por qué me importa a mí, con el carné de Gas B?</a:t>
-            </a:r>
-          </a:p>
-          <a:p>
-            <a:r>
-              <a:t>N2: Porque decide qué instalaciones vas a poder legalizar tú. La lógica es la misma que en el articulado del Reglamento: instalación pequeña o normal, memoria técnica, que la puede firmar el instalador con su categoría de depósitos fijos de GLP; instalación grande o compleja, proyecto, que lo firma un técnico facultativo competente, un titulado. Traducido a tu día a día: con tu carné podrás firmar la memoria técnica de un depósito fijo, pero no el proyecto. Saber distinguir memoria de proyecto es lo que decide, en la práctica, si esa instalación la legalizas tú o tiene que ir a un ingeniero.</a:t>
+              <a:t>N1: El número mágico del papeleo. ¿Por encima de cuántos metros cúbicos toca proyecto?</a:t>
+            </a:r>
+          </a:p>
+          <a:p>
+            <a:r>
+              <a:t>N2: Es una de las cifras estrella del vídeo. Piensa en el umbral que separa la memoria del proyecto.</a:t>
             </a:r>
           </a:p>
         </p:txBody>
@@ -2023,12 +2403,12 @@
           <a:lstStyle/>
           <a:p>
             <a:r>
-              <a:t>N1: ¿Cuándo hay que volver a probar un depósito antes de enchufarlo?</a:t>
-            </a:r>
-          </a:p>
-          <a:p>
-            <a:r>
-              <a:t>N2: Cuando ha estado esperando demasiado tiempo o ha sufrido algo. Se le hace una prueba hidrostática en el emplazamiento, certificada por un organismo de control, en varios casos: si el instalador ve algún desperfecto por las operaciones de carga y descarga, si el depósito cambia de emplazamiento, o por el paso del tiempo. Y ahí van los dos relojes gemelos: más de doce meses desde que llegó al sitio, o más de veinticuatro meses desde las pruebas de fábrica. Truco para recordarlo: un año en la parcela o dos desde fábrica, y a probar otra vez. Superadas las pruebas de la norma, la puesta en servicio conlleva una inspección inicial del organismo de control.</a:t>
+              <a:t>N1: ¿Por qué trece y no otro?</a:t>
+            </a:r>
+          </a:p>
+          <a:p>
+            <a:r>
+              <a:t>N2: Porque la instrucción fija en más de trece metros cúbicos el disparador de proyecto por capacidad; por debajo, y sin otras complicaciones, basta memoria técnica que firma el instalador. Recuerda que hay más disparadores, como alimentar una red o el acceso público, pero el de la capacidad es el trece. El truco: trece, el número mágico del proyecto.</a:t>
             </a:r>
           </a:p>
         </p:txBody>
@@ -5114,7 +5494,7 @@
       </p:sp>
       <p:sp>
         <p:nvSpPr>
-          <p:cNvPr id="4" name="Rounded Rectangle 3"/>
+          <p:cNvPr id="4" name="Rectangle 3"/>
           <p:cNvSpPr/>
           <p:nvPr/>
         </p:nvSpPr>
@@ -5123,7 +5503,7 @@
             <a:off x="868680" y="2057400"/>
             <a:ext cx="1463040" cy="82296"/>
           </a:xfrm>
-          <a:prstGeom prst="roundRect">
+          <a:prstGeom prst="rect">
             <a:avLst/>
           </a:prstGeom>
           <a:solidFill>
@@ -5240,6 +5620,18 @@
   <p:clrMapOvr>
     <a:masterClrMapping/>
   </p:clrMapOvr>
+  <mc:AlternateContent xmlns:mc="http://schemas.openxmlformats.org/markup-compatibility/2006">
+    <mc:Choice xmlns:p14="http://schemas.microsoft.com/office/powerpoint/2010/main" Requires="p14">
+      <p:transition spd="med" p14:dur="700">
+        <p14:cube dir="l"/>
+      </p:transition>
+    </mc:Choice>
+    <mc:Fallback>
+      <p:transition spd="med">
+        <p:push dir="l"/>
+      </p:transition>
+    </mc:Fallback>
+  </mc:AlternateContent>
 </p:sld>
 </file>
 
@@ -5327,7 +5719,7 @@
                 </a:solidFill>
                 <a:latin typeface="Montserrat"/>
               </a:rPr>
-              <a:t>010 / 021</a:t>
+              <a:t>010 / 026</a:t>
             </a:r>
           </a:p>
         </p:txBody>
@@ -5395,7 +5787,7 @@
                 </a:solidFill>
                 <a:latin typeface="Montserrat"/>
               </a:rPr>
-              <a:t>APARTADO 5.5 · CERTIFICADOS</a:t>
+              <a:t>APARTADO 5.3 · MEMORIA</a:t>
             </a:r>
           </a:p>
         </p:txBody>
@@ -5429,14 +5821,14 @@
                 </a:solidFill>
                 <a:latin typeface="Montserrat"/>
               </a:rPr>
-              <a:t>Tres firmas, tres papeles</a:t>
-            </a:r>
-          </a:p>
-        </p:txBody>
-      </p:sp>
-      <p:sp>
-        <p:nvSpPr>
-          <p:cNvPr id="7" name="Rounded Rectangle 6"/>
+              <a:t>Memoria o proyecto: quién firma</a:t>
+            </a:r>
+          </a:p>
+        </p:txBody>
+      </p:sp>
+      <p:sp>
+        <p:nvSpPr>
+          <p:cNvPr id="7" name="Rectangle 6"/>
           <p:cNvSpPr/>
           <p:nvPr/>
         </p:nvSpPr>
@@ -5445,7 +5837,7 @@
             <a:off x="868680" y="1627632"/>
             <a:ext cx="2011680" cy="73152"/>
           </a:xfrm>
-          <a:prstGeom prst="roundRect">
+          <a:prstGeom prst="rect">
             <a:avLst/>
           </a:prstGeom>
           <a:solidFill>
@@ -5487,7 +5879,7 @@
         <p:spPr>
           <a:xfrm>
             <a:off x="822960" y="1965960"/>
-            <a:ext cx="4983480" cy="4206240"/>
+            <a:ext cx="5029200" cy="4206240"/>
           </a:xfrm>
           <a:prstGeom prst="rect">
             <a:avLst/>
@@ -5521,7 +5913,7 @@
                 </a:solidFill>
                 <a:latin typeface="Montserrat"/>
               </a:rPr>
-              <a:t>Instalación: la empresa instaladora (triplicado)</a:t>
+              <a:t>Instalación normal: memoria técnica</a:t>
             </a:r>
           </a:p>
           <a:p>
@@ -5546,7 +5938,7 @@
                 </a:solidFill>
                 <a:latin typeface="Montserrat"/>
               </a:rPr>
-              <a:t>Inspección: el organismo de control</a:t>
+              <a:t>La memoria la firma el instalador</a:t>
             </a:r>
           </a:p>
           <a:p>
@@ -5571,7 +5963,7 @@
                 </a:solidFill>
                 <a:latin typeface="Montserrat"/>
               </a:rPr>
-              <a:t>Dirección de obra: si hubo proyecto</a:t>
+              <a:t>Instalación grande: proyecto</a:t>
             </a:r>
           </a:p>
           <a:p>
@@ -5596,21 +5988,21 @@
                 </a:solidFill>
                 <a:latin typeface="Montserrat"/>
               </a:rPr>
-              <a:t>Copia al titular y a la Comunidad</a:t>
-            </a:r>
-          </a:p>
-        </p:txBody>
-      </p:sp>
-      <p:sp>
-        <p:nvSpPr>
-          <p:cNvPr id="9" name="imgph" descr="IMGQ:signed certificate documents desk"/>
+              <a:t>El proyecto lo firma el técnico</a:t>
+            </a:r>
+          </a:p>
+        </p:txBody>
+      </p:sp>
+      <p:sp>
+        <p:nvSpPr>
+          <p:cNvPr id="9" name="imgph" descr="IMGQ:gas installer signing paperwork"/>
           <p:cNvSpPr/>
           <p:nvPr/>
         </p:nvSpPr>
         <p:spPr>
           <a:xfrm>
-            <a:off x="5806440" y="1051560"/>
-            <a:ext cx="5298947" cy="4629150"/>
+            <a:off x="6080760" y="1965960"/>
+            <a:ext cx="5303520" cy="4572000"/>
           </a:xfrm>
           <a:prstGeom prst="roundRect">
             <a:avLst/>
@@ -5655,8 +6047,8 @@
         </p:nvSpPr>
         <p:spPr>
           <a:xfrm>
-            <a:off x="6080760" y="2726055"/>
-            <a:ext cx="4750307" cy="1280160"/>
+            <a:off x="6355080" y="3611880"/>
+            <a:ext cx="4754880" cy="1280160"/>
           </a:xfrm>
           <a:prstGeom prst="rect">
             <a:avLst/>
@@ -5677,7 +6069,7 @@
                 </a:solidFill>
                 <a:latin typeface="Montserrat"/>
               </a:rPr>
-              <a:t>IMAGEN REALISTA</a:t>
+              <a:t>IMAGEN</a:t>
             </a:r>
           </a:p>
           <a:p>
@@ -5689,7 +6081,7 @@
                 </a:solidFill>
                 <a:latin typeface="Montserrat"/>
               </a:rPr>
-              <a:t>signed certificate documents desk</a:t>
+              <a:t>gas installer signing paperwork</a:t>
             </a:r>
           </a:p>
         </p:txBody>
@@ -5699,6 +6091,18 @@
   <p:clrMapOvr>
     <a:masterClrMapping/>
   </p:clrMapOvr>
+  <mc:AlternateContent xmlns:mc="http://schemas.openxmlformats.org/markup-compatibility/2006">
+    <mc:Choice xmlns:p14="http://schemas.microsoft.com/office/powerpoint/2010/main" Requires="p14">
+      <p:transition spd="med" p14:dur="700">
+        <p14:cube dir="r"/>
+      </p:transition>
+    </mc:Choice>
+    <mc:Fallback>
+      <p:transition spd="med">
+        <p:push dir="r"/>
+      </p:transition>
+    </mc:Fallback>
+  </mc:AlternateContent>
 </p:sld>
 </file>
 
@@ -5786,7 +6190,7 @@
                 </a:solidFill>
                 <a:latin typeface="Montserrat"/>
               </a:rPr>
-              <a:t>011 / 021</a:t>
+              <a:t>011 / 026</a:t>
             </a:r>
           </a:p>
         </p:txBody>
@@ -5854,7 +6258,7 @@
                 </a:solidFill>
                 <a:latin typeface="Montserrat"/>
               </a:rPr>
-              <a:t>APARTADO 5.6 · COMUNICACIÓN</a:t>
+              <a:t>APARTADO 5.4 · PRUEBAS PREVIAS</a:t>
             </a:r>
           </a:p>
         </p:txBody>
@@ -5888,14 +6292,14 @@
                 </a:solidFill>
                 <a:latin typeface="Montserrat"/>
               </a:rPr>
-              <a:t>Antes del primer llenado</a:t>
-            </a:r>
-          </a:p>
-        </p:txBody>
-      </p:sp>
-      <p:sp>
-        <p:nvSpPr>
-          <p:cNvPr id="7" name="Rounded Rectangle 6"/>
+              <a:t>Dos plazos gemelos</a:t>
+            </a:r>
+          </a:p>
+        </p:txBody>
+      </p:sp>
+      <p:sp>
+        <p:nvSpPr>
+          <p:cNvPr id="7" name="Rectangle 6"/>
           <p:cNvSpPr/>
           <p:nvPr/>
         </p:nvSpPr>
@@ -5904,7 +6308,7 @@
             <a:off x="868680" y="1627632"/>
             <a:ext cx="2011680" cy="73152"/>
           </a:xfrm>
-          <a:prstGeom prst="roundRect">
+          <a:prstGeom prst="rect">
             <a:avLst/>
           </a:prstGeom>
           <a:solidFill>
@@ -5945,8 +6349,8 @@
         </p:nvSpPr>
         <p:spPr>
           <a:xfrm>
-            <a:off x="822960" y="1965960"/>
-            <a:ext cx="4983480" cy="4206240"/>
+            <a:off x="6355080" y="1965960"/>
+            <a:ext cx="5029200" cy="4206240"/>
           </a:xfrm>
           <a:prstGeom prst="rect">
             <a:avLst/>
@@ -5980,7 +6384,7 @@
                 </a:solidFill>
                 <a:latin typeface="Montserrat"/>
               </a:rPr>
-              <a:t>Se presenta por duplicado a la Comunidad</a:t>
+              <a:t>Prueba hidrostática si hay golpe o traslado</a:t>
             </a:r>
           </a:p>
           <a:p>
@@ -6005,7 +6409,7 @@
                 </a:solidFill>
                 <a:latin typeface="Montserrat"/>
               </a:rPr>
-              <a:t>Certificados de instalación e inspección</a:t>
+              <a:t>Más de 12 meses en el emplazamiento</a:t>
             </a:r>
           </a:p>
           <a:p>
@@ -6030,7 +6434,7 @@
                 </a:solidFill>
                 <a:latin typeface="Montserrat"/>
               </a:rPr>
-              <a:t>Contrato de mantenimiento ya firmado</a:t>
+              <a:t>Más de 24 meses desde fábrica</a:t>
             </a:r>
           </a:p>
           <a:p>
@@ -6055,21 +6459,21 @@
                 </a:solidFill>
                 <a:latin typeface="Montserrat"/>
               </a:rPr>
-              <a:t>Azotea: certificado de que aguanta el peso</a:t>
-            </a:r>
-          </a:p>
-        </p:txBody>
-      </p:sp>
-      <p:sp>
-        <p:nvSpPr>
-          <p:cNvPr id="9" name="imgph" descr="IMGQ:rooftop gas tank building"/>
+              <a:t>Certifica un organismo de control</a:t>
+            </a:r>
+          </a:p>
+        </p:txBody>
+      </p:sp>
+      <p:sp>
+        <p:nvSpPr>
+          <p:cNvPr id="9" name="imgph" descr="IMGQ:hydrostatic pressure test tank"/>
           <p:cNvSpPr/>
           <p:nvPr/>
         </p:nvSpPr>
         <p:spPr>
           <a:xfrm>
-            <a:off x="5806440" y="1051560"/>
-            <a:ext cx="5298947" cy="4629150"/>
+            <a:off x="822960" y="1965960"/>
+            <a:ext cx="5303520" cy="4572000"/>
           </a:xfrm>
           <a:prstGeom prst="roundRect">
             <a:avLst/>
@@ -6114,8 +6518,8 @@
         </p:nvSpPr>
         <p:spPr>
           <a:xfrm>
-            <a:off x="6080760" y="2726055"/>
-            <a:ext cx="4750307" cy="1280160"/>
+            <a:off x="1097280" y="3611880"/>
+            <a:ext cx="4754880" cy="1280160"/>
           </a:xfrm>
           <a:prstGeom prst="rect">
             <a:avLst/>
@@ -6136,7 +6540,7 @@
                 </a:solidFill>
                 <a:latin typeface="Montserrat"/>
               </a:rPr>
-              <a:t>IMAGEN REALISTA</a:t>
+              <a:t>IMAGEN</a:t>
             </a:r>
           </a:p>
           <a:p>
@@ -6148,7 +6552,7 @@
                 </a:solidFill>
                 <a:latin typeface="Montserrat"/>
               </a:rPr>
-              <a:t>rooftop gas tank building</a:t>
+              <a:t>hydrostatic pressure test tank</a:t>
             </a:r>
           </a:p>
         </p:txBody>
@@ -6158,6 +6562,18 @@
   <p:clrMapOvr>
     <a:masterClrMapping/>
   </p:clrMapOvr>
+  <mc:AlternateContent xmlns:mc="http://schemas.openxmlformats.org/markup-compatibility/2006">
+    <mc:Choice xmlns:p14="http://schemas.microsoft.com/office/powerpoint/2010/main" Requires="p14">
+      <p:transition spd="med" p14:dur="700">
+        <p14:cube dir="l"/>
+      </p:transition>
+    </mc:Choice>
+    <mc:Fallback>
+      <p:transition spd="med">
+        <p:push dir="l"/>
+      </p:transition>
+    </mc:Fallback>
+  </mc:AlternateContent>
 </p:sld>
 </file>
 
@@ -6245,7 +6661,7 @@
                 </a:solidFill>
                 <a:latin typeface="Montserrat"/>
               </a:rPr>
-              <a:t>012 / 021</a:t>
+              <a:t>012 / 026</a:t>
             </a:r>
           </a:p>
         </p:txBody>
@@ -6313,7 +6729,7 @@
                 </a:solidFill>
                 <a:latin typeface="Montserrat"/>
               </a:rPr>
-              <a:t>APARTADO 5.6 · PRIMER LLENADO</a:t>
+              <a:t>APARTADO 5.5 · CERTIFICADOS</a:t>
             </a:r>
           </a:p>
         </p:txBody>
@@ -6347,14 +6763,14 @@
                 </a:solidFill>
                 <a:latin typeface="Montserrat"/>
               </a:rPr>
-              <a:t>El 85 %: la burbuja de seguridad</a:t>
-            </a:r>
-          </a:p>
-        </p:txBody>
-      </p:sp>
-      <p:sp>
-        <p:nvSpPr>
-          <p:cNvPr id="7" name="Rounded Rectangle 6"/>
+              <a:t>Tres firmas, tres papeles</a:t>
+            </a:r>
+          </a:p>
+        </p:txBody>
+      </p:sp>
+      <p:sp>
+        <p:nvSpPr>
+          <p:cNvPr id="7" name="Rectangle 6"/>
           <p:cNvSpPr/>
           <p:nvPr/>
         </p:nvSpPr>
@@ -6363,7 +6779,7 @@
             <a:off x="868680" y="1627632"/>
             <a:ext cx="2011680" cy="73152"/>
           </a:xfrm>
-          <a:prstGeom prst="roundRect">
+          <a:prstGeom prst="rect">
             <a:avLst/>
           </a:prstGeom>
           <a:solidFill>
@@ -6405,7 +6821,7 @@
         <p:spPr>
           <a:xfrm>
             <a:off x="822960" y="1965960"/>
-            <a:ext cx="4983480" cy="4206240"/>
+            <a:ext cx="5029200" cy="4206240"/>
           </a:xfrm>
           <a:prstGeom prst="rect">
             <a:avLst/>
@@ -6439,7 +6855,7 @@
                 </a:solidFill>
                 <a:latin typeface="Montserrat"/>
               </a:rPr>
-              <a:t>Se comprueba la estanquidad</a:t>
+              <a:t>Instalación: la empresa instaladora (triplicado)</a:t>
             </a:r>
           </a:p>
           <a:p>
@@ -6464,7 +6880,7 @@
                 </a:solidFill>
                 <a:latin typeface="Montserrat"/>
               </a:rPr>
-              <a:t>Punto alto de llenado corta al 85 %</a:t>
+              <a:t>Inspección: el organismo de control</a:t>
             </a:r>
           </a:p>
           <a:p>
@@ -6489,7 +6905,7 @@
                 </a:solidFill>
                 <a:latin typeface="Montserrat"/>
               </a:rPr>
-              <a:t>El 15 % de hueco es el colchón</a:t>
+              <a:t>Dirección de obra: si hubo proyecto</a:t>
             </a:r>
           </a:p>
           <a:p>
@@ -6514,21 +6930,21 @@
                 </a:solidFill>
                 <a:latin typeface="Montserrat"/>
               </a:rPr>
-              <a:t>Queda anotado en el Libro</a:t>
-            </a:r>
-          </a:p>
-        </p:txBody>
-      </p:sp>
-      <p:sp>
-        <p:nvSpPr>
-          <p:cNvPr id="9" name="imgph" descr="IMGQ:LPG tank level gauge valve"/>
+              <a:t>Copia al titular y a la Comunidad</a:t>
+            </a:r>
+          </a:p>
+        </p:txBody>
+      </p:sp>
+      <p:sp>
+        <p:nvSpPr>
+          <p:cNvPr id="9" name="imgph" descr="IMGQ:signed certificate documents desk"/>
           <p:cNvSpPr/>
           <p:nvPr/>
         </p:nvSpPr>
         <p:spPr>
           <a:xfrm>
-            <a:off x="5806440" y="1051560"/>
-            <a:ext cx="5298947" cy="4629150"/>
+            <a:off x="6080760" y="1965960"/>
+            <a:ext cx="5303520" cy="4572000"/>
           </a:xfrm>
           <a:prstGeom prst="roundRect">
             <a:avLst/>
@@ -6573,8 +6989,8 @@
         </p:nvSpPr>
         <p:spPr>
           <a:xfrm>
-            <a:off x="6080760" y="2726055"/>
-            <a:ext cx="4750307" cy="1280160"/>
+            <a:off x="6355080" y="3611880"/>
+            <a:ext cx="4754880" cy="1280160"/>
           </a:xfrm>
           <a:prstGeom prst="rect">
             <a:avLst/>
@@ -6595,7 +7011,7 @@
                 </a:solidFill>
                 <a:latin typeface="Montserrat"/>
               </a:rPr>
-              <a:t>IMAGEN REALISTA</a:t>
+              <a:t>IMAGEN</a:t>
             </a:r>
           </a:p>
           <a:p>
@@ -6607,7 +7023,7 @@
                 </a:solidFill>
                 <a:latin typeface="Montserrat"/>
               </a:rPr>
-              <a:t>LPG tank level gauge valve</a:t>
+              <a:t>signed certificate documents desk</a:t>
             </a:r>
           </a:p>
         </p:txBody>
@@ -6617,6 +7033,18 @@
   <p:clrMapOvr>
     <a:masterClrMapping/>
   </p:clrMapOvr>
+  <mc:AlternateContent xmlns:mc="http://schemas.openxmlformats.org/markup-compatibility/2006">
+    <mc:Choice xmlns:p14="http://schemas.microsoft.com/office/powerpoint/2010/main" Requires="p14">
+      <p:transition spd="med" p14:dur="700">
+        <p14:cube dir="r"/>
+      </p:transition>
+    </mc:Choice>
+    <mc:Fallback>
+      <p:transition spd="med">
+        <p:push dir="r"/>
+      </p:transition>
+    </mc:Fallback>
+  </mc:AlternateContent>
 </p:sld>
 </file>
 
@@ -6704,7 +7132,7 @@
                 </a:solidFill>
                 <a:latin typeface="Montserrat"/>
               </a:rPr>
-              <a:t>013 / 021</a:t>
+              <a:t>013 / 026</a:t>
             </a:r>
           </a:p>
         </p:txBody>
@@ -6772,7 +7200,7 @@
                 </a:solidFill>
                 <a:latin typeface="Montserrat"/>
               </a:rPr>
-              <a:t>APARTADO 6.1 · MANTENIMIENTO</a:t>
+              <a:t>APARTADO 5.6 · COMUNICACIÓN</a:t>
             </a:r>
           </a:p>
         </p:txBody>
@@ -6806,14 +7234,14 @@
                 </a:solidFill>
                 <a:latin typeface="Montserrat"/>
               </a:rPr>
-              <a:t>Contrato, urgencias y Libro</a:t>
-            </a:r>
-          </a:p>
-        </p:txBody>
-      </p:sp>
-      <p:sp>
-        <p:nvSpPr>
-          <p:cNvPr id="7" name="Rounded Rectangle 6"/>
+              <a:t>Antes del primer llenado</a:t>
+            </a:r>
+          </a:p>
+        </p:txBody>
+      </p:sp>
+      <p:sp>
+        <p:nvSpPr>
+          <p:cNvPr id="7" name="Rectangle 6"/>
           <p:cNvSpPr/>
           <p:nvPr/>
         </p:nvSpPr>
@@ -6822,7 +7250,7 @@
             <a:off x="868680" y="1627632"/>
             <a:ext cx="2011680" cy="73152"/>
           </a:xfrm>
-          <a:prstGeom prst="roundRect">
+          <a:prstGeom prst="rect">
             <a:avLst/>
           </a:prstGeom>
           <a:solidFill>
@@ -6863,8 +7291,8 @@
         </p:nvSpPr>
         <p:spPr>
           <a:xfrm>
-            <a:off x="822960" y="1965960"/>
-            <a:ext cx="4983480" cy="4206240"/>
+            <a:off x="6355080" y="1965960"/>
+            <a:ext cx="5029200" cy="4206240"/>
           </a:xfrm>
           <a:prstGeom prst="rect">
             <a:avLst/>
@@ -6898,7 +7326,7 @@
                 </a:solidFill>
                 <a:latin typeface="Montserrat"/>
               </a:rPr>
-              <a:t>Titular responsable de conservarlo</a:t>
+              <a:t>Se presenta por duplicado a la Comunidad</a:t>
             </a:r>
           </a:p>
           <a:p>
@@ -6923,7 +7351,7 @@
                 </a:solidFill>
                 <a:latin typeface="Montserrat"/>
               </a:rPr>
-              <a:t>Contrato con instalador de urgencias 24 h</a:t>
+              <a:t>Certificados de instalación e inspección</a:t>
             </a:r>
           </a:p>
           <a:p>
@@ -6948,7 +7376,7 @@
                 </a:solidFill>
                 <a:latin typeface="Montserrat"/>
               </a:rPr>
-              <a:t>Libro de Mantenimiento o archivo</a:t>
+              <a:t>Contrato de mantenimiento ya firmado</a:t>
             </a:r>
           </a:p>
           <a:p>
@@ -6973,21 +7401,21 @@
                 </a:solidFill>
                 <a:latin typeface="Montserrat"/>
               </a:rPr>
-              <a:t>Consta cada visita y sus lecturas</a:t>
-            </a:r>
-          </a:p>
-        </p:txBody>
-      </p:sp>
-      <p:sp>
-        <p:nvSpPr>
-          <p:cNvPr id="9" name="imgph" descr="IMGQ:maintenance logbook technician gas"/>
+              <a:t>Azotea: certificado de que aguanta el peso</a:t>
+            </a:r>
+          </a:p>
+        </p:txBody>
+      </p:sp>
+      <p:sp>
+        <p:nvSpPr>
+          <p:cNvPr id="9" name="imgph" descr="IMGQ:rooftop gas tank building"/>
           <p:cNvSpPr/>
           <p:nvPr/>
         </p:nvSpPr>
         <p:spPr>
           <a:xfrm>
-            <a:off x="5806440" y="1051560"/>
-            <a:ext cx="5298947" cy="4629150"/>
+            <a:off x="822960" y="1965960"/>
+            <a:ext cx="5303520" cy="4572000"/>
           </a:xfrm>
           <a:prstGeom prst="roundRect">
             <a:avLst/>
@@ -7032,8 +7460,8 @@
         </p:nvSpPr>
         <p:spPr>
           <a:xfrm>
-            <a:off x="6080760" y="2726055"/>
-            <a:ext cx="4750307" cy="1280160"/>
+            <a:off x="1097280" y="3611880"/>
+            <a:ext cx="4754880" cy="1280160"/>
           </a:xfrm>
           <a:prstGeom prst="rect">
             <a:avLst/>
@@ -7054,7 +7482,7 @@
                 </a:solidFill>
                 <a:latin typeface="Montserrat"/>
               </a:rPr>
-              <a:t>IMAGEN REALISTA</a:t>
+              <a:t>IMAGEN</a:t>
             </a:r>
           </a:p>
           <a:p>
@@ -7066,7 +7494,7 @@
                 </a:solidFill>
                 <a:latin typeface="Montserrat"/>
               </a:rPr>
-              <a:t>maintenance logbook technician gas</a:t>
+              <a:t>rooftop gas tank building</a:t>
             </a:r>
           </a:p>
         </p:txBody>
@@ -7076,6 +7504,18 @@
   <p:clrMapOvr>
     <a:masterClrMapping/>
   </p:clrMapOvr>
+  <mc:AlternateContent xmlns:mc="http://schemas.openxmlformats.org/markup-compatibility/2006">
+    <mc:Choice xmlns:p14="http://schemas.microsoft.com/office/powerpoint/2010/main" Requires="p14">
+      <p:transition spd="med" p14:dur="700">
+        <p14:cube dir="l"/>
+      </p:transition>
+    </mc:Choice>
+    <mc:Fallback>
+      <p:transition spd="med">
+        <p:push dir="l"/>
+      </p:transition>
+    </mc:Fallback>
+  </mc:AlternateContent>
 </p:sld>
 </file>
 
@@ -7163,7 +7603,7 @@
                 </a:solidFill>
                 <a:latin typeface="Montserrat"/>
               </a:rPr>
-              <a:t>014 / 021</a:t>
+              <a:t>014 / 026</a:t>
             </a:r>
           </a:p>
         </p:txBody>
@@ -7231,7 +7671,7 @@
                 </a:solidFill>
                 <a:latin typeface="Montserrat"/>
               </a:rPr>
-              <a:t>APARTADO 6.4 · CORROSIÓN</a:t>
+              <a:t>APARTADO 5.6 · PRIMER LLENADO</a:t>
             </a:r>
           </a:p>
         </p:txBody>
@@ -7265,14 +7705,14 @@
                 </a:solidFill>
                 <a:latin typeface="Montserrat"/>
               </a:rPr>
-              <a:t>El enemigo silencioso del enterrado</a:t>
-            </a:r>
-          </a:p>
-        </p:txBody>
-      </p:sp>
-      <p:sp>
-        <p:nvSpPr>
-          <p:cNvPr id="7" name="Rounded Rectangle 6"/>
+              <a:t>El 85 %: la burbuja de seguridad</a:t>
+            </a:r>
+          </a:p>
+        </p:txBody>
+      </p:sp>
+      <p:sp>
+        <p:nvSpPr>
+          <p:cNvPr id="7" name="Rectangle 6"/>
           <p:cNvSpPr/>
           <p:nvPr/>
         </p:nvSpPr>
@@ -7281,7 +7721,7 @@
             <a:off x="868680" y="1627632"/>
             <a:ext cx="2011680" cy="73152"/>
           </a:xfrm>
-          <a:prstGeom prst="roundRect">
+          <a:prstGeom prst="rect">
             <a:avLst/>
           </a:prstGeom>
           <a:solidFill>
@@ -7323,7 +7763,7 @@
         <p:spPr>
           <a:xfrm>
             <a:off x="822960" y="1965960"/>
-            <a:ext cx="4983480" cy="4206240"/>
+            <a:ext cx="5029200" cy="4206240"/>
           </a:xfrm>
           <a:prstGeom prst="rect">
             <a:avLst/>
@@ -7357,7 +7797,7 @@
                 </a:solidFill>
                 <a:latin typeface="Montserrat"/>
               </a:rPr>
-              <a:t>Enterrado: protección catódica</a:t>
+              <a:t>Se comprueba la estanquidad</a:t>
             </a:r>
           </a:p>
           <a:p>
@@ -7382,7 +7822,7 @@
                 </a:solidFill>
                 <a:latin typeface="Montserrat"/>
               </a:rPr>
-              <a:t>Salvo estudio de terreno que la exima</a:t>
+              <a:t>Punto alto de llenado corta al 85 %</a:t>
             </a:r>
           </a:p>
           <a:p>
@@ -7407,7 +7847,7 @@
                 </a:solidFill>
                 <a:latin typeface="Montserrat"/>
               </a:rPr>
-              <a:t>Control del potencial: cada año</a:t>
+              <a:t>El 15 % de hueco es el colchón</a:t>
             </a:r>
           </a:p>
           <a:p>
@@ -7432,21 +7872,21 @@
                 </a:solidFill>
                 <a:latin typeface="Montserrat"/>
               </a:rPr>
-              <a:t>Corriente impresa: cada 3 meses</a:t>
-            </a:r>
-          </a:p>
-        </p:txBody>
-      </p:sp>
-      <p:sp>
-        <p:nvSpPr>
-          <p:cNvPr id="9" name="imgph" descr="IMGQ:buried metal tank corrosion protection"/>
+              <a:t>Queda anotado en el Libro</a:t>
+            </a:r>
+          </a:p>
+        </p:txBody>
+      </p:sp>
+      <p:sp>
+        <p:nvSpPr>
+          <p:cNvPr id="9" name="imgph" descr="IMGQ:LPG tank level gauge valve"/>
           <p:cNvSpPr/>
           <p:nvPr/>
         </p:nvSpPr>
         <p:spPr>
           <a:xfrm>
-            <a:off x="5806440" y="1051560"/>
-            <a:ext cx="5298947" cy="4629150"/>
+            <a:off x="6080760" y="1965960"/>
+            <a:ext cx="5303520" cy="4572000"/>
           </a:xfrm>
           <a:prstGeom prst="roundRect">
             <a:avLst/>
@@ -7491,8 +7931,8 @@
         </p:nvSpPr>
         <p:spPr>
           <a:xfrm>
-            <a:off x="6080760" y="2726055"/>
-            <a:ext cx="4750307" cy="1280160"/>
+            <a:off x="6355080" y="3611880"/>
+            <a:ext cx="4754880" cy="1280160"/>
           </a:xfrm>
           <a:prstGeom prst="rect">
             <a:avLst/>
@@ -7513,7 +7953,7 @@
                 </a:solidFill>
                 <a:latin typeface="Montserrat"/>
               </a:rPr>
-              <a:t>IMAGEN REALISTA</a:t>
+              <a:t>IMAGEN</a:t>
             </a:r>
           </a:p>
           <a:p>
@@ -7525,7 +7965,7 @@
                 </a:solidFill>
                 <a:latin typeface="Montserrat"/>
               </a:rPr>
-              <a:t>buried metal tank corrosion protection</a:t>
+              <a:t>LPG tank level gauge valve</a:t>
             </a:r>
           </a:p>
         </p:txBody>
@@ -7535,6 +7975,18 @@
   <p:clrMapOvr>
     <a:masterClrMapping/>
   </p:clrMapOvr>
+  <mc:AlternateContent xmlns:mc="http://schemas.openxmlformats.org/markup-compatibility/2006">
+    <mc:Choice xmlns:p14="http://schemas.microsoft.com/office/powerpoint/2010/main" Requires="p14">
+      <p:transition spd="med" p14:dur="700">
+        <p14:cube dir="r"/>
+      </p:transition>
+    </mc:Choice>
+    <mc:Fallback>
+      <p:transition spd="med">
+        <p:push dir="r"/>
+      </p:transition>
+    </mc:Fallback>
+  </mc:AlternateContent>
 </p:sld>
 </file>
 
@@ -7622,7 +8074,7 @@
                 </a:solidFill>
                 <a:latin typeface="Montserrat"/>
               </a:rPr>
-              <a:t>015 / 021</a:t>
+              <a:t>015 / 026</a:t>
             </a:r>
           </a:p>
         </p:txBody>
@@ -7663,84 +8115,16 @@
       </p:sp>
       <p:sp>
         <p:nvSpPr>
-          <p:cNvPr id="5" name="TextBox 4"/>
-          <p:cNvSpPr txBox="1"/>
-          <p:nvPr/>
-        </p:nvSpPr>
-        <p:spPr>
-          <a:xfrm>
-            <a:off x="822960" y="457200"/>
-            <a:ext cx="10058400" cy="365760"/>
-          </a:xfrm>
-          <a:prstGeom prst="rect">
-            <a:avLst/>
-          </a:prstGeom>
-          <a:noFill/>
-        </p:spPr>
-        <p:txBody>
-          <a:bodyPr wrap="square">
-            <a:spAutoFit/>
-          </a:bodyPr>
-          <a:lstStyle/>
-          <a:p>
-            <a:r>
-              <a:rPr sz="1300" b="1" i="0">
-                <a:solidFill>
-                  <a:srgbClr val="E8801A"/>
-                </a:solidFill>
-                <a:latin typeface="Montserrat"/>
-              </a:rPr>
-              <a:t>APARTADO 6.2 · REVISIONES</a:t>
-            </a:r>
-          </a:p>
-        </p:txBody>
-      </p:sp>
-      <p:sp>
-        <p:nvSpPr>
-          <p:cNvPr id="6" name="TextBox 5"/>
-          <p:cNvSpPr txBox="1"/>
-          <p:nvPr/>
-        </p:nvSpPr>
-        <p:spPr>
-          <a:xfrm>
-            <a:off x="822960" y="868680"/>
-            <a:ext cx="10515600" cy="914400"/>
-          </a:xfrm>
-          <a:prstGeom prst="rect">
-            <a:avLst/>
-          </a:prstGeom>
-          <a:noFill/>
-        </p:spPr>
-        <p:txBody>
-          <a:bodyPr wrap="square">
-            <a:spAutoFit/>
-          </a:bodyPr>
-          <a:lstStyle/>
-          <a:p>
-            <a:r>
-              <a:rPr sz="2800" b="1" i="0">
-                <a:solidFill>
-                  <a:srgbClr val="1E2761"/>
-                </a:solidFill>
-                <a:latin typeface="Montserrat"/>
-              </a:rPr>
-              <a:t>Cada 2 años o con la receptora</a:t>
-            </a:r>
-          </a:p>
-        </p:txBody>
-      </p:sp>
-      <p:sp>
-        <p:nvSpPr>
-          <p:cNvPr id="7" name="Rounded Rectangle 6"/>
+          <p:cNvPr id="5" name="Rectangle 4"/>
           <p:cNvSpPr/>
           <p:nvPr/>
         </p:nvSpPr>
         <p:spPr>
           <a:xfrm>
-            <a:off x="868680" y="1627632"/>
-            <a:ext cx="2011680" cy="73152"/>
-          </a:xfrm>
-          <a:prstGeom prst="roundRect">
+            <a:off x="0" y="0"/>
+            <a:ext cx="12191695" cy="1143000"/>
+          </a:xfrm>
+          <a:prstGeom prst="rect">
             <a:avLst/>
           </a:prstGeom>
           <a:solidFill>
@@ -7775,14 +8159,14 @@
       </p:sp>
       <p:sp>
         <p:nvSpPr>
-          <p:cNvPr id="8" name="TextBox 7"/>
+          <p:cNvPr id="6" name="TextBox 5"/>
           <p:cNvSpPr txBox="1"/>
           <p:nvPr/>
         </p:nvSpPr>
         <p:spPr>
           <a:xfrm>
-            <a:off x="822960" y="1965960"/>
-            <a:ext cx="4983480" cy="4206240"/>
+            <a:off x="822960" y="274320"/>
+            <a:ext cx="10515600" cy="640080"/>
           </a:xfrm>
           <a:prstGeom prst="rect">
             <a:avLst/>
@@ -7795,117 +8179,62 @@
           </a:bodyPr>
           <a:lstStyle/>
           <a:p>
-            <a:pPr>
-              <a:spcAft>
-                <a:spcPts val="1100"/>
-              </a:spcAft>
-            </a:pPr>
-            <a:r>
-              <a:rPr sz="1600" b="1" i="0">
-                <a:solidFill>
-                  <a:srgbClr val="E8801A"/>
-                </a:solidFill>
-                <a:latin typeface="Montserrat"/>
-              </a:rPr>
-              <a:t>▸  </a:t>
-            </a:r>
-            <a:r>
-              <a:rPr sz="1600" b="0" i="0">
-                <a:solidFill>
-                  <a:srgbClr val="1B2330"/>
-                </a:solidFill>
-                <a:latin typeface="Montserrat"/>
-              </a:rPr>
-              <a:t>Alimenta una red: cada 2 años</a:t>
-            </a:r>
-          </a:p>
-          <a:p>
-            <a:pPr>
-              <a:spcAft>
-                <a:spcPts val="1100"/>
-              </a:spcAft>
-            </a:pPr>
-            <a:r>
-              <a:rPr sz="1600" b="1" i="0">
-                <a:solidFill>
-                  <a:srgbClr val="E8801A"/>
-                </a:solidFill>
-                <a:latin typeface="Montserrat"/>
-              </a:rPr>
-              <a:t>▸  </a:t>
-            </a:r>
-            <a:r>
-              <a:rPr sz="1600" b="0" i="0">
-                <a:solidFill>
-                  <a:srgbClr val="1B2330"/>
-                </a:solidFill>
-                <a:latin typeface="Montserrat"/>
-              </a:rPr>
-              <a:t>Resto: a la vez que la receptora</a:t>
-            </a:r>
-          </a:p>
-          <a:p>
-            <a:pPr>
-              <a:spcAft>
-                <a:spcPts val="1100"/>
-              </a:spcAft>
-            </a:pPr>
-            <a:r>
-              <a:rPr sz="1600" b="1" i="0">
-                <a:solidFill>
-                  <a:srgbClr val="E8801A"/>
-                </a:solidFill>
-                <a:latin typeface="Montserrat"/>
-              </a:rPr>
-              <a:t>▸  </a:t>
-            </a:r>
-            <a:r>
-              <a:rPr sz="1600" b="0" i="0">
-                <a:solidFill>
-                  <a:srgbClr val="1B2330"/>
-                </a:solidFill>
-                <a:latin typeface="Montserrat"/>
-              </a:rPr>
-              <a:t>Favorable: certificado de revisión</a:t>
-            </a:r>
-          </a:p>
-          <a:p>
-            <a:pPr>
-              <a:spcAft>
-                <a:spcPts val="1100"/>
-              </a:spcAft>
-            </a:pPr>
-            <a:r>
-              <a:rPr sz="1600" b="1" i="0">
-                <a:solidFill>
-                  <a:srgbClr val="E8801A"/>
-                </a:solidFill>
-                <a:latin typeface="Montserrat"/>
-              </a:rPr>
-              <a:t>▸  </a:t>
-            </a:r>
-            <a:r>
-              <a:rPr sz="1600" b="0" i="0">
-                <a:solidFill>
-                  <a:srgbClr val="1B2330"/>
-                </a:solidFill>
-                <a:latin typeface="Montserrat"/>
-              </a:rPr>
-              <a:t>Con fallos: informe de anomalías</a:t>
-            </a:r>
-          </a:p>
-        </p:txBody>
-      </p:sp>
-      <p:sp>
-        <p:nvSpPr>
-          <p:cNvPr id="9" name="imgph" descr="IMGQ:technician inspecting gas tank valves"/>
+            <a:r>
+              <a:rPr sz="2400" b="1" i="0">
+                <a:solidFill>
+                  <a:srgbClr val="FFFFFF"/>
+                </a:solidFill>
+                <a:latin typeface="Montserrat"/>
+              </a:rPr>
+              <a:t>⚡  PREGUNTA RÁPIDA</a:t>
+            </a:r>
+          </a:p>
+        </p:txBody>
+      </p:sp>
+      <p:sp>
+        <p:nvSpPr>
+          <p:cNvPr id="7" name="TextBox 6"/>
+          <p:cNvSpPr txBox="1"/>
+          <p:nvPr/>
+        </p:nvSpPr>
+        <p:spPr>
+          <a:xfrm>
+            <a:off x="822960" y="1508760"/>
+            <a:ext cx="10515600" cy="1371600"/>
+          </a:xfrm>
+          <a:prstGeom prst="rect">
+            <a:avLst/>
+          </a:prstGeom>
+          <a:noFill/>
+        </p:spPr>
+        <p:txBody>
+          <a:bodyPr wrap="square">
+            <a:spAutoFit/>
+          </a:bodyPr>
+          <a:lstStyle/>
+          <a:p>
+            <a:r>
+              <a:rPr sz="2400" b="1" i="0">
+                <a:solidFill>
+                  <a:srgbClr val="1E2761"/>
+                </a:solidFill>
+                <a:latin typeface="Montserrat"/>
+              </a:rPr>
+              <a:t>¿Hasta qué porcentaje del volumen se llena un depósito fijo de GLP?</a:t>
+            </a:r>
+          </a:p>
+        </p:txBody>
+      </p:sp>
+      <p:sp>
+        <p:nvSpPr>
+          <p:cNvPr id="8" name="Rounded Rectangle 7"/>
           <p:cNvSpPr/>
           <p:nvPr/>
         </p:nvSpPr>
         <p:spPr>
           <a:xfrm>
-            <a:off x="5806440" y="1051560"/>
-            <a:ext cx="5298947" cy="4629150"/>
+            <a:off x="822960" y="3291840"/>
+            <a:ext cx="4983480" cy="1143000"/>
           </a:xfrm>
           <a:prstGeom prst="roundRect">
             <a:avLst/>
@@ -7944,14 +8273,58 @@
       </p:sp>
       <p:sp>
         <p:nvSpPr>
+          <p:cNvPr id="9" name="Rectangle 8"/>
+          <p:cNvSpPr/>
+          <p:nvPr/>
+        </p:nvSpPr>
+        <p:spPr>
+          <a:xfrm>
+            <a:off x="822960" y="3291840"/>
+            <a:ext cx="640080" cy="1143000"/>
+          </a:xfrm>
+          <a:prstGeom prst="rect">
+            <a:avLst/>
+          </a:prstGeom>
+          <a:solidFill>
+            <a:srgbClr val="1E2761"/>
+          </a:solidFill>
+          <a:ln>
+            <a:noFill/>
+          </a:ln>
+          <a:effectLst/>
+        </p:spPr>
+        <p:style>
+          <a:lnRef idx="1">
+            <a:schemeClr val="accent1"/>
+          </a:lnRef>
+          <a:fillRef idx="3">
+            <a:schemeClr val="accent1"/>
+          </a:fillRef>
+          <a:effectRef idx="2">
+            <a:schemeClr val="accent1"/>
+          </a:effectRef>
+          <a:fontRef idx="minor">
+            <a:schemeClr val="lt1"/>
+          </a:fontRef>
+        </p:style>
+        <p:txBody>
+          <a:bodyPr rtlCol="0" anchor="ctr"/>
+          <a:lstStyle/>
+          <a:p>
+            <a:pPr algn="ctr"/>
+          </a:p>
+        </p:txBody>
+      </p:sp>
+      <p:sp>
+        <p:nvSpPr>
           <p:cNvPr id="10" name="TextBox 9"/>
           <p:cNvSpPr txBox="1"/>
           <p:nvPr/>
         </p:nvSpPr>
         <p:spPr>
           <a:xfrm>
-            <a:off x="6080760" y="2726055"/>
-            <a:ext cx="4750307" cy="1280160"/>
+            <a:off x="822960" y="3611880"/>
+            <a:ext cx="640080" cy="548640"/>
           </a:xfrm>
           <a:prstGeom prst="rect">
             <a:avLst/>
@@ -7966,25 +8339,524 @@
           <a:p>
             <a:pPr algn="ctr"/>
             <a:r>
-              <a:rPr sz="1400" b="1" i="0">
-                <a:solidFill>
-                  <a:srgbClr val="64748B"/>
-                </a:solidFill>
-                <a:latin typeface="Montserrat"/>
-              </a:rPr>
-              <a:t>IMAGEN REALISTA</a:t>
-            </a:r>
-          </a:p>
+              <a:rPr sz="2200" b="1" i="0">
+                <a:solidFill>
+                  <a:srgbClr val="FFFFFF"/>
+                </a:solidFill>
+                <a:latin typeface="Montserrat"/>
+              </a:rPr>
+              <a:t>A</a:t>
+            </a:r>
+          </a:p>
+        </p:txBody>
+      </p:sp>
+      <p:sp>
+        <p:nvSpPr>
+          <p:cNvPr id="11" name="TextBox 10"/>
+          <p:cNvSpPr txBox="1"/>
+          <p:nvPr/>
+        </p:nvSpPr>
+        <p:spPr>
+          <a:xfrm>
+            <a:off x="1600200" y="3474720"/>
+            <a:ext cx="4114800" cy="868680"/>
+          </a:xfrm>
+          <a:prstGeom prst="rect">
+            <a:avLst/>
+          </a:prstGeom>
+          <a:noFill/>
+        </p:spPr>
+        <p:txBody>
+          <a:bodyPr wrap="square">
+            <a:spAutoFit/>
+          </a:bodyPr>
+          <a:lstStyle/>
+          <a:p>
+            <a:r>
+              <a:rPr sz="1400" b="0" i="0">
+                <a:solidFill>
+                  <a:srgbClr val="1B2330"/>
+                </a:solidFill>
+                <a:latin typeface="Montserrat"/>
+              </a:rPr>
+              <a:t>Hasta el 100 %</a:t>
+            </a:r>
+          </a:p>
+        </p:txBody>
+      </p:sp>
+      <p:sp>
+        <p:nvSpPr>
+          <p:cNvPr id="12" name="Rounded Rectangle 11"/>
+          <p:cNvSpPr/>
+          <p:nvPr/>
+        </p:nvSpPr>
+        <p:spPr>
+          <a:xfrm>
+            <a:off x="6355080" y="3291840"/>
+            <a:ext cx="4983480" cy="1143000"/>
+          </a:xfrm>
+          <a:prstGeom prst="roundRect">
+            <a:avLst/>
+          </a:prstGeom>
+          <a:solidFill>
+            <a:srgbClr val="F3F6FB"/>
+          </a:solidFill>
+          <a:ln w="12700">
+            <a:solidFill>
+              <a:srgbClr val="C7D2E6"/>
+            </a:solidFill>
+          </a:ln>
+          <a:effectLst/>
+        </p:spPr>
+        <p:style>
+          <a:lnRef idx="1">
+            <a:schemeClr val="accent1"/>
+          </a:lnRef>
+          <a:fillRef idx="3">
+            <a:schemeClr val="accent1"/>
+          </a:fillRef>
+          <a:effectRef idx="2">
+            <a:schemeClr val="accent1"/>
+          </a:effectRef>
+          <a:fontRef idx="minor">
+            <a:schemeClr val="lt1"/>
+          </a:fontRef>
+        </p:style>
+        <p:txBody>
+          <a:bodyPr rtlCol="0" anchor="ctr"/>
+          <a:lstStyle/>
           <a:p>
             <a:pPr algn="ctr"/>
-            <a:r>
-              <a:rPr sz="1100" b="0" i="1">
-                <a:solidFill>
-                  <a:srgbClr val="64748B"/>
-                </a:solidFill>
-                <a:latin typeface="Montserrat"/>
-              </a:rPr>
-              <a:t>technician inspecting gas tank valves</a:t>
+          </a:p>
+        </p:txBody>
+      </p:sp>
+      <p:sp>
+        <p:nvSpPr>
+          <p:cNvPr id="13" name="Rectangle 12"/>
+          <p:cNvSpPr/>
+          <p:nvPr/>
+        </p:nvSpPr>
+        <p:spPr>
+          <a:xfrm>
+            <a:off x="6355080" y="3291840"/>
+            <a:ext cx="640080" cy="1143000"/>
+          </a:xfrm>
+          <a:prstGeom prst="rect">
+            <a:avLst/>
+          </a:prstGeom>
+          <a:solidFill>
+            <a:srgbClr val="1E2761"/>
+          </a:solidFill>
+          <a:ln>
+            <a:noFill/>
+          </a:ln>
+          <a:effectLst/>
+        </p:spPr>
+        <p:style>
+          <a:lnRef idx="1">
+            <a:schemeClr val="accent1"/>
+          </a:lnRef>
+          <a:fillRef idx="3">
+            <a:schemeClr val="accent1"/>
+          </a:fillRef>
+          <a:effectRef idx="2">
+            <a:schemeClr val="accent1"/>
+          </a:effectRef>
+          <a:fontRef idx="minor">
+            <a:schemeClr val="lt1"/>
+          </a:fontRef>
+        </p:style>
+        <p:txBody>
+          <a:bodyPr rtlCol="0" anchor="ctr"/>
+          <a:lstStyle/>
+          <a:p>
+            <a:pPr algn="ctr"/>
+          </a:p>
+        </p:txBody>
+      </p:sp>
+      <p:sp>
+        <p:nvSpPr>
+          <p:cNvPr id="14" name="TextBox 13"/>
+          <p:cNvSpPr txBox="1"/>
+          <p:nvPr/>
+        </p:nvSpPr>
+        <p:spPr>
+          <a:xfrm>
+            <a:off x="6355080" y="3611880"/>
+            <a:ext cx="640080" cy="548640"/>
+          </a:xfrm>
+          <a:prstGeom prst="rect">
+            <a:avLst/>
+          </a:prstGeom>
+          <a:noFill/>
+        </p:spPr>
+        <p:txBody>
+          <a:bodyPr wrap="square">
+            <a:spAutoFit/>
+          </a:bodyPr>
+          <a:lstStyle/>
+          <a:p>
+            <a:pPr algn="ctr"/>
+            <a:r>
+              <a:rPr sz="2200" b="1" i="0">
+                <a:solidFill>
+                  <a:srgbClr val="FFFFFF"/>
+                </a:solidFill>
+                <a:latin typeface="Montserrat"/>
+              </a:rPr>
+              <a:t>B</a:t>
+            </a:r>
+          </a:p>
+        </p:txBody>
+      </p:sp>
+      <p:sp>
+        <p:nvSpPr>
+          <p:cNvPr id="15" name="TextBox 14"/>
+          <p:cNvSpPr txBox="1"/>
+          <p:nvPr/>
+        </p:nvSpPr>
+        <p:spPr>
+          <a:xfrm>
+            <a:off x="7132320" y="3474720"/>
+            <a:ext cx="4114800" cy="868680"/>
+          </a:xfrm>
+          <a:prstGeom prst="rect">
+            <a:avLst/>
+          </a:prstGeom>
+          <a:noFill/>
+        </p:spPr>
+        <p:txBody>
+          <a:bodyPr wrap="square">
+            <a:spAutoFit/>
+          </a:bodyPr>
+          <a:lstStyle/>
+          <a:p>
+            <a:r>
+              <a:rPr sz="1400" b="0" i="0">
+                <a:solidFill>
+                  <a:srgbClr val="1B2330"/>
+                </a:solidFill>
+                <a:latin typeface="Montserrat"/>
+              </a:rPr>
+              <a:t>Hasta el 95 %</a:t>
+            </a:r>
+          </a:p>
+        </p:txBody>
+      </p:sp>
+      <p:sp>
+        <p:nvSpPr>
+          <p:cNvPr id="16" name="Rounded Rectangle 15"/>
+          <p:cNvSpPr/>
+          <p:nvPr/>
+        </p:nvSpPr>
+        <p:spPr>
+          <a:xfrm>
+            <a:off x="822960" y="4617720"/>
+            <a:ext cx="4983480" cy="1143000"/>
+          </a:xfrm>
+          <a:prstGeom prst="roundRect">
+            <a:avLst/>
+          </a:prstGeom>
+          <a:solidFill>
+            <a:srgbClr val="F3F6FB"/>
+          </a:solidFill>
+          <a:ln w="12700">
+            <a:solidFill>
+              <a:srgbClr val="C7D2E6"/>
+            </a:solidFill>
+          </a:ln>
+          <a:effectLst/>
+        </p:spPr>
+        <p:style>
+          <a:lnRef idx="1">
+            <a:schemeClr val="accent1"/>
+          </a:lnRef>
+          <a:fillRef idx="3">
+            <a:schemeClr val="accent1"/>
+          </a:fillRef>
+          <a:effectRef idx="2">
+            <a:schemeClr val="accent1"/>
+          </a:effectRef>
+          <a:fontRef idx="minor">
+            <a:schemeClr val="lt1"/>
+          </a:fontRef>
+        </p:style>
+        <p:txBody>
+          <a:bodyPr rtlCol="0" anchor="ctr"/>
+          <a:lstStyle/>
+          <a:p>
+            <a:pPr algn="ctr"/>
+          </a:p>
+        </p:txBody>
+      </p:sp>
+      <p:sp>
+        <p:nvSpPr>
+          <p:cNvPr id="17" name="Rectangle 16"/>
+          <p:cNvSpPr/>
+          <p:nvPr/>
+        </p:nvSpPr>
+        <p:spPr>
+          <a:xfrm>
+            <a:off x="822960" y="4617720"/>
+            <a:ext cx="640080" cy="1143000"/>
+          </a:xfrm>
+          <a:prstGeom prst="rect">
+            <a:avLst/>
+          </a:prstGeom>
+          <a:solidFill>
+            <a:srgbClr val="1E2761"/>
+          </a:solidFill>
+          <a:ln>
+            <a:noFill/>
+          </a:ln>
+          <a:effectLst/>
+        </p:spPr>
+        <p:style>
+          <a:lnRef idx="1">
+            <a:schemeClr val="accent1"/>
+          </a:lnRef>
+          <a:fillRef idx="3">
+            <a:schemeClr val="accent1"/>
+          </a:fillRef>
+          <a:effectRef idx="2">
+            <a:schemeClr val="accent1"/>
+          </a:effectRef>
+          <a:fontRef idx="minor">
+            <a:schemeClr val="lt1"/>
+          </a:fontRef>
+        </p:style>
+        <p:txBody>
+          <a:bodyPr rtlCol="0" anchor="ctr"/>
+          <a:lstStyle/>
+          <a:p>
+            <a:pPr algn="ctr"/>
+          </a:p>
+        </p:txBody>
+      </p:sp>
+      <p:sp>
+        <p:nvSpPr>
+          <p:cNvPr id="18" name="TextBox 17"/>
+          <p:cNvSpPr txBox="1"/>
+          <p:nvPr/>
+        </p:nvSpPr>
+        <p:spPr>
+          <a:xfrm>
+            <a:off x="822960" y="4937760"/>
+            <a:ext cx="640080" cy="548640"/>
+          </a:xfrm>
+          <a:prstGeom prst="rect">
+            <a:avLst/>
+          </a:prstGeom>
+          <a:noFill/>
+        </p:spPr>
+        <p:txBody>
+          <a:bodyPr wrap="square">
+            <a:spAutoFit/>
+          </a:bodyPr>
+          <a:lstStyle/>
+          <a:p>
+            <a:pPr algn="ctr"/>
+            <a:r>
+              <a:rPr sz="2200" b="1" i="0">
+                <a:solidFill>
+                  <a:srgbClr val="FFFFFF"/>
+                </a:solidFill>
+                <a:latin typeface="Montserrat"/>
+              </a:rPr>
+              <a:t>C</a:t>
+            </a:r>
+          </a:p>
+        </p:txBody>
+      </p:sp>
+      <p:sp>
+        <p:nvSpPr>
+          <p:cNvPr id="19" name="TextBox 18"/>
+          <p:cNvSpPr txBox="1"/>
+          <p:nvPr/>
+        </p:nvSpPr>
+        <p:spPr>
+          <a:xfrm>
+            <a:off x="1600200" y="4800600"/>
+            <a:ext cx="4114800" cy="868680"/>
+          </a:xfrm>
+          <a:prstGeom prst="rect">
+            <a:avLst/>
+          </a:prstGeom>
+          <a:noFill/>
+        </p:spPr>
+        <p:txBody>
+          <a:bodyPr wrap="square">
+            <a:spAutoFit/>
+          </a:bodyPr>
+          <a:lstStyle/>
+          <a:p>
+            <a:r>
+              <a:rPr sz="1400" b="0" i="0">
+                <a:solidFill>
+                  <a:srgbClr val="1B2330"/>
+                </a:solidFill>
+                <a:latin typeface="Montserrat"/>
+              </a:rPr>
+              <a:t>Hasta el 85 %</a:t>
+            </a:r>
+          </a:p>
+        </p:txBody>
+      </p:sp>
+      <p:sp>
+        <p:nvSpPr>
+          <p:cNvPr id="20" name="Rounded Rectangle 19"/>
+          <p:cNvSpPr/>
+          <p:nvPr/>
+        </p:nvSpPr>
+        <p:spPr>
+          <a:xfrm>
+            <a:off x="6355080" y="4617720"/>
+            <a:ext cx="4983480" cy="1143000"/>
+          </a:xfrm>
+          <a:prstGeom prst="roundRect">
+            <a:avLst/>
+          </a:prstGeom>
+          <a:solidFill>
+            <a:srgbClr val="F3F6FB"/>
+          </a:solidFill>
+          <a:ln w="12700">
+            <a:solidFill>
+              <a:srgbClr val="C7D2E6"/>
+            </a:solidFill>
+          </a:ln>
+          <a:effectLst/>
+        </p:spPr>
+        <p:style>
+          <a:lnRef idx="1">
+            <a:schemeClr val="accent1"/>
+          </a:lnRef>
+          <a:fillRef idx="3">
+            <a:schemeClr val="accent1"/>
+          </a:fillRef>
+          <a:effectRef idx="2">
+            <a:schemeClr val="accent1"/>
+          </a:effectRef>
+          <a:fontRef idx="minor">
+            <a:schemeClr val="lt1"/>
+          </a:fontRef>
+        </p:style>
+        <p:txBody>
+          <a:bodyPr rtlCol="0" anchor="ctr"/>
+          <a:lstStyle/>
+          <a:p>
+            <a:pPr algn="ctr"/>
+          </a:p>
+        </p:txBody>
+      </p:sp>
+      <p:sp>
+        <p:nvSpPr>
+          <p:cNvPr id="21" name="Rectangle 20"/>
+          <p:cNvSpPr/>
+          <p:nvPr/>
+        </p:nvSpPr>
+        <p:spPr>
+          <a:xfrm>
+            <a:off x="6355080" y="4617720"/>
+            <a:ext cx="640080" cy="1143000"/>
+          </a:xfrm>
+          <a:prstGeom prst="rect">
+            <a:avLst/>
+          </a:prstGeom>
+          <a:solidFill>
+            <a:srgbClr val="1E2761"/>
+          </a:solidFill>
+          <a:ln>
+            <a:noFill/>
+          </a:ln>
+          <a:effectLst/>
+        </p:spPr>
+        <p:style>
+          <a:lnRef idx="1">
+            <a:schemeClr val="accent1"/>
+          </a:lnRef>
+          <a:fillRef idx="3">
+            <a:schemeClr val="accent1"/>
+          </a:fillRef>
+          <a:effectRef idx="2">
+            <a:schemeClr val="accent1"/>
+          </a:effectRef>
+          <a:fontRef idx="minor">
+            <a:schemeClr val="lt1"/>
+          </a:fontRef>
+        </p:style>
+        <p:txBody>
+          <a:bodyPr rtlCol="0" anchor="ctr"/>
+          <a:lstStyle/>
+          <a:p>
+            <a:pPr algn="ctr"/>
+          </a:p>
+        </p:txBody>
+      </p:sp>
+      <p:sp>
+        <p:nvSpPr>
+          <p:cNvPr id="22" name="TextBox 21"/>
+          <p:cNvSpPr txBox="1"/>
+          <p:nvPr/>
+        </p:nvSpPr>
+        <p:spPr>
+          <a:xfrm>
+            <a:off x="6355080" y="4937760"/>
+            <a:ext cx="640080" cy="548640"/>
+          </a:xfrm>
+          <a:prstGeom prst="rect">
+            <a:avLst/>
+          </a:prstGeom>
+          <a:noFill/>
+        </p:spPr>
+        <p:txBody>
+          <a:bodyPr wrap="square">
+            <a:spAutoFit/>
+          </a:bodyPr>
+          <a:lstStyle/>
+          <a:p>
+            <a:pPr algn="ctr"/>
+            <a:r>
+              <a:rPr sz="2200" b="1" i="0">
+                <a:solidFill>
+                  <a:srgbClr val="FFFFFF"/>
+                </a:solidFill>
+                <a:latin typeface="Montserrat"/>
+              </a:rPr>
+              <a:t>D</a:t>
+            </a:r>
+          </a:p>
+        </p:txBody>
+      </p:sp>
+      <p:sp>
+        <p:nvSpPr>
+          <p:cNvPr id="23" name="TextBox 22"/>
+          <p:cNvSpPr txBox="1"/>
+          <p:nvPr/>
+        </p:nvSpPr>
+        <p:spPr>
+          <a:xfrm>
+            <a:off x="7132320" y="4800600"/>
+            <a:ext cx="4114800" cy="868680"/>
+          </a:xfrm>
+          <a:prstGeom prst="rect">
+            <a:avLst/>
+          </a:prstGeom>
+          <a:noFill/>
+        </p:spPr>
+        <p:txBody>
+          <a:bodyPr wrap="square">
+            <a:spAutoFit/>
+          </a:bodyPr>
+          <a:lstStyle/>
+          <a:p>
+            <a:r>
+              <a:rPr sz="1400" b="0" i="0">
+                <a:solidFill>
+                  <a:srgbClr val="1B2330"/>
+                </a:solidFill>
+                <a:latin typeface="Montserrat"/>
+              </a:rPr>
+              <a:t>Hasta el 65 %</a:t>
             </a:r>
           </a:p>
         </p:txBody>
@@ -7994,6 +8866,18 @@
   <p:clrMapOvr>
     <a:masterClrMapping/>
   </p:clrMapOvr>
+  <mc:AlternateContent xmlns:mc="http://schemas.openxmlformats.org/markup-compatibility/2006">
+    <mc:Choice xmlns:p14="http://schemas.microsoft.com/office/powerpoint/2010/main" Requires="p14">
+      <p:transition spd="med" p14:dur="700">
+        <p14:cube dir="l"/>
+      </p:transition>
+    </mc:Choice>
+    <mc:Fallback>
+      <p:transition spd="med">
+        <p:push dir="l"/>
+      </p:transition>
+    </mc:Fallback>
+  </mc:AlternateContent>
 </p:sld>
 </file>
 
@@ -8081,7 +8965,7 @@
                 </a:solidFill>
                 <a:latin typeface="Montserrat"/>
               </a:rPr>
-              <a:t>016 / 021</a:t>
+              <a:t>016 / 026</a:t>
             </a:r>
           </a:p>
         </p:txBody>
@@ -8122,88 +9006,20 @@
       </p:sp>
       <p:sp>
         <p:nvSpPr>
-          <p:cNvPr id="5" name="TextBox 4"/>
-          <p:cNvSpPr txBox="1"/>
-          <p:nvPr/>
-        </p:nvSpPr>
-        <p:spPr>
-          <a:xfrm>
-            <a:off x="822960" y="457200"/>
-            <a:ext cx="10058400" cy="365760"/>
-          </a:xfrm>
-          <a:prstGeom prst="rect">
-            <a:avLst/>
-          </a:prstGeom>
-          <a:noFill/>
-        </p:spPr>
-        <p:txBody>
-          <a:bodyPr wrap="square">
-            <a:spAutoFit/>
-          </a:bodyPr>
-          <a:lstStyle/>
-          <a:p>
-            <a:r>
-              <a:rPr sz="1300" b="1" i="0">
-                <a:solidFill>
-                  <a:srgbClr val="E8801A"/>
-                </a:solidFill>
-                <a:latin typeface="Montserrat"/>
-              </a:rPr>
-              <a:t>APARTADO 6.2.1 · COMPROBACIONES</a:t>
-            </a:r>
-          </a:p>
-        </p:txBody>
-      </p:sp>
-      <p:sp>
-        <p:nvSpPr>
-          <p:cNvPr id="6" name="TextBox 5"/>
-          <p:cNvSpPr txBox="1"/>
-          <p:nvPr/>
-        </p:nvSpPr>
-        <p:spPr>
-          <a:xfrm>
-            <a:off x="822960" y="868680"/>
-            <a:ext cx="10515600" cy="914400"/>
-          </a:xfrm>
-          <a:prstGeom prst="rect">
-            <a:avLst/>
-          </a:prstGeom>
-          <a:noFill/>
-        </p:spPr>
-        <p:txBody>
-          <a:bodyPr wrap="square">
-            <a:spAutoFit/>
-          </a:bodyPr>
-          <a:lstStyle/>
-          <a:p>
-            <a:r>
-              <a:rPr sz="2800" b="1" i="0">
-                <a:solidFill>
-                  <a:srgbClr val="1E2761"/>
-                </a:solidFill>
-                <a:latin typeface="Montserrat"/>
-              </a:rPr>
-              <a:t>Las 13 comprobaciones, agrupadas</a:t>
-            </a:r>
-          </a:p>
-        </p:txBody>
-      </p:sp>
-      <p:sp>
-        <p:nvSpPr>
-          <p:cNvPr id="7" name="Rounded Rectangle 6"/>
+          <p:cNvPr id="5" name="Rectangle 4"/>
           <p:cNvSpPr/>
           <p:nvPr/>
         </p:nvSpPr>
         <p:spPr>
           <a:xfrm>
-            <a:off x="868680" y="1627632"/>
-            <a:ext cx="2011680" cy="73152"/>
-          </a:xfrm>
-          <a:prstGeom prst="roundRect">
+            <a:off x="0" y="0"/>
+            <a:ext cx="12191695" cy="1143000"/>
+          </a:xfrm>
+          <a:prstGeom prst="rect">
             <a:avLst/>
           </a:prstGeom>
           <a:solidFill>
-            <a:srgbClr val="E8801A"/>
+            <a:srgbClr val="1E8E4B"/>
           </a:solidFill>
           <a:ln>
             <a:noFill/>
@@ -8234,14 +9050,14 @@
       </p:sp>
       <p:sp>
         <p:nvSpPr>
-          <p:cNvPr id="8" name="TextBox 7"/>
+          <p:cNvPr id="6" name="TextBox 5"/>
           <p:cNvSpPr txBox="1"/>
           <p:nvPr/>
         </p:nvSpPr>
         <p:spPr>
           <a:xfrm>
-            <a:off x="822960" y="1965960"/>
-            <a:ext cx="4983480" cy="4206240"/>
+            <a:off x="822960" y="274320"/>
+            <a:ext cx="10515600" cy="640080"/>
           </a:xfrm>
           <a:prstGeom prst="rect">
             <a:avLst/>
@@ -8254,127 +9070,72 @@
           </a:bodyPr>
           <a:lstStyle/>
           <a:p>
-            <a:pPr>
-              <a:spcAft>
-                <a:spcPts val="1100"/>
-              </a:spcAft>
-            </a:pPr>
-            <a:r>
-              <a:rPr sz="1600" b="1" i="0">
-                <a:solidFill>
-                  <a:srgbClr val="E8801A"/>
-                </a:solidFill>
-                <a:latin typeface="Montserrat"/>
-              </a:rPr>
-              <a:t>▸  </a:t>
-            </a:r>
-            <a:r>
-              <a:rPr sz="1600" b="0" i="0">
-                <a:solidFill>
-                  <a:srgbClr val="1B2330"/>
-                </a:solidFill>
-                <a:latin typeface="Montserrat"/>
-              </a:rPr>
-              <a:t>1 a 3: papeles y bomberos</a:t>
-            </a:r>
-          </a:p>
-          <a:p>
-            <a:pPr>
-              <a:spcAft>
-                <a:spcPts val="1100"/>
-              </a:spcAft>
-            </a:pPr>
-            <a:r>
-              <a:rPr sz="1600" b="1" i="0">
-                <a:solidFill>
-                  <a:srgbClr val="E8801A"/>
-                </a:solidFill>
-                <a:latin typeface="Montserrat"/>
-              </a:rPr>
-              <a:t>▸  </a:t>
-            </a:r>
-            <a:r>
-              <a:rPr sz="1600" b="0" i="0">
-                <a:solidFill>
-                  <a:srgbClr val="1B2330"/>
-                </a:solidFill>
-                <a:latin typeface="Montserrat"/>
-              </a:rPr>
-              <a:t>4 a 9: el hierro (válvulas, corrosión, tierra)</a:t>
-            </a:r>
-          </a:p>
-          <a:p>
-            <a:pPr>
-              <a:spcAft>
-                <a:spcPts val="1100"/>
-              </a:spcAft>
-            </a:pPr>
-            <a:r>
-              <a:rPr sz="1600" b="1" i="0">
-                <a:solidFill>
-                  <a:srgbClr val="E8801A"/>
-                </a:solidFill>
-                <a:latin typeface="Montserrat"/>
-              </a:rPr>
-              <a:t>▸  </a:t>
-            </a:r>
-            <a:r>
-              <a:rPr sz="1600" b="0" i="0">
-                <a:solidFill>
-                  <a:srgbClr val="1B2330"/>
-                </a:solidFill>
-                <a:latin typeface="Montserrat"/>
-              </a:rPr>
-              <a:t>10 a 13: que no fugue</a:t>
-            </a:r>
-          </a:p>
-          <a:p>
-            <a:pPr>
-              <a:spcAft>
-                <a:spcPts val="1100"/>
-              </a:spcAft>
-            </a:pPr>
-            <a:r>
-              <a:rPr sz="1600" b="1" i="0">
-                <a:solidFill>
-                  <a:srgbClr val="E8801A"/>
-                </a:solidFill>
-                <a:latin typeface="Montserrat"/>
-              </a:rPr>
-              <a:t>▸  </a:t>
-            </a:r>
-            <a:r>
-              <a:rPr sz="1600" b="0" i="0">
-                <a:solidFill>
-                  <a:srgbClr val="1B2330"/>
-                </a:solidFill>
-                <a:latin typeface="Montserrat"/>
-              </a:rPr>
-              <a:t>Boca desplazada: 3 bar durante 10 min</a:t>
-            </a:r>
-          </a:p>
-        </p:txBody>
-      </p:sp>
-      <p:sp>
-        <p:nvSpPr>
-          <p:cNvPr id="9" name="imgph" descr="IMGQ:soapy water leak test gas fitting"/>
+            <a:r>
+              <a:rPr sz="2400" b="1" i="0">
+                <a:solidFill>
+                  <a:srgbClr val="FFFFFF"/>
+                </a:solidFill>
+                <a:latin typeface="Montserrat"/>
+              </a:rPr>
+              <a:t>✔  RESPUESTA:  C</a:t>
+            </a:r>
+          </a:p>
+        </p:txBody>
+      </p:sp>
+      <p:sp>
+        <p:nvSpPr>
+          <p:cNvPr id="7" name="TextBox 6"/>
+          <p:cNvSpPr txBox="1"/>
+          <p:nvPr/>
+        </p:nvSpPr>
+        <p:spPr>
+          <a:xfrm>
+            <a:off x="822960" y="1417320"/>
+            <a:ext cx="10515600" cy="914400"/>
+          </a:xfrm>
+          <a:prstGeom prst="rect">
+            <a:avLst/>
+          </a:prstGeom>
+          <a:noFill/>
+        </p:spPr>
+        <p:txBody>
+          <a:bodyPr wrap="square">
+            <a:spAutoFit/>
+          </a:bodyPr>
+          <a:lstStyle/>
+          <a:p>
+            <a:r>
+              <a:rPr sz="1800" b="1" i="0">
+                <a:solidFill>
+                  <a:srgbClr val="64748B"/>
+                </a:solidFill>
+                <a:latin typeface="Montserrat"/>
+              </a:rPr>
+              <a:t>¿Hasta qué porcentaje del volumen se llena un depósito fijo de GLP?</a:t>
+            </a:r>
+          </a:p>
+        </p:txBody>
+      </p:sp>
+      <p:sp>
+        <p:nvSpPr>
+          <p:cNvPr id="8" name="Rounded Rectangle 7"/>
           <p:cNvSpPr/>
           <p:nvPr/>
         </p:nvSpPr>
         <p:spPr>
           <a:xfrm>
-            <a:off x="5806440" y="1051560"/>
-            <a:ext cx="5298947" cy="4629150"/>
+            <a:off x="822960" y="2514600"/>
+            <a:ext cx="10515600" cy="914400"/>
           </a:xfrm>
           <a:prstGeom prst="roundRect">
             <a:avLst/>
           </a:prstGeom>
           <a:solidFill>
-            <a:srgbClr val="F3F6FB"/>
+            <a:srgbClr val="E9F6EE"/>
           </a:solidFill>
           <a:ln w="12700">
             <a:solidFill>
-              <a:srgbClr val="C7D2E6"/>
+              <a:srgbClr val="1E8E4B"/>
             </a:solidFill>
           </a:ln>
           <a:effectLst/>
@@ -8403,14 +9164,14 @@
       </p:sp>
       <p:sp>
         <p:nvSpPr>
-          <p:cNvPr id="10" name="TextBox 9"/>
+          <p:cNvPr id="9" name="TextBox 8"/>
           <p:cNvSpPr txBox="1"/>
           <p:nvPr/>
         </p:nvSpPr>
         <p:spPr>
           <a:xfrm>
-            <a:off x="6080760" y="2726055"/>
-            <a:ext cx="4750307" cy="1280160"/>
+            <a:off x="1097280" y="2697480"/>
+            <a:ext cx="10058400" cy="640080"/>
           </a:xfrm>
           <a:prstGeom prst="rect">
             <a:avLst/>
@@ -8423,27 +9184,66 @@
           </a:bodyPr>
           <a:lstStyle/>
           <a:p>
-            <a:pPr algn="ctr"/>
-            <a:r>
-              <a:rPr sz="1400" b="1" i="0">
-                <a:solidFill>
-                  <a:srgbClr val="64748B"/>
-                </a:solidFill>
-                <a:latin typeface="Montserrat"/>
-              </a:rPr>
-              <a:t>IMAGEN REALISTA</a:t>
-            </a:r>
-          </a:p>
-          <a:p>
-            <a:pPr algn="ctr"/>
-            <a:r>
-              <a:rPr sz="1100" b="0" i="1">
-                <a:solidFill>
-                  <a:srgbClr val="64748B"/>
-                </a:solidFill>
-                <a:latin typeface="Montserrat"/>
-              </a:rPr>
-              <a:t>soapy water leak test gas fitting</a:t>
+            <a:r>
+              <a:rPr sz="1800" b="1" i="0">
+                <a:solidFill>
+                  <a:srgbClr val="1E8E4B"/>
+                </a:solidFill>
+                <a:latin typeface="Montserrat"/>
+              </a:rPr>
+              <a:t>C.  </a:t>
+            </a:r>
+            <a:r>
+              <a:rPr sz="1800" b="1" i="0">
+                <a:solidFill>
+                  <a:srgbClr val="1E2761"/>
+                </a:solidFill>
+                <a:latin typeface="Montserrat"/>
+              </a:rPr>
+              <a:t>Hasta el 85 %</a:t>
+            </a:r>
+          </a:p>
+        </p:txBody>
+      </p:sp>
+      <p:sp>
+        <p:nvSpPr>
+          <p:cNvPr id="10" name="TextBox 9"/>
+          <p:cNvSpPr txBox="1"/>
+          <p:nvPr/>
+        </p:nvSpPr>
+        <p:spPr>
+          <a:xfrm>
+            <a:off x="822960" y="3749039"/>
+            <a:ext cx="10515600" cy="2194560"/>
+          </a:xfrm>
+          <a:prstGeom prst="rect">
+            <a:avLst/>
+          </a:prstGeom>
+          <a:noFill/>
+        </p:spPr>
+        <p:txBody>
+          <a:bodyPr wrap="square">
+            <a:spAutoFit/>
+          </a:bodyPr>
+          <a:lstStyle/>
+          <a:p>
+            <a:r>
+              <a:rPr sz="1500" b="1" i="0">
+                <a:solidFill>
+                  <a:srgbClr val="E8801A"/>
+                </a:solidFill>
+                <a:latin typeface="Montserrat"/>
+              </a:rPr>
+              <a:t>Por qué:  </a:t>
+            </a:r>
+            <a:r>
+              <a:rPr sz="1500" b="0" i="0">
+                <a:solidFill>
+                  <a:srgbClr val="1B2330"/>
+                </a:solidFill>
+                <a:latin typeface="Montserrat"/>
+              </a:rPr>
+              <a:t>El punto alto de llenado corta al 85 %; ese 15 % de hueco es el colchón para que el líquido se dilate.</a:t>
             </a:r>
           </a:p>
         </p:txBody>
@@ -8453,6 +9253,18 @@
   <p:clrMapOvr>
     <a:masterClrMapping/>
   </p:clrMapOvr>
+  <mc:AlternateContent xmlns:mc="http://schemas.openxmlformats.org/markup-compatibility/2006">
+    <mc:Choice xmlns:p14="http://schemas.microsoft.com/office/powerpoint/2010/main" Requires="p14">
+      <p:transition spd="med" p14:dur="700">
+        <p14:cube dir="r"/>
+      </p:transition>
+    </mc:Choice>
+    <mc:Fallback>
+      <p:transition spd="med">
+        <p:push dir="r"/>
+      </p:transition>
+    </mc:Fallback>
+  </mc:AlternateContent>
 </p:sld>
 </file>
 
@@ -8540,7 +9352,7 @@
                 </a:solidFill>
                 <a:latin typeface="Montserrat"/>
               </a:rPr>
-              <a:t>017 / 021</a:t>
+              <a:t>017 / 026</a:t>
             </a:r>
           </a:p>
         </p:txBody>
@@ -8608,7 +9420,7 @@
                 </a:solidFill>
                 <a:latin typeface="Montserrat"/>
               </a:rPr>
-              <a:t>APARTADO 6.3 · PRUEBA DE PRESIÓN</a:t>
+              <a:t>APARTADO 6.1 · MANTENIMIENTO</a:t>
             </a:r>
           </a:p>
         </p:txBody>
@@ -8642,14 +9454,14 @@
                 </a:solidFill>
                 <a:latin typeface="Montserrat"/>
               </a:rPr>
-              <a:t>Cada 15 años y el muestreo</a:t>
-            </a:r>
-          </a:p>
-        </p:txBody>
-      </p:sp>
-      <p:sp>
-        <p:nvSpPr>
-          <p:cNvPr id="7" name="Rounded Rectangle 6"/>
+              <a:t>Contrato, urgencias y Libro</a:t>
+            </a:r>
+          </a:p>
+        </p:txBody>
+      </p:sp>
+      <p:sp>
+        <p:nvSpPr>
+          <p:cNvPr id="7" name="Rectangle 6"/>
           <p:cNvSpPr/>
           <p:nvPr/>
         </p:nvSpPr>
@@ -8658,7 +9470,7 @@
             <a:off x="868680" y="1627632"/>
             <a:ext cx="2011680" cy="73152"/>
           </a:xfrm>
-          <a:prstGeom prst="roundRect">
+          <a:prstGeom prst="rect">
             <a:avLst/>
           </a:prstGeom>
           <a:solidFill>
@@ -8699,8 +9511,8 @@
         </p:nvSpPr>
         <p:spPr>
           <a:xfrm>
-            <a:off x="822960" y="1965960"/>
-            <a:ext cx="4983480" cy="4206240"/>
+            <a:off x="6355080" y="1965960"/>
+            <a:ext cx="5029200" cy="4206240"/>
           </a:xfrm>
           <a:prstGeom prst="rect">
             <a:avLst/>
@@ -8734,7 +9546,7 @@
                 </a:solidFill>
                 <a:latin typeface="Montserrat"/>
               </a:rPr>
-              <a:t>Prueba de presión cada 15 años</a:t>
+              <a:t>Titular responsable de conservarlo</a:t>
             </a:r>
           </a:p>
           <a:p>
@@ -8759,7 +9571,7 @@
                 </a:solidFill>
                 <a:latin typeface="Montserrat"/>
               </a:rPr>
-              <a:t>La encarga a un organismo de control</a:t>
+              <a:t>Contrato con instalador de urgencias 24 h</a:t>
             </a:r>
           </a:p>
           <a:p>
@@ -8784,7 +9596,7 @@
                 </a:solidFill>
                 <a:latin typeface="Montserrat"/>
               </a:rPr>
-              <a:t>Superficie: se prueba una muestra</a:t>
+              <a:t>Libro de Mantenimiento o archivo</a:t>
             </a:r>
           </a:p>
           <a:p>
@@ -8809,21 +9621,21 @@
                 </a:solidFill>
                 <a:latin typeface="Montserrat"/>
               </a:rPr>
-              <a:t>Muestra redondea arriba, mínimo 8</a:t>
-            </a:r>
-          </a:p>
-        </p:txBody>
-      </p:sp>
-      <p:sp>
-        <p:nvSpPr>
-          <p:cNvPr id="9" name="imgph" descr="IMGQ:pressure gauge industrial tank test"/>
+              <a:t>Consta cada visita y sus lecturas</a:t>
+            </a:r>
+          </a:p>
+        </p:txBody>
+      </p:sp>
+      <p:sp>
+        <p:nvSpPr>
+          <p:cNvPr id="9" name="imgph" descr="IMGQ:maintenance logbook technician gas"/>
           <p:cNvSpPr/>
           <p:nvPr/>
         </p:nvSpPr>
         <p:spPr>
           <a:xfrm>
-            <a:off x="5806440" y="1051560"/>
-            <a:ext cx="5298947" cy="4629150"/>
+            <a:off x="822960" y="1965960"/>
+            <a:ext cx="5303520" cy="4572000"/>
           </a:xfrm>
           <a:prstGeom prst="roundRect">
             <a:avLst/>
@@ -8868,8 +9680,8 @@
         </p:nvSpPr>
         <p:spPr>
           <a:xfrm>
-            <a:off x="6080760" y="2726055"/>
-            <a:ext cx="4750307" cy="1280160"/>
+            <a:off x="1097280" y="3611880"/>
+            <a:ext cx="4754880" cy="1280160"/>
           </a:xfrm>
           <a:prstGeom prst="rect">
             <a:avLst/>
@@ -8890,7 +9702,7 @@
                 </a:solidFill>
                 <a:latin typeface="Montserrat"/>
               </a:rPr>
-              <a:t>IMAGEN REALISTA</a:t>
+              <a:t>IMAGEN</a:t>
             </a:r>
           </a:p>
           <a:p>
@@ -8902,7 +9714,7 @@
                 </a:solidFill>
                 <a:latin typeface="Montserrat"/>
               </a:rPr>
-              <a:t>pressure gauge industrial tank test</a:t>
+              <a:t>maintenance logbook technician gas</a:t>
             </a:r>
           </a:p>
         </p:txBody>
@@ -8912,6 +9724,18 @@
   <p:clrMapOvr>
     <a:masterClrMapping/>
   </p:clrMapOvr>
+  <mc:AlternateContent xmlns:mc="http://schemas.openxmlformats.org/markup-compatibility/2006">
+    <mc:Choice xmlns:p14="http://schemas.microsoft.com/office/powerpoint/2010/main" Requires="p14">
+      <p:transition spd="med" p14:dur="700">
+        <p14:cube dir="l"/>
+      </p:transition>
+    </mc:Choice>
+    <mc:Fallback>
+      <p:transition spd="med">
+        <p:push dir="l"/>
+      </p:transition>
+    </mc:Fallback>
+  </mc:AlternateContent>
 </p:sld>
 </file>
 
@@ -8999,7 +9823,7 @@
                 </a:solidFill>
                 <a:latin typeface="Montserrat"/>
               </a:rPr>
-              <a:t>018 / 021</a:t>
+              <a:t>018 / 026</a:t>
             </a:r>
           </a:p>
         </p:txBody>
@@ -9067,7 +9891,7 @@
                 </a:solidFill>
                 <a:latin typeface="Montserrat"/>
               </a:rPr>
-              <a:t>APARTADOS 6.5 Y 6.6 · CASOS</a:t>
+              <a:t>APARTADO 6.4 · CORROSIÓN</a:t>
             </a:r>
           </a:p>
         </p:txBody>
@@ -9101,14 +9925,14 @@
                 </a:solidFill>
                 <a:latin typeface="Montserrat"/>
               </a:rPr>
-              <a:t>Protección adicional y provisionales</a:t>
-            </a:r>
-          </a:p>
-        </p:txBody>
-      </p:sp>
-      <p:sp>
-        <p:nvSpPr>
-          <p:cNvPr id="7" name="Rounded Rectangle 6"/>
+              <a:t>El enemigo silencioso del enterrado</a:t>
+            </a:r>
+          </a:p>
+        </p:txBody>
+      </p:sp>
+      <p:sp>
+        <p:nvSpPr>
+          <p:cNvPr id="7" name="Rectangle 6"/>
           <p:cNvSpPr/>
           <p:nvPr/>
         </p:nvSpPr>
@@ -9117,7 +9941,7 @@
             <a:off x="868680" y="1627632"/>
             <a:ext cx="2011680" cy="73152"/>
           </a:xfrm>
-          <a:prstGeom prst="roundRect">
+          <a:prstGeom prst="rect">
             <a:avLst/>
           </a:prstGeom>
           <a:solidFill>
@@ -9159,7 +9983,7 @@
         <p:spPr>
           <a:xfrm>
             <a:off x="822960" y="1965960"/>
-            <a:ext cx="4983480" cy="4206240"/>
+            <a:ext cx="5029200" cy="4206240"/>
           </a:xfrm>
           <a:prstGeom prst="rect">
             <a:avLst/>
@@ -9193,7 +10017,7 @@
                 </a:solidFill>
                 <a:latin typeface="Montserrat"/>
               </a:rPr>
-              <a:t>Protección adicional: no hay que desenterrar</a:t>
+              <a:t>Enterrado: protección catódica</a:t>
             </a:r>
           </a:p>
           <a:p>
@@ -9218,7 +10042,7 @@
                 </a:solidFill>
                 <a:latin typeface="Montserrat"/>
               </a:rPr>
-              <a:t>Se libra si pasa las pruebas del fabricante</a:t>
+              <a:t>Salvo estudio de terreno que la exima</a:t>
             </a:r>
           </a:p>
           <a:p>
@@ -9243,7 +10067,7 @@
                 </a:solidFill>
                 <a:latin typeface="Montserrat"/>
               </a:rPr>
-              <a:t>Provisional: máximo 5 m³</a:t>
+              <a:t>Control del potencial: cada año</a:t>
             </a:r>
           </a:p>
           <a:p>
@@ -9268,21 +10092,21 @@
                 </a:solidFill>
                 <a:latin typeface="Montserrat"/>
               </a:rPr>
-              <a:t>Provisional: hasta 60 días, prorrogable</a:t>
-            </a:r>
-          </a:p>
-        </p:txBody>
-      </p:sp>
-      <p:sp>
-        <p:nvSpPr>
-          <p:cNvPr id="9" name="imgph" descr="IMGQ:underground tank excavation site"/>
+              <a:t>Corriente impresa: cada 3 meses</a:t>
+            </a:r>
+          </a:p>
+        </p:txBody>
+      </p:sp>
+      <p:sp>
+        <p:nvSpPr>
+          <p:cNvPr id="9" name="imgph" descr="IMGQ:buried metal tank corrosion protection"/>
           <p:cNvSpPr/>
           <p:nvPr/>
         </p:nvSpPr>
         <p:spPr>
           <a:xfrm>
-            <a:off x="5806440" y="1051560"/>
-            <a:ext cx="5298947" cy="4629150"/>
+            <a:off x="6080760" y="1965960"/>
+            <a:ext cx="5303520" cy="4572000"/>
           </a:xfrm>
           <a:prstGeom prst="roundRect">
             <a:avLst/>
@@ -9327,8 +10151,8 @@
         </p:nvSpPr>
         <p:spPr>
           <a:xfrm>
-            <a:off x="6080760" y="2726055"/>
-            <a:ext cx="4750307" cy="1280160"/>
+            <a:off x="6355080" y="3611880"/>
+            <a:ext cx="4754880" cy="1280160"/>
           </a:xfrm>
           <a:prstGeom prst="rect">
             <a:avLst/>
@@ -9349,7 +10173,7 @@
                 </a:solidFill>
                 <a:latin typeface="Montserrat"/>
               </a:rPr>
-              <a:t>IMAGEN REALISTA</a:t>
+              <a:t>IMAGEN</a:t>
             </a:r>
           </a:p>
           <a:p>
@@ -9361,7 +10185,7 @@
                 </a:solidFill>
                 <a:latin typeface="Montserrat"/>
               </a:rPr>
-              <a:t>underground tank excavation site</a:t>
+              <a:t>buried metal tank corrosion protection</a:t>
             </a:r>
           </a:p>
         </p:txBody>
@@ -9371,6 +10195,18 @@
   <p:clrMapOvr>
     <a:masterClrMapping/>
   </p:clrMapOvr>
+  <mc:AlternateContent xmlns:mc="http://schemas.openxmlformats.org/markup-compatibility/2006">
+    <mc:Choice xmlns:p14="http://schemas.microsoft.com/office/powerpoint/2010/main" Requires="p14">
+      <p:transition spd="med" p14:dur="700">
+        <p14:cube dir="r"/>
+      </p:transition>
+    </mc:Choice>
+    <mc:Fallback>
+      <p:transition spd="med">
+        <p:push dir="r"/>
+      </p:transition>
+    </mc:Fallback>
+  </mc:AlternateContent>
 </p:sld>
 </file>
 
@@ -9458,7 +10294,7 @@
                 </a:solidFill>
                 <a:latin typeface="Montserrat"/>
               </a:rPr>
-              <a:t>019 / 021</a:t>
+              <a:t>019 / 026</a:t>
             </a:r>
           </a:p>
         </p:txBody>
@@ -9526,7 +10362,7 @@
                 </a:solidFill>
                 <a:latin typeface="Montserrat"/>
               </a:rPr>
-              <a:t>APARTADO 7 · RETIRADA</a:t>
+              <a:t>APARTADO 6.2 · REVISIONES</a:t>
             </a:r>
           </a:p>
         </p:txBody>
@@ -9560,14 +10396,14 @@
                 </a:solidFill>
                 <a:latin typeface="Montserrat"/>
               </a:rPr>
-              <a:t>No dejes una bomba</a:t>
-            </a:r>
-          </a:p>
-        </p:txBody>
-      </p:sp>
-      <p:sp>
-        <p:nvSpPr>
-          <p:cNvPr id="7" name="Rounded Rectangle 6"/>
+              <a:t>Cada 2 años o con la receptora</a:t>
+            </a:r>
+          </a:p>
+        </p:txBody>
+      </p:sp>
+      <p:sp>
+        <p:nvSpPr>
+          <p:cNvPr id="7" name="Rectangle 6"/>
           <p:cNvSpPr/>
           <p:nvPr/>
         </p:nvSpPr>
@@ -9576,7 +10412,7 @@
             <a:off x="868680" y="1627632"/>
             <a:ext cx="2011680" cy="73152"/>
           </a:xfrm>
-          <a:prstGeom prst="roundRect">
+          <a:prstGeom prst="rect">
             <a:avLst/>
           </a:prstGeom>
           <a:solidFill>
@@ -9617,8 +10453,8 @@
         </p:nvSpPr>
         <p:spPr>
           <a:xfrm>
-            <a:off x="822960" y="1965960"/>
-            <a:ext cx="4983480" cy="4206240"/>
+            <a:off x="6355080" y="1965960"/>
+            <a:ext cx="5029200" cy="4206240"/>
           </a:xfrm>
           <a:prstGeom prst="rect">
             <a:avLst/>
@@ -9652,7 +10488,7 @@
                 </a:solidFill>
                 <a:latin typeface="Montserrat"/>
               </a:rPr>
-              <a:t>Inertizado con nitrógeno</a:t>
+              <a:t>Alimenta una red: cada 2 años</a:t>
             </a:r>
           </a:p>
           <a:p>
@@ -9677,7 +10513,7 @@
                 </a:solidFill>
                 <a:latin typeface="Montserrat"/>
               </a:rPr>
-              <a:t>O desgasificado con agua</a:t>
+              <a:t>Resto: a la vez que la receptora</a:t>
             </a:r>
           </a:p>
           <a:p>
@@ -9702,7 +10538,7 @@
                 </a:solidFill>
                 <a:latin typeface="Montserrat"/>
               </a:rPr>
-              <a:t>Certificado a la Comunidad Autónoma</a:t>
+              <a:t>Favorable: certificado de revisión</a:t>
             </a:r>
           </a:p>
           <a:p>
@@ -9727,21 +10563,21 @@
                 </a:solidFill>
                 <a:latin typeface="Montserrat"/>
               </a:rPr>
-              <a:t>Cese: 2 años sin consumo o 5 sin mantenimiento</a:t>
-            </a:r>
-          </a:p>
-        </p:txBody>
-      </p:sp>
-      <p:sp>
-        <p:nvSpPr>
-          <p:cNvPr id="9" name="imgph" descr="IMGQ:nitrogen cylinder inert gas industrial"/>
+              <a:t>Con fallos: informe de anomalías</a:t>
+            </a:r>
+          </a:p>
+        </p:txBody>
+      </p:sp>
+      <p:sp>
+        <p:nvSpPr>
+          <p:cNvPr id="9" name="imgph" descr="IMGQ:technician inspecting gas tank valves"/>
           <p:cNvSpPr/>
           <p:nvPr/>
         </p:nvSpPr>
         <p:spPr>
           <a:xfrm>
-            <a:off x="5806440" y="1051560"/>
-            <a:ext cx="5298947" cy="4629150"/>
+            <a:off x="822960" y="1965960"/>
+            <a:ext cx="5303520" cy="4572000"/>
           </a:xfrm>
           <a:prstGeom prst="roundRect">
             <a:avLst/>
@@ -9786,8 +10622,8 @@
         </p:nvSpPr>
         <p:spPr>
           <a:xfrm>
-            <a:off x="6080760" y="2726055"/>
-            <a:ext cx="4750307" cy="1280160"/>
+            <a:off x="1097280" y="3611880"/>
+            <a:ext cx="4754880" cy="1280160"/>
           </a:xfrm>
           <a:prstGeom prst="rect">
             <a:avLst/>
@@ -9808,7 +10644,7 @@
                 </a:solidFill>
                 <a:latin typeface="Montserrat"/>
               </a:rPr>
-              <a:t>IMAGEN REALISTA</a:t>
+              <a:t>IMAGEN</a:t>
             </a:r>
           </a:p>
           <a:p>
@@ -9820,7 +10656,7 @@
                 </a:solidFill>
                 <a:latin typeface="Montserrat"/>
               </a:rPr>
-              <a:t>nitrogen cylinder inert gas industrial</a:t>
+              <a:t>technician inspecting gas tank valves</a:t>
             </a:r>
           </a:p>
         </p:txBody>
@@ -9830,6 +10666,18 @@
   <p:clrMapOvr>
     <a:masterClrMapping/>
   </p:clrMapOvr>
+  <mc:AlternateContent xmlns:mc="http://schemas.openxmlformats.org/markup-compatibility/2006">
+    <mc:Choice xmlns:p14="http://schemas.microsoft.com/office/powerpoint/2010/main" Requires="p14">
+      <p:transition spd="med" p14:dur="700">
+        <p14:cube dir="l"/>
+      </p:transition>
+    </mc:Choice>
+    <mc:Fallback>
+      <p:transition spd="med">
+        <p:push dir="l"/>
+      </p:transition>
+    </mc:Fallback>
+  </mc:AlternateContent>
 </p:sld>
 </file>
 
@@ -9917,7 +10765,7 @@
                 </a:solidFill>
                 <a:latin typeface="Montserrat"/>
               </a:rPr>
-              <a:t>002 / 021</a:t>
+              <a:t>002 / 026</a:t>
             </a:r>
           </a:p>
         </p:txBody>
@@ -9992,7 +10840,7 @@
       </p:sp>
       <p:sp>
         <p:nvSpPr>
-          <p:cNvPr id="6" name="Rounded Rectangle 5"/>
+          <p:cNvPr id="6" name="Rectangle 5"/>
           <p:cNvSpPr/>
           <p:nvPr/>
         </p:nvSpPr>
@@ -10001,7 +10849,7 @@
             <a:off x="868680" y="1234440"/>
             <a:ext cx="1463040" cy="73152"/>
           </a:xfrm>
-          <a:prstGeom prst="roundRect">
+          <a:prstGeom prst="rect">
             <a:avLst/>
           </a:prstGeom>
           <a:solidFill>
@@ -10082,14 +10930,58 @@
       </p:sp>
       <p:sp>
         <p:nvSpPr>
-          <p:cNvPr id="8" name="TextBox 7"/>
+          <p:cNvPr id="8" name="Rectangle 7"/>
+          <p:cNvSpPr/>
+          <p:nvPr/>
+        </p:nvSpPr>
+        <p:spPr>
+          <a:xfrm>
+            <a:off x="822960" y="2011680"/>
+            <a:ext cx="3017520" cy="128016"/>
+          </a:xfrm>
+          <a:prstGeom prst="rect">
+            <a:avLst/>
+          </a:prstGeom>
+          <a:solidFill>
+            <a:srgbClr val="E8801A"/>
+          </a:solidFill>
+          <a:ln>
+            <a:noFill/>
+          </a:ln>
+          <a:effectLst/>
+        </p:spPr>
+        <p:style>
+          <a:lnRef idx="1">
+            <a:schemeClr val="accent1"/>
+          </a:lnRef>
+          <a:fillRef idx="3">
+            <a:schemeClr val="accent1"/>
+          </a:fillRef>
+          <a:effectRef idx="2">
+            <a:schemeClr val="accent1"/>
+          </a:effectRef>
+          <a:fontRef idx="minor">
+            <a:schemeClr val="lt1"/>
+          </a:fontRef>
+        </p:style>
+        <p:txBody>
+          <a:bodyPr rtlCol="0" anchor="ctr"/>
+          <a:lstStyle/>
+          <a:p>
+            <a:pPr algn="ctr"/>
+          </a:p>
+        </p:txBody>
+      </p:sp>
+      <p:sp>
+        <p:nvSpPr>
+          <p:cNvPr id="9" name="TextBox 8"/>
           <p:cNvSpPr txBox="1"/>
           <p:nvPr/>
         </p:nvSpPr>
         <p:spPr>
           <a:xfrm>
-            <a:off x="822960" y="2331720"/>
-            <a:ext cx="3017520" cy="1463040"/>
+            <a:off x="822960" y="2377440"/>
+            <a:ext cx="3017520" cy="1371600"/>
           </a:xfrm>
           <a:prstGeom prst="rect">
             <a:avLst/>
@@ -10104,7 +10996,7 @@
           <a:p>
             <a:pPr algn="ctr"/>
             <a:r>
-              <a:rPr sz="6000" b="1" i="0">
+              <a:rPr sz="5800" b="1" i="0">
                 <a:solidFill>
                   <a:srgbClr val="1E2761"/>
                 </a:solidFill>
@@ -10117,13 +11009,13 @@
       </p:sp>
       <p:sp>
         <p:nvSpPr>
-          <p:cNvPr id="9" name="TextBox 8"/>
+          <p:cNvPr id="10" name="TextBox 9"/>
           <p:cNvSpPr txBox="1"/>
           <p:nvPr/>
         </p:nvSpPr>
         <p:spPr>
           <a:xfrm>
-            <a:off x="1051560" y="3611880"/>
+            <a:off x="1051560" y="3657600"/>
             <a:ext cx="2560320" cy="1005840"/>
           </a:xfrm>
           <a:prstGeom prst="rect">
@@ -10152,7 +11044,7 @@
       </p:sp>
       <p:sp>
         <p:nvSpPr>
-          <p:cNvPr id="10" name="Rounded Rectangle 9"/>
+          <p:cNvPr id="11" name="Rounded Rectangle 10"/>
           <p:cNvSpPr/>
           <p:nvPr/>
         </p:nvSpPr>
@@ -10198,14 +11090,58 @@
       </p:sp>
       <p:sp>
         <p:nvSpPr>
-          <p:cNvPr id="11" name="TextBox 10"/>
+          <p:cNvPr id="12" name="Rectangle 11"/>
+          <p:cNvSpPr/>
+          <p:nvPr/>
+        </p:nvSpPr>
+        <p:spPr>
+          <a:xfrm>
+            <a:off x="4617720" y="2011680"/>
+            <a:ext cx="3017520" cy="128016"/>
+          </a:xfrm>
+          <a:prstGeom prst="rect">
+            <a:avLst/>
+          </a:prstGeom>
+          <a:solidFill>
+            <a:srgbClr val="E8801A"/>
+          </a:solidFill>
+          <a:ln>
+            <a:noFill/>
+          </a:ln>
+          <a:effectLst/>
+        </p:spPr>
+        <p:style>
+          <a:lnRef idx="1">
+            <a:schemeClr val="accent1"/>
+          </a:lnRef>
+          <a:fillRef idx="3">
+            <a:schemeClr val="accent1"/>
+          </a:fillRef>
+          <a:effectRef idx="2">
+            <a:schemeClr val="accent1"/>
+          </a:effectRef>
+          <a:fontRef idx="minor">
+            <a:schemeClr val="lt1"/>
+          </a:fontRef>
+        </p:style>
+        <p:txBody>
+          <a:bodyPr rtlCol="0" anchor="ctr"/>
+          <a:lstStyle/>
+          <a:p>
+            <a:pPr algn="ctr"/>
+          </a:p>
+        </p:txBody>
+      </p:sp>
+      <p:sp>
+        <p:nvSpPr>
+          <p:cNvPr id="13" name="TextBox 12"/>
           <p:cNvSpPr txBox="1"/>
           <p:nvPr/>
         </p:nvSpPr>
         <p:spPr>
           <a:xfrm>
-            <a:off x="4617720" y="2331720"/>
-            <a:ext cx="3017520" cy="1463040"/>
+            <a:off x="4617720" y="2377440"/>
+            <a:ext cx="3017520" cy="1371600"/>
           </a:xfrm>
           <a:prstGeom prst="rect">
             <a:avLst/>
@@ -10220,7 +11156,7 @@
           <a:p>
             <a:pPr algn="ctr"/>
             <a:r>
-              <a:rPr sz="6000" b="1" i="0">
+              <a:rPr sz="5800" b="1" i="0">
                 <a:solidFill>
                   <a:srgbClr val="1E2761"/>
                 </a:solidFill>
@@ -10233,13 +11169,13 @@
       </p:sp>
       <p:sp>
         <p:nvSpPr>
-          <p:cNvPr id="12" name="TextBox 11"/>
+          <p:cNvPr id="14" name="TextBox 13"/>
           <p:cNvSpPr txBox="1"/>
           <p:nvPr/>
         </p:nvSpPr>
         <p:spPr>
           <a:xfrm>
-            <a:off x="4846320" y="3611880"/>
+            <a:off x="4846320" y="3657600"/>
             <a:ext cx="2560320" cy="1005840"/>
           </a:xfrm>
           <a:prstGeom prst="rect">
@@ -10268,7 +11204,7 @@
       </p:sp>
       <p:sp>
         <p:nvSpPr>
-          <p:cNvPr id="13" name="Rounded Rectangle 12"/>
+          <p:cNvPr id="15" name="Rounded Rectangle 14"/>
           <p:cNvSpPr/>
           <p:nvPr/>
         </p:nvSpPr>
@@ -10314,14 +11250,58 @@
       </p:sp>
       <p:sp>
         <p:nvSpPr>
-          <p:cNvPr id="14" name="TextBox 13"/>
+          <p:cNvPr id="16" name="Rectangle 15"/>
+          <p:cNvSpPr/>
+          <p:nvPr/>
+        </p:nvSpPr>
+        <p:spPr>
+          <a:xfrm>
+            <a:off x="8412480" y="2011680"/>
+            <a:ext cx="3017520" cy="128016"/>
+          </a:xfrm>
+          <a:prstGeom prst="rect">
+            <a:avLst/>
+          </a:prstGeom>
+          <a:solidFill>
+            <a:srgbClr val="E8801A"/>
+          </a:solidFill>
+          <a:ln>
+            <a:noFill/>
+          </a:ln>
+          <a:effectLst/>
+        </p:spPr>
+        <p:style>
+          <a:lnRef idx="1">
+            <a:schemeClr val="accent1"/>
+          </a:lnRef>
+          <a:fillRef idx="3">
+            <a:schemeClr val="accent1"/>
+          </a:fillRef>
+          <a:effectRef idx="2">
+            <a:schemeClr val="accent1"/>
+          </a:effectRef>
+          <a:fontRef idx="minor">
+            <a:schemeClr val="lt1"/>
+          </a:fontRef>
+        </p:style>
+        <p:txBody>
+          <a:bodyPr rtlCol="0" anchor="ctr"/>
+          <a:lstStyle/>
+          <a:p>
+            <a:pPr algn="ctr"/>
+          </a:p>
+        </p:txBody>
+      </p:sp>
+      <p:sp>
+        <p:nvSpPr>
+          <p:cNvPr id="17" name="TextBox 16"/>
           <p:cNvSpPr txBox="1"/>
           <p:nvPr/>
         </p:nvSpPr>
         <p:spPr>
           <a:xfrm>
-            <a:off x="8412480" y="2331720"/>
-            <a:ext cx="3017520" cy="1463040"/>
+            <a:off x="8412480" y="2377440"/>
+            <a:ext cx="3017520" cy="1371600"/>
           </a:xfrm>
           <a:prstGeom prst="rect">
             <a:avLst/>
@@ -10336,7 +11316,7 @@
           <a:p>
             <a:pPr algn="ctr"/>
             <a:r>
-              <a:rPr sz="6000" b="1" i="0">
+              <a:rPr sz="5800" b="1" i="0">
                 <a:solidFill>
                   <a:srgbClr val="1E2761"/>
                 </a:solidFill>
@@ -10349,13 +11329,13 @@
       </p:sp>
       <p:sp>
         <p:nvSpPr>
-          <p:cNvPr id="15" name="TextBox 14"/>
+          <p:cNvPr id="18" name="TextBox 17"/>
           <p:cNvSpPr txBox="1"/>
           <p:nvPr/>
         </p:nvSpPr>
         <p:spPr>
           <a:xfrm>
-            <a:off x="8641080" y="3611880"/>
+            <a:off x="8641080" y="3657600"/>
             <a:ext cx="2560320" cy="1005840"/>
           </a:xfrm>
           <a:prstGeom prst="rect">
@@ -10387,6 +11367,18 @@
   <p:clrMapOvr>
     <a:masterClrMapping/>
   </p:clrMapOvr>
+  <mc:AlternateContent xmlns:mc="http://schemas.openxmlformats.org/markup-compatibility/2006">
+    <mc:Choice xmlns:p14="http://schemas.microsoft.com/office/powerpoint/2010/main" Requires="p14">
+      <p:transition spd="med" p14:dur="700">
+        <p14:cube dir="r"/>
+      </p:transition>
+    </mc:Choice>
+    <mc:Fallback>
+      <p:transition spd="med">
+        <p:push dir="r"/>
+      </p:transition>
+    </mc:Fallback>
+  </mc:AlternateContent>
 </p:sld>
 </file>
 
@@ -10474,7 +11466,7 @@
                 </a:solidFill>
                 <a:latin typeface="Montserrat"/>
               </a:rPr>
-              <a:t>020 / 021</a:t>
+              <a:t>020 / 026</a:t>
             </a:r>
           </a:p>
         </p:txBody>
@@ -10542,7 +11534,7 @@
                 </a:solidFill>
                 <a:latin typeface="Montserrat"/>
               </a:rPr>
-              <a:t>REPASO RELÁMPAGO</a:t>
+              <a:t>APARTADO 6.2.1 · COMPROBACIONES</a:t>
             </a:r>
           </a:p>
         </p:txBody>
@@ -10576,14 +11568,14 @@
                 </a:solidFill>
                 <a:latin typeface="Montserrat"/>
               </a:rPr>
-              <a:t>Seis anclas antes del cierre</a:t>
-            </a:r>
-          </a:p>
-        </p:txBody>
-      </p:sp>
-      <p:sp>
-        <p:nvSpPr>
-          <p:cNvPr id="7" name="Rounded Rectangle 6"/>
+              <a:t>Las 13 comprobaciones, agrupadas</a:t>
+            </a:r>
+          </a:p>
+        </p:txBody>
+      </p:sp>
+      <p:sp>
+        <p:nvSpPr>
+          <p:cNvPr id="7" name="Rectangle 6"/>
           <p:cNvSpPr/>
           <p:nvPr/>
         </p:nvSpPr>
@@ -10592,7 +11584,7 @@
             <a:off x="868680" y="1627632"/>
             <a:ext cx="2011680" cy="73152"/>
           </a:xfrm>
-          <a:prstGeom prst="roundRect">
+          <a:prstGeom prst="rect">
             <a:avLst/>
           </a:prstGeom>
           <a:solidFill>
@@ -10634,7 +11626,7 @@
         <p:spPr>
           <a:xfrm>
             <a:off x="822960" y="1965960"/>
-            <a:ext cx="4983480" cy="4206240"/>
+            <a:ext cx="5029200" cy="4206240"/>
           </a:xfrm>
           <a:prstGeom prst="rect">
             <a:avLst/>
@@ -10668,7 +11660,7 @@
                 </a:solidFill>
                 <a:latin typeface="Montserrat"/>
               </a:rPr>
-              <a:t>Topes 2.000 / 500 m³ · proyecto &gt; 13 m³</a:t>
+              <a:t>1 a 3: papeles y bomberos</a:t>
             </a:r>
           </a:p>
           <a:p>
@@ -10693,7 +11685,7 @@
                 </a:solidFill>
                 <a:latin typeface="Montserrat"/>
               </a:rPr>
-              <a:t>Memoria la firma el instalador</a:t>
+              <a:t>4 a 9: el hierro (válvulas, corrosión, tierra)</a:t>
             </a:r>
           </a:p>
           <a:p>
@@ -10718,7 +11710,7 @@
                 </a:solidFill>
                 <a:latin typeface="Montserrat"/>
               </a:rPr>
-              <a:t>Primer llenado corta al 85 %</a:t>
+              <a:t>10 a 13: que no fugue</a:t>
             </a:r>
           </a:p>
           <a:p>
@@ -10743,46 +11735,21 @@
                 </a:solidFill>
                 <a:latin typeface="Montserrat"/>
               </a:rPr>
-              <a:t>Enterrado: protección catódica</a:t>
-            </a:r>
-          </a:p>
-          <a:p>
-            <a:pPr>
-              <a:spcAft>
-                <a:spcPts val="1100"/>
-              </a:spcAft>
-            </a:pPr>
-            <a:r>
-              <a:rPr sz="1600" b="1" i="0">
-                <a:solidFill>
-                  <a:srgbClr val="E8801A"/>
-                </a:solidFill>
-                <a:latin typeface="Montserrat"/>
-              </a:rPr>
-              <a:t>▸  </a:t>
-            </a:r>
-            <a:r>
-              <a:rPr sz="1600" b="0" i="0">
-                <a:solidFill>
-                  <a:srgbClr val="1B2330"/>
-                </a:solidFill>
-                <a:latin typeface="Montserrat"/>
-              </a:rPr>
-              <a:t>Prueba de presión cada 15 años</a:t>
-            </a:r>
-          </a:p>
-        </p:txBody>
-      </p:sp>
-      <p:sp>
-        <p:nvSpPr>
-          <p:cNvPr id="9" name="imgph" descr="IMGQ:LPG tank installation residential"/>
+              <a:t>Boca desplazada: 3 bar durante 10 min</a:t>
+            </a:r>
+          </a:p>
+        </p:txBody>
+      </p:sp>
+      <p:sp>
+        <p:nvSpPr>
+          <p:cNvPr id="9" name="imgph" descr="IMGQ:soapy water leak test gas fitting"/>
           <p:cNvSpPr/>
           <p:nvPr/>
         </p:nvSpPr>
         <p:spPr>
           <a:xfrm>
-            <a:off x="5806440" y="1051560"/>
-            <a:ext cx="5298947" cy="4629150"/>
+            <a:off x="6080760" y="1965960"/>
+            <a:ext cx="5303520" cy="4572000"/>
           </a:xfrm>
           <a:prstGeom prst="roundRect">
             <a:avLst/>
@@ -10827,8 +11794,8 @@
         </p:nvSpPr>
         <p:spPr>
           <a:xfrm>
-            <a:off x="6080760" y="2726055"/>
-            <a:ext cx="4750307" cy="1280160"/>
+            <a:off x="6355080" y="3611880"/>
+            <a:ext cx="4754880" cy="1280160"/>
           </a:xfrm>
           <a:prstGeom prst="rect">
             <a:avLst/>
@@ -10849,7 +11816,7 @@
                 </a:solidFill>
                 <a:latin typeface="Montserrat"/>
               </a:rPr>
-              <a:t>IMAGEN REALISTA</a:t>
+              <a:t>IMAGEN</a:t>
             </a:r>
           </a:p>
           <a:p>
@@ -10861,7 +11828,7 @@
                 </a:solidFill>
                 <a:latin typeface="Montserrat"/>
               </a:rPr>
-              <a:t>LPG tank installation residential</a:t>
+              <a:t>soapy water leak test gas fitting</a:t>
             </a:r>
           </a:p>
         </p:txBody>
@@ -10871,6 +11838,18 @@
   <p:clrMapOvr>
     <a:masterClrMapping/>
   </p:clrMapOvr>
+  <mc:AlternateContent xmlns:mc="http://schemas.openxmlformats.org/markup-compatibility/2006">
+    <mc:Choice xmlns:p14="http://schemas.microsoft.com/office/powerpoint/2010/main" Requires="p14">
+      <p:transition spd="med" p14:dur="700">
+        <p14:cube dir="r"/>
+      </p:transition>
+    </mc:Choice>
+    <mc:Fallback>
+      <p:transition spd="med">
+        <p:push dir="r"/>
+      </p:transition>
+    </mc:Fallback>
+  </mc:AlternateContent>
 </p:sld>
 </file>
 
@@ -10899,7 +11878,7 @@
             <a:avLst/>
           </a:prstGeom>
           <a:solidFill>
-            <a:srgbClr val="1E2761"/>
+            <a:srgbClr val="FFFFFF"/>
           </a:solidFill>
           <a:ln>
             <a:noFill/>
@@ -10936,8 +11915,8 @@
         </p:nvSpPr>
         <p:spPr>
           <a:xfrm>
-            <a:off x="822960" y="640080"/>
-            <a:ext cx="10515600" cy="457200"/>
+            <a:off x="10607040" y="320040"/>
+            <a:ext cx="1371600" cy="365760"/>
           </a:xfrm>
           <a:prstGeom prst="rect">
             <a:avLst/>
@@ -10950,30 +11929,133 @@
           </a:bodyPr>
           <a:lstStyle/>
           <a:p>
-            <a:r>
-              <a:rPr sz="1400" b="1" i="0">
-                <a:solidFill>
-                  <a:srgbClr val="F4A24C"/>
-                </a:solidFill>
-                <a:latin typeface="Montserrat"/>
-              </a:rPr>
-              <a:t>LO QUE YA DOMINAS</a:t>
-            </a:r>
-          </a:p>
-        </p:txBody>
-      </p:sp>
-      <p:sp>
-        <p:nvSpPr>
-          <p:cNvPr id="4" name="Rounded Rectangle 3"/>
+            <a:pPr algn="r"/>
+            <a:r>
+              <a:rPr sz="1000" b="1" i="0">
+                <a:solidFill>
+                  <a:srgbClr val="64748B"/>
+                </a:solidFill>
+                <a:latin typeface="Montserrat"/>
+              </a:rPr>
+              <a:t>021 / 026</a:t>
+            </a:r>
+          </a:p>
+        </p:txBody>
+      </p:sp>
+      <p:sp>
+        <p:nvSpPr>
+          <p:cNvPr id="4" name="TextBox 3"/>
+          <p:cNvSpPr txBox="1"/>
+          <p:nvPr/>
+        </p:nvSpPr>
+        <p:spPr>
+          <a:xfrm>
+            <a:off x="457200" y="6419088"/>
+            <a:ext cx="8229600" cy="365760"/>
+          </a:xfrm>
+          <a:prstGeom prst="rect">
+            <a:avLst/>
+          </a:prstGeom>
+          <a:noFill/>
+        </p:spPr>
+        <p:txBody>
+          <a:bodyPr wrap="square">
+            <a:spAutoFit/>
+          </a:bodyPr>
+          <a:lstStyle/>
+          <a:p>
+            <a:r>
+              <a:rPr sz="900" b="0" i="0">
+                <a:solidFill>
+                  <a:srgbClr val="64748B"/>
+                </a:solidFill>
+                <a:latin typeface="Montserrat"/>
+              </a:rPr>
+              <a:t>Curso Gas B · Tema 02 · Depósitos fijos de GLP (ITC-ICG 03)</a:t>
+            </a:r>
+          </a:p>
+        </p:txBody>
+      </p:sp>
+      <p:sp>
+        <p:nvSpPr>
+          <p:cNvPr id="5" name="TextBox 4"/>
+          <p:cNvSpPr txBox="1"/>
+          <p:nvPr/>
+        </p:nvSpPr>
+        <p:spPr>
+          <a:xfrm>
+            <a:off x="822960" y="457200"/>
+            <a:ext cx="10058400" cy="365760"/>
+          </a:xfrm>
+          <a:prstGeom prst="rect">
+            <a:avLst/>
+          </a:prstGeom>
+          <a:noFill/>
+        </p:spPr>
+        <p:txBody>
+          <a:bodyPr wrap="square">
+            <a:spAutoFit/>
+          </a:bodyPr>
+          <a:lstStyle/>
+          <a:p>
+            <a:r>
+              <a:rPr sz="1300" b="1" i="0">
+                <a:solidFill>
+                  <a:srgbClr val="E8801A"/>
+                </a:solidFill>
+                <a:latin typeface="Montserrat"/>
+              </a:rPr>
+              <a:t>APARTADO 6.3 · PRUEBA DE PRESIÓN</a:t>
+            </a:r>
+          </a:p>
+        </p:txBody>
+      </p:sp>
+      <p:sp>
+        <p:nvSpPr>
+          <p:cNvPr id="6" name="TextBox 5"/>
+          <p:cNvSpPr txBox="1"/>
+          <p:nvPr/>
+        </p:nvSpPr>
+        <p:spPr>
+          <a:xfrm>
+            <a:off x="822960" y="868680"/>
+            <a:ext cx="10515600" cy="914400"/>
+          </a:xfrm>
+          <a:prstGeom prst="rect">
+            <a:avLst/>
+          </a:prstGeom>
+          <a:noFill/>
+        </p:spPr>
+        <p:txBody>
+          <a:bodyPr wrap="square">
+            <a:spAutoFit/>
+          </a:bodyPr>
+          <a:lstStyle/>
+          <a:p>
+            <a:r>
+              <a:rPr sz="2800" b="1" i="0">
+                <a:solidFill>
+                  <a:srgbClr val="1E2761"/>
+                </a:solidFill>
+                <a:latin typeface="Montserrat"/>
+              </a:rPr>
+              <a:t>Cada 15 años y el muestreo</a:t>
+            </a:r>
+          </a:p>
+        </p:txBody>
+      </p:sp>
+      <p:sp>
+        <p:nvSpPr>
+          <p:cNvPr id="7" name="Rectangle 6"/>
           <p:cNvSpPr/>
           <p:nvPr/>
         </p:nvSpPr>
         <p:spPr>
           <a:xfrm>
-            <a:off x="868680" y="1051560"/>
-            <a:ext cx="1463040" cy="82296"/>
-          </a:xfrm>
-          <a:prstGeom prst="roundRect">
+            <a:off x="868680" y="1627632"/>
+            <a:ext cx="2011680" cy="73152"/>
+          </a:xfrm>
+          <a:prstGeom prst="rect">
             <a:avLst/>
           </a:prstGeom>
           <a:solidFill>
@@ -11008,14 +12090,14 @@
       </p:sp>
       <p:sp>
         <p:nvSpPr>
-          <p:cNvPr id="5" name="TextBox 4"/>
+          <p:cNvPr id="8" name="TextBox 7"/>
           <p:cNvSpPr txBox="1"/>
           <p:nvPr/>
         </p:nvSpPr>
         <p:spPr>
           <a:xfrm>
-            <a:off x="822960" y="1234440"/>
-            <a:ext cx="10515600" cy="1097280"/>
+            <a:off x="6355080" y="1965960"/>
+            <a:ext cx="5029200" cy="4206240"/>
           </a:xfrm>
           <a:prstGeom prst="rect">
             <a:avLst/>
@@ -11028,28 +12110,163 @@
           </a:bodyPr>
           <a:lstStyle/>
           <a:p>
-            <a:r>
-              <a:rPr sz="3400" b="1" i="0">
-                <a:solidFill>
-                  <a:srgbClr val="FFFFFF"/>
-                </a:solidFill>
-                <a:latin typeface="Montserrat"/>
-              </a:rPr>
-              <a:t>Ya legalizas y mantienes un depósito fijo</a:t>
-            </a:r>
-          </a:p>
-        </p:txBody>
-      </p:sp>
-      <p:sp>
-        <p:nvSpPr>
-          <p:cNvPr id="6" name="TextBox 5"/>
+            <a:pPr>
+              <a:spcAft>
+                <a:spcPts val="1100"/>
+              </a:spcAft>
+            </a:pPr>
+            <a:r>
+              <a:rPr sz="1600" b="1" i="0">
+                <a:solidFill>
+                  <a:srgbClr val="E8801A"/>
+                </a:solidFill>
+                <a:latin typeface="Montserrat"/>
+              </a:rPr>
+              <a:t>▸  </a:t>
+            </a:r>
+            <a:r>
+              <a:rPr sz="1600" b="0" i="0">
+                <a:solidFill>
+                  <a:srgbClr val="1B2330"/>
+                </a:solidFill>
+                <a:latin typeface="Montserrat"/>
+              </a:rPr>
+              <a:t>Prueba de presión cada 15 años</a:t>
+            </a:r>
+          </a:p>
+          <a:p>
+            <a:pPr>
+              <a:spcAft>
+                <a:spcPts val="1100"/>
+              </a:spcAft>
+            </a:pPr>
+            <a:r>
+              <a:rPr sz="1600" b="1" i="0">
+                <a:solidFill>
+                  <a:srgbClr val="E8801A"/>
+                </a:solidFill>
+                <a:latin typeface="Montserrat"/>
+              </a:rPr>
+              <a:t>▸  </a:t>
+            </a:r>
+            <a:r>
+              <a:rPr sz="1600" b="0" i="0">
+                <a:solidFill>
+                  <a:srgbClr val="1B2330"/>
+                </a:solidFill>
+                <a:latin typeface="Montserrat"/>
+              </a:rPr>
+              <a:t>La encarga a un organismo de control</a:t>
+            </a:r>
+          </a:p>
+          <a:p>
+            <a:pPr>
+              <a:spcAft>
+                <a:spcPts val="1100"/>
+              </a:spcAft>
+            </a:pPr>
+            <a:r>
+              <a:rPr sz="1600" b="1" i="0">
+                <a:solidFill>
+                  <a:srgbClr val="E8801A"/>
+                </a:solidFill>
+                <a:latin typeface="Montserrat"/>
+              </a:rPr>
+              <a:t>▸  </a:t>
+            </a:r>
+            <a:r>
+              <a:rPr sz="1600" b="0" i="0">
+                <a:solidFill>
+                  <a:srgbClr val="1B2330"/>
+                </a:solidFill>
+                <a:latin typeface="Montserrat"/>
+              </a:rPr>
+              <a:t>Superficie: se prueba una muestra</a:t>
+            </a:r>
+          </a:p>
+          <a:p>
+            <a:pPr>
+              <a:spcAft>
+                <a:spcPts val="1100"/>
+              </a:spcAft>
+            </a:pPr>
+            <a:r>
+              <a:rPr sz="1600" b="1" i="0">
+                <a:solidFill>
+                  <a:srgbClr val="E8801A"/>
+                </a:solidFill>
+                <a:latin typeface="Montserrat"/>
+              </a:rPr>
+              <a:t>▸  </a:t>
+            </a:r>
+            <a:r>
+              <a:rPr sz="1600" b="0" i="0">
+                <a:solidFill>
+                  <a:srgbClr val="1B2330"/>
+                </a:solidFill>
+                <a:latin typeface="Montserrat"/>
+              </a:rPr>
+              <a:t>Muestra redondea arriba, mínimo 8</a:t>
+            </a:r>
+          </a:p>
+        </p:txBody>
+      </p:sp>
+      <p:sp>
+        <p:nvSpPr>
+          <p:cNvPr id="9" name="imgph" descr="IMGQ:pressure gauge industrial tank test"/>
+          <p:cNvSpPr/>
+          <p:nvPr/>
+        </p:nvSpPr>
+        <p:spPr>
+          <a:xfrm>
+            <a:off x="822960" y="1965960"/>
+            <a:ext cx="5303520" cy="4572000"/>
+          </a:xfrm>
+          <a:prstGeom prst="roundRect">
+            <a:avLst/>
+          </a:prstGeom>
+          <a:solidFill>
+            <a:srgbClr val="F3F6FB"/>
+          </a:solidFill>
+          <a:ln w="12700">
+            <a:solidFill>
+              <a:srgbClr val="C7D2E6"/>
+            </a:solidFill>
+          </a:ln>
+          <a:effectLst/>
+        </p:spPr>
+        <p:style>
+          <a:lnRef idx="1">
+            <a:schemeClr val="accent1"/>
+          </a:lnRef>
+          <a:fillRef idx="3">
+            <a:schemeClr val="accent1"/>
+          </a:fillRef>
+          <a:effectRef idx="2">
+            <a:schemeClr val="accent1"/>
+          </a:effectRef>
+          <a:fontRef idx="minor">
+            <a:schemeClr val="lt1"/>
+          </a:fontRef>
+        </p:style>
+        <p:txBody>
+          <a:bodyPr rtlCol="0" anchor="ctr"/>
+          <a:lstStyle/>
+          <a:p>
+            <a:pPr algn="ctr"/>
+          </a:p>
+        </p:txBody>
+      </p:sp>
+      <p:sp>
+        <p:nvSpPr>
+          <p:cNvPr id="10" name="TextBox 9"/>
           <p:cNvSpPr txBox="1"/>
           <p:nvPr/>
         </p:nvSpPr>
         <p:spPr>
           <a:xfrm>
-            <a:off x="822960" y="2606040"/>
-            <a:ext cx="10515600" cy="2743200"/>
+            <a:off x="1097280" y="3611880"/>
+            <a:ext cx="4754880" cy="1280160"/>
           </a:xfrm>
           <a:prstGeom prst="rect">
             <a:avLst/>
@@ -11062,119 +12279,254 @@
           </a:bodyPr>
           <a:lstStyle/>
           <a:p>
-            <a:pPr>
-              <a:spcAft>
-                <a:spcPts val="1200"/>
-              </a:spcAft>
-            </a:pPr>
-            <a:r>
-              <a:rPr sz="2000" b="1" i="0">
-                <a:solidFill>
-                  <a:srgbClr val="F4A24C"/>
-                </a:solidFill>
-                <a:latin typeface="Montserrat"/>
-              </a:rPr>
-              <a:t>✓  </a:t>
-            </a:r>
-            <a:r>
-              <a:rPr sz="1900" b="0" i="0">
-                <a:solidFill>
-                  <a:srgbClr val="FFFFFF"/>
-                </a:solidFill>
-                <a:latin typeface="Montserrat"/>
-              </a:rPr>
-              <a:t>Decides memoria o proyecto y sabes qué firmas tú</a:t>
-            </a:r>
-          </a:p>
-          <a:p>
-            <a:pPr>
-              <a:spcAft>
-                <a:spcPts val="1200"/>
-              </a:spcAft>
-            </a:pPr>
-            <a:r>
-              <a:rPr sz="2000" b="1" i="0">
-                <a:solidFill>
-                  <a:srgbClr val="F4A24C"/>
-                </a:solidFill>
-                <a:latin typeface="Montserrat"/>
-              </a:rPr>
-              <a:t>✓  </a:t>
-            </a:r>
-            <a:r>
-              <a:rPr sz="1900" b="0" i="0">
-                <a:solidFill>
-                  <a:srgbClr val="FFFFFF"/>
-                </a:solidFill>
-                <a:latin typeface="Montserrat"/>
-              </a:rPr>
-              <a:t>Entiendes el 85 % y por qué el líquido se dilata</a:t>
-            </a:r>
-          </a:p>
-          <a:p>
-            <a:pPr>
-              <a:spcAft>
-                <a:spcPts val="1200"/>
-              </a:spcAft>
-            </a:pPr>
-            <a:r>
-              <a:rPr sz="2000" b="1" i="0">
-                <a:solidFill>
-                  <a:srgbClr val="F4A24C"/>
-                </a:solidFill>
-                <a:latin typeface="Montserrat"/>
-              </a:rPr>
-              <a:t>✓  </a:t>
-            </a:r>
-            <a:r>
-              <a:rPr sz="1900" b="0" i="0">
-                <a:solidFill>
-                  <a:srgbClr val="FFFFFF"/>
-                </a:solidFill>
-                <a:latin typeface="Montserrat"/>
-              </a:rPr>
-              <a:t>Controlas corrosión, revisiones y prueba de los 15 años</a:t>
-            </a:r>
-          </a:p>
-          <a:p>
-            <a:pPr>
-              <a:spcAft>
-                <a:spcPts val="1200"/>
-              </a:spcAft>
-            </a:pPr>
-            <a:r>
-              <a:rPr sz="2000" b="1" i="0">
-                <a:solidFill>
-                  <a:srgbClr val="F4A24C"/>
-                </a:solidFill>
-                <a:latin typeface="Montserrat"/>
-              </a:rPr>
-              <a:t>✓  </a:t>
-            </a:r>
-            <a:r>
-              <a:rPr sz="1900" b="0" i="0">
-                <a:solidFill>
-                  <a:srgbClr val="FFFFFF"/>
-                </a:solidFill>
-                <a:latin typeface="Montserrat"/>
-              </a:rPr>
-              <a:t>Retiras el depósito sin dejar una bomba dentro</a:t>
-            </a:r>
-          </a:p>
-        </p:txBody>
-      </p:sp>
-      <p:sp>
-        <p:nvSpPr>
-          <p:cNvPr id="7" name="Rounded Rectangle 6"/>
+            <a:pPr algn="ctr"/>
+            <a:r>
+              <a:rPr sz="1400" b="1" i="0">
+                <a:solidFill>
+                  <a:srgbClr val="64748B"/>
+                </a:solidFill>
+                <a:latin typeface="Montserrat"/>
+              </a:rPr>
+              <a:t>IMAGEN</a:t>
+            </a:r>
+          </a:p>
+          <a:p>
+            <a:pPr algn="ctr"/>
+            <a:r>
+              <a:rPr sz="1100" b="0" i="1">
+                <a:solidFill>
+                  <a:srgbClr val="64748B"/>
+                </a:solidFill>
+                <a:latin typeface="Montserrat"/>
+              </a:rPr>
+              <a:t>pressure gauge industrial tank test</a:t>
+            </a:r>
+          </a:p>
+        </p:txBody>
+      </p:sp>
+    </p:spTree>
+  </p:cSld>
+  <p:clrMapOvr>
+    <a:masterClrMapping/>
+  </p:clrMapOvr>
+  <mc:AlternateContent xmlns:mc="http://schemas.openxmlformats.org/markup-compatibility/2006">
+    <mc:Choice xmlns:p14="http://schemas.microsoft.com/office/powerpoint/2010/main" Requires="p14">
+      <p:transition spd="med" p14:dur="700">
+        <p14:cube dir="l"/>
+      </p:transition>
+    </mc:Choice>
+    <mc:Fallback>
+      <p:transition spd="med">
+        <p:push dir="l"/>
+      </p:transition>
+    </mc:Fallback>
+  </mc:AlternateContent>
+</p:sld>
+</file>
+
+<file path=ppt/slides/slide22.xml><?xml version="1.0" encoding="utf-8"?>
+<p:sld xmlns:a="http://schemas.openxmlformats.org/drawingml/2006/main" xmlns:p="http://schemas.openxmlformats.org/presentationml/2006/main" xmlns:r="http://schemas.openxmlformats.org/officeDocument/2006/relationships">
+  <p:cSld>
+    <p:spTree>
+      <p:nvGrpSpPr>
+        <p:cNvPr id="1" name=""/>
+        <p:cNvGrpSpPr/>
+        <p:nvPr/>
+      </p:nvGrpSpPr>
+      <p:grpSpPr/>
+      <p:sp>
+        <p:nvSpPr>
+          <p:cNvPr id="2" name="Rectangle 1"/>
           <p:cNvSpPr/>
           <p:nvPr/>
         </p:nvSpPr>
         <p:spPr>
           <a:xfrm>
-            <a:off x="822960" y="5532120"/>
+            <a:off x="0" y="0"/>
+            <a:ext cx="12191695" cy="6858000"/>
+          </a:xfrm>
+          <a:prstGeom prst="rect">
+            <a:avLst/>
+          </a:prstGeom>
+          <a:solidFill>
+            <a:srgbClr val="FFFFFF"/>
+          </a:solidFill>
+          <a:ln>
+            <a:noFill/>
+          </a:ln>
+          <a:effectLst/>
+        </p:spPr>
+        <p:style>
+          <a:lnRef idx="1">
+            <a:schemeClr val="accent1"/>
+          </a:lnRef>
+          <a:fillRef idx="3">
+            <a:schemeClr val="accent1"/>
+          </a:fillRef>
+          <a:effectRef idx="2">
+            <a:schemeClr val="accent1"/>
+          </a:effectRef>
+          <a:fontRef idx="minor">
+            <a:schemeClr val="lt1"/>
+          </a:fontRef>
+        </p:style>
+        <p:txBody>
+          <a:bodyPr rtlCol="0" anchor="ctr"/>
+          <a:lstStyle/>
+          <a:p>
+            <a:pPr algn="ctr"/>
+          </a:p>
+        </p:txBody>
+      </p:sp>
+      <p:sp>
+        <p:nvSpPr>
+          <p:cNvPr id="3" name="TextBox 2"/>
+          <p:cNvSpPr txBox="1"/>
+          <p:nvPr/>
+        </p:nvSpPr>
+        <p:spPr>
+          <a:xfrm>
+            <a:off x="10607040" y="320040"/>
+            <a:ext cx="1371600" cy="365760"/>
+          </a:xfrm>
+          <a:prstGeom prst="rect">
+            <a:avLst/>
+          </a:prstGeom>
+          <a:noFill/>
+        </p:spPr>
+        <p:txBody>
+          <a:bodyPr wrap="square">
+            <a:spAutoFit/>
+          </a:bodyPr>
+          <a:lstStyle/>
+          <a:p>
+            <a:pPr algn="r"/>
+            <a:r>
+              <a:rPr sz="1000" b="1" i="0">
+                <a:solidFill>
+                  <a:srgbClr val="64748B"/>
+                </a:solidFill>
+                <a:latin typeface="Montserrat"/>
+              </a:rPr>
+              <a:t>022 / 026</a:t>
+            </a:r>
+          </a:p>
+        </p:txBody>
+      </p:sp>
+      <p:sp>
+        <p:nvSpPr>
+          <p:cNvPr id="4" name="TextBox 3"/>
+          <p:cNvSpPr txBox="1"/>
+          <p:nvPr/>
+        </p:nvSpPr>
+        <p:spPr>
+          <a:xfrm>
+            <a:off x="457200" y="6419088"/>
+            <a:ext cx="8229600" cy="365760"/>
+          </a:xfrm>
+          <a:prstGeom prst="rect">
+            <a:avLst/>
+          </a:prstGeom>
+          <a:noFill/>
+        </p:spPr>
+        <p:txBody>
+          <a:bodyPr wrap="square">
+            <a:spAutoFit/>
+          </a:bodyPr>
+          <a:lstStyle/>
+          <a:p>
+            <a:r>
+              <a:rPr sz="900" b="0" i="0">
+                <a:solidFill>
+                  <a:srgbClr val="64748B"/>
+                </a:solidFill>
+                <a:latin typeface="Montserrat"/>
+              </a:rPr>
+              <a:t>Curso Gas B · Tema 02 · Depósitos fijos de GLP (ITC-ICG 03)</a:t>
+            </a:r>
+          </a:p>
+        </p:txBody>
+      </p:sp>
+      <p:sp>
+        <p:nvSpPr>
+          <p:cNvPr id="5" name="TextBox 4"/>
+          <p:cNvSpPr txBox="1"/>
+          <p:nvPr/>
+        </p:nvSpPr>
+        <p:spPr>
+          <a:xfrm>
+            <a:off x="822960" y="411480"/>
+            <a:ext cx="10058400" cy="365760"/>
+          </a:xfrm>
+          <a:prstGeom prst="rect">
+            <a:avLst/>
+          </a:prstGeom>
+          <a:noFill/>
+        </p:spPr>
+        <p:txBody>
+          <a:bodyPr wrap="square">
+            <a:spAutoFit/>
+          </a:bodyPr>
+          <a:lstStyle/>
+          <a:p>
+            <a:r>
+              <a:rPr sz="1300" b="1" i="0">
+                <a:solidFill>
+                  <a:srgbClr val="E8801A"/>
+                </a:solidFill>
+                <a:latin typeface="Montserrat"/>
+              </a:rPr>
+              <a:t>APARTADO 6.3 · MUESTREO (CUADRO I)</a:t>
+            </a:r>
+          </a:p>
+        </p:txBody>
+      </p:sp>
+      <p:sp>
+        <p:nvSpPr>
+          <p:cNvPr id="6" name="TextBox 5"/>
+          <p:cNvSpPr txBox="1"/>
+          <p:nvPr/>
+        </p:nvSpPr>
+        <p:spPr>
+          <a:xfrm>
+            <a:off x="822960" y="777240"/>
             <a:ext cx="10515600" cy="822960"/>
           </a:xfrm>
-          <a:prstGeom prst="roundRect">
+          <a:prstGeom prst="rect">
+            <a:avLst/>
+          </a:prstGeom>
+          <a:noFill/>
+        </p:spPr>
+        <p:txBody>
+          <a:bodyPr wrap="square">
+            <a:spAutoFit/>
+          </a:bodyPr>
+          <a:lstStyle/>
+          <a:p>
+            <a:r>
+              <a:rPr sz="2600" b="1" i="0">
+                <a:solidFill>
+                  <a:srgbClr val="1E2761"/>
+                </a:solidFill>
+                <a:latin typeface="Montserrat"/>
+              </a:rPr>
+              <a:t>Muestra para la primera prueba hidráulica (superficie)</a:t>
+            </a:r>
+          </a:p>
+        </p:txBody>
+      </p:sp>
+      <p:sp>
+        <p:nvSpPr>
+          <p:cNvPr id="7" name="Rectangle 6"/>
+          <p:cNvSpPr/>
+          <p:nvPr/>
+        </p:nvSpPr>
+        <p:spPr>
+          <a:xfrm>
+            <a:off x="868680" y="1481328"/>
+            <a:ext cx="2011680" cy="73152"/>
+          </a:xfrm>
+          <a:prstGeom prst="rect">
             <a:avLst/>
           </a:prstGeom>
           <a:solidFill>
@@ -11207,16 +12559,633 @@
           </a:p>
         </p:txBody>
       </p:sp>
-      <p:sp>
-        <p:nvSpPr>
-          <p:cNvPr id="8" name="TextBox 7"/>
+      <p:graphicFrame>
+        <p:nvGraphicFramePr>
+          <p:cNvPr id="8" name="Table 7"/>
+          <p:cNvGraphicFramePr>
+            <a:graphicFrameLocks noGrp="1"/>
+          </p:cNvGraphicFramePr>
+          <p:nvPr/>
+        </p:nvGraphicFramePr>
+        <p:xfrm>
+          <a:off x="548640" y="1783080"/>
+          <a:ext cx="11091672" cy="4023360"/>
+        </p:xfrm>
+        <a:graphic>
+          <a:graphicData uri="http://schemas.openxmlformats.org/drawingml/2006/table">
+            <a:tbl>
+              <a:tblPr firstRow="1" bandRow="1">
+                <a:tableStyleId>{5C22544A-7EE6-4342-B048-85BDC9FD1C3A}</a:tableStyleId>
+              </a:tblPr>
+              <a:tblGrid>
+                <a:gridCol w="3697224"/>
+                <a:gridCol w="3697224"/>
+                <a:gridCol w="3697224"/>
+              </a:tblGrid>
+              <a:tr h="502920">
+                <a:tc>
+                  <a:txBody>
+                    <a:bodyPr/>
+                    <a:lstStyle/>
+                    <a:p>
+                      <a:r>
+                        <a:rPr sz="1200" b="1" i="0">
+                          <a:solidFill>
+                            <a:srgbClr val="FFFFFF"/>
+                          </a:solidFill>
+                          <a:latin typeface="Montserrat"/>
+                        </a:rPr>
+                        <a:t>Tramos por lote (de – a)</a:t>
+                      </a:r>
+                    </a:p>
+                  </a:txBody>
+                  <a:tcPr>
+                    <a:solidFill>
+                      <a:srgbClr val="1E2761"/>
+                    </a:solidFill>
+                  </a:tcPr>
+                </a:tc>
+                <a:tc>
+                  <a:txBody>
+                    <a:bodyPr/>
+                    <a:lstStyle/>
+                    <a:p>
+                      <a:r>
+                        <a:rPr sz="1200" b="1" i="0">
+                          <a:solidFill>
+                            <a:srgbClr val="FFFFFF"/>
+                          </a:solidFill>
+                          <a:latin typeface="Montserrat"/>
+                        </a:rPr>
+                        <a:t>Muestra normal (%)</a:t>
+                      </a:r>
+                    </a:p>
+                  </a:txBody>
+                  <a:tcPr>
+                    <a:solidFill>
+                      <a:srgbClr val="1E2761"/>
+                    </a:solidFill>
+                  </a:tcPr>
+                </a:tc>
+                <a:tc>
+                  <a:txBody>
+                    <a:bodyPr/>
+                    <a:lstStyle/>
+                    <a:p>
+                      <a:r>
+                        <a:rPr sz="1200" b="1" i="0">
+                          <a:solidFill>
+                            <a:srgbClr val="FFFFFF"/>
+                          </a:solidFill>
+                          <a:latin typeface="Montserrat"/>
+                        </a:rPr>
+                        <a:t>Muestra reducida (%)</a:t>
+                      </a:r>
+                    </a:p>
+                  </a:txBody>
+                  <a:tcPr>
+                    <a:solidFill>
+                      <a:srgbClr val="1E2761"/>
+                    </a:solidFill>
+                  </a:tcPr>
+                </a:tc>
+              </a:tr>
+              <a:tr h="502920">
+                <a:tc>
+                  <a:txBody>
+                    <a:bodyPr/>
+                    <a:lstStyle/>
+                    <a:p>
+                      <a:r>
+                        <a:rPr sz="1200" b="0" i="0">
+                          <a:solidFill>
+                            <a:srgbClr val="1B2330"/>
+                          </a:solidFill>
+                          <a:latin typeface="Montserrat"/>
+                        </a:rPr>
+                        <a:t>10 – 100</a:t>
+                      </a:r>
+                    </a:p>
+                  </a:txBody>
+                  <a:tcPr>
+                    <a:solidFill>
+                      <a:srgbClr val="F6F8FC"/>
+                    </a:solidFill>
+                  </a:tcPr>
+                </a:tc>
+                <a:tc>
+                  <a:txBody>
+                    <a:bodyPr/>
+                    <a:lstStyle/>
+                    <a:p>
+                      <a:r>
+                        <a:rPr sz="1200" b="0" i="0">
+                          <a:solidFill>
+                            <a:srgbClr val="1B2330"/>
+                          </a:solidFill>
+                          <a:latin typeface="Montserrat"/>
+                        </a:rPr>
+                        <a:t>24</a:t>
+                      </a:r>
+                    </a:p>
+                  </a:txBody>
+                  <a:tcPr>
+                    <a:solidFill>
+                      <a:srgbClr val="F6F8FC"/>
+                    </a:solidFill>
+                  </a:tcPr>
+                </a:tc>
+                <a:tc>
+                  <a:txBody>
+                    <a:bodyPr/>
+                    <a:lstStyle/>
+                    <a:p>
+                      <a:r>
+                        <a:rPr sz="1200" b="0" i="0">
+                          <a:solidFill>
+                            <a:srgbClr val="1B2330"/>
+                          </a:solidFill>
+                          <a:latin typeface="Montserrat"/>
+                        </a:rPr>
+                        <a:t>12</a:t>
+                      </a:r>
+                    </a:p>
+                  </a:txBody>
+                  <a:tcPr>
+                    <a:solidFill>
+                      <a:srgbClr val="F6F8FC"/>
+                    </a:solidFill>
+                  </a:tcPr>
+                </a:tc>
+              </a:tr>
+              <a:tr h="502920">
+                <a:tc>
+                  <a:txBody>
+                    <a:bodyPr/>
+                    <a:lstStyle/>
+                    <a:p>
+                      <a:r>
+                        <a:rPr sz="1200" b="0" i="0">
+                          <a:solidFill>
+                            <a:srgbClr val="1B2330"/>
+                          </a:solidFill>
+                          <a:latin typeface="Montserrat"/>
+                        </a:rPr>
+                        <a:t>101 – 200</a:t>
+                      </a:r>
+                    </a:p>
+                  </a:txBody>
+                  <a:tcPr>
+                    <a:solidFill>
+                      <a:srgbClr val="FFFFFF"/>
+                    </a:solidFill>
+                  </a:tcPr>
+                </a:tc>
+                <a:tc>
+                  <a:txBody>
+                    <a:bodyPr/>
+                    <a:lstStyle/>
+                    <a:p>
+                      <a:r>
+                        <a:rPr sz="1200" b="0" i="0">
+                          <a:solidFill>
+                            <a:srgbClr val="1B2330"/>
+                          </a:solidFill>
+                          <a:latin typeface="Montserrat"/>
+                        </a:rPr>
+                        <a:t>20</a:t>
+                      </a:r>
+                    </a:p>
+                  </a:txBody>
+                  <a:tcPr>
+                    <a:solidFill>
+                      <a:srgbClr val="FFFFFF"/>
+                    </a:solidFill>
+                  </a:tcPr>
+                </a:tc>
+                <a:tc>
+                  <a:txBody>
+                    <a:bodyPr/>
+                    <a:lstStyle/>
+                    <a:p>
+                      <a:r>
+                        <a:rPr sz="1200" b="0" i="0">
+                          <a:solidFill>
+                            <a:srgbClr val="1B2330"/>
+                          </a:solidFill>
+                          <a:latin typeface="Montserrat"/>
+                        </a:rPr>
+                        <a:t>10</a:t>
+                      </a:r>
+                    </a:p>
+                  </a:txBody>
+                  <a:tcPr>
+                    <a:solidFill>
+                      <a:srgbClr val="FFFFFF"/>
+                    </a:solidFill>
+                  </a:tcPr>
+                </a:tc>
+              </a:tr>
+              <a:tr h="502920">
+                <a:tc>
+                  <a:txBody>
+                    <a:bodyPr/>
+                    <a:lstStyle/>
+                    <a:p>
+                      <a:r>
+                        <a:rPr sz="1200" b="0" i="0">
+                          <a:solidFill>
+                            <a:srgbClr val="1B2330"/>
+                          </a:solidFill>
+                          <a:latin typeface="Montserrat"/>
+                        </a:rPr>
+                        <a:t>201 – 400</a:t>
+                      </a:r>
+                    </a:p>
+                  </a:txBody>
+                  <a:tcPr>
+                    <a:solidFill>
+                      <a:srgbClr val="F6F8FC"/>
+                    </a:solidFill>
+                  </a:tcPr>
+                </a:tc>
+                <a:tc>
+                  <a:txBody>
+                    <a:bodyPr/>
+                    <a:lstStyle/>
+                    <a:p>
+                      <a:r>
+                        <a:rPr sz="1200" b="0" i="0">
+                          <a:solidFill>
+                            <a:srgbClr val="1B2330"/>
+                          </a:solidFill>
+                          <a:latin typeface="Montserrat"/>
+                        </a:rPr>
+                        <a:t>16</a:t>
+                      </a:r>
+                    </a:p>
+                  </a:txBody>
+                  <a:tcPr>
+                    <a:solidFill>
+                      <a:srgbClr val="F6F8FC"/>
+                    </a:solidFill>
+                  </a:tcPr>
+                </a:tc>
+                <a:tc>
+                  <a:txBody>
+                    <a:bodyPr/>
+                    <a:lstStyle/>
+                    <a:p>
+                      <a:r>
+                        <a:rPr sz="1200" b="0" i="0">
+                          <a:solidFill>
+                            <a:srgbClr val="1B2330"/>
+                          </a:solidFill>
+                          <a:latin typeface="Montserrat"/>
+                        </a:rPr>
+                        <a:t>8</a:t>
+                      </a:r>
+                    </a:p>
+                  </a:txBody>
+                  <a:tcPr>
+                    <a:solidFill>
+                      <a:srgbClr val="F6F8FC"/>
+                    </a:solidFill>
+                  </a:tcPr>
+                </a:tc>
+              </a:tr>
+              <a:tr h="502920">
+                <a:tc>
+                  <a:txBody>
+                    <a:bodyPr/>
+                    <a:lstStyle/>
+                    <a:p>
+                      <a:r>
+                        <a:rPr sz="1200" b="0" i="0">
+                          <a:solidFill>
+                            <a:srgbClr val="1B2330"/>
+                          </a:solidFill>
+                          <a:latin typeface="Montserrat"/>
+                        </a:rPr>
+                        <a:t>401 – 800</a:t>
+                      </a:r>
+                    </a:p>
+                  </a:txBody>
+                  <a:tcPr>
+                    <a:solidFill>
+                      <a:srgbClr val="FFFFFF"/>
+                    </a:solidFill>
+                  </a:tcPr>
+                </a:tc>
+                <a:tc>
+                  <a:txBody>
+                    <a:bodyPr/>
+                    <a:lstStyle/>
+                    <a:p>
+                      <a:r>
+                        <a:rPr sz="1200" b="0" i="0">
+                          <a:solidFill>
+                            <a:srgbClr val="1B2330"/>
+                          </a:solidFill>
+                          <a:latin typeface="Montserrat"/>
+                        </a:rPr>
+                        <a:t>12</a:t>
+                      </a:r>
+                    </a:p>
+                  </a:txBody>
+                  <a:tcPr>
+                    <a:solidFill>
+                      <a:srgbClr val="FFFFFF"/>
+                    </a:solidFill>
+                  </a:tcPr>
+                </a:tc>
+                <a:tc>
+                  <a:txBody>
+                    <a:bodyPr/>
+                    <a:lstStyle/>
+                    <a:p>
+                      <a:r>
+                        <a:rPr sz="1200" b="0" i="0">
+                          <a:solidFill>
+                            <a:srgbClr val="1B2330"/>
+                          </a:solidFill>
+                          <a:latin typeface="Montserrat"/>
+                        </a:rPr>
+                        <a:t>6</a:t>
+                      </a:r>
+                    </a:p>
+                  </a:txBody>
+                  <a:tcPr>
+                    <a:solidFill>
+                      <a:srgbClr val="FFFFFF"/>
+                    </a:solidFill>
+                  </a:tcPr>
+                </a:tc>
+              </a:tr>
+              <a:tr h="502920">
+                <a:tc>
+                  <a:txBody>
+                    <a:bodyPr/>
+                    <a:lstStyle/>
+                    <a:p>
+                      <a:r>
+                        <a:rPr sz="1200" b="0" i="0">
+                          <a:solidFill>
+                            <a:srgbClr val="1B2330"/>
+                          </a:solidFill>
+                          <a:latin typeface="Montserrat"/>
+                        </a:rPr>
+                        <a:t>801 – 1.600</a:t>
+                      </a:r>
+                    </a:p>
+                  </a:txBody>
+                  <a:tcPr>
+                    <a:solidFill>
+                      <a:srgbClr val="F6F8FC"/>
+                    </a:solidFill>
+                  </a:tcPr>
+                </a:tc>
+                <a:tc>
+                  <a:txBody>
+                    <a:bodyPr/>
+                    <a:lstStyle/>
+                    <a:p>
+                      <a:r>
+                        <a:rPr sz="1200" b="0" i="0">
+                          <a:solidFill>
+                            <a:srgbClr val="1B2330"/>
+                          </a:solidFill>
+                          <a:latin typeface="Montserrat"/>
+                        </a:rPr>
+                        <a:t>8</a:t>
+                      </a:r>
+                    </a:p>
+                  </a:txBody>
+                  <a:tcPr>
+                    <a:solidFill>
+                      <a:srgbClr val="F6F8FC"/>
+                    </a:solidFill>
+                  </a:tcPr>
+                </a:tc>
+                <a:tc>
+                  <a:txBody>
+                    <a:bodyPr/>
+                    <a:lstStyle/>
+                    <a:p>
+                      <a:r>
+                        <a:rPr sz="1200" b="0" i="0">
+                          <a:solidFill>
+                            <a:srgbClr val="1B2330"/>
+                          </a:solidFill>
+                          <a:latin typeface="Montserrat"/>
+                        </a:rPr>
+                        <a:t>4</a:t>
+                      </a:r>
+                    </a:p>
+                  </a:txBody>
+                  <a:tcPr>
+                    <a:solidFill>
+                      <a:srgbClr val="F6F8FC"/>
+                    </a:solidFill>
+                  </a:tcPr>
+                </a:tc>
+              </a:tr>
+              <a:tr h="502920">
+                <a:tc>
+                  <a:txBody>
+                    <a:bodyPr/>
+                    <a:lstStyle/>
+                    <a:p>
+                      <a:r>
+                        <a:rPr sz="1200" b="0" i="0">
+                          <a:solidFill>
+                            <a:srgbClr val="1B2330"/>
+                          </a:solidFill>
+                          <a:latin typeface="Montserrat"/>
+                        </a:rPr>
+                        <a:t>1.601 – 3.200</a:t>
+                      </a:r>
+                    </a:p>
+                  </a:txBody>
+                  <a:tcPr>
+                    <a:solidFill>
+                      <a:srgbClr val="FFFFFF"/>
+                    </a:solidFill>
+                  </a:tcPr>
+                </a:tc>
+                <a:tc>
+                  <a:txBody>
+                    <a:bodyPr/>
+                    <a:lstStyle/>
+                    <a:p>
+                      <a:r>
+                        <a:rPr sz="1200" b="0" i="0">
+                          <a:solidFill>
+                            <a:srgbClr val="1B2330"/>
+                          </a:solidFill>
+                          <a:latin typeface="Montserrat"/>
+                        </a:rPr>
+                        <a:t>4</a:t>
+                      </a:r>
+                    </a:p>
+                  </a:txBody>
+                  <a:tcPr>
+                    <a:solidFill>
+                      <a:srgbClr val="FFFFFF"/>
+                    </a:solidFill>
+                  </a:tcPr>
+                </a:tc>
+                <a:tc>
+                  <a:txBody>
+                    <a:bodyPr/>
+                    <a:lstStyle/>
+                    <a:p>
+                      <a:r>
+                        <a:rPr sz="1200" b="0" i="0">
+                          <a:solidFill>
+                            <a:srgbClr val="1B2330"/>
+                          </a:solidFill>
+                          <a:latin typeface="Montserrat"/>
+                        </a:rPr>
+                        <a:t>2</a:t>
+                      </a:r>
+                    </a:p>
+                  </a:txBody>
+                  <a:tcPr>
+                    <a:solidFill>
+                      <a:srgbClr val="FFFFFF"/>
+                    </a:solidFill>
+                  </a:tcPr>
+                </a:tc>
+              </a:tr>
+              <a:tr h="502920">
+                <a:tc>
+                  <a:txBody>
+                    <a:bodyPr/>
+                    <a:lstStyle/>
+                    <a:p>
+                      <a:r>
+                        <a:rPr sz="1200" b="0" i="0">
+                          <a:solidFill>
+                            <a:srgbClr val="1B2330"/>
+                          </a:solidFill>
+                          <a:latin typeface="Montserrat"/>
+                        </a:rPr>
+                        <a:t>Ilimitado</a:t>
+                      </a:r>
+                    </a:p>
+                  </a:txBody>
+                  <a:tcPr>
+                    <a:solidFill>
+                      <a:srgbClr val="F6F8FC"/>
+                    </a:solidFill>
+                  </a:tcPr>
+                </a:tc>
+                <a:tc>
+                  <a:txBody>
+                    <a:bodyPr/>
+                    <a:lstStyle/>
+                    <a:p>
+                      <a:r>
+                        <a:rPr sz="1200" b="0" i="0">
+                          <a:solidFill>
+                            <a:srgbClr val="1B2330"/>
+                          </a:solidFill>
+                          <a:latin typeface="Montserrat"/>
+                        </a:rPr>
+                        <a:t>2</a:t>
+                      </a:r>
+                    </a:p>
+                  </a:txBody>
+                  <a:tcPr>
+                    <a:solidFill>
+                      <a:srgbClr val="F6F8FC"/>
+                    </a:solidFill>
+                  </a:tcPr>
+                </a:tc>
+                <a:tc>
+                  <a:txBody>
+                    <a:bodyPr/>
+                    <a:lstStyle/>
+                    <a:p>
+                      <a:r>
+                        <a:rPr sz="1200" b="0" i="0">
+                          <a:solidFill>
+                            <a:srgbClr val="1B2330"/>
+                          </a:solidFill>
+                          <a:latin typeface="Montserrat"/>
+                        </a:rPr>
+                        <a:t>1</a:t>
+                      </a:r>
+                    </a:p>
+                  </a:txBody>
+                  <a:tcPr>
+                    <a:solidFill>
+                      <a:srgbClr val="F6F8FC"/>
+                    </a:solidFill>
+                  </a:tcPr>
+                </a:tc>
+              </a:tr>
+            </a:tbl>
+          </a:graphicData>
+        </a:graphic>
+      </p:graphicFrame>
+      <p:sp>
+        <p:nvSpPr>
+          <p:cNvPr id="9" name="Rounded Rectangle 8"/>
+          <p:cNvSpPr/>
+          <p:nvPr/>
+        </p:nvSpPr>
+        <p:spPr>
+          <a:xfrm>
+            <a:off x="548640" y="5943600"/>
+            <a:ext cx="11091672" cy="384048"/>
+          </a:xfrm>
+          <a:prstGeom prst="roundRect">
+            <a:avLst/>
+          </a:prstGeom>
+          <a:solidFill>
+            <a:srgbClr val="F3F6FB"/>
+          </a:solidFill>
+          <a:ln w="12700">
+            <a:solidFill>
+              <a:srgbClr val="D7DEEA"/>
+            </a:solidFill>
+          </a:ln>
+          <a:effectLst/>
+        </p:spPr>
+        <p:style>
+          <a:lnRef idx="1">
+            <a:schemeClr val="accent1"/>
+          </a:lnRef>
+          <a:fillRef idx="3">
+            <a:schemeClr val="accent1"/>
+          </a:fillRef>
+          <a:effectRef idx="2">
+            <a:schemeClr val="accent1"/>
+          </a:effectRef>
+          <a:fontRef idx="minor">
+            <a:schemeClr val="lt1"/>
+          </a:fontRef>
+        </p:style>
+        <p:txBody>
+          <a:bodyPr rtlCol="0" anchor="ctr"/>
+          <a:lstStyle/>
+          <a:p>
+            <a:pPr algn="ctr"/>
+          </a:p>
+        </p:txBody>
+      </p:sp>
+      <p:sp>
+        <p:nvSpPr>
+          <p:cNvPr id="10" name="TextBox 9"/>
           <p:cNvSpPr txBox="1"/>
           <p:nvPr/>
         </p:nvSpPr>
         <p:spPr>
           <a:xfrm>
-            <a:off x="1051560" y="5623560"/>
-            <a:ext cx="10058400" cy="640080"/>
+            <a:off x="731520" y="5961888"/>
+            <a:ext cx="10789920" cy="365760"/>
           </a:xfrm>
           <a:prstGeom prst="rect">
             <a:avLst/>
@@ -11230,13 +13199,22 @@
           <a:lstStyle/>
           <a:p>
             <a:r>
-              <a:rPr sz="1500" b="1" i="1">
-                <a:solidFill>
-                  <a:srgbClr val="1E2761"/>
-                </a:solidFill>
-                <a:latin typeface="Montserrat"/>
-              </a:rPr>
-              <a:t>Hoy ya eres más gasista que ayer. En el último vídeo damos el salto al frío: el GNL.</a:t>
+              <a:rPr sz="1100" b="1" i="0">
+                <a:solidFill>
+                  <a:srgbClr val="E8801A"/>
+                </a:solidFill>
+                <a:latin typeface="Montserrat"/>
+              </a:rPr>
+              <a:t>Qué significa:  </a:t>
+            </a:r>
+            <a:r>
+              <a:rPr sz="1100" b="0" i="0">
+                <a:solidFill>
+                  <a:srgbClr val="1B2330"/>
+                </a:solidFill>
+                <a:latin typeface="Montserrat"/>
+              </a:rPr>
+              <a:t>El porcentaje se redondea a la unidad superior y nunca baja de 8 depósitos.</a:t>
             </a:r>
           </a:p>
         </p:txBody>
@@ -11246,6 +13224,1843 @@
   <p:clrMapOvr>
     <a:masterClrMapping/>
   </p:clrMapOvr>
+  <mc:AlternateContent xmlns:mc="http://schemas.openxmlformats.org/markup-compatibility/2006">
+    <mc:Choice xmlns:p14="http://schemas.microsoft.com/office/powerpoint/2010/main" Requires="p14">
+      <p:transition spd="med" p14:dur="700">
+        <p14:cube dir="r"/>
+      </p:transition>
+    </mc:Choice>
+    <mc:Fallback>
+      <p:transition spd="med">
+        <p:push dir="r"/>
+      </p:transition>
+    </mc:Fallback>
+  </mc:AlternateContent>
+</p:sld>
+</file>
+
+<file path=ppt/slides/slide23.xml><?xml version="1.0" encoding="utf-8"?>
+<p:sld xmlns:a="http://schemas.openxmlformats.org/drawingml/2006/main" xmlns:p="http://schemas.openxmlformats.org/presentationml/2006/main" xmlns:r="http://schemas.openxmlformats.org/officeDocument/2006/relationships">
+  <p:cSld>
+    <p:spTree>
+      <p:nvGrpSpPr>
+        <p:cNvPr id="1" name=""/>
+        <p:cNvGrpSpPr/>
+        <p:nvPr/>
+      </p:nvGrpSpPr>
+      <p:grpSpPr/>
+      <p:sp>
+        <p:nvSpPr>
+          <p:cNvPr id="2" name="Rectangle 1"/>
+          <p:cNvSpPr/>
+          <p:nvPr/>
+        </p:nvSpPr>
+        <p:spPr>
+          <a:xfrm>
+            <a:off x="0" y="0"/>
+            <a:ext cx="12191695" cy="6858000"/>
+          </a:xfrm>
+          <a:prstGeom prst="rect">
+            <a:avLst/>
+          </a:prstGeom>
+          <a:solidFill>
+            <a:srgbClr val="FFFFFF"/>
+          </a:solidFill>
+          <a:ln>
+            <a:noFill/>
+          </a:ln>
+          <a:effectLst/>
+        </p:spPr>
+        <p:style>
+          <a:lnRef idx="1">
+            <a:schemeClr val="accent1"/>
+          </a:lnRef>
+          <a:fillRef idx="3">
+            <a:schemeClr val="accent1"/>
+          </a:fillRef>
+          <a:effectRef idx="2">
+            <a:schemeClr val="accent1"/>
+          </a:effectRef>
+          <a:fontRef idx="minor">
+            <a:schemeClr val="lt1"/>
+          </a:fontRef>
+        </p:style>
+        <p:txBody>
+          <a:bodyPr rtlCol="0" anchor="ctr"/>
+          <a:lstStyle/>
+          <a:p>
+            <a:pPr algn="ctr"/>
+          </a:p>
+        </p:txBody>
+      </p:sp>
+      <p:sp>
+        <p:nvSpPr>
+          <p:cNvPr id="3" name="TextBox 2"/>
+          <p:cNvSpPr txBox="1"/>
+          <p:nvPr/>
+        </p:nvSpPr>
+        <p:spPr>
+          <a:xfrm>
+            <a:off x="10607040" y="320040"/>
+            <a:ext cx="1371600" cy="365760"/>
+          </a:xfrm>
+          <a:prstGeom prst="rect">
+            <a:avLst/>
+          </a:prstGeom>
+          <a:noFill/>
+        </p:spPr>
+        <p:txBody>
+          <a:bodyPr wrap="square">
+            <a:spAutoFit/>
+          </a:bodyPr>
+          <a:lstStyle/>
+          <a:p>
+            <a:pPr algn="r"/>
+            <a:r>
+              <a:rPr sz="1000" b="1" i="0">
+                <a:solidFill>
+                  <a:srgbClr val="64748B"/>
+                </a:solidFill>
+                <a:latin typeface="Montserrat"/>
+              </a:rPr>
+              <a:t>023 / 026</a:t>
+            </a:r>
+          </a:p>
+        </p:txBody>
+      </p:sp>
+      <p:sp>
+        <p:nvSpPr>
+          <p:cNvPr id="4" name="TextBox 3"/>
+          <p:cNvSpPr txBox="1"/>
+          <p:nvPr/>
+        </p:nvSpPr>
+        <p:spPr>
+          <a:xfrm>
+            <a:off x="457200" y="6419088"/>
+            <a:ext cx="8229600" cy="365760"/>
+          </a:xfrm>
+          <a:prstGeom prst="rect">
+            <a:avLst/>
+          </a:prstGeom>
+          <a:noFill/>
+        </p:spPr>
+        <p:txBody>
+          <a:bodyPr wrap="square">
+            <a:spAutoFit/>
+          </a:bodyPr>
+          <a:lstStyle/>
+          <a:p>
+            <a:r>
+              <a:rPr sz="900" b="0" i="0">
+                <a:solidFill>
+                  <a:srgbClr val="64748B"/>
+                </a:solidFill>
+                <a:latin typeface="Montserrat"/>
+              </a:rPr>
+              <a:t>Curso Gas B · Tema 02 · Depósitos fijos de GLP (ITC-ICG 03)</a:t>
+            </a:r>
+          </a:p>
+        </p:txBody>
+      </p:sp>
+      <p:sp>
+        <p:nvSpPr>
+          <p:cNvPr id="5" name="TextBox 4"/>
+          <p:cNvSpPr txBox="1"/>
+          <p:nvPr/>
+        </p:nvSpPr>
+        <p:spPr>
+          <a:xfrm>
+            <a:off x="822960" y="457200"/>
+            <a:ext cx="10058400" cy="365760"/>
+          </a:xfrm>
+          <a:prstGeom prst="rect">
+            <a:avLst/>
+          </a:prstGeom>
+          <a:noFill/>
+        </p:spPr>
+        <p:txBody>
+          <a:bodyPr wrap="square">
+            <a:spAutoFit/>
+          </a:bodyPr>
+          <a:lstStyle/>
+          <a:p>
+            <a:r>
+              <a:rPr sz="1300" b="1" i="0">
+                <a:solidFill>
+                  <a:srgbClr val="E8801A"/>
+                </a:solidFill>
+                <a:latin typeface="Montserrat"/>
+              </a:rPr>
+              <a:t>APARTADOS 6.5 Y 6.6 · CASOS</a:t>
+            </a:r>
+          </a:p>
+        </p:txBody>
+      </p:sp>
+      <p:sp>
+        <p:nvSpPr>
+          <p:cNvPr id="6" name="TextBox 5"/>
+          <p:cNvSpPr txBox="1"/>
+          <p:nvPr/>
+        </p:nvSpPr>
+        <p:spPr>
+          <a:xfrm>
+            <a:off x="822960" y="868680"/>
+            <a:ext cx="10515600" cy="914400"/>
+          </a:xfrm>
+          <a:prstGeom prst="rect">
+            <a:avLst/>
+          </a:prstGeom>
+          <a:noFill/>
+        </p:spPr>
+        <p:txBody>
+          <a:bodyPr wrap="square">
+            <a:spAutoFit/>
+          </a:bodyPr>
+          <a:lstStyle/>
+          <a:p>
+            <a:r>
+              <a:rPr sz="2800" b="1" i="0">
+                <a:solidFill>
+                  <a:srgbClr val="1E2761"/>
+                </a:solidFill>
+                <a:latin typeface="Montserrat"/>
+              </a:rPr>
+              <a:t>Protección adicional y provisionales</a:t>
+            </a:r>
+          </a:p>
+        </p:txBody>
+      </p:sp>
+      <p:sp>
+        <p:nvSpPr>
+          <p:cNvPr id="7" name="Rectangle 6"/>
+          <p:cNvSpPr/>
+          <p:nvPr/>
+        </p:nvSpPr>
+        <p:spPr>
+          <a:xfrm>
+            <a:off x="868680" y="1627632"/>
+            <a:ext cx="2011680" cy="73152"/>
+          </a:xfrm>
+          <a:prstGeom prst="rect">
+            <a:avLst/>
+          </a:prstGeom>
+          <a:solidFill>
+            <a:srgbClr val="E8801A"/>
+          </a:solidFill>
+          <a:ln>
+            <a:noFill/>
+          </a:ln>
+          <a:effectLst/>
+        </p:spPr>
+        <p:style>
+          <a:lnRef idx="1">
+            <a:schemeClr val="accent1"/>
+          </a:lnRef>
+          <a:fillRef idx="3">
+            <a:schemeClr val="accent1"/>
+          </a:fillRef>
+          <a:effectRef idx="2">
+            <a:schemeClr val="accent1"/>
+          </a:effectRef>
+          <a:fontRef idx="minor">
+            <a:schemeClr val="lt1"/>
+          </a:fontRef>
+        </p:style>
+        <p:txBody>
+          <a:bodyPr rtlCol="0" anchor="ctr"/>
+          <a:lstStyle/>
+          <a:p>
+            <a:pPr algn="ctr"/>
+          </a:p>
+        </p:txBody>
+      </p:sp>
+      <p:sp>
+        <p:nvSpPr>
+          <p:cNvPr id="8" name="TextBox 7"/>
+          <p:cNvSpPr txBox="1"/>
+          <p:nvPr/>
+        </p:nvSpPr>
+        <p:spPr>
+          <a:xfrm>
+            <a:off x="822960" y="1965960"/>
+            <a:ext cx="5029200" cy="4206240"/>
+          </a:xfrm>
+          <a:prstGeom prst="rect">
+            <a:avLst/>
+          </a:prstGeom>
+          <a:noFill/>
+        </p:spPr>
+        <p:txBody>
+          <a:bodyPr wrap="square">
+            <a:spAutoFit/>
+          </a:bodyPr>
+          <a:lstStyle/>
+          <a:p>
+            <a:pPr>
+              <a:spcAft>
+                <a:spcPts val="1100"/>
+              </a:spcAft>
+            </a:pPr>
+            <a:r>
+              <a:rPr sz="1600" b="1" i="0">
+                <a:solidFill>
+                  <a:srgbClr val="E8801A"/>
+                </a:solidFill>
+                <a:latin typeface="Montserrat"/>
+              </a:rPr>
+              <a:t>▸  </a:t>
+            </a:r>
+            <a:r>
+              <a:rPr sz="1600" b="0" i="0">
+                <a:solidFill>
+                  <a:srgbClr val="1B2330"/>
+                </a:solidFill>
+                <a:latin typeface="Montserrat"/>
+              </a:rPr>
+              <a:t>Protección adicional: no hay que desenterrar</a:t>
+            </a:r>
+          </a:p>
+          <a:p>
+            <a:pPr>
+              <a:spcAft>
+                <a:spcPts val="1100"/>
+              </a:spcAft>
+            </a:pPr>
+            <a:r>
+              <a:rPr sz="1600" b="1" i="0">
+                <a:solidFill>
+                  <a:srgbClr val="E8801A"/>
+                </a:solidFill>
+                <a:latin typeface="Montserrat"/>
+              </a:rPr>
+              <a:t>▸  </a:t>
+            </a:r>
+            <a:r>
+              <a:rPr sz="1600" b="0" i="0">
+                <a:solidFill>
+                  <a:srgbClr val="1B2330"/>
+                </a:solidFill>
+                <a:latin typeface="Montserrat"/>
+              </a:rPr>
+              <a:t>Se libra si pasa las pruebas del fabricante</a:t>
+            </a:r>
+          </a:p>
+          <a:p>
+            <a:pPr>
+              <a:spcAft>
+                <a:spcPts val="1100"/>
+              </a:spcAft>
+            </a:pPr>
+            <a:r>
+              <a:rPr sz="1600" b="1" i="0">
+                <a:solidFill>
+                  <a:srgbClr val="E8801A"/>
+                </a:solidFill>
+                <a:latin typeface="Montserrat"/>
+              </a:rPr>
+              <a:t>▸  </a:t>
+            </a:r>
+            <a:r>
+              <a:rPr sz="1600" b="0" i="0">
+                <a:solidFill>
+                  <a:srgbClr val="1B2330"/>
+                </a:solidFill>
+                <a:latin typeface="Montserrat"/>
+              </a:rPr>
+              <a:t>Provisional: máximo 5 m³</a:t>
+            </a:r>
+          </a:p>
+          <a:p>
+            <a:pPr>
+              <a:spcAft>
+                <a:spcPts val="1100"/>
+              </a:spcAft>
+            </a:pPr>
+            <a:r>
+              <a:rPr sz="1600" b="1" i="0">
+                <a:solidFill>
+                  <a:srgbClr val="E8801A"/>
+                </a:solidFill>
+                <a:latin typeface="Montserrat"/>
+              </a:rPr>
+              <a:t>▸  </a:t>
+            </a:r>
+            <a:r>
+              <a:rPr sz="1600" b="0" i="0">
+                <a:solidFill>
+                  <a:srgbClr val="1B2330"/>
+                </a:solidFill>
+                <a:latin typeface="Montserrat"/>
+              </a:rPr>
+              <a:t>Provisional: hasta 60 días, prorrogable</a:t>
+            </a:r>
+          </a:p>
+        </p:txBody>
+      </p:sp>
+      <p:sp>
+        <p:nvSpPr>
+          <p:cNvPr id="9" name="imgph" descr="IMGQ:underground tank excavation site"/>
+          <p:cNvSpPr/>
+          <p:nvPr/>
+        </p:nvSpPr>
+        <p:spPr>
+          <a:xfrm>
+            <a:off x="6080760" y="1965960"/>
+            <a:ext cx="5303520" cy="4572000"/>
+          </a:xfrm>
+          <a:prstGeom prst="roundRect">
+            <a:avLst/>
+          </a:prstGeom>
+          <a:solidFill>
+            <a:srgbClr val="F3F6FB"/>
+          </a:solidFill>
+          <a:ln w="12700">
+            <a:solidFill>
+              <a:srgbClr val="C7D2E6"/>
+            </a:solidFill>
+          </a:ln>
+          <a:effectLst/>
+        </p:spPr>
+        <p:style>
+          <a:lnRef idx="1">
+            <a:schemeClr val="accent1"/>
+          </a:lnRef>
+          <a:fillRef idx="3">
+            <a:schemeClr val="accent1"/>
+          </a:fillRef>
+          <a:effectRef idx="2">
+            <a:schemeClr val="accent1"/>
+          </a:effectRef>
+          <a:fontRef idx="minor">
+            <a:schemeClr val="lt1"/>
+          </a:fontRef>
+        </p:style>
+        <p:txBody>
+          <a:bodyPr rtlCol="0" anchor="ctr"/>
+          <a:lstStyle/>
+          <a:p>
+            <a:pPr algn="ctr"/>
+          </a:p>
+        </p:txBody>
+      </p:sp>
+      <p:sp>
+        <p:nvSpPr>
+          <p:cNvPr id="10" name="TextBox 9"/>
+          <p:cNvSpPr txBox="1"/>
+          <p:nvPr/>
+        </p:nvSpPr>
+        <p:spPr>
+          <a:xfrm>
+            <a:off x="6355080" y="3611880"/>
+            <a:ext cx="4754880" cy="1280160"/>
+          </a:xfrm>
+          <a:prstGeom prst="rect">
+            <a:avLst/>
+          </a:prstGeom>
+          <a:noFill/>
+        </p:spPr>
+        <p:txBody>
+          <a:bodyPr wrap="square">
+            <a:spAutoFit/>
+          </a:bodyPr>
+          <a:lstStyle/>
+          <a:p>
+            <a:pPr algn="ctr"/>
+            <a:r>
+              <a:rPr sz="1400" b="1" i="0">
+                <a:solidFill>
+                  <a:srgbClr val="64748B"/>
+                </a:solidFill>
+                <a:latin typeface="Montserrat"/>
+              </a:rPr>
+              <a:t>IMAGEN</a:t>
+            </a:r>
+          </a:p>
+          <a:p>
+            <a:pPr algn="ctr"/>
+            <a:r>
+              <a:rPr sz="1100" b="0" i="1">
+                <a:solidFill>
+                  <a:srgbClr val="64748B"/>
+                </a:solidFill>
+                <a:latin typeface="Montserrat"/>
+              </a:rPr>
+              <a:t>underground tank excavation site</a:t>
+            </a:r>
+          </a:p>
+        </p:txBody>
+      </p:sp>
+    </p:spTree>
+  </p:cSld>
+  <p:clrMapOvr>
+    <a:masterClrMapping/>
+  </p:clrMapOvr>
+  <mc:AlternateContent xmlns:mc="http://schemas.openxmlformats.org/markup-compatibility/2006">
+    <mc:Choice xmlns:p14="http://schemas.microsoft.com/office/powerpoint/2010/main" Requires="p14">
+      <p:transition spd="med" p14:dur="700">
+        <p14:cube dir="l"/>
+      </p:transition>
+    </mc:Choice>
+    <mc:Fallback>
+      <p:transition spd="med">
+        <p:push dir="l"/>
+      </p:transition>
+    </mc:Fallback>
+  </mc:AlternateContent>
+</p:sld>
+</file>
+
+<file path=ppt/slides/slide24.xml><?xml version="1.0" encoding="utf-8"?>
+<p:sld xmlns:a="http://schemas.openxmlformats.org/drawingml/2006/main" xmlns:p="http://schemas.openxmlformats.org/presentationml/2006/main" xmlns:r="http://schemas.openxmlformats.org/officeDocument/2006/relationships">
+  <p:cSld>
+    <p:spTree>
+      <p:nvGrpSpPr>
+        <p:cNvPr id="1" name=""/>
+        <p:cNvGrpSpPr/>
+        <p:nvPr/>
+      </p:nvGrpSpPr>
+      <p:grpSpPr/>
+      <p:sp>
+        <p:nvSpPr>
+          <p:cNvPr id="2" name="Rectangle 1"/>
+          <p:cNvSpPr/>
+          <p:nvPr/>
+        </p:nvSpPr>
+        <p:spPr>
+          <a:xfrm>
+            <a:off x="0" y="0"/>
+            <a:ext cx="12191695" cy="6858000"/>
+          </a:xfrm>
+          <a:prstGeom prst="rect">
+            <a:avLst/>
+          </a:prstGeom>
+          <a:solidFill>
+            <a:srgbClr val="FFFFFF"/>
+          </a:solidFill>
+          <a:ln>
+            <a:noFill/>
+          </a:ln>
+          <a:effectLst/>
+        </p:spPr>
+        <p:style>
+          <a:lnRef idx="1">
+            <a:schemeClr val="accent1"/>
+          </a:lnRef>
+          <a:fillRef idx="3">
+            <a:schemeClr val="accent1"/>
+          </a:fillRef>
+          <a:effectRef idx="2">
+            <a:schemeClr val="accent1"/>
+          </a:effectRef>
+          <a:fontRef idx="minor">
+            <a:schemeClr val="lt1"/>
+          </a:fontRef>
+        </p:style>
+        <p:txBody>
+          <a:bodyPr rtlCol="0" anchor="ctr"/>
+          <a:lstStyle/>
+          <a:p>
+            <a:pPr algn="ctr"/>
+          </a:p>
+        </p:txBody>
+      </p:sp>
+      <p:sp>
+        <p:nvSpPr>
+          <p:cNvPr id="3" name="TextBox 2"/>
+          <p:cNvSpPr txBox="1"/>
+          <p:nvPr/>
+        </p:nvSpPr>
+        <p:spPr>
+          <a:xfrm>
+            <a:off x="10607040" y="320040"/>
+            <a:ext cx="1371600" cy="365760"/>
+          </a:xfrm>
+          <a:prstGeom prst="rect">
+            <a:avLst/>
+          </a:prstGeom>
+          <a:noFill/>
+        </p:spPr>
+        <p:txBody>
+          <a:bodyPr wrap="square">
+            <a:spAutoFit/>
+          </a:bodyPr>
+          <a:lstStyle/>
+          <a:p>
+            <a:pPr algn="r"/>
+            <a:r>
+              <a:rPr sz="1000" b="1" i="0">
+                <a:solidFill>
+                  <a:srgbClr val="64748B"/>
+                </a:solidFill>
+                <a:latin typeface="Montserrat"/>
+              </a:rPr>
+              <a:t>024 / 026</a:t>
+            </a:r>
+          </a:p>
+        </p:txBody>
+      </p:sp>
+      <p:sp>
+        <p:nvSpPr>
+          <p:cNvPr id="4" name="TextBox 3"/>
+          <p:cNvSpPr txBox="1"/>
+          <p:nvPr/>
+        </p:nvSpPr>
+        <p:spPr>
+          <a:xfrm>
+            <a:off x="457200" y="6419088"/>
+            <a:ext cx="8229600" cy="365760"/>
+          </a:xfrm>
+          <a:prstGeom prst="rect">
+            <a:avLst/>
+          </a:prstGeom>
+          <a:noFill/>
+        </p:spPr>
+        <p:txBody>
+          <a:bodyPr wrap="square">
+            <a:spAutoFit/>
+          </a:bodyPr>
+          <a:lstStyle/>
+          <a:p>
+            <a:r>
+              <a:rPr sz="900" b="0" i="0">
+                <a:solidFill>
+                  <a:srgbClr val="64748B"/>
+                </a:solidFill>
+                <a:latin typeface="Montserrat"/>
+              </a:rPr>
+              <a:t>Curso Gas B · Tema 02 · Depósitos fijos de GLP (ITC-ICG 03)</a:t>
+            </a:r>
+          </a:p>
+        </p:txBody>
+      </p:sp>
+      <p:sp>
+        <p:nvSpPr>
+          <p:cNvPr id="5" name="TextBox 4"/>
+          <p:cNvSpPr txBox="1"/>
+          <p:nvPr/>
+        </p:nvSpPr>
+        <p:spPr>
+          <a:xfrm>
+            <a:off x="822960" y="457200"/>
+            <a:ext cx="10058400" cy="365760"/>
+          </a:xfrm>
+          <a:prstGeom prst="rect">
+            <a:avLst/>
+          </a:prstGeom>
+          <a:noFill/>
+        </p:spPr>
+        <p:txBody>
+          <a:bodyPr wrap="square">
+            <a:spAutoFit/>
+          </a:bodyPr>
+          <a:lstStyle/>
+          <a:p>
+            <a:r>
+              <a:rPr sz="1300" b="1" i="0">
+                <a:solidFill>
+                  <a:srgbClr val="E8801A"/>
+                </a:solidFill>
+                <a:latin typeface="Montserrat"/>
+              </a:rPr>
+              <a:t>APARTADO 7 · RETIRADA</a:t>
+            </a:r>
+          </a:p>
+        </p:txBody>
+      </p:sp>
+      <p:sp>
+        <p:nvSpPr>
+          <p:cNvPr id="6" name="TextBox 5"/>
+          <p:cNvSpPr txBox="1"/>
+          <p:nvPr/>
+        </p:nvSpPr>
+        <p:spPr>
+          <a:xfrm>
+            <a:off x="822960" y="868680"/>
+            <a:ext cx="10515600" cy="914400"/>
+          </a:xfrm>
+          <a:prstGeom prst="rect">
+            <a:avLst/>
+          </a:prstGeom>
+          <a:noFill/>
+        </p:spPr>
+        <p:txBody>
+          <a:bodyPr wrap="square">
+            <a:spAutoFit/>
+          </a:bodyPr>
+          <a:lstStyle/>
+          <a:p>
+            <a:r>
+              <a:rPr sz="2800" b="1" i="0">
+                <a:solidFill>
+                  <a:srgbClr val="1E2761"/>
+                </a:solidFill>
+                <a:latin typeface="Montserrat"/>
+              </a:rPr>
+              <a:t>No dejes una bomba</a:t>
+            </a:r>
+          </a:p>
+        </p:txBody>
+      </p:sp>
+      <p:sp>
+        <p:nvSpPr>
+          <p:cNvPr id="7" name="Rectangle 6"/>
+          <p:cNvSpPr/>
+          <p:nvPr/>
+        </p:nvSpPr>
+        <p:spPr>
+          <a:xfrm>
+            <a:off x="868680" y="1627632"/>
+            <a:ext cx="2011680" cy="73152"/>
+          </a:xfrm>
+          <a:prstGeom prst="rect">
+            <a:avLst/>
+          </a:prstGeom>
+          <a:solidFill>
+            <a:srgbClr val="E8801A"/>
+          </a:solidFill>
+          <a:ln>
+            <a:noFill/>
+          </a:ln>
+          <a:effectLst/>
+        </p:spPr>
+        <p:style>
+          <a:lnRef idx="1">
+            <a:schemeClr val="accent1"/>
+          </a:lnRef>
+          <a:fillRef idx="3">
+            <a:schemeClr val="accent1"/>
+          </a:fillRef>
+          <a:effectRef idx="2">
+            <a:schemeClr val="accent1"/>
+          </a:effectRef>
+          <a:fontRef idx="minor">
+            <a:schemeClr val="lt1"/>
+          </a:fontRef>
+        </p:style>
+        <p:txBody>
+          <a:bodyPr rtlCol="0" anchor="ctr"/>
+          <a:lstStyle/>
+          <a:p>
+            <a:pPr algn="ctr"/>
+          </a:p>
+        </p:txBody>
+      </p:sp>
+      <p:sp>
+        <p:nvSpPr>
+          <p:cNvPr id="8" name="TextBox 7"/>
+          <p:cNvSpPr txBox="1"/>
+          <p:nvPr/>
+        </p:nvSpPr>
+        <p:spPr>
+          <a:xfrm>
+            <a:off x="6355080" y="1965960"/>
+            <a:ext cx="5029200" cy="4206240"/>
+          </a:xfrm>
+          <a:prstGeom prst="rect">
+            <a:avLst/>
+          </a:prstGeom>
+          <a:noFill/>
+        </p:spPr>
+        <p:txBody>
+          <a:bodyPr wrap="square">
+            <a:spAutoFit/>
+          </a:bodyPr>
+          <a:lstStyle/>
+          <a:p>
+            <a:pPr>
+              <a:spcAft>
+                <a:spcPts val="1100"/>
+              </a:spcAft>
+            </a:pPr>
+            <a:r>
+              <a:rPr sz="1600" b="1" i="0">
+                <a:solidFill>
+                  <a:srgbClr val="E8801A"/>
+                </a:solidFill>
+                <a:latin typeface="Montserrat"/>
+              </a:rPr>
+              <a:t>▸  </a:t>
+            </a:r>
+            <a:r>
+              <a:rPr sz="1600" b="0" i="0">
+                <a:solidFill>
+                  <a:srgbClr val="1B2330"/>
+                </a:solidFill>
+                <a:latin typeface="Montserrat"/>
+              </a:rPr>
+              <a:t>Inertizado con nitrógeno</a:t>
+            </a:r>
+          </a:p>
+          <a:p>
+            <a:pPr>
+              <a:spcAft>
+                <a:spcPts val="1100"/>
+              </a:spcAft>
+            </a:pPr>
+            <a:r>
+              <a:rPr sz="1600" b="1" i="0">
+                <a:solidFill>
+                  <a:srgbClr val="E8801A"/>
+                </a:solidFill>
+                <a:latin typeface="Montserrat"/>
+              </a:rPr>
+              <a:t>▸  </a:t>
+            </a:r>
+            <a:r>
+              <a:rPr sz="1600" b="0" i="0">
+                <a:solidFill>
+                  <a:srgbClr val="1B2330"/>
+                </a:solidFill>
+                <a:latin typeface="Montserrat"/>
+              </a:rPr>
+              <a:t>O desgasificado con agua</a:t>
+            </a:r>
+          </a:p>
+          <a:p>
+            <a:pPr>
+              <a:spcAft>
+                <a:spcPts val="1100"/>
+              </a:spcAft>
+            </a:pPr>
+            <a:r>
+              <a:rPr sz="1600" b="1" i="0">
+                <a:solidFill>
+                  <a:srgbClr val="E8801A"/>
+                </a:solidFill>
+                <a:latin typeface="Montserrat"/>
+              </a:rPr>
+              <a:t>▸  </a:t>
+            </a:r>
+            <a:r>
+              <a:rPr sz="1600" b="0" i="0">
+                <a:solidFill>
+                  <a:srgbClr val="1B2330"/>
+                </a:solidFill>
+                <a:latin typeface="Montserrat"/>
+              </a:rPr>
+              <a:t>Certificado a la Comunidad Autónoma</a:t>
+            </a:r>
+          </a:p>
+          <a:p>
+            <a:pPr>
+              <a:spcAft>
+                <a:spcPts val="1100"/>
+              </a:spcAft>
+            </a:pPr>
+            <a:r>
+              <a:rPr sz="1600" b="1" i="0">
+                <a:solidFill>
+                  <a:srgbClr val="E8801A"/>
+                </a:solidFill>
+                <a:latin typeface="Montserrat"/>
+              </a:rPr>
+              <a:t>▸  </a:t>
+            </a:r>
+            <a:r>
+              <a:rPr sz="1600" b="0" i="0">
+                <a:solidFill>
+                  <a:srgbClr val="1B2330"/>
+                </a:solidFill>
+                <a:latin typeface="Montserrat"/>
+              </a:rPr>
+              <a:t>Cese: 2 años sin consumo o 5 sin mantenimiento</a:t>
+            </a:r>
+          </a:p>
+        </p:txBody>
+      </p:sp>
+      <p:sp>
+        <p:nvSpPr>
+          <p:cNvPr id="9" name="imgph" descr="IMGQ:nitrogen cylinder inert gas industrial"/>
+          <p:cNvSpPr/>
+          <p:nvPr/>
+        </p:nvSpPr>
+        <p:spPr>
+          <a:xfrm>
+            <a:off x="822960" y="1965960"/>
+            <a:ext cx="5303520" cy="4572000"/>
+          </a:xfrm>
+          <a:prstGeom prst="roundRect">
+            <a:avLst/>
+          </a:prstGeom>
+          <a:solidFill>
+            <a:srgbClr val="F3F6FB"/>
+          </a:solidFill>
+          <a:ln w="12700">
+            <a:solidFill>
+              <a:srgbClr val="C7D2E6"/>
+            </a:solidFill>
+          </a:ln>
+          <a:effectLst/>
+        </p:spPr>
+        <p:style>
+          <a:lnRef idx="1">
+            <a:schemeClr val="accent1"/>
+          </a:lnRef>
+          <a:fillRef idx="3">
+            <a:schemeClr val="accent1"/>
+          </a:fillRef>
+          <a:effectRef idx="2">
+            <a:schemeClr val="accent1"/>
+          </a:effectRef>
+          <a:fontRef idx="minor">
+            <a:schemeClr val="lt1"/>
+          </a:fontRef>
+        </p:style>
+        <p:txBody>
+          <a:bodyPr rtlCol="0" anchor="ctr"/>
+          <a:lstStyle/>
+          <a:p>
+            <a:pPr algn="ctr"/>
+          </a:p>
+        </p:txBody>
+      </p:sp>
+      <p:sp>
+        <p:nvSpPr>
+          <p:cNvPr id="10" name="TextBox 9"/>
+          <p:cNvSpPr txBox="1"/>
+          <p:nvPr/>
+        </p:nvSpPr>
+        <p:spPr>
+          <a:xfrm>
+            <a:off x="1097280" y="3611880"/>
+            <a:ext cx="4754880" cy="1280160"/>
+          </a:xfrm>
+          <a:prstGeom prst="rect">
+            <a:avLst/>
+          </a:prstGeom>
+          <a:noFill/>
+        </p:spPr>
+        <p:txBody>
+          <a:bodyPr wrap="square">
+            <a:spAutoFit/>
+          </a:bodyPr>
+          <a:lstStyle/>
+          <a:p>
+            <a:pPr algn="ctr"/>
+            <a:r>
+              <a:rPr sz="1400" b="1" i="0">
+                <a:solidFill>
+                  <a:srgbClr val="64748B"/>
+                </a:solidFill>
+                <a:latin typeface="Montserrat"/>
+              </a:rPr>
+              <a:t>IMAGEN</a:t>
+            </a:r>
+          </a:p>
+          <a:p>
+            <a:pPr algn="ctr"/>
+            <a:r>
+              <a:rPr sz="1100" b="0" i="1">
+                <a:solidFill>
+                  <a:srgbClr val="64748B"/>
+                </a:solidFill>
+                <a:latin typeface="Montserrat"/>
+              </a:rPr>
+              <a:t>nitrogen cylinder inert gas industrial</a:t>
+            </a:r>
+          </a:p>
+        </p:txBody>
+      </p:sp>
+    </p:spTree>
+  </p:cSld>
+  <p:clrMapOvr>
+    <a:masterClrMapping/>
+  </p:clrMapOvr>
+  <mc:AlternateContent xmlns:mc="http://schemas.openxmlformats.org/markup-compatibility/2006">
+    <mc:Choice xmlns:p14="http://schemas.microsoft.com/office/powerpoint/2010/main" Requires="p14">
+      <p:transition spd="med" p14:dur="700">
+        <p14:cube dir="r"/>
+      </p:transition>
+    </mc:Choice>
+    <mc:Fallback>
+      <p:transition spd="med">
+        <p:push dir="r"/>
+      </p:transition>
+    </mc:Fallback>
+  </mc:AlternateContent>
+</p:sld>
+</file>
+
+<file path=ppt/slides/slide25.xml><?xml version="1.0" encoding="utf-8"?>
+<p:sld xmlns:a="http://schemas.openxmlformats.org/drawingml/2006/main" xmlns:p="http://schemas.openxmlformats.org/presentationml/2006/main" xmlns:r="http://schemas.openxmlformats.org/officeDocument/2006/relationships">
+  <p:cSld>
+    <p:spTree>
+      <p:nvGrpSpPr>
+        <p:cNvPr id="1" name=""/>
+        <p:cNvGrpSpPr/>
+        <p:nvPr/>
+      </p:nvGrpSpPr>
+      <p:grpSpPr/>
+      <p:sp>
+        <p:nvSpPr>
+          <p:cNvPr id="2" name="Rectangle 1"/>
+          <p:cNvSpPr/>
+          <p:nvPr/>
+        </p:nvSpPr>
+        <p:spPr>
+          <a:xfrm>
+            <a:off x="0" y="0"/>
+            <a:ext cx="12191695" cy="6858000"/>
+          </a:xfrm>
+          <a:prstGeom prst="rect">
+            <a:avLst/>
+          </a:prstGeom>
+          <a:solidFill>
+            <a:srgbClr val="FFFFFF"/>
+          </a:solidFill>
+          <a:ln>
+            <a:noFill/>
+          </a:ln>
+          <a:effectLst/>
+        </p:spPr>
+        <p:style>
+          <a:lnRef idx="1">
+            <a:schemeClr val="accent1"/>
+          </a:lnRef>
+          <a:fillRef idx="3">
+            <a:schemeClr val="accent1"/>
+          </a:fillRef>
+          <a:effectRef idx="2">
+            <a:schemeClr val="accent1"/>
+          </a:effectRef>
+          <a:fontRef idx="minor">
+            <a:schemeClr val="lt1"/>
+          </a:fontRef>
+        </p:style>
+        <p:txBody>
+          <a:bodyPr rtlCol="0" anchor="ctr"/>
+          <a:lstStyle/>
+          <a:p>
+            <a:pPr algn="ctr"/>
+          </a:p>
+        </p:txBody>
+      </p:sp>
+      <p:sp>
+        <p:nvSpPr>
+          <p:cNvPr id="3" name="TextBox 2"/>
+          <p:cNvSpPr txBox="1"/>
+          <p:nvPr/>
+        </p:nvSpPr>
+        <p:spPr>
+          <a:xfrm>
+            <a:off x="10607040" y="320040"/>
+            <a:ext cx="1371600" cy="365760"/>
+          </a:xfrm>
+          <a:prstGeom prst="rect">
+            <a:avLst/>
+          </a:prstGeom>
+          <a:noFill/>
+        </p:spPr>
+        <p:txBody>
+          <a:bodyPr wrap="square">
+            <a:spAutoFit/>
+          </a:bodyPr>
+          <a:lstStyle/>
+          <a:p>
+            <a:pPr algn="r"/>
+            <a:r>
+              <a:rPr sz="1000" b="1" i="0">
+                <a:solidFill>
+                  <a:srgbClr val="64748B"/>
+                </a:solidFill>
+                <a:latin typeface="Montserrat"/>
+              </a:rPr>
+              <a:t>025 / 026</a:t>
+            </a:r>
+          </a:p>
+        </p:txBody>
+      </p:sp>
+      <p:sp>
+        <p:nvSpPr>
+          <p:cNvPr id="4" name="TextBox 3"/>
+          <p:cNvSpPr txBox="1"/>
+          <p:nvPr/>
+        </p:nvSpPr>
+        <p:spPr>
+          <a:xfrm>
+            <a:off x="457200" y="6419088"/>
+            <a:ext cx="8229600" cy="365760"/>
+          </a:xfrm>
+          <a:prstGeom prst="rect">
+            <a:avLst/>
+          </a:prstGeom>
+          <a:noFill/>
+        </p:spPr>
+        <p:txBody>
+          <a:bodyPr wrap="square">
+            <a:spAutoFit/>
+          </a:bodyPr>
+          <a:lstStyle/>
+          <a:p>
+            <a:r>
+              <a:rPr sz="900" b="0" i="0">
+                <a:solidFill>
+                  <a:srgbClr val="64748B"/>
+                </a:solidFill>
+                <a:latin typeface="Montserrat"/>
+              </a:rPr>
+              <a:t>Curso Gas B · Tema 02 · Depósitos fijos de GLP (ITC-ICG 03)</a:t>
+            </a:r>
+          </a:p>
+        </p:txBody>
+      </p:sp>
+      <p:sp>
+        <p:nvSpPr>
+          <p:cNvPr id="5" name="TextBox 4"/>
+          <p:cNvSpPr txBox="1"/>
+          <p:nvPr/>
+        </p:nvSpPr>
+        <p:spPr>
+          <a:xfrm>
+            <a:off x="822960" y="457200"/>
+            <a:ext cx="10058400" cy="365760"/>
+          </a:xfrm>
+          <a:prstGeom prst="rect">
+            <a:avLst/>
+          </a:prstGeom>
+          <a:noFill/>
+        </p:spPr>
+        <p:txBody>
+          <a:bodyPr wrap="square">
+            <a:spAutoFit/>
+          </a:bodyPr>
+          <a:lstStyle/>
+          <a:p>
+            <a:r>
+              <a:rPr sz="1300" b="1" i="0">
+                <a:solidFill>
+                  <a:srgbClr val="E8801A"/>
+                </a:solidFill>
+                <a:latin typeface="Montserrat"/>
+              </a:rPr>
+              <a:t>REPASO RELÁMPAGO</a:t>
+            </a:r>
+          </a:p>
+        </p:txBody>
+      </p:sp>
+      <p:sp>
+        <p:nvSpPr>
+          <p:cNvPr id="6" name="TextBox 5"/>
+          <p:cNvSpPr txBox="1"/>
+          <p:nvPr/>
+        </p:nvSpPr>
+        <p:spPr>
+          <a:xfrm>
+            <a:off x="822960" y="868680"/>
+            <a:ext cx="10515600" cy="914400"/>
+          </a:xfrm>
+          <a:prstGeom prst="rect">
+            <a:avLst/>
+          </a:prstGeom>
+          <a:noFill/>
+        </p:spPr>
+        <p:txBody>
+          <a:bodyPr wrap="square">
+            <a:spAutoFit/>
+          </a:bodyPr>
+          <a:lstStyle/>
+          <a:p>
+            <a:r>
+              <a:rPr sz="2800" b="1" i="0">
+                <a:solidFill>
+                  <a:srgbClr val="1E2761"/>
+                </a:solidFill>
+                <a:latin typeface="Montserrat"/>
+              </a:rPr>
+              <a:t>Seis anclas antes del cierre</a:t>
+            </a:r>
+          </a:p>
+        </p:txBody>
+      </p:sp>
+      <p:sp>
+        <p:nvSpPr>
+          <p:cNvPr id="7" name="Rectangle 6"/>
+          <p:cNvSpPr/>
+          <p:nvPr/>
+        </p:nvSpPr>
+        <p:spPr>
+          <a:xfrm>
+            <a:off x="868680" y="1627632"/>
+            <a:ext cx="2011680" cy="73152"/>
+          </a:xfrm>
+          <a:prstGeom prst="rect">
+            <a:avLst/>
+          </a:prstGeom>
+          <a:solidFill>
+            <a:srgbClr val="E8801A"/>
+          </a:solidFill>
+          <a:ln>
+            <a:noFill/>
+          </a:ln>
+          <a:effectLst/>
+        </p:spPr>
+        <p:style>
+          <a:lnRef idx="1">
+            <a:schemeClr val="accent1"/>
+          </a:lnRef>
+          <a:fillRef idx="3">
+            <a:schemeClr val="accent1"/>
+          </a:fillRef>
+          <a:effectRef idx="2">
+            <a:schemeClr val="accent1"/>
+          </a:effectRef>
+          <a:fontRef idx="minor">
+            <a:schemeClr val="lt1"/>
+          </a:fontRef>
+        </p:style>
+        <p:txBody>
+          <a:bodyPr rtlCol="0" anchor="ctr"/>
+          <a:lstStyle/>
+          <a:p>
+            <a:pPr algn="ctr"/>
+          </a:p>
+        </p:txBody>
+      </p:sp>
+      <p:sp>
+        <p:nvSpPr>
+          <p:cNvPr id="8" name="TextBox 7"/>
+          <p:cNvSpPr txBox="1"/>
+          <p:nvPr/>
+        </p:nvSpPr>
+        <p:spPr>
+          <a:xfrm>
+            <a:off x="822960" y="1965960"/>
+            <a:ext cx="5029200" cy="4206240"/>
+          </a:xfrm>
+          <a:prstGeom prst="rect">
+            <a:avLst/>
+          </a:prstGeom>
+          <a:noFill/>
+        </p:spPr>
+        <p:txBody>
+          <a:bodyPr wrap="square">
+            <a:spAutoFit/>
+          </a:bodyPr>
+          <a:lstStyle/>
+          <a:p>
+            <a:pPr>
+              <a:spcAft>
+                <a:spcPts val="1100"/>
+              </a:spcAft>
+            </a:pPr>
+            <a:r>
+              <a:rPr sz="1600" b="1" i="0">
+                <a:solidFill>
+                  <a:srgbClr val="E8801A"/>
+                </a:solidFill>
+                <a:latin typeface="Montserrat"/>
+              </a:rPr>
+              <a:t>▸  </a:t>
+            </a:r>
+            <a:r>
+              <a:rPr sz="1600" b="0" i="0">
+                <a:solidFill>
+                  <a:srgbClr val="1B2330"/>
+                </a:solidFill>
+                <a:latin typeface="Montserrat"/>
+              </a:rPr>
+              <a:t>Topes 2.000 / 500 m³ · proyecto &gt; 13 m³</a:t>
+            </a:r>
+          </a:p>
+          <a:p>
+            <a:pPr>
+              <a:spcAft>
+                <a:spcPts val="1100"/>
+              </a:spcAft>
+            </a:pPr>
+            <a:r>
+              <a:rPr sz="1600" b="1" i="0">
+                <a:solidFill>
+                  <a:srgbClr val="E8801A"/>
+                </a:solidFill>
+                <a:latin typeface="Montserrat"/>
+              </a:rPr>
+              <a:t>▸  </a:t>
+            </a:r>
+            <a:r>
+              <a:rPr sz="1600" b="0" i="0">
+                <a:solidFill>
+                  <a:srgbClr val="1B2330"/>
+                </a:solidFill>
+                <a:latin typeface="Montserrat"/>
+              </a:rPr>
+              <a:t>Memoria la firma el instalador</a:t>
+            </a:r>
+          </a:p>
+          <a:p>
+            <a:pPr>
+              <a:spcAft>
+                <a:spcPts val="1100"/>
+              </a:spcAft>
+            </a:pPr>
+            <a:r>
+              <a:rPr sz="1600" b="1" i="0">
+                <a:solidFill>
+                  <a:srgbClr val="E8801A"/>
+                </a:solidFill>
+                <a:latin typeface="Montserrat"/>
+              </a:rPr>
+              <a:t>▸  </a:t>
+            </a:r>
+            <a:r>
+              <a:rPr sz="1600" b="0" i="0">
+                <a:solidFill>
+                  <a:srgbClr val="1B2330"/>
+                </a:solidFill>
+                <a:latin typeface="Montserrat"/>
+              </a:rPr>
+              <a:t>Primer llenado corta al 85 %</a:t>
+            </a:r>
+          </a:p>
+          <a:p>
+            <a:pPr>
+              <a:spcAft>
+                <a:spcPts val="1100"/>
+              </a:spcAft>
+            </a:pPr>
+            <a:r>
+              <a:rPr sz="1600" b="1" i="0">
+                <a:solidFill>
+                  <a:srgbClr val="E8801A"/>
+                </a:solidFill>
+                <a:latin typeface="Montserrat"/>
+              </a:rPr>
+              <a:t>▸  </a:t>
+            </a:r>
+            <a:r>
+              <a:rPr sz="1600" b="0" i="0">
+                <a:solidFill>
+                  <a:srgbClr val="1B2330"/>
+                </a:solidFill>
+                <a:latin typeface="Montserrat"/>
+              </a:rPr>
+              <a:t>Enterrado: protección catódica</a:t>
+            </a:r>
+          </a:p>
+          <a:p>
+            <a:pPr>
+              <a:spcAft>
+                <a:spcPts val="1100"/>
+              </a:spcAft>
+            </a:pPr>
+            <a:r>
+              <a:rPr sz="1600" b="1" i="0">
+                <a:solidFill>
+                  <a:srgbClr val="E8801A"/>
+                </a:solidFill>
+                <a:latin typeface="Montserrat"/>
+              </a:rPr>
+              <a:t>▸  </a:t>
+            </a:r>
+            <a:r>
+              <a:rPr sz="1600" b="0" i="0">
+                <a:solidFill>
+                  <a:srgbClr val="1B2330"/>
+                </a:solidFill>
+                <a:latin typeface="Montserrat"/>
+              </a:rPr>
+              <a:t>Prueba de presión cada 15 años</a:t>
+            </a:r>
+          </a:p>
+        </p:txBody>
+      </p:sp>
+      <p:sp>
+        <p:nvSpPr>
+          <p:cNvPr id="9" name="imgph" descr="IMGQ:LPG tank installation residential"/>
+          <p:cNvSpPr/>
+          <p:nvPr/>
+        </p:nvSpPr>
+        <p:spPr>
+          <a:xfrm>
+            <a:off x="6080760" y="1965960"/>
+            <a:ext cx="5303520" cy="4572000"/>
+          </a:xfrm>
+          <a:prstGeom prst="roundRect">
+            <a:avLst/>
+          </a:prstGeom>
+          <a:solidFill>
+            <a:srgbClr val="F3F6FB"/>
+          </a:solidFill>
+          <a:ln w="12700">
+            <a:solidFill>
+              <a:srgbClr val="C7D2E6"/>
+            </a:solidFill>
+          </a:ln>
+          <a:effectLst/>
+        </p:spPr>
+        <p:style>
+          <a:lnRef idx="1">
+            <a:schemeClr val="accent1"/>
+          </a:lnRef>
+          <a:fillRef idx="3">
+            <a:schemeClr val="accent1"/>
+          </a:fillRef>
+          <a:effectRef idx="2">
+            <a:schemeClr val="accent1"/>
+          </a:effectRef>
+          <a:fontRef idx="minor">
+            <a:schemeClr val="lt1"/>
+          </a:fontRef>
+        </p:style>
+        <p:txBody>
+          <a:bodyPr rtlCol="0" anchor="ctr"/>
+          <a:lstStyle/>
+          <a:p>
+            <a:pPr algn="ctr"/>
+          </a:p>
+        </p:txBody>
+      </p:sp>
+      <p:sp>
+        <p:nvSpPr>
+          <p:cNvPr id="10" name="TextBox 9"/>
+          <p:cNvSpPr txBox="1"/>
+          <p:nvPr/>
+        </p:nvSpPr>
+        <p:spPr>
+          <a:xfrm>
+            <a:off x="6355080" y="3611880"/>
+            <a:ext cx="4754880" cy="1280160"/>
+          </a:xfrm>
+          <a:prstGeom prst="rect">
+            <a:avLst/>
+          </a:prstGeom>
+          <a:noFill/>
+        </p:spPr>
+        <p:txBody>
+          <a:bodyPr wrap="square">
+            <a:spAutoFit/>
+          </a:bodyPr>
+          <a:lstStyle/>
+          <a:p>
+            <a:pPr algn="ctr"/>
+            <a:r>
+              <a:rPr sz="1400" b="1" i="0">
+                <a:solidFill>
+                  <a:srgbClr val="64748B"/>
+                </a:solidFill>
+                <a:latin typeface="Montserrat"/>
+              </a:rPr>
+              <a:t>IMAGEN</a:t>
+            </a:r>
+          </a:p>
+          <a:p>
+            <a:pPr algn="ctr"/>
+            <a:r>
+              <a:rPr sz="1100" b="0" i="1">
+                <a:solidFill>
+                  <a:srgbClr val="64748B"/>
+                </a:solidFill>
+                <a:latin typeface="Montserrat"/>
+              </a:rPr>
+              <a:t>LPG tank installation residential</a:t>
+            </a:r>
+          </a:p>
+        </p:txBody>
+      </p:sp>
+    </p:spTree>
+  </p:cSld>
+  <p:clrMapOvr>
+    <a:masterClrMapping/>
+  </p:clrMapOvr>
+  <mc:AlternateContent xmlns:mc="http://schemas.openxmlformats.org/markup-compatibility/2006">
+    <mc:Choice xmlns:p14="http://schemas.microsoft.com/office/powerpoint/2010/main" Requires="p14">
+      <p:transition spd="med" p14:dur="700">
+        <p14:cube dir="l"/>
+      </p:transition>
+    </mc:Choice>
+    <mc:Fallback>
+      <p:transition spd="med">
+        <p:push dir="l"/>
+      </p:transition>
+    </mc:Fallback>
+  </mc:AlternateContent>
+</p:sld>
+</file>
+
+<file path=ppt/slides/slide26.xml><?xml version="1.0" encoding="utf-8"?>
+<p:sld xmlns:a="http://schemas.openxmlformats.org/drawingml/2006/main" xmlns:p="http://schemas.openxmlformats.org/presentationml/2006/main" xmlns:r="http://schemas.openxmlformats.org/officeDocument/2006/relationships">
+  <p:cSld>
+    <p:spTree>
+      <p:nvGrpSpPr>
+        <p:cNvPr id="1" name=""/>
+        <p:cNvGrpSpPr/>
+        <p:nvPr/>
+      </p:nvGrpSpPr>
+      <p:grpSpPr/>
+      <p:sp>
+        <p:nvSpPr>
+          <p:cNvPr id="2" name="Rectangle 1"/>
+          <p:cNvSpPr/>
+          <p:nvPr/>
+        </p:nvSpPr>
+        <p:spPr>
+          <a:xfrm>
+            <a:off x="0" y="0"/>
+            <a:ext cx="12191695" cy="6858000"/>
+          </a:xfrm>
+          <a:prstGeom prst="rect">
+            <a:avLst/>
+          </a:prstGeom>
+          <a:solidFill>
+            <a:srgbClr val="1E2761"/>
+          </a:solidFill>
+          <a:ln>
+            <a:noFill/>
+          </a:ln>
+          <a:effectLst/>
+        </p:spPr>
+        <p:style>
+          <a:lnRef idx="1">
+            <a:schemeClr val="accent1"/>
+          </a:lnRef>
+          <a:fillRef idx="3">
+            <a:schemeClr val="accent1"/>
+          </a:fillRef>
+          <a:effectRef idx="2">
+            <a:schemeClr val="accent1"/>
+          </a:effectRef>
+          <a:fontRef idx="minor">
+            <a:schemeClr val="lt1"/>
+          </a:fontRef>
+        </p:style>
+        <p:txBody>
+          <a:bodyPr rtlCol="0" anchor="ctr"/>
+          <a:lstStyle/>
+          <a:p>
+            <a:pPr algn="ctr"/>
+          </a:p>
+        </p:txBody>
+      </p:sp>
+      <p:sp>
+        <p:nvSpPr>
+          <p:cNvPr id="3" name="TextBox 2"/>
+          <p:cNvSpPr txBox="1"/>
+          <p:nvPr/>
+        </p:nvSpPr>
+        <p:spPr>
+          <a:xfrm>
+            <a:off x="822960" y="640080"/>
+            <a:ext cx="10515600" cy="457200"/>
+          </a:xfrm>
+          <a:prstGeom prst="rect">
+            <a:avLst/>
+          </a:prstGeom>
+          <a:noFill/>
+        </p:spPr>
+        <p:txBody>
+          <a:bodyPr wrap="square">
+            <a:spAutoFit/>
+          </a:bodyPr>
+          <a:lstStyle/>
+          <a:p>
+            <a:r>
+              <a:rPr sz="1400" b="1" i="0">
+                <a:solidFill>
+                  <a:srgbClr val="F4A24C"/>
+                </a:solidFill>
+                <a:latin typeface="Montserrat"/>
+              </a:rPr>
+              <a:t>LO QUE YA DOMINAS</a:t>
+            </a:r>
+          </a:p>
+        </p:txBody>
+      </p:sp>
+      <p:sp>
+        <p:nvSpPr>
+          <p:cNvPr id="4" name="Rectangle 3"/>
+          <p:cNvSpPr/>
+          <p:nvPr/>
+        </p:nvSpPr>
+        <p:spPr>
+          <a:xfrm>
+            <a:off x="868680" y="1051560"/>
+            <a:ext cx="1463040" cy="82296"/>
+          </a:xfrm>
+          <a:prstGeom prst="rect">
+            <a:avLst/>
+          </a:prstGeom>
+          <a:solidFill>
+            <a:srgbClr val="E8801A"/>
+          </a:solidFill>
+          <a:ln>
+            <a:noFill/>
+          </a:ln>
+          <a:effectLst/>
+        </p:spPr>
+        <p:style>
+          <a:lnRef idx="1">
+            <a:schemeClr val="accent1"/>
+          </a:lnRef>
+          <a:fillRef idx="3">
+            <a:schemeClr val="accent1"/>
+          </a:fillRef>
+          <a:effectRef idx="2">
+            <a:schemeClr val="accent1"/>
+          </a:effectRef>
+          <a:fontRef idx="minor">
+            <a:schemeClr val="lt1"/>
+          </a:fontRef>
+        </p:style>
+        <p:txBody>
+          <a:bodyPr rtlCol="0" anchor="ctr"/>
+          <a:lstStyle/>
+          <a:p>
+            <a:pPr algn="ctr"/>
+          </a:p>
+        </p:txBody>
+      </p:sp>
+      <p:sp>
+        <p:nvSpPr>
+          <p:cNvPr id="5" name="TextBox 4"/>
+          <p:cNvSpPr txBox="1"/>
+          <p:nvPr/>
+        </p:nvSpPr>
+        <p:spPr>
+          <a:xfrm>
+            <a:off x="822960" y="1234440"/>
+            <a:ext cx="10515600" cy="1097280"/>
+          </a:xfrm>
+          <a:prstGeom prst="rect">
+            <a:avLst/>
+          </a:prstGeom>
+          <a:noFill/>
+        </p:spPr>
+        <p:txBody>
+          <a:bodyPr wrap="square">
+            <a:spAutoFit/>
+          </a:bodyPr>
+          <a:lstStyle/>
+          <a:p>
+            <a:r>
+              <a:rPr sz="3400" b="1" i="0">
+                <a:solidFill>
+                  <a:srgbClr val="FFFFFF"/>
+                </a:solidFill>
+                <a:latin typeface="Montserrat"/>
+              </a:rPr>
+              <a:t>Ya legalizas y mantienes un depósito fijo</a:t>
+            </a:r>
+          </a:p>
+        </p:txBody>
+      </p:sp>
+      <p:sp>
+        <p:nvSpPr>
+          <p:cNvPr id="6" name="TextBox 5"/>
+          <p:cNvSpPr txBox="1"/>
+          <p:nvPr/>
+        </p:nvSpPr>
+        <p:spPr>
+          <a:xfrm>
+            <a:off x="822960" y="2606040"/>
+            <a:ext cx="10515600" cy="2743200"/>
+          </a:xfrm>
+          <a:prstGeom prst="rect">
+            <a:avLst/>
+          </a:prstGeom>
+          <a:noFill/>
+        </p:spPr>
+        <p:txBody>
+          <a:bodyPr wrap="square">
+            <a:spAutoFit/>
+          </a:bodyPr>
+          <a:lstStyle/>
+          <a:p>
+            <a:pPr>
+              <a:spcAft>
+                <a:spcPts val="1200"/>
+              </a:spcAft>
+            </a:pPr>
+            <a:r>
+              <a:rPr sz="2000" b="1" i="0">
+                <a:solidFill>
+                  <a:srgbClr val="F4A24C"/>
+                </a:solidFill>
+                <a:latin typeface="Montserrat"/>
+              </a:rPr>
+              <a:t>✓  </a:t>
+            </a:r>
+            <a:r>
+              <a:rPr sz="1900" b="0" i="0">
+                <a:solidFill>
+                  <a:srgbClr val="FFFFFF"/>
+                </a:solidFill>
+                <a:latin typeface="Montserrat"/>
+              </a:rPr>
+              <a:t>Decides memoria o proyecto y sabes qué firmas tú</a:t>
+            </a:r>
+          </a:p>
+          <a:p>
+            <a:pPr>
+              <a:spcAft>
+                <a:spcPts val="1200"/>
+              </a:spcAft>
+            </a:pPr>
+            <a:r>
+              <a:rPr sz="2000" b="1" i="0">
+                <a:solidFill>
+                  <a:srgbClr val="F4A24C"/>
+                </a:solidFill>
+                <a:latin typeface="Montserrat"/>
+              </a:rPr>
+              <a:t>✓  </a:t>
+            </a:r>
+            <a:r>
+              <a:rPr sz="1900" b="0" i="0">
+                <a:solidFill>
+                  <a:srgbClr val="FFFFFF"/>
+                </a:solidFill>
+                <a:latin typeface="Montserrat"/>
+              </a:rPr>
+              <a:t>Entiendes el 85 % y por qué el líquido se dilata</a:t>
+            </a:r>
+          </a:p>
+          <a:p>
+            <a:pPr>
+              <a:spcAft>
+                <a:spcPts val="1200"/>
+              </a:spcAft>
+            </a:pPr>
+            <a:r>
+              <a:rPr sz="2000" b="1" i="0">
+                <a:solidFill>
+                  <a:srgbClr val="F4A24C"/>
+                </a:solidFill>
+                <a:latin typeface="Montserrat"/>
+              </a:rPr>
+              <a:t>✓  </a:t>
+            </a:r>
+            <a:r>
+              <a:rPr sz="1900" b="0" i="0">
+                <a:solidFill>
+                  <a:srgbClr val="FFFFFF"/>
+                </a:solidFill>
+                <a:latin typeface="Montserrat"/>
+              </a:rPr>
+              <a:t>Controlas corrosión, revisiones y prueba de los 15 años</a:t>
+            </a:r>
+          </a:p>
+          <a:p>
+            <a:pPr>
+              <a:spcAft>
+                <a:spcPts val="1200"/>
+              </a:spcAft>
+            </a:pPr>
+            <a:r>
+              <a:rPr sz="2000" b="1" i="0">
+                <a:solidFill>
+                  <a:srgbClr val="F4A24C"/>
+                </a:solidFill>
+                <a:latin typeface="Montserrat"/>
+              </a:rPr>
+              <a:t>✓  </a:t>
+            </a:r>
+            <a:r>
+              <a:rPr sz="1900" b="0" i="0">
+                <a:solidFill>
+                  <a:srgbClr val="FFFFFF"/>
+                </a:solidFill>
+                <a:latin typeface="Montserrat"/>
+              </a:rPr>
+              <a:t>Retiras el depósito sin dejar una bomba dentro</a:t>
+            </a:r>
+          </a:p>
+        </p:txBody>
+      </p:sp>
+      <p:sp>
+        <p:nvSpPr>
+          <p:cNvPr id="7" name="Rounded Rectangle 6"/>
+          <p:cNvSpPr/>
+          <p:nvPr/>
+        </p:nvSpPr>
+        <p:spPr>
+          <a:xfrm>
+            <a:off x="822960" y="5532120"/>
+            <a:ext cx="10515600" cy="822960"/>
+          </a:xfrm>
+          <a:prstGeom prst="roundRect">
+            <a:avLst/>
+          </a:prstGeom>
+          <a:solidFill>
+            <a:srgbClr val="E8801A"/>
+          </a:solidFill>
+          <a:ln>
+            <a:noFill/>
+          </a:ln>
+          <a:effectLst/>
+        </p:spPr>
+        <p:style>
+          <a:lnRef idx="1">
+            <a:schemeClr val="accent1"/>
+          </a:lnRef>
+          <a:fillRef idx="3">
+            <a:schemeClr val="accent1"/>
+          </a:fillRef>
+          <a:effectRef idx="2">
+            <a:schemeClr val="accent1"/>
+          </a:effectRef>
+          <a:fontRef idx="minor">
+            <a:schemeClr val="lt1"/>
+          </a:fontRef>
+        </p:style>
+        <p:txBody>
+          <a:bodyPr rtlCol="0" anchor="ctr"/>
+          <a:lstStyle/>
+          <a:p>
+            <a:pPr algn="ctr"/>
+          </a:p>
+        </p:txBody>
+      </p:sp>
+      <p:sp>
+        <p:nvSpPr>
+          <p:cNvPr id="8" name="TextBox 7"/>
+          <p:cNvSpPr txBox="1"/>
+          <p:nvPr/>
+        </p:nvSpPr>
+        <p:spPr>
+          <a:xfrm>
+            <a:off x="1051560" y="5623560"/>
+            <a:ext cx="10058400" cy="640080"/>
+          </a:xfrm>
+          <a:prstGeom prst="rect">
+            <a:avLst/>
+          </a:prstGeom>
+          <a:noFill/>
+        </p:spPr>
+        <p:txBody>
+          <a:bodyPr wrap="square">
+            <a:spAutoFit/>
+          </a:bodyPr>
+          <a:lstStyle/>
+          <a:p>
+            <a:r>
+              <a:rPr sz="1500" b="1" i="1">
+                <a:solidFill>
+                  <a:srgbClr val="1E2761"/>
+                </a:solidFill>
+                <a:latin typeface="Montserrat"/>
+              </a:rPr>
+              <a:t>Hoy ya eres más gasista que ayer. En el último vídeo damos el salto al frío: el GNL.</a:t>
+            </a:r>
+          </a:p>
+        </p:txBody>
+      </p:sp>
+    </p:spTree>
+  </p:cSld>
+  <p:clrMapOvr>
+    <a:masterClrMapping/>
+  </p:clrMapOvr>
+  <mc:AlternateContent xmlns:mc="http://schemas.openxmlformats.org/markup-compatibility/2006">
+    <mc:Choice xmlns:p14="http://schemas.microsoft.com/office/powerpoint/2010/main" Requires="p14">
+      <p:transition spd="med" p14:dur="700">
+        <p14:cube dir="r"/>
+      </p:transition>
+    </mc:Choice>
+    <mc:Fallback>
+      <p:transition spd="med">
+        <p:push dir="r"/>
+      </p:transition>
+    </mc:Fallback>
+  </mc:AlternateContent>
 </p:sld>
 </file>
 
@@ -11333,7 +15148,7 @@
                 </a:solidFill>
                 <a:latin typeface="Montserrat"/>
               </a:rPr>
-              <a:t>003 / 021</a:t>
+              <a:t>003 / 026</a:t>
             </a:r>
           </a:p>
         </p:txBody>
@@ -11442,7 +15257,7 @@
       </p:sp>
       <p:sp>
         <p:nvSpPr>
-          <p:cNvPr id="7" name="Rounded Rectangle 6"/>
+          <p:cNvPr id="7" name="Rectangle 6"/>
           <p:cNvSpPr/>
           <p:nvPr/>
         </p:nvSpPr>
@@ -11451,7 +15266,7 @@
             <a:off x="868680" y="1673352"/>
             <a:ext cx="2011680" cy="73152"/>
           </a:xfrm>
-          <a:prstGeom prst="roundRect">
+          <a:prstGeom prst="rect">
             <a:avLst/>
           </a:prstGeom>
           <a:solidFill>
@@ -11737,6 +15552,18 @@
   <p:clrMapOvr>
     <a:masterClrMapping/>
   </p:clrMapOvr>
+  <mc:AlternateContent xmlns:mc="http://schemas.openxmlformats.org/markup-compatibility/2006">
+    <mc:Choice xmlns:p14="http://schemas.microsoft.com/office/powerpoint/2010/main" Requires="p14">
+      <p:transition spd="med" p14:dur="700">
+        <p14:cube dir="l"/>
+      </p:transition>
+    </mc:Choice>
+    <mc:Fallback>
+      <p:transition spd="med">
+        <p:push dir="l"/>
+      </p:transition>
+    </mc:Fallback>
+  </mc:AlternateContent>
 </p:sld>
 </file>
 
@@ -11824,7 +15651,7 @@
                 </a:solidFill>
                 <a:latin typeface="Montserrat"/>
               </a:rPr>
-              <a:t>004 / 021</a:t>
+              <a:t>004 / 026</a:t>
             </a:r>
           </a:p>
         </p:txBody>
@@ -11933,7 +15760,7 @@
       </p:sp>
       <p:sp>
         <p:nvSpPr>
-          <p:cNvPr id="7" name="Rounded Rectangle 6"/>
+          <p:cNvPr id="7" name="Rectangle 6"/>
           <p:cNvSpPr/>
           <p:nvPr/>
         </p:nvSpPr>
@@ -11942,7 +15769,7 @@
             <a:off x="868680" y="1627632"/>
             <a:ext cx="2011680" cy="73152"/>
           </a:xfrm>
-          <a:prstGeom prst="roundRect">
+          <a:prstGeom prst="rect">
             <a:avLst/>
           </a:prstGeom>
           <a:solidFill>
@@ -11984,7 +15811,7 @@
         <p:spPr>
           <a:xfrm>
             <a:off x="822960" y="1965960"/>
-            <a:ext cx="4983480" cy="4206240"/>
+            <a:ext cx="5029200" cy="4206240"/>
           </a:xfrm>
           <a:prstGeom prst="rect">
             <a:avLst/>
@@ -12106,8 +15933,8 @@
         </p:nvSpPr>
         <p:spPr>
           <a:xfrm>
-            <a:off x="5806440" y="1051560"/>
-            <a:ext cx="5298947" cy="4629150"/>
+            <a:off x="6080760" y="1965960"/>
+            <a:ext cx="5303520" cy="4572000"/>
           </a:xfrm>
           <a:prstGeom prst="roundRect">
             <a:avLst/>
@@ -12152,8 +15979,8 @@
         </p:nvSpPr>
         <p:spPr>
           <a:xfrm>
-            <a:off x="6080760" y="2726055"/>
-            <a:ext cx="4750307" cy="1280160"/>
+            <a:off x="6355080" y="3611880"/>
+            <a:ext cx="4754880" cy="1280160"/>
           </a:xfrm>
           <a:prstGeom prst="rect">
             <a:avLst/>
@@ -12174,7 +16001,7 @@
                 </a:solidFill>
                 <a:latin typeface="Montserrat"/>
               </a:rPr>
-              <a:t>IMAGEN REALISTA</a:t>
+              <a:t>IMAGEN</a:t>
             </a:r>
           </a:p>
           <a:p>
@@ -12196,6 +16023,18 @@
   <p:clrMapOvr>
     <a:masterClrMapping/>
   </p:clrMapOvr>
+  <mc:AlternateContent xmlns:mc="http://schemas.openxmlformats.org/markup-compatibility/2006">
+    <mc:Choice xmlns:p14="http://schemas.microsoft.com/office/powerpoint/2010/main" Requires="p14">
+      <p:transition spd="med" p14:dur="700">
+        <p14:cube dir="r"/>
+      </p:transition>
+    </mc:Choice>
+    <mc:Fallback>
+      <p:transition spd="med">
+        <p:push dir="r"/>
+      </p:transition>
+    </mc:Fallback>
+  </mc:AlternateContent>
 </p:sld>
 </file>
 
@@ -12283,7 +16122,7 @@
                 </a:solidFill>
                 <a:latin typeface="Montserrat"/>
               </a:rPr>
-              <a:t>005 / 021</a:t>
+              <a:t>005 / 026</a:t>
             </a:r>
           </a:p>
         </p:txBody>
@@ -12392,7 +16231,7 @@
       </p:sp>
       <p:sp>
         <p:nvSpPr>
-          <p:cNvPr id="7" name="Rounded Rectangle 6"/>
+          <p:cNvPr id="7" name="Rectangle 6"/>
           <p:cNvSpPr/>
           <p:nvPr/>
         </p:nvSpPr>
@@ -12401,7 +16240,7 @@
             <a:off x="868680" y="1627632"/>
             <a:ext cx="2011680" cy="73152"/>
           </a:xfrm>
-          <a:prstGeom prst="roundRect">
+          <a:prstGeom prst="rect">
             <a:avLst/>
           </a:prstGeom>
           <a:solidFill>
@@ -12442,8 +16281,8 @@
         </p:nvSpPr>
         <p:spPr>
           <a:xfrm>
-            <a:off x="822960" y="1965960"/>
-            <a:ext cx="4983480" cy="4206240"/>
+            <a:off x="6355080" y="1965960"/>
+            <a:ext cx="5029200" cy="4206240"/>
           </a:xfrm>
           <a:prstGeom prst="rect">
             <a:avLst/>
@@ -12565,8 +16404,8 @@
         </p:nvSpPr>
         <p:spPr>
           <a:xfrm>
-            <a:off x="5806440" y="1051560"/>
-            <a:ext cx="5298947" cy="4629150"/>
+            <a:off x="822960" y="1965960"/>
+            <a:ext cx="5303520" cy="4572000"/>
           </a:xfrm>
           <a:prstGeom prst="roundRect">
             <a:avLst/>
@@ -12611,8 +16450,8 @@
         </p:nvSpPr>
         <p:spPr>
           <a:xfrm>
-            <a:off x="6080760" y="2726055"/>
-            <a:ext cx="4750307" cy="1280160"/>
+            <a:off x="1097280" y="3611880"/>
+            <a:ext cx="4754880" cy="1280160"/>
           </a:xfrm>
           <a:prstGeom prst="rect">
             <a:avLst/>
@@ -12633,7 +16472,7 @@
                 </a:solidFill>
                 <a:latin typeface="Montserrat"/>
               </a:rPr>
-              <a:t>IMAGEN REALISTA</a:t>
+              <a:t>IMAGEN</a:t>
             </a:r>
           </a:p>
           <a:p>
@@ -12655,6 +16494,18 @@
   <p:clrMapOvr>
     <a:masterClrMapping/>
   </p:clrMapOvr>
+  <mc:AlternateContent xmlns:mc="http://schemas.openxmlformats.org/markup-compatibility/2006">
+    <mc:Choice xmlns:p14="http://schemas.microsoft.com/office/powerpoint/2010/main" Requires="p14">
+      <p:transition spd="med" p14:dur="700">
+        <p14:cube dir="l"/>
+      </p:transition>
+    </mc:Choice>
+    <mc:Fallback>
+      <p:transition spd="med">
+        <p:push dir="l"/>
+      </p:transition>
+    </mc:Fallback>
+  </mc:AlternateContent>
 </p:sld>
 </file>
 
@@ -12742,7 +16593,7 @@
                 </a:solidFill>
                 <a:latin typeface="Montserrat"/>
               </a:rPr>
-              <a:t>006 / 021</a:t>
+              <a:t>006 / 026</a:t>
             </a:r>
           </a:p>
         </p:txBody>
@@ -12851,7 +16702,7 @@
       </p:sp>
       <p:sp>
         <p:nvSpPr>
-          <p:cNvPr id="7" name="Rounded Rectangle 6"/>
+          <p:cNvPr id="7" name="Rectangle 6"/>
           <p:cNvSpPr/>
           <p:nvPr/>
         </p:nvSpPr>
@@ -12860,7 +16711,7 @@
             <a:off x="868680" y="1627632"/>
             <a:ext cx="2011680" cy="73152"/>
           </a:xfrm>
-          <a:prstGeom prst="roundRect">
+          <a:prstGeom prst="rect">
             <a:avLst/>
           </a:prstGeom>
           <a:solidFill>
@@ -12902,7 +16753,7 @@
         <p:spPr>
           <a:xfrm>
             <a:off x="822960" y="1965960"/>
-            <a:ext cx="4983480" cy="4206240"/>
+            <a:ext cx="5029200" cy="4206240"/>
           </a:xfrm>
           <a:prstGeom prst="rect">
             <a:avLst/>
@@ -12999,8 +16850,8 @@
         </p:nvSpPr>
         <p:spPr>
           <a:xfrm>
-            <a:off x="5806440" y="1051560"/>
-            <a:ext cx="5298947" cy="4629150"/>
+            <a:off x="6080760" y="1965960"/>
+            <a:ext cx="5303520" cy="4572000"/>
           </a:xfrm>
           <a:prstGeom prst="roundRect">
             <a:avLst/>
@@ -13045,8 +16896,8 @@
         </p:nvSpPr>
         <p:spPr>
           <a:xfrm>
-            <a:off x="6080760" y="2726055"/>
-            <a:ext cx="4750307" cy="1280160"/>
+            <a:off x="6355080" y="3611880"/>
+            <a:ext cx="4754880" cy="1280160"/>
           </a:xfrm>
           <a:prstGeom prst="rect">
             <a:avLst/>
@@ -13067,7 +16918,7 @@
                 </a:solidFill>
                 <a:latin typeface="Montserrat"/>
               </a:rPr>
-              <a:t>IMAGEN REALISTA</a:t>
+              <a:t>IMAGEN</a:t>
             </a:r>
           </a:p>
           <a:p>
@@ -13089,6 +16940,18 @@
   <p:clrMapOvr>
     <a:masterClrMapping/>
   </p:clrMapOvr>
+  <mc:AlternateContent xmlns:mc="http://schemas.openxmlformats.org/markup-compatibility/2006">
+    <mc:Choice xmlns:p14="http://schemas.microsoft.com/office/powerpoint/2010/main" Requires="p14">
+      <p:transition spd="med" p14:dur="700">
+        <p14:cube dir="r"/>
+      </p:transition>
+    </mc:Choice>
+    <mc:Fallback>
+      <p:transition spd="med">
+        <p:push dir="r"/>
+      </p:transition>
+    </mc:Fallback>
+  </mc:AlternateContent>
 </p:sld>
 </file>
 
@@ -13176,7 +17039,7 @@
                 </a:solidFill>
                 <a:latin typeface="Montserrat"/>
               </a:rPr>
-              <a:t>007 / 021</a:t>
+              <a:t>007 / 026</a:t>
             </a:r>
           </a:p>
         </p:txBody>
@@ -13285,7 +17148,7 @@
       </p:sp>
       <p:sp>
         <p:nvSpPr>
-          <p:cNvPr id="7" name="Rounded Rectangle 6"/>
+          <p:cNvPr id="7" name="Rectangle 6"/>
           <p:cNvSpPr/>
           <p:nvPr/>
         </p:nvSpPr>
@@ -13294,7 +17157,7 @@
             <a:off x="868680" y="1627632"/>
             <a:ext cx="2011680" cy="73152"/>
           </a:xfrm>
-          <a:prstGeom prst="roundRect">
+          <a:prstGeom prst="rect">
             <a:avLst/>
           </a:prstGeom>
           <a:solidFill>
@@ -13335,8 +17198,8 @@
         </p:nvSpPr>
         <p:spPr>
           <a:xfrm>
-            <a:off x="822960" y="1965960"/>
-            <a:ext cx="4983480" cy="4206240"/>
+            <a:off x="6355080" y="1965960"/>
+            <a:ext cx="5029200" cy="4206240"/>
           </a:xfrm>
           <a:prstGeom prst="rect">
             <a:avLst/>
@@ -13458,8 +17321,8 @@
         </p:nvSpPr>
         <p:spPr>
           <a:xfrm>
-            <a:off x="5806440" y="1051560"/>
-            <a:ext cx="5298947" cy="4629150"/>
+            <a:off x="822960" y="1965960"/>
+            <a:ext cx="5303520" cy="4572000"/>
           </a:xfrm>
           <a:prstGeom prst="roundRect">
             <a:avLst/>
@@ -13504,8 +17367,8 @@
         </p:nvSpPr>
         <p:spPr>
           <a:xfrm>
-            <a:off x="6080760" y="2726055"/>
-            <a:ext cx="4750307" cy="1280160"/>
+            <a:off x="1097280" y="3611880"/>
+            <a:ext cx="4754880" cy="1280160"/>
           </a:xfrm>
           <a:prstGeom prst="rect">
             <a:avLst/>
@@ -13526,7 +17389,7 @@
                 </a:solidFill>
                 <a:latin typeface="Montserrat"/>
               </a:rPr>
-              <a:t>IMAGEN REALISTA</a:t>
+              <a:t>IMAGEN</a:t>
             </a:r>
           </a:p>
           <a:p>
@@ -13548,6 +17411,18 @@
   <p:clrMapOvr>
     <a:masterClrMapping/>
   </p:clrMapOvr>
+  <mc:AlternateContent xmlns:mc="http://schemas.openxmlformats.org/markup-compatibility/2006">
+    <mc:Choice xmlns:p14="http://schemas.microsoft.com/office/powerpoint/2010/main" Requires="p14">
+      <p:transition spd="med" p14:dur="700">
+        <p14:cube dir="l"/>
+      </p:transition>
+    </mc:Choice>
+    <mc:Fallback>
+      <p:transition spd="med">
+        <p:push dir="l"/>
+      </p:transition>
+    </mc:Fallback>
+  </mc:AlternateContent>
 </p:sld>
 </file>
 
@@ -13635,7 +17510,7 @@
                 </a:solidFill>
                 <a:latin typeface="Montserrat"/>
               </a:rPr>
-              <a:t>008 / 021</a:t>
+              <a:t>008 / 026</a:t>
             </a:r>
           </a:p>
         </p:txBody>
@@ -13676,84 +17551,16 @@
       </p:sp>
       <p:sp>
         <p:nvSpPr>
-          <p:cNvPr id="5" name="TextBox 4"/>
-          <p:cNvSpPr txBox="1"/>
-          <p:nvPr/>
-        </p:nvSpPr>
-        <p:spPr>
-          <a:xfrm>
-            <a:off x="822960" y="457200"/>
-            <a:ext cx="10058400" cy="365760"/>
-          </a:xfrm>
-          <a:prstGeom prst="rect">
-            <a:avLst/>
-          </a:prstGeom>
-          <a:noFill/>
-        </p:spPr>
-        <p:txBody>
-          <a:bodyPr wrap="square">
-            <a:spAutoFit/>
-          </a:bodyPr>
-          <a:lstStyle/>
-          <a:p>
-            <a:r>
-              <a:rPr sz="1300" b="1" i="0">
-                <a:solidFill>
-                  <a:srgbClr val="E8801A"/>
-                </a:solidFill>
-                <a:latin typeface="Montserrat"/>
-              </a:rPr>
-              <a:t>APARTADO 5.3 · MEMORIA</a:t>
-            </a:r>
-          </a:p>
-        </p:txBody>
-      </p:sp>
-      <p:sp>
-        <p:nvSpPr>
-          <p:cNvPr id="6" name="TextBox 5"/>
-          <p:cNvSpPr txBox="1"/>
-          <p:nvPr/>
-        </p:nvSpPr>
-        <p:spPr>
-          <a:xfrm>
-            <a:off x="822960" y="868680"/>
-            <a:ext cx="10515600" cy="914400"/>
-          </a:xfrm>
-          <a:prstGeom prst="rect">
-            <a:avLst/>
-          </a:prstGeom>
-          <a:noFill/>
-        </p:spPr>
-        <p:txBody>
-          <a:bodyPr wrap="square">
-            <a:spAutoFit/>
-          </a:bodyPr>
-          <a:lstStyle/>
-          <a:p>
-            <a:r>
-              <a:rPr sz="2800" b="1" i="0">
-                <a:solidFill>
-                  <a:srgbClr val="1E2761"/>
-                </a:solidFill>
-                <a:latin typeface="Montserrat"/>
-              </a:rPr>
-              <a:t>Memoria o proyecto: quién firma</a:t>
-            </a:r>
-          </a:p>
-        </p:txBody>
-      </p:sp>
-      <p:sp>
-        <p:nvSpPr>
-          <p:cNvPr id="7" name="Rounded Rectangle 6"/>
+          <p:cNvPr id="5" name="Rectangle 4"/>
           <p:cNvSpPr/>
           <p:nvPr/>
         </p:nvSpPr>
         <p:spPr>
           <a:xfrm>
-            <a:off x="868680" y="1627632"/>
-            <a:ext cx="2011680" cy="73152"/>
-          </a:xfrm>
-          <a:prstGeom prst="roundRect">
+            <a:off x="0" y="0"/>
+            <a:ext cx="12191695" cy="1143000"/>
+          </a:xfrm>
+          <a:prstGeom prst="rect">
             <a:avLst/>
           </a:prstGeom>
           <a:solidFill>
@@ -13788,14 +17595,14 @@
       </p:sp>
       <p:sp>
         <p:nvSpPr>
-          <p:cNvPr id="8" name="TextBox 7"/>
+          <p:cNvPr id="6" name="TextBox 5"/>
           <p:cNvSpPr txBox="1"/>
           <p:nvPr/>
         </p:nvSpPr>
         <p:spPr>
           <a:xfrm>
-            <a:off x="822960" y="1965960"/>
-            <a:ext cx="4983480" cy="4206240"/>
+            <a:off x="822960" y="274320"/>
+            <a:ext cx="10515600" cy="640080"/>
           </a:xfrm>
           <a:prstGeom prst="rect">
             <a:avLst/>
@@ -13808,117 +17615,62 @@
           </a:bodyPr>
           <a:lstStyle/>
           <a:p>
-            <a:pPr>
-              <a:spcAft>
-                <a:spcPts val="1100"/>
-              </a:spcAft>
-            </a:pPr>
-            <a:r>
-              <a:rPr sz="1600" b="1" i="0">
-                <a:solidFill>
-                  <a:srgbClr val="E8801A"/>
-                </a:solidFill>
-                <a:latin typeface="Montserrat"/>
-              </a:rPr>
-              <a:t>▸  </a:t>
-            </a:r>
-            <a:r>
-              <a:rPr sz="1600" b="0" i="0">
-                <a:solidFill>
-                  <a:srgbClr val="1B2330"/>
-                </a:solidFill>
-                <a:latin typeface="Montserrat"/>
-              </a:rPr>
-              <a:t>Instalación normal: memoria técnica</a:t>
-            </a:r>
-          </a:p>
-          <a:p>
-            <a:pPr>
-              <a:spcAft>
-                <a:spcPts val="1100"/>
-              </a:spcAft>
-            </a:pPr>
-            <a:r>
-              <a:rPr sz="1600" b="1" i="0">
-                <a:solidFill>
-                  <a:srgbClr val="E8801A"/>
-                </a:solidFill>
-                <a:latin typeface="Montserrat"/>
-              </a:rPr>
-              <a:t>▸  </a:t>
-            </a:r>
-            <a:r>
-              <a:rPr sz="1600" b="0" i="0">
-                <a:solidFill>
-                  <a:srgbClr val="1B2330"/>
-                </a:solidFill>
-                <a:latin typeface="Montserrat"/>
-              </a:rPr>
-              <a:t>La memoria la firma el instalador</a:t>
-            </a:r>
-          </a:p>
-          <a:p>
-            <a:pPr>
-              <a:spcAft>
-                <a:spcPts val="1100"/>
-              </a:spcAft>
-            </a:pPr>
-            <a:r>
-              <a:rPr sz="1600" b="1" i="0">
-                <a:solidFill>
-                  <a:srgbClr val="E8801A"/>
-                </a:solidFill>
-                <a:latin typeface="Montserrat"/>
-              </a:rPr>
-              <a:t>▸  </a:t>
-            </a:r>
-            <a:r>
-              <a:rPr sz="1600" b="0" i="0">
-                <a:solidFill>
-                  <a:srgbClr val="1B2330"/>
-                </a:solidFill>
-                <a:latin typeface="Montserrat"/>
-              </a:rPr>
-              <a:t>Instalación grande: proyecto</a:t>
-            </a:r>
-          </a:p>
-          <a:p>
-            <a:pPr>
-              <a:spcAft>
-                <a:spcPts val="1100"/>
-              </a:spcAft>
-            </a:pPr>
-            <a:r>
-              <a:rPr sz="1600" b="1" i="0">
-                <a:solidFill>
-                  <a:srgbClr val="E8801A"/>
-                </a:solidFill>
-                <a:latin typeface="Montserrat"/>
-              </a:rPr>
-              <a:t>▸  </a:t>
-            </a:r>
-            <a:r>
-              <a:rPr sz="1600" b="0" i="0">
-                <a:solidFill>
-                  <a:srgbClr val="1B2330"/>
-                </a:solidFill>
-                <a:latin typeface="Montserrat"/>
-              </a:rPr>
-              <a:t>El proyecto lo firma el técnico</a:t>
-            </a:r>
-          </a:p>
-        </p:txBody>
-      </p:sp>
-      <p:sp>
-        <p:nvSpPr>
-          <p:cNvPr id="9" name="imgph" descr="IMGQ:gas installer signing paperwork"/>
+            <a:r>
+              <a:rPr sz="2400" b="1" i="0">
+                <a:solidFill>
+                  <a:srgbClr val="FFFFFF"/>
+                </a:solidFill>
+                <a:latin typeface="Montserrat"/>
+              </a:rPr>
+              <a:t>⚡  PREGUNTA RÁPIDA</a:t>
+            </a:r>
+          </a:p>
+        </p:txBody>
+      </p:sp>
+      <p:sp>
+        <p:nvSpPr>
+          <p:cNvPr id="7" name="TextBox 6"/>
+          <p:cNvSpPr txBox="1"/>
+          <p:nvPr/>
+        </p:nvSpPr>
+        <p:spPr>
+          <a:xfrm>
+            <a:off x="822960" y="1508760"/>
+            <a:ext cx="10515600" cy="1371600"/>
+          </a:xfrm>
+          <a:prstGeom prst="rect">
+            <a:avLst/>
+          </a:prstGeom>
+          <a:noFill/>
+        </p:spPr>
+        <p:txBody>
+          <a:bodyPr wrap="square">
+            <a:spAutoFit/>
+          </a:bodyPr>
+          <a:lstStyle/>
+          <a:p>
+            <a:r>
+              <a:rPr sz="2400" b="1" i="0">
+                <a:solidFill>
+                  <a:srgbClr val="1E2761"/>
+                </a:solidFill>
+                <a:latin typeface="Montserrat"/>
+              </a:rPr>
+              <a:t>¿A partir de qué capacidad un depósito fijo de GLP exige proyecto en vez de memoria?</a:t>
+            </a:r>
+          </a:p>
+        </p:txBody>
+      </p:sp>
+      <p:sp>
+        <p:nvSpPr>
+          <p:cNvPr id="8" name="Rounded Rectangle 7"/>
           <p:cNvSpPr/>
           <p:nvPr/>
         </p:nvSpPr>
         <p:spPr>
           <a:xfrm>
-            <a:off x="5806440" y="1051560"/>
-            <a:ext cx="5298947" cy="4629150"/>
+            <a:off x="822960" y="3291840"/>
+            <a:ext cx="4983480" cy="1143000"/>
           </a:xfrm>
           <a:prstGeom prst="roundRect">
             <a:avLst/>
@@ -13957,14 +17709,58 @@
       </p:sp>
       <p:sp>
         <p:nvSpPr>
+          <p:cNvPr id="9" name="Rectangle 8"/>
+          <p:cNvSpPr/>
+          <p:nvPr/>
+        </p:nvSpPr>
+        <p:spPr>
+          <a:xfrm>
+            <a:off x="822960" y="3291840"/>
+            <a:ext cx="640080" cy="1143000"/>
+          </a:xfrm>
+          <a:prstGeom prst="rect">
+            <a:avLst/>
+          </a:prstGeom>
+          <a:solidFill>
+            <a:srgbClr val="1E2761"/>
+          </a:solidFill>
+          <a:ln>
+            <a:noFill/>
+          </a:ln>
+          <a:effectLst/>
+        </p:spPr>
+        <p:style>
+          <a:lnRef idx="1">
+            <a:schemeClr val="accent1"/>
+          </a:lnRef>
+          <a:fillRef idx="3">
+            <a:schemeClr val="accent1"/>
+          </a:fillRef>
+          <a:effectRef idx="2">
+            <a:schemeClr val="accent1"/>
+          </a:effectRef>
+          <a:fontRef idx="minor">
+            <a:schemeClr val="lt1"/>
+          </a:fontRef>
+        </p:style>
+        <p:txBody>
+          <a:bodyPr rtlCol="0" anchor="ctr"/>
+          <a:lstStyle/>
+          <a:p>
+            <a:pPr algn="ctr"/>
+          </a:p>
+        </p:txBody>
+      </p:sp>
+      <p:sp>
+        <p:nvSpPr>
           <p:cNvPr id="10" name="TextBox 9"/>
           <p:cNvSpPr txBox="1"/>
           <p:nvPr/>
         </p:nvSpPr>
         <p:spPr>
           <a:xfrm>
-            <a:off x="6080760" y="2726055"/>
-            <a:ext cx="4750307" cy="1280160"/>
+            <a:off x="822960" y="3611880"/>
+            <a:ext cx="640080" cy="548640"/>
           </a:xfrm>
           <a:prstGeom prst="rect">
             <a:avLst/>
@@ -13979,25 +17775,524 @@
           <a:p>
             <a:pPr algn="ctr"/>
             <a:r>
-              <a:rPr sz="1400" b="1" i="0">
-                <a:solidFill>
-                  <a:srgbClr val="64748B"/>
-                </a:solidFill>
-                <a:latin typeface="Montserrat"/>
-              </a:rPr>
-              <a:t>IMAGEN REALISTA</a:t>
-            </a:r>
-          </a:p>
+              <a:rPr sz="2200" b="1" i="0">
+                <a:solidFill>
+                  <a:srgbClr val="FFFFFF"/>
+                </a:solidFill>
+                <a:latin typeface="Montserrat"/>
+              </a:rPr>
+              <a:t>A</a:t>
+            </a:r>
+          </a:p>
+        </p:txBody>
+      </p:sp>
+      <p:sp>
+        <p:nvSpPr>
+          <p:cNvPr id="11" name="TextBox 10"/>
+          <p:cNvSpPr txBox="1"/>
+          <p:nvPr/>
+        </p:nvSpPr>
+        <p:spPr>
+          <a:xfrm>
+            <a:off x="1600200" y="3474720"/>
+            <a:ext cx="4114800" cy="868680"/>
+          </a:xfrm>
+          <a:prstGeom prst="rect">
+            <a:avLst/>
+          </a:prstGeom>
+          <a:noFill/>
+        </p:spPr>
+        <p:txBody>
+          <a:bodyPr wrap="square">
+            <a:spAutoFit/>
+          </a:bodyPr>
+          <a:lstStyle/>
+          <a:p>
+            <a:r>
+              <a:rPr sz="1400" b="0" i="0">
+                <a:solidFill>
+                  <a:srgbClr val="1B2330"/>
+                </a:solidFill>
+                <a:latin typeface="Montserrat"/>
+              </a:rPr>
+              <a:t>Más de 10 m³</a:t>
+            </a:r>
+          </a:p>
+        </p:txBody>
+      </p:sp>
+      <p:sp>
+        <p:nvSpPr>
+          <p:cNvPr id="12" name="Rounded Rectangle 11"/>
+          <p:cNvSpPr/>
+          <p:nvPr/>
+        </p:nvSpPr>
+        <p:spPr>
+          <a:xfrm>
+            <a:off x="6355080" y="3291840"/>
+            <a:ext cx="4983480" cy="1143000"/>
+          </a:xfrm>
+          <a:prstGeom prst="roundRect">
+            <a:avLst/>
+          </a:prstGeom>
+          <a:solidFill>
+            <a:srgbClr val="F3F6FB"/>
+          </a:solidFill>
+          <a:ln w="12700">
+            <a:solidFill>
+              <a:srgbClr val="C7D2E6"/>
+            </a:solidFill>
+          </a:ln>
+          <a:effectLst/>
+        </p:spPr>
+        <p:style>
+          <a:lnRef idx="1">
+            <a:schemeClr val="accent1"/>
+          </a:lnRef>
+          <a:fillRef idx="3">
+            <a:schemeClr val="accent1"/>
+          </a:fillRef>
+          <a:effectRef idx="2">
+            <a:schemeClr val="accent1"/>
+          </a:effectRef>
+          <a:fontRef idx="minor">
+            <a:schemeClr val="lt1"/>
+          </a:fontRef>
+        </p:style>
+        <p:txBody>
+          <a:bodyPr rtlCol="0" anchor="ctr"/>
+          <a:lstStyle/>
           <a:p>
             <a:pPr algn="ctr"/>
-            <a:r>
-              <a:rPr sz="1100" b="0" i="1">
-                <a:solidFill>
-                  <a:srgbClr val="64748B"/>
-                </a:solidFill>
-                <a:latin typeface="Montserrat"/>
-              </a:rPr>
-              <a:t>gas installer signing paperwork</a:t>
+          </a:p>
+        </p:txBody>
+      </p:sp>
+      <p:sp>
+        <p:nvSpPr>
+          <p:cNvPr id="13" name="Rectangle 12"/>
+          <p:cNvSpPr/>
+          <p:nvPr/>
+        </p:nvSpPr>
+        <p:spPr>
+          <a:xfrm>
+            <a:off x="6355080" y="3291840"/>
+            <a:ext cx="640080" cy="1143000"/>
+          </a:xfrm>
+          <a:prstGeom prst="rect">
+            <a:avLst/>
+          </a:prstGeom>
+          <a:solidFill>
+            <a:srgbClr val="1E2761"/>
+          </a:solidFill>
+          <a:ln>
+            <a:noFill/>
+          </a:ln>
+          <a:effectLst/>
+        </p:spPr>
+        <p:style>
+          <a:lnRef idx="1">
+            <a:schemeClr val="accent1"/>
+          </a:lnRef>
+          <a:fillRef idx="3">
+            <a:schemeClr val="accent1"/>
+          </a:fillRef>
+          <a:effectRef idx="2">
+            <a:schemeClr val="accent1"/>
+          </a:effectRef>
+          <a:fontRef idx="minor">
+            <a:schemeClr val="lt1"/>
+          </a:fontRef>
+        </p:style>
+        <p:txBody>
+          <a:bodyPr rtlCol="0" anchor="ctr"/>
+          <a:lstStyle/>
+          <a:p>
+            <a:pPr algn="ctr"/>
+          </a:p>
+        </p:txBody>
+      </p:sp>
+      <p:sp>
+        <p:nvSpPr>
+          <p:cNvPr id="14" name="TextBox 13"/>
+          <p:cNvSpPr txBox="1"/>
+          <p:nvPr/>
+        </p:nvSpPr>
+        <p:spPr>
+          <a:xfrm>
+            <a:off x="6355080" y="3611880"/>
+            <a:ext cx="640080" cy="548640"/>
+          </a:xfrm>
+          <a:prstGeom prst="rect">
+            <a:avLst/>
+          </a:prstGeom>
+          <a:noFill/>
+        </p:spPr>
+        <p:txBody>
+          <a:bodyPr wrap="square">
+            <a:spAutoFit/>
+          </a:bodyPr>
+          <a:lstStyle/>
+          <a:p>
+            <a:pPr algn="ctr"/>
+            <a:r>
+              <a:rPr sz="2200" b="1" i="0">
+                <a:solidFill>
+                  <a:srgbClr val="FFFFFF"/>
+                </a:solidFill>
+                <a:latin typeface="Montserrat"/>
+              </a:rPr>
+              <a:t>B</a:t>
+            </a:r>
+          </a:p>
+        </p:txBody>
+      </p:sp>
+      <p:sp>
+        <p:nvSpPr>
+          <p:cNvPr id="15" name="TextBox 14"/>
+          <p:cNvSpPr txBox="1"/>
+          <p:nvPr/>
+        </p:nvSpPr>
+        <p:spPr>
+          <a:xfrm>
+            <a:off x="7132320" y="3474720"/>
+            <a:ext cx="4114800" cy="868680"/>
+          </a:xfrm>
+          <a:prstGeom prst="rect">
+            <a:avLst/>
+          </a:prstGeom>
+          <a:noFill/>
+        </p:spPr>
+        <p:txBody>
+          <a:bodyPr wrap="square">
+            <a:spAutoFit/>
+          </a:bodyPr>
+          <a:lstStyle/>
+          <a:p>
+            <a:r>
+              <a:rPr sz="1400" b="0" i="0">
+                <a:solidFill>
+                  <a:srgbClr val="1B2330"/>
+                </a:solidFill>
+                <a:latin typeface="Montserrat"/>
+              </a:rPr>
+              <a:t>Más de 13 m³</a:t>
+            </a:r>
+          </a:p>
+        </p:txBody>
+      </p:sp>
+      <p:sp>
+        <p:nvSpPr>
+          <p:cNvPr id="16" name="Rounded Rectangle 15"/>
+          <p:cNvSpPr/>
+          <p:nvPr/>
+        </p:nvSpPr>
+        <p:spPr>
+          <a:xfrm>
+            <a:off x="822960" y="4617720"/>
+            <a:ext cx="4983480" cy="1143000"/>
+          </a:xfrm>
+          <a:prstGeom prst="roundRect">
+            <a:avLst/>
+          </a:prstGeom>
+          <a:solidFill>
+            <a:srgbClr val="F3F6FB"/>
+          </a:solidFill>
+          <a:ln w="12700">
+            <a:solidFill>
+              <a:srgbClr val="C7D2E6"/>
+            </a:solidFill>
+          </a:ln>
+          <a:effectLst/>
+        </p:spPr>
+        <p:style>
+          <a:lnRef idx="1">
+            <a:schemeClr val="accent1"/>
+          </a:lnRef>
+          <a:fillRef idx="3">
+            <a:schemeClr val="accent1"/>
+          </a:fillRef>
+          <a:effectRef idx="2">
+            <a:schemeClr val="accent1"/>
+          </a:effectRef>
+          <a:fontRef idx="minor">
+            <a:schemeClr val="lt1"/>
+          </a:fontRef>
+        </p:style>
+        <p:txBody>
+          <a:bodyPr rtlCol="0" anchor="ctr"/>
+          <a:lstStyle/>
+          <a:p>
+            <a:pPr algn="ctr"/>
+          </a:p>
+        </p:txBody>
+      </p:sp>
+      <p:sp>
+        <p:nvSpPr>
+          <p:cNvPr id="17" name="Rectangle 16"/>
+          <p:cNvSpPr/>
+          <p:nvPr/>
+        </p:nvSpPr>
+        <p:spPr>
+          <a:xfrm>
+            <a:off x="822960" y="4617720"/>
+            <a:ext cx="640080" cy="1143000"/>
+          </a:xfrm>
+          <a:prstGeom prst="rect">
+            <a:avLst/>
+          </a:prstGeom>
+          <a:solidFill>
+            <a:srgbClr val="1E2761"/>
+          </a:solidFill>
+          <a:ln>
+            <a:noFill/>
+          </a:ln>
+          <a:effectLst/>
+        </p:spPr>
+        <p:style>
+          <a:lnRef idx="1">
+            <a:schemeClr val="accent1"/>
+          </a:lnRef>
+          <a:fillRef idx="3">
+            <a:schemeClr val="accent1"/>
+          </a:fillRef>
+          <a:effectRef idx="2">
+            <a:schemeClr val="accent1"/>
+          </a:effectRef>
+          <a:fontRef idx="minor">
+            <a:schemeClr val="lt1"/>
+          </a:fontRef>
+        </p:style>
+        <p:txBody>
+          <a:bodyPr rtlCol="0" anchor="ctr"/>
+          <a:lstStyle/>
+          <a:p>
+            <a:pPr algn="ctr"/>
+          </a:p>
+        </p:txBody>
+      </p:sp>
+      <p:sp>
+        <p:nvSpPr>
+          <p:cNvPr id="18" name="TextBox 17"/>
+          <p:cNvSpPr txBox="1"/>
+          <p:nvPr/>
+        </p:nvSpPr>
+        <p:spPr>
+          <a:xfrm>
+            <a:off x="822960" y="4937760"/>
+            <a:ext cx="640080" cy="548640"/>
+          </a:xfrm>
+          <a:prstGeom prst="rect">
+            <a:avLst/>
+          </a:prstGeom>
+          <a:noFill/>
+        </p:spPr>
+        <p:txBody>
+          <a:bodyPr wrap="square">
+            <a:spAutoFit/>
+          </a:bodyPr>
+          <a:lstStyle/>
+          <a:p>
+            <a:pPr algn="ctr"/>
+            <a:r>
+              <a:rPr sz="2200" b="1" i="0">
+                <a:solidFill>
+                  <a:srgbClr val="FFFFFF"/>
+                </a:solidFill>
+                <a:latin typeface="Montserrat"/>
+              </a:rPr>
+              <a:t>C</a:t>
+            </a:r>
+          </a:p>
+        </p:txBody>
+      </p:sp>
+      <p:sp>
+        <p:nvSpPr>
+          <p:cNvPr id="19" name="TextBox 18"/>
+          <p:cNvSpPr txBox="1"/>
+          <p:nvPr/>
+        </p:nvSpPr>
+        <p:spPr>
+          <a:xfrm>
+            <a:off x="1600200" y="4800600"/>
+            <a:ext cx="4114800" cy="868680"/>
+          </a:xfrm>
+          <a:prstGeom prst="rect">
+            <a:avLst/>
+          </a:prstGeom>
+          <a:noFill/>
+        </p:spPr>
+        <p:txBody>
+          <a:bodyPr wrap="square">
+            <a:spAutoFit/>
+          </a:bodyPr>
+          <a:lstStyle/>
+          <a:p>
+            <a:r>
+              <a:rPr sz="1400" b="0" i="0">
+                <a:solidFill>
+                  <a:srgbClr val="1B2330"/>
+                </a:solidFill>
+                <a:latin typeface="Montserrat"/>
+              </a:rPr>
+              <a:t>Más de 15 m³</a:t>
+            </a:r>
+          </a:p>
+        </p:txBody>
+      </p:sp>
+      <p:sp>
+        <p:nvSpPr>
+          <p:cNvPr id="20" name="Rounded Rectangle 19"/>
+          <p:cNvSpPr/>
+          <p:nvPr/>
+        </p:nvSpPr>
+        <p:spPr>
+          <a:xfrm>
+            <a:off x="6355080" y="4617720"/>
+            <a:ext cx="4983480" cy="1143000"/>
+          </a:xfrm>
+          <a:prstGeom prst="roundRect">
+            <a:avLst/>
+          </a:prstGeom>
+          <a:solidFill>
+            <a:srgbClr val="F3F6FB"/>
+          </a:solidFill>
+          <a:ln w="12700">
+            <a:solidFill>
+              <a:srgbClr val="C7D2E6"/>
+            </a:solidFill>
+          </a:ln>
+          <a:effectLst/>
+        </p:spPr>
+        <p:style>
+          <a:lnRef idx="1">
+            <a:schemeClr val="accent1"/>
+          </a:lnRef>
+          <a:fillRef idx="3">
+            <a:schemeClr val="accent1"/>
+          </a:fillRef>
+          <a:effectRef idx="2">
+            <a:schemeClr val="accent1"/>
+          </a:effectRef>
+          <a:fontRef idx="minor">
+            <a:schemeClr val="lt1"/>
+          </a:fontRef>
+        </p:style>
+        <p:txBody>
+          <a:bodyPr rtlCol="0" anchor="ctr"/>
+          <a:lstStyle/>
+          <a:p>
+            <a:pPr algn="ctr"/>
+          </a:p>
+        </p:txBody>
+      </p:sp>
+      <p:sp>
+        <p:nvSpPr>
+          <p:cNvPr id="21" name="Rectangle 20"/>
+          <p:cNvSpPr/>
+          <p:nvPr/>
+        </p:nvSpPr>
+        <p:spPr>
+          <a:xfrm>
+            <a:off x="6355080" y="4617720"/>
+            <a:ext cx="640080" cy="1143000"/>
+          </a:xfrm>
+          <a:prstGeom prst="rect">
+            <a:avLst/>
+          </a:prstGeom>
+          <a:solidFill>
+            <a:srgbClr val="1E2761"/>
+          </a:solidFill>
+          <a:ln>
+            <a:noFill/>
+          </a:ln>
+          <a:effectLst/>
+        </p:spPr>
+        <p:style>
+          <a:lnRef idx="1">
+            <a:schemeClr val="accent1"/>
+          </a:lnRef>
+          <a:fillRef idx="3">
+            <a:schemeClr val="accent1"/>
+          </a:fillRef>
+          <a:effectRef idx="2">
+            <a:schemeClr val="accent1"/>
+          </a:effectRef>
+          <a:fontRef idx="minor">
+            <a:schemeClr val="lt1"/>
+          </a:fontRef>
+        </p:style>
+        <p:txBody>
+          <a:bodyPr rtlCol="0" anchor="ctr"/>
+          <a:lstStyle/>
+          <a:p>
+            <a:pPr algn="ctr"/>
+          </a:p>
+        </p:txBody>
+      </p:sp>
+      <p:sp>
+        <p:nvSpPr>
+          <p:cNvPr id="22" name="TextBox 21"/>
+          <p:cNvSpPr txBox="1"/>
+          <p:nvPr/>
+        </p:nvSpPr>
+        <p:spPr>
+          <a:xfrm>
+            <a:off x="6355080" y="4937760"/>
+            <a:ext cx="640080" cy="548640"/>
+          </a:xfrm>
+          <a:prstGeom prst="rect">
+            <a:avLst/>
+          </a:prstGeom>
+          <a:noFill/>
+        </p:spPr>
+        <p:txBody>
+          <a:bodyPr wrap="square">
+            <a:spAutoFit/>
+          </a:bodyPr>
+          <a:lstStyle/>
+          <a:p>
+            <a:pPr algn="ctr"/>
+            <a:r>
+              <a:rPr sz="2200" b="1" i="0">
+                <a:solidFill>
+                  <a:srgbClr val="FFFFFF"/>
+                </a:solidFill>
+                <a:latin typeface="Montserrat"/>
+              </a:rPr>
+              <a:t>D</a:t>
+            </a:r>
+          </a:p>
+        </p:txBody>
+      </p:sp>
+      <p:sp>
+        <p:nvSpPr>
+          <p:cNvPr id="23" name="TextBox 22"/>
+          <p:cNvSpPr txBox="1"/>
+          <p:nvPr/>
+        </p:nvSpPr>
+        <p:spPr>
+          <a:xfrm>
+            <a:off x="7132320" y="4800600"/>
+            <a:ext cx="4114800" cy="868680"/>
+          </a:xfrm>
+          <a:prstGeom prst="rect">
+            <a:avLst/>
+          </a:prstGeom>
+          <a:noFill/>
+        </p:spPr>
+        <p:txBody>
+          <a:bodyPr wrap="square">
+            <a:spAutoFit/>
+          </a:bodyPr>
+          <a:lstStyle/>
+          <a:p>
+            <a:r>
+              <a:rPr sz="1400" b="0" i="0">
+                <a:solidFill>
+                  <a:srgbClr val="1B2330"/>
+                </a:solidFill>
+                <a:latin typeface="Montserrat"/>
+              </a:rPr>
+              <a:t>Más de 500 m³</a:t>
             </a:r>
           </a:p>
         </p:txBody>
@@ -14007,6 +18302,18 @@
   <p:clrMapOvr>
     <a:masterClrMapping/>
   </p:clrMapOvr>
+  <mc:AlternateContent xmlns:mc="http://schemas.openxmlformats.org/markup-compatibility/2006">
+    <mc:Choice xmlns:p14="http://schemas.microsoft.com/office/powerpoint/2010/main" Requires="p14">
+      <p:transition spd="med" p14:dur="700">
+        <p14:cube dir="r"/>
+      </p:transition>
+    </mc:Choice>
+    <mc:Fallback>
+      <p:transition spd="med">
+        <p:push dir="r"/>
+      </p:transition>
+    </mc:Fallback>
+  </mc:AlternateContent>
 </p:sld>
 </file>
 
@@ -14094,7 +18401,7 @@
                 </a:solidFill>
                 <a:latin typeface="Montserrat"/>
               </a:rPr>
-              <a:t>009 / 021</a:t>
+              <a:t>009 / 026</a:t>
             </a:r>
           </a:p>
         </p:txBody>
@@ -14135,88 +18442,20 @@
       </p:sp>
       <p:sp>
         <p:nvSpPr>
-          <p:cNvPr id="5" name="TextBox 4"/>
-          <p:cNvSpPr txBox="1"/>
-          <p:nvPr/>
-        </p:nvSpPr>
-        <p:spPr>
-          <a:xfrm>
-            <a:off x="822960" y="457200"/>
-            <a:ext cx="10058400" cy="365760"/>
-          </a:xfrm>
-          <a:prstGeom prst="rect">
-            <a:avLst/>
-          </a:prstGeom>
-          <a:noFill/>
-        </p:spPr>
-        <p:txBody>
-          <a:bodyPr wrap="square">
-            <a:spAutoFit/>
-          </a:bodyPr>
-          <a:lstStyle/>
-          <a:p>
-            <a:r>
-              <a:rPr sz="1300" b="1" i="0">
-                <a:solidFill>
-                  <a:srgbClr val="E8801A"/>
-                </a:solidFill>
-                <a:latin typeface="Montserrat"/>
-              </a:rPr>
-              <a:t>APARTADO 5.4 · PRUEBAS PREVIAS</a:t>
-            </a:r>
-          </a:p>
-        </p:txBody>
-      </p:sp>
-      <p:sp>
-        <p:nvSpPr>
-          <p:cNvPr id="6" name="TextBox 5"/>
-          <p:cNvSpPr txBox="1"/>
-          <p:nvPr/>
-        </p:nvSpPr>
-        <p:spPr>
-          <a:xfrm>
-            <a:off x="822960" y="868680"/>
-            <a:ext cx="10515600" cy="914400"/>
-          </a:xfrm>
-          <a:prstGeom prst="rect">
-            <a:avLst/>
-          </a:prstGeom>
-          <a:noFill/>
-        </p:spPr>
-        <p:txBody>
-          <a:bodyPr wrap="square">
-            <a:spAutoFit/>
-          </a:bodyPr>
-          <a:lstStyle/>
-          <a:p>
-            <a:r>
-              <a:rPr sz="2800" b="1" i="0">
-                <a:solidFill>
-                  <a:srgbClr val="1E2761"/>
-                </a:solidFill>
-                <a:latin typeface="Montserrat"/>
-              </a:rPr>
-              <a:t>Dos plazos gemelos</a:t>
-            </a:r>
-          </a:p>
-        </p:txBody>
-      </p:sp>
-      <p:sp>
-        <p:nvSpPr>
-          <p:cNvPr id="7" name="Rounded Rectangle 6"/>
+          <p:cNvPr id="5" name="Rectangle 4"/>
           <p:cNvSpPr/>
           <p:nvPr/>
         </p:nvSpPr>
         <p:spPr>
           <a:xfrm>
-            <a:off x="868680" y="1627632"/>
-            <a:ext cx="2011680" cy="73152"/>
-          </a:xfrm>
-          <a:prstGeom prst="roundRect">
+            <a:off x="0" y="0"/>
+            <a:ext cx="12191695" cy="1143000"/>
+          </a:xfrm>
+          <a:prstGeom prst="rect">
             <a:avLst/>
           </a:prstGeom>
           <a:solidFill>
-            <a:srgbClr val="E8801A"/>
+            <a:srgbClr val="1E8E4B"/>
           </a:solidFill>
           <a:ln>
             <a:noFill/>
@@ -14247,14 +18486,14 @@
       </p:sp>
       <p:sp>
         <p:nvSpPr>
-          <p:cNvPr id="8" name="TextBox 7"/>
+          <p:cNvPr id="6" name="TextBox 5"/>
           <p:cNvSpPr txBox="1"/>
           <p:nvPr/>
         </p:nvSpPr>
         <p:spPr>
           <a:xfrm>
-            <a:off x="822960" y="1965960"/>
-            <a:ext cx="4983480" cy="4206240"/>
+            <a:off x="822960" y="274320"/>
+            <a:ext cx="10515600" cy="640080"/>
           </a:xfrm>
           <a:prstGeom prst="rect">
             <a:avLst/>
@@ -14267,127 +18506,72 @@
           </a:bodyPr>
           <a:lstStyle/>
           <a:p>
-            <a:pPr>
-              <a:spcAft>
-                <a:spcPts val="1100"/>
-              </a:spcAft>
-            </a:pPr>
-            <a:r>
-              <a:rPr sz="1600" b="1" i="0">
-                <a:solidFill>
-                  <a:srgbClr val="E8801A"/>
-                </a:solidFill>
-                <a:latin typeface="Montserrat"/>
-              </a:rPr>
-              <a:t>▸  </a:t>
-            </a:r>
-            <a:r>
-              <a:rPr sz="1600" b="0" i="0">
-                <a:solidFill>
-                  <a:srgbClr val="1B2330"/>
-                </a:solidFill>
-                <a:latin typeface="Montserrat"/>
-              </a:rPr>
-              <a:t>Prueba hidrostática si hay golpe o traslado</a:t>
-            </a:r>
-          </a:p>
-          <a:p>
-            <a:pPr>
-              <a:spcAft>
-                <a:spcPts val="1100"/>
-              </a:spcAft>
-            </a:pPr>
-            <a:r>
-              <a:rPr sz="1600" b="1" i="0">
-                <a:solidFill>
-                  <a:srgbClr val="E8801A"/>
-                </a:solidFill>
-                <a:latin typeface="Montserrat"/>
-              </a:rPr>
-              <a:t>▸  </a:t>
-            </a:r>
-            <a:r>
-              <a:rPr sz="1600" b="0" i="0">
-                <a:solidFill>
-                  <a:srgbClr val="1B2330"/>
-                </a:solidFill>
-                <a:latin typeface="Montserrat"/>
-              </a:rPr>
-              <a:t>Más de 12 meses en el emplazamiento</a:t>
-            </a:r>
-          </a:p>
-          <a:p>
-            <a:pPr>
-              <a:spcAft>
-                <a:spcPts val="1100"/>
-              </a:spcAft>
-            </a:pPr>
-            <a:r>
-              <a:rPr sz="1600" b="1" i="0">
-                <a:solidFill>
-                  <a:srgbClr val="E8801A"/>
-                </a:solidFill>
-                <a:latin typeface="Montserrat"/>
-              </a:rPr>
-              <a:t>▸  </a:t>
-            </a:r>
-            <a:r>
-              <a:rPr sz="1600" b="0" i="0">
-                <a:solidFill>
-                  <a:srgbClr val="1B2330"/>
-                </a:solidFill>
-                <a:latin typeface="Montserrat"/>
-              </a:rPr>
-              <a:t>Más de 24 meses desde fábrica</a:t>
-            </a:r>
-          </a:p>
-          <a:p>
-            <a:pPr>
-              <a:spcAft>
-                <a:spcPts val="1100"/>
-              </a:spcAft>
-            </a:pPr>
-            <a:r>
-              <a:rPr sz="1600" b="1" i="0">
-                <a:solidFill>
-                  <a:srgbClr val="E8801A"/>
-                </a:solidFill>
-                <a:latin typeface="Montserrat"/>
-              </a:rPr>
-              <a:t>▸  </a:t>
-            </a:r>
-            <a:r>
-              <a:rPr sz="1600" b="0" i="0">
-                <a:solidFill>
-                  <a:srgbClr val="1B2330"/>
-                </a:solidFill>
-                <a:latin typeface="Montserrat"/>
-              </a:rPr>
-              <a:t>Certifica un organismo de control</a:t>
-            </a:r>
-          </a:p>
-        </p:txBody>
-      </p:sp>
-      <p:sp>
-        <p:nvSpPr>
-          <p:cNvPr id="9" name="imgph" descr="IMGQ:hydrostatic pressure test tank"/>
+            <a:r>
+              <a:rPr sz="2400" b="1" i="0">
+                <a:solidFill>
+                  <a:srgbClr val="FFFFFF"/>
+                </a:solidFill>
+                <a:latin typeface="Montserrat"/>
+              </a:rPr>
+              <a:t>✔  RESPUESTA:  B</a:t>
+            </a:r>
+          </a:p>
+        </p:txBody>
+      </p:sp>
+      <p:sp>
+        <p:nvSpPr>
+          <p:cNvPr id="7" name="TextBox 6"/>
+          <p:cNvSpPr txBox="1"/>
+          <p:nvPr/>
+        </p:nvSpPr>
+        <p:spPr>
+          <a:xfrm>
+            <a:off x="822960" y="1417320"/>
+            <a:ext cx="10515600" cy="914400"/>
+          </a:xfrm>
+          <a:prstGeom prst="rect">
+            <a:avLst/>
+          </a:prstGeom>
+          <a:noFill/>
+        </p:spPr>
+        <p:txBody>
+          <a:bodyPr wrap="square">
+            <a:spAutoFit/>
+          </a:bodyPr>
+          <a:lstStyle/>
+          <a:p>
+            <a:r>
+              <a:rPr sz="1800" b="1" i="0">
+                <a:solidFill>
+                  <a:srgbClr val="64748B"/>
+                </a:solidFill>
+                <a:latin typeface="Montserrat"/>
+              </a:rPr>
+              <a:t>¿A partir de qué capacidad un depósito fijo de GLP exige proyecto en vez de memoria?</a:t>
+            </a:r>
+          </a:p>
+        </p:txBody>
+      </p:sp>
+      <p:sp>
+        <p:nvSpPr>
+          <p:cNvPr id="8" name="Rounded Rectangle 7"/>
           <p:cNvSpPr/>
           <p:nvPr/>
         </p:nvSpPr>
         <p:spPr>
           <a:xfrm>
-            <a:off x="5806440" y="1051560"/>
-            <a:ext cx="5298947" cy="4629150"/>
+            <a:off x="822960" y="2514600"/>
+            <a:ext cx="10515600" cy="914400"/>
           </a:xfrm>
           <a:prstGeom prst="roundRect">
             <a:avLst/>
           </a:prstGeom>
           <a:solidFill>
-            <a:srgbClr val="F3F6FB"/>
+            <a:srgbClr val="E9F6EE"/>
           </a:solidFill>
           <a:ln w="12700">
             <a:solidFill>
-              <a:srgbClr val="C7D2E6"/>
+              <a:srgbClr val="1E8E4B"/>
             </a:solidFill>
           </a:ln>
           <a:effectLst/>
@@ -14416,14 +18600,14 @@
       </p:sp>
       <p:sp>
         <p:nvSpPr>
-          <p:cNvPr id="10" name="TextBox 9"/>
+          <p:cNvPr id="9" name="TextBox 8"/>
           <p:cNvSpPr txBox="1"/>
           <p:nvPr/>
         </p:nvSpPr>
         <p:spPr>
           <a:xfrm>
-            <a:off x="6080760" y="2726055"/>
-            <a:ext cx="4750307" cy="1280160"/>
+            <a:off x="1097280" y="2697480"/>
+            <a:ext cx="10058400" cy="640080"/>
           </a:xfrm>
           <a:prstGeom prst="rect">
             <a:avLst/>
@@ -14436,27 +18620,66 @@
           </a:bodyPr>
           <a:lstStyle/>
           <a:p>
-            <a:pPr algn="ctr"/>
-            <a:r>
-              <a:rPr sz="1400" b="1" i="0">
-                <a:solidFill>
-                  <a:srgbClr val="64748B"/>
-                </a:solidFill>
-                <a:latin typeface="Montserrat"/>
-              </a:rPr>
-              <a:t>IMAGEN REALISTA</a:t>
-            </a:r>
-          </a:p>
-          <a:p>
-            <a:pPr algn="ctr"/>
-            <a:r>
-              <a:rPr sz="1100" b="0" i="1">
-                <a:solidFill>
-                  <a:srgbClr val="64748B"/>
-                </a:solidFill>
-                <a:latin typeface="Montserrat"/>
-              </a:rPr>
-              <a:t>hydrostatic pressure test tank</a:t>
+            <a:r>
+              <a:rPr sz="1800" b="1" i="0">
+                <a:solidFill>
+                  <a:srgbClr val="1E8E4B"/>
+                </a:solidFill>
+                <a:latin typeface="Montserrat"/>
+              </a:rPr>
+              <a:t>B.  </a:t>
+            </a:r>
+            <a:r>
+              <a:rPr sz="1800" b="1" i="0">
+                <a:solidFill>
+                  <a:srgbClr val="1E2761"/>
+                </a:solidFill>
+                <a:latin typeface="Montserrat"/>
+              </a:rPr>
+              <a:t>Más de 13 m³</a:t>
+            </a:r>
+          </a:p>
+        </p:txBody>
+      </p:sp>
+      <p:sp>
+        <p:nvSpPr>
+          <p:cNvPr id="10" name="TextBox 9"/>
+          <p:cNvSpPr txBox="1"/>
+          <p:nvPr/>
+        </p:nvSpPr>
+        <p:spPr>
+          <a:xfrm>
+            <a:off x="822960" y="3749039"/>
+            <a:ext cx="10515600" cy="2194560"/>
+          </a:xfrm>
+          <a:prstGeom prst="rect">
+            <a:avLst/>
+          </a:prstGeom>
+          <a:noFill/>
+        </p:spPr>
+        <p:txBody>
+          <a:bodyPr wrap="square">
+            <a:spAutoFit/>
+          </a:bodyPr>
+          <a:lstStyle/>
+          <a:p>
+            <a:r>
+              <a:rPr sz="1500" b="1" i="0">
+                <a:solidFill>
+                  <a:srgbClr val="E8801A"/>
+                </a:solidFill>
+                <a:latin typeface="Montserrat"/>
+              </a:rPr>
+              <a:t>Por qué:  </a:t>
+            </a:r>
+            <a:r>
+              <a:rPr sz="1500" b="0" i="0">
+                <a:solidFill>
+                  <a:srgbClr val="1B2330"/>
+                </a:solidFill>
+                <a:latin typeface="Montserrat"/>
+              </a:rPr>
+              <a:t>Por encima de 13 m³ de capacidad hace falta proyecto de técnico competente.</a:t>
             </a:r>
           </a:p>
         </p:txBody>
@@ -14466,6 +18689,18 @@
   <p:clrMapOvr>
     <a:masterClrMapping/>
   </p:clrMapOvr>
+  <mc:AlternateContent xmlns:mc="http://schemas.openxmlformats.org/markup-compatibility/2006">
+    <mc:Choice xmlns:p14="http://schemas.microsoft.com/office/powerpoint/2010/main" Requires="p14">
+      <p:transition spd="med" p14:dur="700">
+        <p14:cube dir="l"/>
+      </p:transition>
+    </mc:Choice>
+    <mc:Fallback>
+      <p:transition spd="med">
+        <p:push dir="l"/>
+      </p:transition>
+    </mc:Fallback>
+  </mc:AlternateContent>
 </p:sld>
 </file>
 

--- a/Curso Gas B/02 - ITC-ICG 02-03-04 - Almacenamiento GLP y plantas GNL/02 - ITC-ICG 02-03-04 - Almacenamiento GLP y plantas GNL - Vídeo 3.pptx
+++ b/Curso Gas B/02 - ITC-ICG 02-03-04 - Almacenamiento GLP y plantas GNL/02 - ITC-ICG 02-03-04 - Almacenamiento GLP y plantas GNL - Vídeo 3.pptx
@@ -977,12 +977,12 @@
           <a:lstStyle/>
           <a:p>
             <a:r>
-              <a:t>N1: Nunca se llena hasta arriba. ¿En qué porcentaje corta el llenado?</a:t>
-            </a:r>
-          </a:p>
-          <a:p>
-            <a:r>
-              <a:t>N2: Recuerda que el GLP líquido se dilata con el calor y necesita sitio.</a:t>
+              <a:t>N1: Un depósito nunca se llena hasta arriba. ¿Hasta qué porcentaje del volumen se llena un depósito fijo de GLP? Opción A, hasta el cien por cien. Opción B, hasta el noventa y cinco por ciento. Opción C, hasta el ochenta y cinco por ciento. Opción D, hasta el sesenta y cinco por ciento. Piensa un momento.</a:t>
+            </a:r>
+          </a:p>
+          <a:p>
+            <a:r>
+              <a:t>N2: Pista: recuerda que el GLP líquido se dilata con el calor y necesita sitio para crecer.</a:t>
             </a:r>
           </a:p>
         </p:txBody>
@@ -1052,12 +1052,12 @@
           <a:lstStyle/>
           <a:p>
             <a:r>
-              <a:t>N1: ¿Por qué el ochenta y cinco y no el cien?</a:t>
-            </a:r>
-          </a:p>
-          <a:p>
-            <a:r>
-              <a:t>N2: Porque el GLP líquido se dilata cuando sube la temperatura, así que el punto alto de llenado corta al ochenta y cinco por ciento y deja un quince por ciento de hueco como colchón. Sin ese margen, en pleno verano el depósito reventaría o dispararía la válvula. Cuidado con el sesenta y cinco, que es el coeficiente de otra fórmula distinta, la de los envases.</a:t>
+              <a:t>N2: La respuesta correcta es la opción C: hasta el ochenta y cinco por ciento. ¿Por qué? Porque el GLP líquido se dilata cuando sube la temperatura, así que el punto alto de llenado corta al ochenta y cinco por ciento y deja un quince por ciento de hueco como colchón. Sin ese margen, en pleno verano el depósito reventaría o dispararía la válvula. Cuidado con la opción D, el sesenta y cinco, que es el coeficiente de otra fórmula distinta, la de los envases.</a:t>
+            </a:r>
+          </a:p>
+          <a:p>
+            <a:r>
+              <a:t>N1: Ochenta y cinco de llenado, y no lo confundas con el sesenta y cinco.</a:t>
             </a:r>
           </a:p>
         </p:txBody>
@@ -2328,12 +2328,12 @@
           <a:lstStyle/>
           <a:p>
             <a:r>
-              <a:t>N1: El número mágico del papeleo. ¿Por encima de cuántos metros cúbicos toca proyecto?</a:t>
-            </a:r>
-          </a:p>
-          <a:p>
-            <a:r>
-              <a:t>N2: Es una de las cifras estrella del vídeo. Piensa en el umbral que separa la memoria del proyecto.</a:t>
+              <a:t>N1: El número mágico del papeleo. ¿A partir de qué capacidad un depósito fijo de GLP exige proyecto en vez de memoria? Opción A, más de diez metros cúbicos. Opción B, más de trece metros cúbicos. Opción C, más de quince metros cúbicos. Opción D, más de quinientos metros cúbicos. Elige.</a:t>
+            </a:r>
+          </a:p>
+          <a:p>
+            <a:r>
+              <a:t>N2: Pista: es una de las cifras estrella del vídeo; piensa en el umbral que separa la memoria del proyecto.</a:t>
             </a:r>
           </a:p>
         </p:txBody>
@@ -2403,12 +2403,12 @@
           <a:lstStyle/>
           <a:p>
             <a:r>
-              <a:t>N1: ¿Por qué trece y no otro?</a:t>
-            </a:r>
-          </a:p>
-          <a:p>
-            <a:r>
-              <a:t>N2: Porque la instrucción fija en más de trece metros cúbicos el disparador de proyecto por capacidad; por debajo, y sin otras complicaciones, basta memoria técnica que firma el instalador. Recuerda que hay más disparadores, como alimentar una red o el acceso público, pero el de la capacidad es el trece. El truco: trece, el número mágico del proyecto.</a:t>
+              <a:t>N2: La respuesta correcta es la opción B: más de trece metros cúbicos. ¿Por qué? Porque la instrucción fija en más de trece metros cúbicos el disparador de proyecto por capacidad; por debajo, y sin otras complicaciones, basta memoria técnica que firma el instalador. Recuerda que hay más disparadores, como alimentar una red o el acceso público, pero el de la capacidad es el trece. El truco: trece, el número mágico del proyecto.</a:t>
+            </a:r>
+          </a:p>
+          <a:p>
+            <a:r>
+              <a:t>N1: Trece, el número mágico.</a:t>
             </a:r>
           </a:p>
         </p:txBody>
